--- a/presentation/bao_cao_demo.pptx
+++ b/presentation/bao_cao_demo.pptx
@@ -13851,21 +13851,21 @@
         </p:nvGraphicFramePr>
         <p:xfrm>
           <a:off x="0" y="1374988"/>
-          <a:ext cx="18288000" cy="6484283"/>
+          <a:ext cx="18288000" cy="8915400"/>
         </p:xfrm>
         <a:graphic>
           <a:graphicData uri="http://schemas.openxmlformats.org/drawingml/2006/table">
             <a:tbl>
               <a:tblPr/>
               <a:tblGrid>
-                <a:gridCol w="2729917"/>
-                <a:gridCol w="1594531"/>
-                <a:gridCol w="1336043"/>
-                <a:gridCol w="6576287"/>
-                <a:gridCol w="3685929"/>
-                <a:gridCol w="2365293"/>
+                <a:gridCol w="2604395"/>
+                <a:gridCol w="1469009"/>
+                <a:gridCol w="4787892"/>
+                <a:gridCol w="3367637"/>
+                <a:gridCol w="3066165"/>
+                <a:gridCol w="2992902"/>
               </a:tblGrid>
-              <a:tr h="1073105">
+              <a:tr h="1913176">
                 <a:tc>
                   <a:txBody>
                     <a:bodyPr anchor="t" rtlCol="false"/>
@@ -13880,6 +13880,17 @@
                         </a:spcBef>
                         <a:defRPr/>
                       </a:pPr>
+                      <a:endParaRPr lang="en-US" sz="1100"/>
+                    </a:p>
+                    <a:p>
+                      <a:pPr algn="ctr" marL="0" indent="0" lvl="0">
+                        <a:lnSpc>
+                          <a:spcPts val="3360"/>
+                        </a:lnSpc>
+                        <a:spcBef>
+                          <a:spcPct val="0"/>
+                        </a:spcBef>
+                      </a:pPr>
                       <a:r>
                         <a:rPr lang="en-US" b="true" sz="2400" strike="noStrike" u="none">
                           <a:solidFill>
@@ -13890,9 +13901,52 @@
                           <a:cs typeface="Red Hat Display Bold"/>
                           <a:sym typeface="Red Hat Display Bold"/>
                         </a:rPr>
-                        <a:t>Thành viên</a:t>
+                        <a:t>   Thành</a:t>
                       </a:r>
-                      <a:endParaRPr lang="en-US" sz="1100"/>
+                    </a:p>
+                    <a:p>
+                      <a:pPr algn="ctr" marL="0" indent="0" lvl="0">
+                        <a:lnSpc>
+                          <a:spcPts val="3360"/>
+                        </a:lnSpc>
+                        <a:spcBef>
+                          <a:spcPct val="0"/>
+                        </a:spcBef>
+                      </a:pPr>
+                      <a:r>
+                        <a:rPr lang="en-US" b="true" sz="2400" strike="noStrike" u="none">
+                          <a:solidFill>
+                            <a:srgbClr val="000000"/>
+                          </a:solidFill>
+                          <a:latin typeface="Red Hat Display Bold"/>
+                          <a:ea typeface="Red Hat Display Bold"/>
+                          <a:cs typeface="Red Hat Display Bold"/>
+                          <a:sym typeface="Red Hat Display Bold"/>
+                        </a:rPr>
+                        <a:t>   viên</a:t>
+                      </a:r>
+                    </a:p>
+                    <a:p>
+                      <a:pPr algn="ctr" marL="0" indent="0" lvl="0">
+                        <a:lnSpc>
+                          <a:spcPts val="3360"/>
+                        </a:lnSpc>
+                        <a:spcBef>
+                          <a:spcPct val="0"/>
+                        </a:spcBef>
+                      </a:pPr>
+                      <a:r>
+                        <a:rPr lang="en-US" b="true" sz="2400" strike="noStrike" u="none">
+                          <a:solidFill>
+                            <a:srgbClr val="000000"/>
+                          </a:solidFill>
+                          <a:latin typeface="Red Hat Display Bold"/>
+                          <a:ea typeface="Red Hat Display Bold"/>
+                          <a:cs typeface="Red Hat Display Bold"/>
+                          <a:sym typeface="Red Hat Display Bold"/>
+                        </a:rPr>
+                        <a:t>   </a:t>
+                      </a:r>
                     </a:p>
                   </a:txBody>
                   <a:tcPr marL="76200" marR="76200" marT="76200" marB="76200" anchor="ctr">
@@ -13951,6 +14005,17 @@
                         </a:spcBef>
                         <a:defRPr/>
                       </a:pPr>
+                      <a:endParaRPr lang="en-US" sz="1100"/>
+                    </a:p>
+                    <a:p>
+                      <a:pPr algn="ctr" marL="0" indent="0" lvl="0">
+                        <a:lnSpc>
+                          <a:spcPts val="3360"/>
+                        </a:lnSpc>
+                        <a:spcBef>
+                          <a:spcPct val="0"/>
+                        </a:spcBef>
+                      </a:pPr>
                       <a:r>
                         <a:rPr lang="en-US" b="true" sz="2400" strike="noStrike" u="none">
                           <a:solidFill>
@@ -13961,9 +14026,30 @@
                           <a:cs typeface="Red Hat Display Bold"/>
                           <a:sym typeface="Red Hat Display Bold"/>
                         </a:rPr>
-                        <a:t>MSSV</a:t>
+                        <a:t>   Tỷ lệ</a:t>
                       </a:r>
-                      <a:endParaRPr lang="en-US" sz="1100"/>
+                    </a:p>
+                    <a:p>
+                      <a:pPr algn="ctr" marL="0" indent="0" lvl="0">
+                        <a:lnSpc>
+                          <a:spcPts val="3360"/>
+                        </a:lnSpc>
+                        <a:spcBef>
+                          <a:spcPct val="0"/>
+                        </a:spcBef>
+                      </a:pPr>
+                      <a:r>
+                        <a:rPr lang="en-US" b="true" sz="2400" strike="noStrike" u="none">
+                          <a:solidFill>
+                            <a:srgbClr val="000000"/>
+                          </a:solidFill>
+                          <a:latin typeface="Red Hat Display Bold"/>
+                          <a:ea typeface="Red Hat Display Bold"/>
+                          <a:cs typeface="Red Hat Display Bold"/>
+                          <a:sym typeface="Red Hat Display Bold"/>
+                        </a:rPr>
+                        <a:t>   </a:t>
+                      </a:r>
                     </a:p>
                   </a:txBody>
                   <a:tcPr marL="76200" marR="76200" marT="76200" marB="76200" anchor="ctr">
@@ -14022,6 +14108,17 @@
                         </a:spcBef>
                         <a:defRPr/>
                       </a:pPr>
+                      <a:endParaRPr lang="en-US" sz="1100"/>
+                    </a:p>
+                    <a:p>
+                      <a:pPr algn="ctr" marL="0" indent="0" lvl="0">
+                        <a:lnSpc>
+                          <a:spcPts val="3360"/>
+                        </a:lnSpc>
+                        <a:spcBef>
+                          <a:spcPct val="0"/>
+                        </a:spcBef>
+                      </a:pPr>
                       <a:r>
                         <a:rPr lang="en-US" b="true" sz="2400" strike="noStrike" u="none">
                           <a:solidFill>
@@ -14032,9 +14129,52 @@
                           <a:cs typeface="Red Hat Display Bold"/>
                           <a:sym typeface="Red Hat Display Bold"/>
                         </a:rPr>
-                        <a:t>Tỷ lệ</a:t>
+                        <a:t>   Phạm vi</a:t>
                       </a:r>
-                      <a:endParaRPr lang="en-US" sz="1100"/>
+                    </a:p>
+                    <a:p>
+                      <a:pPr algn="ctr" marL="0" indent="0" lvl="0">
+                        <a:lnSpc>
+                          <a:spcPts val="3360"/>
+                        </a:lnSpc>
+                        <a:spcBef>
+                          <a:spcPct val="0"/>
+                        </a:spcBef>
+                      </a:pPr>
+                      <a:r>
+                        <a:rPr lang="en-US" b="true" sz="2400" strike="noStrike" u="none">
+                          <a:solidFill>
+                            <a:srgbClr val="000000"/>
+                          </a:solidFill>
+                          <a:latin typeface="Red Hat Display Bold"/>
+                          <a:ea typeface="Red Hat Display Bold"/>
+                          <a:cs typeface="Red Hat Display Bold"/>
+                          <a:sym typeface="Red Hat Display Bold"/>
+                        </a:rPr>
+                        <a:t>   đóng góp</a:t>
+                      </a:r>
+                    </a:p>
+                    <a:p>
+                      <a:pPr algn="ctr" marL="0" indent="0" lvl="0">
+                        <a:lnSpc>
+                          <a:spcPts val="3360"/>
+                        </a:lnSpc>
+                        <a:spcBef>
+                          <a:spcPct val="0"/>
+                        </a:spcBef>
+                      </a:pPr>
+                      <a:r>
+                        <a:rPr lang="en-US" b="true" sz="2400" strike="noStrike" u="none">
+                          <a:solidFill>
+                            <a:srgbClr val="000000"/>
+                          </a:solidFill>
+                          <a:latin typeface="Red Hat Display Bold"/>
+                          <a:ea typeface="Red Hat Display Bold"/>
+                          <a:cs typeface="Red Hat Display Bold"/>
+                          <a:sym typeface="Red Hat Display Bold"/>
+                        </a:rPr>
+                        <a:t>   </a:t>
+                      </a:r>
                     </a:p>
                   </a:txBody>
                   <a:tcPr marL="76200" marR="76200" marT="76200" marB="76200" anchor="ctr">
@@ -14093,6 +14233,17 @@
                         </a:spcBef>
                         <a:defRPr/>
                       </a:pPr>
+                      <a:endParaRPr lang="en-US" sz="1100"/>
+                    </a:p>
+                    <a:p>
+                      <a:pPr algn="ctr" marL="0" indent="0" lvl="0">
+                        <a:lnSpc>
+                          <a:spcPts val="3360"/>
+                        </a:lnSpc>
+                        <a:spcBef>
+                          <a:spcPct val="0"/>
+                        </a:spcBef>
+                      </a:pPr>
                       <a:r>
                         <a:rPr lang="en-US" b="true" sz="2400" strike="noStrike" u="none">
                           <a:solidFill>
@@ -14103,9 +14254,30 @@
                           <a:cs typeface="Red Hat Display Bold"/>
                           <a:sym typeface="Red Hat Display Bold"/>
                         </a:rPr>
-                        <a:t>Phân công công việc chi tiết</a:t>
+                        <a:t>   Thời gian thực hiện</a:t>
                       </a:r>
-                      <a:endParaRPr lang="en-US" sz="1100"/>
+                    </a:p>
+                    <a:p>
+                      <a:pPr algn="ctr" marL="0" indent="0" lvl="0">
+                        <a:lnSpc>
+                          <a:spcPts val="3360"/>
+                        </a:lnSpc>
+                        <a:spcBef>
+                          <a:spcPct val="0"/>
+                        </a:spcBef>
+                      </a:pPr>
+                      <a:r>
+                        <a:rPr lang="en-US" b="true" sz="2400" strike="noStrike" u="none">
+                          <a:solidFill>
+                            <a:srgbClr val="000000"/>
+                          </a:solidFill>
+                          <a:latin typeface="Red Hat Display Bold"/>
+                          <a:ea typeface="Red Hat Display Bold"/>
+                          <a:cs typeface="Red Hat Display Bold"/>
+                          <a:sym typeface="Red Hat Display Bold"/>
+                        </a:rPr>
+                        <a:t>   </a:t>
+                      </a:r>
                     </a:p>
                   </a:txBody>
                   <a:tcPr marL="76200" marR="76200" marT="76200" marB="76200" anchor="ctr">
@@ -14164,6 +14336,17 @@
                         </a:spcBef>
                         <a:defRPr/>
                       </a:pPr>
+                      <a:endParaRPr lang="en-US" sz="1100"/>
+                    </a:p>
+                    <a:p>
+                      <a:pPr algn="ctr" marL="0" indent="0" lvl="0">
+                        <a:lnSpc>
+                          <a:spcPts val="3360"/>
+                        </a:lnSpc>
+                        <a:spcBef>
+                          <a:spcPct val="0"/>
+                        </a:spcBef>
+                      </a:pPr>
                       <a:r>
                         <a:rPr lang="en-US" b="true" sz="2400" strike="noStrike" u="none">
                           <a:solidFill>
@@ -14174,9 +14357,30 @@
                           <a:cs typeface="Red Hat Display Bold"/>
                           <a:sym typeface="Red Hat Display Bold"/>
                         </a:rPr>
-                        <a:t>Thời gian thực hiện</a:t>
+                        <a:t>   Các file phụ trách chính</a:t>
                       </a:r>
-                      <a:endParaRPr lang="en-US" sz="1100"/>
+                    </a:p>
+                    <a:p>
+                      <a:pPr algn="ctr" marL="0" indent="0" lvl="0">
+                        <a:lnSpc>
+                          <a:spcPts val="3360"/>
+                        </a:lnSpc>
+                        <a:spcBef>
+                          <a:spcPct val="0"/>
+                        </a:spcBef>
+                      </a:pPr>
+                      <a:r>
+                        <a:rPr lang="en-US" b="true" sz="2400" strike="noStrike" u="none">
+                          <a:solidFill>
+                            <a:srgbClr val="000000"/>
+                          </a:solidFill>
+                          <a:latin typeface="Red Hat Display Bold"/>
+                          <a:ea typeface="Red Hat Display Bold"/>
+                          <a:cs typeface="Red Hat Display Bold"/>
+                          <a:sym typeface="Red Hat Display Bold"/>
+                        </a:rPr>
+                        <a:t>   </a:t>
+                      </a:r>
                     </a:p>
                   </a:txBody>
                   <a:tcPr marL="76200" marR="76200" marT="76200" marB="76200" anchor="ctr">
@@ -14235,6 +14439,17 @@
                         </a:spcBef>
                         <a:defRPr/>
                       </a:pPr>
+                      <a:endParaRPr lang="en-US" sz="1100"/>
+                    </a:p>
+                    <a:p>
+                      <a:pPr algn="ctr" marL="0" indent="0" lvl="0">
+                        <a:lnSpc>
+                          <a:spcPts val="3360"/>
+                        </a:lnSpc>
+                        <a:spcBef>
+                          <a:spcPct val="0"/>
+                        </a:spcBef>
+                      </a:pPr>
                       <a:r>
                         <a:rPr lang="en-US" b="true" sz="2400" strike="noStrike" u="none">
                           <a:solidFill>
@@ -14245,9 +14460,52 @@
                           <a:cs typeface="Red Hat Display Bold"/>
                           <a:sym typeface="Red Hat Display Bold"/>
                         </a:rPr>
-                        <a:t>Mức độ hoàn thành</a:t>
+                        <a:t>   Thành</a:t>
                       </a:r>
-                      <a:endParaRPr lang="en-US" sz="1100"/>
+                    </a:p>
+                    <a:p>
+                      <a:pPr algn="ctr" marL="0" indent="0" lvl="0">
+                        <a:lnSpc>
+                          <a:spcPts val="3360"/>
+                        </a:lnSpc>
+                        <a:spcBef>
+                          <a:spcPct val="0"/>
+                        </a:spcBef>
+                      </a:pPr>
+                      <a:r>
+                        <a:rPr lang="en-US" b="true" sz="2400" strike="noStrike" u="none">
+                          <a:solidFill>
+                            <a:srgbClr val="000000"/>
+                          </a:solidFill>
+                          <a:latin typeface="Red Hat Display Bold"/>
+                          <a:ea typeface="Red Hat Display Bold"/>
+                          <a:cs typeface="Red Hat Display Bold"/>
+                          <a:sym typeface="Red Hat Display Bold"/>
+                        </a:rPr>
+                        <a:t>   viên</a:t>
+                      </a:r>
+                    </a:p>
+                    <a:p>
+                      <a:pPr algn="ctr" marL="0" indent="0" lvl="0">
+                        <a:lnSpc>
+                          <a:spcPts val="3360"/>
+                        </a:lnSpc>
+                        <a:spcBef>
+                          <a:spcPct val="0"/>
+                        </a:spcBef>
+                      </a:pPr>
+                      <a:r>
+                        <a:rPr lang="en-US" b="true" sz="2400" strike="noStrike" u="none">
+                          <a:solidFill>
+                            <a:srgbClr val="000000"/>
+                          </a:solidFill>
+                          <a:latin typeface="Red Hat Display Bold"/>
+                          <a:ea typeface="Red Hat Display Bold"/>
+                          <a:cs typeface="Red Hat Display Bold"/>
+                          <a:sym typeface="Red Hat Display Bold"/>
+                        </a:rPr>
+                        <a:t>   </a:t>
+                      </a:r>
                     </a:p>
                   </a:txBody>
                   <a:tcPr marL="76200" marR="76200" marT="76200" marB="76200" anchor="ctr">
@@ -14293,7 +14551,7 @@
                   </a:tcPr>
                 </a:tc>
               </a:tr>
-              <a:tr h="1494682">
+              <a:tr h="2334075">
                 <a:tc>
                   <a:txBody>
                     <a:bodyPr anchor="t" rtlCol="false"/>
@@ -14308,6 +14566,17 @@
                         </a:spcBef>
                         <a:defRPr/>
                       </a:pPr>
+                      <a:endParaRPr lang="en-US" sz="1100"/>
+                    </a:p>
+                    <a:p>
+                      <a:pPr algn="ctr" marL="0" indent="0" lvl="0">
+                        <a:lnSpc>
+                          <a:spcPts val="3360"/>
+                        </a:lnSpc>
+                        <a:spcBef>
+                          <a:spcPct val="0"/>
+                        </a:spcBef>
+                      </a:pPr>
                       <a:r>
                         <a:rPr lang="en-US" sz="2400" strike="noStrike" u="none">
                           <a:solidFill>
@@ -14318,9 +14587,52 @@
                           <a:cs typeface="Red Hat Display"/>
                           <a:sym typeface="Red Hat Display"/>
                         </a:rPr>
-                        <a:t>Trần Thiên Lực</a:t>
+                        <a:t>  Trần Thiên Lực</a:t>
                       </a:r>
-                      <a:endParaRPr lang="en-US" sz="1100"/>
+                    </a:p>
+                    <a:p>
+                      <a:pPr algn="ctr" marL="0" indent="0" lvl="0">
+                        <a:lnSpc>
+                          <a:spcPts val="3360"/>
+                        </a:lnSpc>
+                        <a:spcBef>
+                          <a:spcPct val="0"/>
+                        </a:spcBef>
+                      </a:pPr>
+                      <a:r>
+                        <a:rPr lang="en-US" sz="2400" strike="noStrike" u="none">
+                          <a:solidFill>
+                            <a:srgbClr val="000000"/>
+                          </a:solidFill>
+                          <a:latin typeface="Red Hat Display"/>
+                          <a:ea typeface="Red Hat Display"/>
+                          <a:cs typeface="Red Hat Display"/>
+                          <a:sym typeface="Red Hat Display"/>
+                        </a:rPr>
+                        <a:t>  (24133037)</a:t>
+                      </a:r>
+                    </a:p>
+                    <a:p>
+                      <a:pPr algn="ctr" marL="0" indent="0" lvl="0">
+                        <a:lnSpc>
+                          <a:spcPts val="3360"/>
+                        </a:lnSpc>
+                        <a:spcBef>
+                          <a:spcPct val="0"/>
+                        </a:spcBef>
+                      </a:pPr>
+                      <a:r>
+                        <a:rPr lang="en-US" sz="2400" strike="noStrike" u="none">
+                          <a:solidFill>
+                            <a:srgbClr val="000000"/>
+                          </a:solidFill>
+                          <a:latin typeface="Red Hat Display"/>
+                          <a:ea typeface="Red Hat Display"/>
+                          <a:cs typeface="Red Hat Display"/>
+                          <a:sym typeface="Red Hat Display"/>
+                        </a:rPr>
+                        <a:t>  </a:t>
+                      </a:r>
                     </a:p>
                   </a:txBody>
                   <a:tcPr marL="76200" marR="76200" marT="76200" marB="76200" anchor="ctr">
@@ -14379,6 +14691,17 @@
                         </a:spcBef>
                         <a:defRPr/>
                       </a:pPr>
+                      <a:endParaRPr lang="en-US" sz="1100"/>
+                    </a:p>
+                    <a:p>
+                      <a:pPr algn="ctr" marL="0" indent="0" lvl="0">
+                        <a:lnSpc>
+                          <a:spcPts val="3360"/>
+                        </a:lnSpc>
+                        <a:spcBef>
+                          <a:spcPct val="0"/>
+                        </a:spcBef>
+                      </a:pPr>
                       <a:r>
                         <a:rPr lang="en-US" sz="2400" strike="noStrike" u="none">
                           <a:solidFill>
@@ -14389,9 +14712,30 @@
                           <a:cs typeface="Red Hat Display"/>
                           <a:sym typeface="Red Hat Display"/>
                         </a:rPr>
-                        <a:t>24133037</a:t>
+                        <a:t>  30%</a:t>
                       </a:r>
-                      <a:endParaRPr lang="en-US" sz="1100"/>
+                    </a:p>
+                    <a:p>
+                      <a:pPr algn="ctr" marL="0" indent="0" lvl="0">
+                        <a:lnSpc>
+                          <a:spcPts val="3360"/>
+                        </a:lnSpc>
+                        <a:spcBef>
+                          <a:spcPct val="0"/>
+                        </a:spcBef>
+                      </a:pPr>
+                      <a:r>
+                        <a:rPr lang="en-US" sz="2400" strike="noStrike" u="none">
+                          <a:solidFill>
+                            <a:srgbClr val="000000"/>
+                          </a:solidFill>
+                          <a:latin typeface="Red Hat Display"/>
+                          <a:ea typeface="Red Hat Display"/>
+                          <a:cs typeface="Red Hat Display"/>
+                          <a:sym typeface="Red Hat Display"/>
+                        </a:rPr>
+                        <a:t>  </a:t>
+                      </a:r>
                     </a:p>
                   </a:txBody>
                   <a:tcPr marL="76200" marR="76200" marT="76200" marB="76200" anchor="ctr">
@@ -14450,6 +14794,17 @@
                         </a:spcBef>
                         <a:defRPr/>
                       </a:pPr>
+                      <a:endParaRPr lang="en-US" sz="1100"/>
+                    </a:p>
+                    <a:p>
+                      <a:pPr algn="ctr" marL="0" indent="0" lvl="0">
+                        <a:lnSpc>
+                          <a:spcPts val="3360"/>
+                        </a:lnSpc>
+                        <a:spcBef>
+                          <a:spcPct val="0"/>
+                        </a:spcBef>
+                      </a:pPr>
                       <a:r>
                         <a:rPr lang="en-US" sz="2400" strike="noStrike" u="none">
                           <a:solidFill>
@@ -14460,9 +14815,52 @@
                           <a:cs typeface="Red Hat Display"/>
                           <a:sym typeface="Red Hat Display"/>
                         </a:rPr>
-                        <a:t>30%</a:t>
+                        <a:t>  Nguồn dữ liệu,</a:t>
                       </a:r>
-                      <a:endParaRPr lang="en-US" sz="1100"/>
+                    </a:p>
+                    <a:p>
+                      <a:pPr algn="ctr" marL="0" indent="0" lvl="0">
+                        <a:lnSpc>
+                          <a:spcPts val="3360"/>
+                        </a:lnSpc>
+                        <a:spcBef>
+                          <a:spcPct val="0"/>
+                        </a:spcBef>
+                      </a:pPr>
+                      <a:r>
+                        <a:rPr lang="en-US" sz="2400" strike="noStrike" u="none">
+                          <a:solidFill>
+                            <a:srgbClr val="000000"/>
+                          </a:solidFill>
+                          <a:latin typeface="Red Hat Display"/>
+                          <a:ea typeface="Red Hat Display"/>
+                          <a:cs typeface="Red Hat Display"/>
+                          <a:sym typeface="Red Hat Display"/>
+                        </a:rPr>
+                        <a:t>  cleaning, quality checks và EDA</a:t>
+                      </a:r>
+                    </a:p>
+                    <a:p>
+                      <a:pPr algn="ctr" marL="0" indent="0" lvl="0">
+                        <a:lnSpc>
+                          <a:spcPts val="3360"/>
+                        </a:lnSpc>
+                        <a:spcBef>
+                          <a:spcPct val="0"/>
+                        </a:spcBef>
+                      </a:pPr>
+                      <a:r>
+                        <a:rPr lang="en-US" sz="2400" strike="noStrike" u="none">
+                          <a:solidFill>
+                            <a:srgbClr val="000000"/>
+                          </a:solidFill>
+                          <a:latin typeface="Red Hat Display"/>
+                          <a:ea typeface="Red Hat Display"/>
+                          <a:cs typeface="Red Hat Display"/>
+                          <a:sym typeface="Red Hat Display"/>
+                        </a:rPr>
+                        <a:t>  </a:t>
+                      </a:r>
                     </a:p>
                   </a:txBody>
                   <a:tcPr marL="76200" marR="76200" marT="76200" marB="76200" anchor="ctr">
@@ -14521,6 +14919,17 @@
                         </a:spcBef>
                         <a:defRPr/>
                       </a:pPr>
+                      <a:endParaRPr lang="en-US" sz="1100"/>
+                    </a:p>
+                    <a:p>
+                      <a:pPr algn="ctr" marL="0" indent="0" lvl="0">
+                        <a:lnSpc>
+                          <a:spcPts val="3360"/>
+                        </a:lnSpc>
+                        <a:spcBef>
+                          <a:spcPct val="0"/>
+                        </a:spcBef>
+                      </a:pPr>
                       <a:r>
                         <a:rPr lang="en-US" sz="2400" strike="noStrike" u="none">
                           <a:solidFill>
@@ -14531,9 +14940,30 @@
                           <a:cs typeface="Red Hat Display"/>
                           <a:sym typeface="Red Hat Display"/>
                         </a:rPr>
-                        <a:t>Thu thập dữ liệu Yahoo Finance, làm sạch (01_data_cleaning.R), kiểm tra chất lượng, trực quan hóa EDA (02_visualization.R) — 9 biểu đồ</a:t>
+                        <a:t>  25/05/2026 – 19/06/2026</a:t>
                       </a:r>
-                      <a:endParaRPr lang="en-US" sz="1100"/>
+                    </a:p>
+                    <a:p>
+                      <a:pPr algn="ctr" marL="0" indent="0" lvl="0">
+                        <a:lnSpc>
+                          <a:spcPts val="3360"/>
+                        </a:lnSpc>
+                        <a:spcBef>
+                          <a:spcPct val="0"/>
+                        </a:spcBef>
+                      </a:pPr>
+                      <a:r>
+                        <a:rPr lang="en-US" sz="2400" strike="noStrike" u="none">
+                          <a:solidFill>
+                            <a:srgbClr val="000000"/>
+                          </a:solidFill>
+                          <a:latin typeface="Red Hat Display"/>
+                          <a:ea typeface="Red Hat Display"/>
+                          <a:cs typeface="Red Hat Display"/>
+                          <a:sym typeface="Red Hat Display"/>
+                        </a:rPr>
+                        <a:t>  </a:t>
+                      </a:r>
                     </a:p>
                   </a:txBody>
                   <a:tcPr marL="76200" marR="76200" marT="76200" marB="76200" anchor="ctr">
@@ -14592,6 +15022,17 @@
                         </a:spcBef>
                         <a:defRPr/>
                       </a:pPr>
+                      <a:endParaRPr lang="en-US" sz="1100"/>
+                    </a:p>
+                    <a:p>
+                      <a:pPr algn="ctr" marL="0" indent="0" lvl="0">
+                        <a:lnSpc>
+                          <a:spcPts val="3360"/>
+                        </a:lnSpc>
+                        <a:spcBef>
+                          <a:spcPct val="0"/>
+                        </a:spcBef>
+                      </a:pPr>
                       <a:r>
                         <a:rPr lang="en-US" sz="2400" strike="noStrike" u="none">
                           <a:solidFill>
@@ -14602,9 +15043,30 @@
                           <a:cs typeface="Red Hat Display"/>
                           <a:sym typeface="Red Hat Display"/>
                         </a:rPr>
-                        <a:t>25/05 – 19/06/2026</a:t>
+                        <a:t>  Notebook, R/01, R/02, dữ liệu và hình EDA</a:t>
                       </a:r>
-                      <a:endParaRPr lang="en-US" sz="1100"/>
+                    </a:p>
+                    <a:p>
+                      <a:pPr algn="ctr" marL="0" indent="0" lvl="0">
+                        <a:lnSpc>
+                          <a:spcPts val="3360"/>
+                        </a:lnSpc>
+                        <a:spcBef>
+                          <a:spcPct val="0"/>
+                        </a:spcBef>
+                      </a:pPr>
+                      <a:r>
+                        <a:rPr lang="en-US" sz="2400" strike="noStrike" u="none">
+                          <a:solidFill>
+                            <a:srgbClr val="000000"/>
+                          </a:solidFill>
+                          <a:latin typeface="Red Hat Display"/>
+                          <a:ea typeface="Red Hat Display"/>
+                          <a:cs typeface="Red Hat Display"/>
+                          <a:sym typeface="Red Hat Display"/>
+                        </a:rPr>
+                        <a:t>  </a:t>
+                      </a:r>
                     </a:p>
                   </a:txBody>
                   <a:tcPr marL="76200" marR="76200" marT="76200" marB="76200" anchor="ctr">
@@ -14663,6 +15125,17 @@
                         </a:spcBef>
                         <a:defRPr/>
                       </a:pPr>
+                      <a:endParaRPr lang="en-US" sz="1100"/>
+                    </a:p>
+                    <a:p>
+                      <a:pPr algn="ctr" marL="0" indent="0" lvl="0">
+                        <a:lnSpc>
+                          <a:spcPts val="3360"/>
+                        </a:lnSpc>
+                        <a:spcBef>
+                          <a:spcPct val="0"/>
+                        </a:spcBef>
+                      </a:pPr>
                       <a:r>
                         <a:rPr lang="en-US" sz="2400" strike="noStrike" u="none">
                           <a:solidFill>
@@ -14673,9 +15146,52 @@
                           <a:cs typeface="Red Hat Display"/>
                           <a:sym typeface="Red Hat Display"/>
                         </a:rPr>
-                        <a:t>100%</a:t>
+                        <a:t>  Trần Thiên Lực</a:t>
                       </a:r>
-                      <a:endParaRPr lang="en-US" sz="1100"/>
+                    </a:p>
+                    <a:p>
+                      <a:pPr algn="ctr" marL="0" indent="0" lvl="0">
+                        <a:lnSpc>
+                          <a:spcPts val="3360"/>
+                        </a:lnSpc>
+                        <a:spcBef>
+                          <a:spcPct val="0"/>
+                        </a:spcBef>
+                      </a:pPr>
+                      <a:r>
+                        <a:rPr lang="en-US" sz="2400" strike="noStrike" u="none">
+                          <a:solidFill>
+                            <a:srgbClr val="000000"/>
+                          </a:solidFill>
+                          <a:latin typeface="Red Hat Display"/>
+                          <a:ea typeface="Red Hat Display"/>
+                          <a:cs typeface="Red Hat Display"/>
+                          <a:sym typeface="Red Hat Display"/>
+                        </a:rPr>
+                        <a:t>  (24133037)</a:t>
+                      </a:r>
+                    </a:p>
+                    <a:p>
+                      <a:pPr algn="ctr" marL="0" indent="0" lvl="0">
+                        <a:lnSpc>
+                          <a:spcPts val="3360"/>
+                        </a:lnSpc>
+                        <a:spcBef>
+                          <a:spcPct val="0"/>
+                        </a:spcBef>
+                      </a:pPr>
+                      <a:r>
+                        <a:rPr lang="en-US" sz="2400" strike="noStrike" u="none">
+                          <a:solidFill>
+                            <a:srgbClr val="000000"/>
+                          </a:solidFill>
+                          <a:latin typeface="Red Hat Display"/>
+                          <a:ea typeface="Red Hat Display"/>
+                          <a:cs typeface="Red Hat Display"/>
+                          <a:sym typeface="Red Hat Display"/>
+                        </a:rPr>
+                        <a:t>  </a:t>
+                      </a:r>
                     </a:p>
                   </a:txBody>
                   <a:tcPr marL="76200" marR="76200" marT="76200" marB="76200" anchor="ctr">
@@ -14721,7 +15237,7 @@
                   </a:tcPr>
                 </a:tc>
               </a:tr>
-              <a:tr h="1916259">
+              <a:tr h="2334075">
                 <a:tc>
                   <a:txBody>
                     <a:bodyPr anchor="t" rtlCol="false"/>
@@ -14736,6 +15252,17 @@
                         </a:spcBef>
                         <a:defRPr/>
                       </a:pPr>
+                      <a:endParaRPr lang="en-US" sz="1100"/>
+                    </a:p>
+                    <a:p>
+                      <a:pPr algn="ctr" marL="0" indent="0" lvl="0">
+                        <a:lnSpc>
+                          <a:spcPts val="3360"/>
+                        </a:lnSpc>
+                        <a:spcBef>
+                          <a:spcPct val="0"/>
+                        </a:spcBef>
+                      </a:pPr>
                       <a:r>
                         <a:rPr lang="en-US" sz="2400" strike="noStrike" u="none">
                           <a:solidFill>
@@ -14746,9 +15273,52 @@
                           <a:cs typeface="Red Hat Display"/>
                           <a:sym typeface="Red Hat Display"/>
                         </a:rPr>
-                        <a:t>Nguyễn Đức Học</a:t>
+                        <a:t>  Nguyễn Đức Học</a:t>
                       </a:r>
-                      <a:endParaRPr lang="en-US" sz="1100"/>
+                    </a:p>
+                    <a:p>
+                      <a:pPr algn="ctr" marL="0" indent="0" lvl="0">
+                        <a:lnSpc>
+                          <a:spcPts val="3360"/>
+                        </a:lnSpc>
+                        <a:spcBef>
+                          <a:spcPct val="0"/>
+                        </a:spcBef>
+                      </a:pPr>
+                      <a:r>
+                        <a:rPr lang="en-US" sz="2400" strike="noStrike" u="none">
+                          <a:solidFill>
+                            <a:srgbClr val="000000"/>
+                          </a:solidFill>
+                          <a:latin typeface="Red Hat Display"/>
+                          <a:ea typeface="Red Hat Display"/>
+                          <a:cs typeface="Red Hat Display"/>
+                          <a:sym typeface="Red Hat Display"/>
+                        </a:rPr>
+                        <a:t>  (24162039)</a:t>
+                      </a:r>
+                    </a:p>
+                    <a:p>
+                      <a:pPr algn="ctr" marL="0" indent="0" lvl="0">
+                        <a:lnSpc>
+                          <a:spcPts val="3360"/>
+                        </a:lnSpc>
+                        <a:spcBef>
+                          <a:spcPct val="0"/>
+                        </a:spcBef>
+                      </a:pPr>
+                      <a:r>
+                        <a:rPr lang="en-US" sz="2400" strike="noStrike" u="none">
+                          <a:solidFill>
+                            <a:srgbClr val="000000"/>
+                          </a:solidFill>
+                          <a:latin typeface="Red Hat Display"/>
+                          <a:ea typeface="Red Hat Display"/>
+                          <a:cs typeface="Red Hat Display"/>
+                          <a:sym typeface="Red Hat Display"/>
+                        </a:rPr>
+                        <a:t>  </a:t>
+                      </a:r>
                     </a:p>
                   </a:txBody>
                   <a:tcPr marL="76200" marR="76200" marT="76200" marB="76200" anchor="ctr">
@@ -14807,6 +15377,17 @@
                         </a:spcBef>
                         <a:defRPr/>
                       </a:pPr>
+                      <a:endParaRPr lang="en-US" sz="1100"/>
+                    </a:p>
+                    <a:p>
+                      <a:pPr algn="ctr" marL="0" indent="0" lvl="0">
+                        <a:lnSpc>
+                          <a:spcPts val="3360"/>
+                        </a:lnSpc>
+                        <a:spcBef>
+                          <a:spcPct val="0"/>
+                        </a:spcBef>
+                      </a:pPr>
                       <a:r>
                         <a:rPr lang="en-US" sz="2400" strike="noStrike" u="none">
                           <a:solidFill>
@@ -14817,9 +15398,30 @@
                           <a:cs typeface="Red Hat Display"/>
                           <a:sym typeface="Red Hat Display"/>
                         </a:rPr>
-                        <a:t>24162039</a:t>
+                        <a:t>  35%</a:t>
                       </a:r>
-                      <a:endParaRPr lang="en-US" sz="1100"/>
+                    </a:p>
+                    <a:p>
+                      <a:pPr algn="ctr" marL="0" indent="0" lvl="0">
+                        <a:lnSpc>
+                          <a:spcPts val="3360"/>
+                        </a:lnSpc>
+                        <a:spcBef>
+                          <a:spcPct val="0"/>
+                        </a:spcBef>
+                      </a:pPr>
+                      <a:r>
+                        <a:rPr lang="en-US" sz="2400" strike="noStrike" u="none">
+                          <a:solidFill>
+                            <a:srgbClr val="000000"/>
+                          </a:solidFill>
+                          <a:latin typeface="Red Hat Display"/>
+                          <a:ea typeface="Red Hat Display"/>
+                          <a:cs typeface="Red Hat Display"/>
+                          <a:sym typeface="Red Hat Display"/>
+                        </a:rPr>
+                        <a:t>  </a:t>
+                      </a:r>
                     </a:p>
                   </a:txBody>
                   <a:tcPr marL="76200" marR="76200" marT="76200" marB="76200" anchor="ctr">
@@ -14878,6 +15480,17 @@
                         </a:spcBef>
                         <a:defRPr/>
                       </a:pPr>
+                      <a:endParaRPr lang="en-US" sz="1100"/>
+                    </a:p>
+                    <a:p>
+                      <a:pPr algn="ctr" marL="0" indent="0" lvl="0">
+                        <a:lnSpc>
+                          <a:spcPts val="3360"/>
+                        </a:lnSpc>
+                        <a:spcBef>
+                          <a:spcPct val="0"/>
+                        </a:spcBef>
+                      </a:pPr>
                       <a:r>
                         <a:rPr lang="en-US" sz="2400" strike="noStrike" u="none">
                           <a:solidFill>
@@ -14888,9 +15501,52 @@
                           <a:cs typeface="Red Hat Display"/>
                           <a:sym typeface="Red Hat Display"/>
                         </a:rPr>
-                        <a:t>35%</a:t>
+                        <a:t>  ADF, forecast</a:t>
                       </a:r>
-                      <a:endParaRPr lang="en-US" sz="1100"/>
+                    </a:p>
+                    <a:p>
+                      <a:pPr algn="ctr" marL="0" indent="0" lvl="0">
+                        <a:lnSpc>
+                          <a:spcPts val="3360"/>
+                        </a:lnSpc>
+                        <a:spcBef>
+                          <a:spcPct val="0"/>
+                        </a:spcBef>
+                      </a:pPr>
+                      <a:r>
+                        <a:rPr lang="en-US" sz="2400" strike="noStrike" u="none">
+                          <a:solidFill>
+                            <a:srgbClr val="000000"/>
+                          </a:solidFill>
+                          <a:latin typeface="Red Hat Display"/>
+                          <a:ea typeface="Red Hat Display"/>
+                          <a:cs typeface="Red Hat Display"/>
+                          <a:sym typeface="Red Hat Display"/>
+                        </a:rPr>
+                        <a:t>  framework, benchmark, rolling CV và diagnostics</a:t>
+                      </a:r>
+                    </a:p>
+                    <a:p>
+                      <a:pPr algn="ctr" marL="0" indent="0" lvl="0">
+                        <a:lnSpc>
+                          <a:spcPts val="3360"/>
+                        </a:lnSpc>
+                        <a:spcBef>
+                          <a:spcPct val="0"/>
+                        </a:spcBef>
+                      </a:pPr>
+                      <a:r>
+                        <a:rPr lang="en-US" sz="2400" strike="noStrike" u="none">
+                          <a:solidFill>
+                            <a:srgbClr val="000000"/>
+                          </a:solidFill>
+                          <a:latin typeface="Red Hat Display"/>
+                          <a:ea typeface="Red Hat Display"/>
+                          <a:cs typeface="Red Hat Display"/>
+                          <a:sym typeface="Red Hat Display"/>
+                        </a:rPr>
+                        <a:t>  </a:t>
+                      </a:r>
                     </a:p>
                   </a:txBody>
                   <a:tcPr marL="76200" marR="76200" marT="76200" marB="76200" anchor="ctr">
@@ -14949,6 +15605,17 @@
                         </a:spcBef>
                         <a:defRPr/>
                       </a:pPr>
+                      <a:endParaRPr lang="en-US" sz="1100"/>
+                    </a:p>
+                    <a:p>
+                      <a:pPr algn="ctr" marL="0" indent="0" lvl="0">
+                        <a:lnSpc>
+                          <a:spcPts val="3360"/>
+                        </a:lnSpc>
+                        <a:spcBef>
+                          <a:spcPct val="0"/>
+                        </a:spcBef>
+                      </a:pPr>
                       <a:r>
                         <a:rPr lang="en-US" sz="2400" strike="noStrike" u="none">
                           <a:solidFill>
@@ -14959,9 +15626,30 @@
                           <a:cs typeface="Red Hat Display"/>
                           <a:sym typeface="Red Hat Display"/>
                         </a:rPr>
-                        <a:t>Kiểm định ADF, dự báo giá: Naive, Drift, ARIMA, SARIMA, ETS, ETS Damped, ARIMAX (03_stationarity_arima_ets.R), rolling-origin CV, residual diagnostics</a:t>
+                        <a:t>  25/05/2026 – 19/06/2026</a:t>
                       </a:r>
-                      <a:endParaRPr lang="en-US" sz="1100"/>
+                    </a:p>
+                    <a:p>
+                      <a:pPr algn="ctr" marL="0" indent="0" lvl="0">
+                        <a:lnSpc>
+                          <a:spcPts val="3360"/>
+                        </a:lnSpc>
+                        <a:spcBef>
+                          <a:spcPct val="0"/>
+                        </a:spcBef>
+                      </a:pPr>
+                      <a:r>
+                        <a:rPr lang="en-US" sz="2400" strike="noStrike" u="none">
+                          <a:solidFill>
+                            <a:srgbClr val="000000"/>
+                          </a:solidFill>
+                          <a:latin typeface="Red Hat Display"/>
+                          <a:ea typeface="Red Hat Display"/>
+                          <a:cs typeface="Red Hat Display"/>
+                          <a:sym typeface="Red Hat Display"/>
+                        </a:rPr>
+                        <a:t>  </a:t>
+                      </a:r>
                     </a:p>
                   </a:txBody>
                   <a:tcPr marL="76200" marR="76200" marT="76200" marB="76200" anchor="ctr">
@@ -15020,6 +15708,17 @@
                         </a:spcBef>
                         <a:defRPr/>
                       </a:pPr>
+                      <a:endParaRPr lang="en-US" sz="1100"/>
+                    </a:p>
+                    <a:p>
+                      <a:pPr algn="ctr" marL="0" indent="0" lvl="0">
+                        <a:lnSpc>
+                          <a:spcPts val="3360"/>
+                        </a:lnSpc>
+                        <a:spcBef>
+                          <a:spcPct val="0"/>
+                        </a:spcBef>
+                      </a:pPr>
                       <a:r>
                         <a:rPr lang="en-US" sz="2400" strike="noStrike" u="none">
                           <a:solidFill>
@@ -15030,9 +15729,52 @@
                           <a:cs typeface="Red Hat Display"/>
                           <a:sym typeface="Red Hat Display"/>
                         </a:rPr>
-                        <a:t>25/05 – 19/06/2026</a:t>
+                        <a:t>  R/03, bảng/hình</a:t>
                       </a:r>
-                      <a:endParaRPr lang="en-US" sz="1100"/>
+                    </a:p>
+                    <a:p>
+                      <a:pPr algn="ctr" marL="0" indent="0" lvl="0">
+                        <a:lnSpc>
+                          <a:spcPts val="3360"/>
+                        </a:lnSpc>
+                        <a:spcBef>
+                          <a:spcPct val="0"/>
+                        </a:spcBef>
+                      </a:pPr>
+                      <a:r>
+                        <a:rPr lang="en-US" sz="2400" strike="noStrike" u="none">
+                          <a:solidFill>
+                            <a:srgbClr val="000000"/>
+                          </a:solidFill>
+                          <a:latin typeface="Red Hat Display"/>
+                          <a:ea typeface="Red Hat Display"/>
+                          <a:cs typeface="Red Hat Display"/>
+                          <a:sym typeface="Red Hat Display"/>
+                        </a:rPr>
+                        <a:t>  forecast</a:t>
+                      </a:r>
+                    </a:p>
+                    <a:p>
+                      <a:pPr algn="ctr" marL="0" indent="0" lvl="0">
+                        <a:lnSpc>
+                          <a:spcPts val="3360"/>
+                        </a:lnSpc>
+                        <a:spcBef>
+                          <a:spcPct val="0"/>
+                        </a:spcBef>
+                      </a:pPr>
+                      <a:r>
+                        <a:rPr lang="en-US" sz="2400" strike="noStrike" u="none">
+                          <a:solidFill>
+                            <a:srgbClr val="000000"/>
+                          </a:solidFill>
+                          <a:latin typeface="Red Hat Display"/>
+                          <a:ea typeface="Red Hat Display"/>
+                          <a:cs typeface="Red Hat Display"/>
+                          <a:sym typeface="Red Hat Display"/>
+                        </a:rPr>
+                        <a:t>  </a:t>
+                      </a:r>
                     </a:p>
                   </a:txBody>
                   <a:tcPr marL="76200" marR="76200" marT="76200" marB="76200" anchor="ctr">
@@ -15091,6 +15833,17 @@
                         </a:spcBef>
                         <a:defRPr/>
                       </a:pPr>
+                      <a:endParaRPr lang="en-US" sz="1100"/>
+                    </a:p>
+                    <a:p>
+                      <a:pPr algn="ctr" marL="0" indent="0" lvl="0">
+                        <a:lnSpc>
+                          <a:spcPts val="3360"/>
+                        </a:lnSpc>
+                        <a:spcBef>
+                          <a:spcPct val="0"/>
+                        </a:spcBef>
+                      </a:pPr>
                       <a:r>
                         <a:rPr lang="en-US" sz="2400" strike="noStrike" u="none">
                           <a:solidFill>
@@ -15101,9 +15854,52 @@
                           <a:cs typeface="Red Hat Display"/>
                           <a:sym typeface="Red Hat Display"/>
                         </a:rPr>
-                        <a:t>100%</a:t>
+                        <a:t>  Nguyễn Đức Học</a:t>
                       </a:r>
-                      <a:endParaRPr lang="en-US" sz="1100"/>
+                    </a:p>
+                    <a:p>
+                      <a:pPr algn="ctr" marL="0" indent="0" lvl="0">
+                        <a:lnSpc>
+                          <a:spcPts val="3360"/>
+                        </a:lnSpc>
+                        <a:spcBef>
+                          <a:spcPct val="0"/>
+                        </a:spcBef>
+                      </a:pPr>
+                      <a:r>
+                        <a:rPr lang="en-US" sz="2400" strike="noStrike" u="none">
+                          <a:solidFill>
+                            <a:srgbClr val="000000"/>
+                          </a:solidFill>
+                          <a:latin typeface="Red Hat Display"/>
+                          <a:ea typeface="Red Hat Display"/>
+                          <a:cs typeface="Red Hat Display"/>
+                          <a:sym typeface="Red Hat Display"/>
+                        </a:rPr>
+                        <a:t>  (24162039)</a:t>
+                      </a:r>
+                    </a:p>
+                    <a:p>
+                      <a:pPr algn="ctr" marL="0" indent="0" lvl="0">
+                        <a:lnSpc>
+                          <a:spcPts val="3360"/>
+                        </a:lnSpc>
+                        <a:spcBef>
+                          <a:spcPct val="0"/>
+                        </a:spcBef>
+                      </a:pPr>
+                      <a:r>
+                        <a:rPr lang="en-US" sz="2400" strike="noStrike" u="none">
+                          <a:solidFill>
+                            <a:srgbClr val="000000"/>
+                          </a:solidFill>
+                          <a:latin typeface="Red Hat Display"/>
+                          <a:ea typeface="Red Hat Display"/>
+                          <a:cs typeface="Red Hat Display"/>
+                          <a:sym typeface="Red Hat Display"/>
+                        </a:rPr>
+                        <a:t>  </a:t>
+                      </a:r>
                     </a:p>
                   </a:txBody>
                   <a:tcPr marL="76200" marR="76200" marT="76200" marB="76200" anchor="ctr">
@@ -15149,7 +15945,7 @@
                   </a:tcPr>
                 </a:tc>
               </a:tr>
-              <a:tr h="2000236">
+              <a:tr h="2334075">
                 <a:tc>
                   <a:txBody>
                     <a:bodyPr anchor="t" rtlCol="false"/>
@@ -15164,6 +15960,17 @@
                         </a:spcBef>
                         <a:defRPr/>
                       </a:pPr>
+                      <a:endParaRPr lang="en-US" sz="1100"/>
+                    </a:p>
+                    <a:p>
+                      <a:pPr algn="ctr" marL="0" indent="0" lvl="0">
+                        <a:lnSpc>
+                          <a:spcPts val="3360"/>
+                        </a:lnSpc>
+                        <a:spcBef>
+                          <a:spcPct val="0"/>
+                        </a:spcBef>
+                      </a:pPr>
                       <a:r>
                         <a:rPr lang="en-US" sz="2400" strike="noStrike" u="none">
                           <a:solidFill>
@@ -15174,9 +15981,52 @@
                           <a:cs typeface="Red Hat Display"/>
                           <a:sym typeface="Red Hat Display"/>
                         </a:rPr>
-                        <a:t>Lê Đặng Hoàng Anh</a:t>
+                        <a:t>  Lê Đặng Hoàng</a:t>
                       </a:r>
-                      <a:endParaRPr lang="en-US" sz="1100"/>
+                    </a:p>
+                    <a:p>
+                      <a:pPr algn="ctr" marL="0" indent="0" lvl="0">
+                        <a:lnSpc>
+                          <a:spcPts val="3360"/>
+                        </a:lnSpc>
+                        <a:spcBef>
+                          <a:spcPct val="0"/>
+                        </a:spcBef>
+                      </a:pPr>
+                      <a:r>
+                        <a:rPr lang="en-US" sz="2400" strike="noStrike" u="none">
+                          <a:solidFill>
+                            <a:srgbClr val="000000"/>
+                          </a:solidFill>
+                          <a:latin typeface="Red Hat Display"/>
+                          <a:ea typeface="Red Hat Display"/>
+                          <a:cs typeface="Red Hat Display"/>
+                          <a:sym typeface="Red Hat Display"/>
+                        </a:rPr>
+                        <a:t>  Anh (24162006)</a:t>
+                      </a:r>
+                    </a:p>
+                    <a:p>
+                      <a:pPr algn="ctr" marL="0" indent="0" lvl="0">
+                        <a:lnSpc>
+                          <a:spcPts val="3360"/>
+                        </a:lnSpc>
+                        <a:spcBef>
+                          <a:spcPct val="0"/>
+                        </a:spcBef>
+                      </a:pPr>
+                      <a:r>
+                        <a:rPr lang="en-US" sz="2400" strike="noStrike" u="none">
+                          <a:solidFill>
+                            <a:srgbClr val="000000"/>
+                          </a:solidFill>
+                          <a:latin typeface="Red Hat Display"/>
+                          <a:ea typeface="Red Hat Display"/>
+                          <a:cs typeface="Red Hat Display"/>
+                          <a:sym typeface="Red Hat Display"/>
+                        </a:rPr>
+                        <a:t>  </a:t>
+                      </a:r>
                     </a:p>
                   </a:txBody>
                   <a:tcPr marL="76200" marR="76200" marT="76200" marB="76200" anchor="ctr">
@@ -15235,6 +16085,17 @@
                         </a:spcBef>
                         <a:defRPr/>
                       </a:pPr>
+                      <a:endParaRPr lang="en-US" sz="1100"/>
+                    </a:p>
+                    <a:p>
+                      <a:pPr algn="ctr" marL="0" indent="0" lvl="0">
+                        <a:lnSpc>
+                          <a:spcPts val="3360"/>
+                        </a:lnSpc>
+                        <a:spcBef>
+                          <a:spcPct val="0"/>
+                        </a:spcBef>
+                      </a:pPr>
                       <a:r>
                         <a:rPr lang="en-US" sz="2400" strike="noStrike" u="none">
                           <a:solidFill>
@@ -15245,9 +16106,30 @@
                           <a:cs typeface="Red Hat Display"/>
                           <a:sym typeface="Red Hat Display"/>
                         </a:rPr>
-                        <a:t>24162006</a:t>
+                        <a:t>  35%</a:t>
                       </a:r>
-                      <a:endParaRPr lang="en-US" sz="1100"/>
+                    </a:p>
+                    <a:p>
+                      <a:pPr algn="ctr" marL="0" indent="0" lvl="0">
+                        <a:lnSpc>
+                          <a:spcPts val="3360"/>
+                        </a:lnSpc>
+                        <a:spcBef>
+                          <a:spcPct val="0"/>
+                        </a:spcBef>
+                      </a:pPr>
+                      <a:r>
+                        <a:rPr lang="en-US" sz="2400" strike="noStrike" u="none">
+                          <a:solidFill>
+                            <a:srgbClr val="000000"/>
+                          </a:solidFill>
+                          <a:latin typeface="Red Hat Display"/>
+                          <a:ea typeface="Red Hat Display"/>
+                          <a:cs typeface="Red Hat Display"/>
+                          <a:sym typeface="Red Hat Display"/>
+                        </a:rPr>
+                        <a:t>  </a:t>
+                      </a:r>
                     </a:p>
                   </a:txBody>
                   <a:tcPr marL="76200" marR="76200" marT="76200" marB="76200" anchor="ctr">
@@ -15306,6 +16188,17 @@
                         </a:spcBef>
                         <a:defRPr/>
                       </a:pPr>
+                      <a:endParaRPr lang="en-US" sz="1100"/>
+                    </a:p>
+                    <a:p>
+                      <a:pPr algn="ctr" marL="0" indent="0" lvl="0">
+                        <a:lnSpc>
+                          <a:spcPts val="3360"/>
+                        </a:lnSpc>
+                        <a:spcBef>
+                          <a:spcPct val="0"/>
+                        </a:spcBef>
+                      </a:pPr>
                       <a:r>
                         <a:rPr lang="en-US" sz="2400" strike="noStrike" u="none">
                           <a:solidFill>
@@ -15316,9 +16209,52 @@
                           <a:cs typeface="Red Hat Display"/>
                           <a:sym typeface="Red Hat Display"/>
                         </a:rPr>
-                        <a:t>35%</a:t>
+                        <a:t>  GARCH variants,</a:t>
                       </a:r>
-                      <a:endParaRPr lang="en-US" sz="1100"/>
+                    </a:p>
+                    <a:p>
+                      <a:pPr algn="ctr" marL="0" indent="0" lvl="0">
+                        <a:lnSpc>
+                          <a:spcPts val="3360"/>
+                        </a:lnSpc>
+                        <a:spcBef>
+                          <a:spcPct val="0"/>
+                        </a:spcBef>
+                      </a:pPr>
+                      <a:r>
+                        <a:rPr lang="en-US" sz="2400" strike="noStrike" u="none">
+                          <a:solidFill>
+                            <a:srgbClr val="000000"/>
+                          </a:solidFill>
+                          <a:latin typeface="Red Hat Display"/>
+                          <a:ea typeface="Red Hat Display"/>
+                          <a:cs typeface="Red Hat Display"/>
+                          <a:sym typeface="Red Hat Display"/>
+                        </a:rPr>
+                        <a:t>  diagnostics, comparison và tích hợp báo cáo</a:t>
+                      </a:r>
+                    </a:p>
+                    <a:p>
+                      <a:pPr algn="ctr" marL="0" indent="0" lvl="0">
+                        <a:lnSpc>
+                          <a:spcPts val="3360"/>
+                        </a:lnSpc>
+                        <a:spcBef>
+                          <a:spcPct val="0"/>
+                        </a:spcBef>
+                      </a:pPr>
+                      <a:r>
+                        <a:rPr lang="en-US" sz="2400" strike="noStrike" u="none">
+                          <a:solidFill>
+                            <a:srgbClr val="000000"/>
+                          </a:solidFill>
+                          <a:latin typeface="Red Hat Display"/>
+                          <a:ea typeface="Red Hat Display"/>
+                          <a:cs typeface="Red Hat Display"/>
+                          <a:sym typeface="Red Hat Display"/>
+                        </a:rPr>
+                        <a:t>  </a:t>
+                      </a:r>
                     </a:p>
                   </a:txBody>
                   <a:tcPr marL="76200" marR="76200" marT="76200" marB="76200" anchor="ctr">
@@ -15377,6 +16313,17 @@
                         </a:spcBef>
                         <a:defRPr/>
                       </a:pPr>
+                      <a:endParaRPr lang="en-US" sz="1100"/>
+                    </a:p>
+                    <a:p>
+                      <a:pPr algn="ctr" marL="0" indent="0" lvl="0">
+                        <a:lnSpc>
+                          <a:spcPts val="3360"/>
+                        </a:lnSpc>
+                        <a:spcBef>
+                          <a:spcPct val="0"/>
+                        </a:spcBef>
+                      </a:pPr>
                       <a:r>
                         <a:rPr lang="en-US" sz="2400" strike="noStrike" u="none">
                           <a:solidFill>
@@ -15387,9 +16334,30 @@
                           <a:cs typeface="Red Hat Display"/>
                           <a:sym typeface="Red Hat Display"/>
                         </a:rPr>
-                        <a:t>GARCH 4 specification (04_garch_volatility.R), model comparison (05_model_comparison.R), export tables (06_export_report_tables.R), tích hợp báo cáo Word, khung slide</a:t>
+                        <a:t>  25/05/2026 – 19/06/2026</a:t>
                       </a:r>
-                      <a:endParaRPr lang="en-US" sz="1100"/>
+                    </a:p>
+                    <a:p>
+                      <a:pPr algn="ctr" marL="0" indent="0" lvl="0">
+                        <a:lnSpc>
+                          <a:spcPts val="3360"/>
+                        </a:lnSpc>
+                        <a:spcBef>
+                          <a:spcPct val="0"/>
+                        </a:spcBef>
+                      </a:pPr>
+                      <a:r>
+                        <a:rPr lang="en-US" sz="2400" strike="noStrike" u="none">
+                          <a:solidFill>
+                            <a:srgbClr val="000000"/>
+                          </a:solidFill>
+                          <a:latin typeface="Red Hat Display"/>
+                          <a:ea typeface="Red Hat Display"/>
+                          <a:cs typeface="Red Hat Display"/>
+                          <a:sym typeface="Red Hat Display"/>
+                        </a:rPr>
+                        <a:t>  </a:t>
+                      </a:r>
                     </a:p>
                   </a:txBody>
                   <a:tcPr marL="76200" marR="76200" marT="76200" marB="76200" anchor="ctr">
@@ -15448,6 +16416,17 @@
                         </a:spcBef>
                         <a:defRPr/>
                       </a:pPr>
+                      <a:endParaRPr lang="en-US" sz="1100"/>
+                    </a:p>
+                    <a:p>
+                      <a:pPr algn="ctr" marL="0" indent="0" lvl="0">
+                        <a:lnSpc>
+                          <a:spcPts val="3360"/>
+                        </a:lnSpc>
+                        <a:spcBef>
+                          <a:spcPct val="0"/>
+                        </a:spcBef>
+                      </a:pPr>
                       <a:r>
                         <a:rPr lang="en-US" sz="2400" strike="noStrike" u="none">
                           <a:solidFill>
@@ -15458,9 +16437,30 @@
                           <a:cs typeface="Red Hat Display"/>
                           <a:sym typeface="Red Hat Display"/>
                         </a:rPr>
-                        <a:t>25/05 – 20/06/2026</a:t>
+                        <a:t>  R/04-R/06, Word và khung slide</a:t>
                       </a:r>
-                      <a:endParaRPr lang="en-US" sz="1100"/>
+                    </a:p>
+                    <a:p>
+                      <a:pPr algn="ctr" marL="0" indent="0" lvl="0">
+                        <a:lnSpc>
+                          <a:spcPts val="3360"/>
+                        </a:lnSpc>
+                        <a:spcBef>
+                          <a:spcPct val="0"/>
+                        </a:spcBef>
+                      </a:pPr>
+                      <a:r>
+                        <a:rPr lang="en-US" sz="2400" strike="noStrike" u="none">
+                          <a:solidFill>
+                            <a:srgbClr val="000000"/>
+                          </a:solidFill>
+                          <a:latin typeface="Red Hat Display"/>
+                          <a:ea typeface="Red Hat Display"/>
+                          <a:cs typeface="Red Hat Display"/>
+                          <a:sym typeface="Red Hat Display"/>
+                        </a:rPr>
+                        <a:t>  </a:t>
+                      </a:r>
                     </a:p>
                   </a:txBody>
                   <a:tcPr marL="76200" marR="76200" marT="76200" marB="76200" anchor="ctr">
@@ -15519,6 +16519,17 @@
                         </a:spcBef>
                         <a:defRPr/>
                       </a:pPr>
+                      <a:endParaRPr lang="en-US" sz="1100"/>
+                    </a:p>
+                    <a:p>
+                      <a:pPr algn="ctr" marL="0" indent="0" lvl="0">
+                        <a:lnSpc>
+                          <a:spcPts val="3360"/>
+                        </a:lnSpc>
+                        <a:spcBef>
+                          <a:spcPct val="0"/>
+                        </a:spcBef>
+                      </a:pPr>
                       <a:r>
                         <a:rPr lang="en-US" sz="2400" strike="noStrike" u="none">
                           <a:solidFill>
@@ -15529,9 +16540,52 @@
                           <a:cs typeface="Red Hat Display"/>
                           <a:sym typeface="Red Hat Display"/>
                         </a:rPr>
-                        <a:t>100%</a:t>
+                        <a:t>  Lê Đặng Hoàng</a:t>
                       </a:r>
-                      <a:endParaRPr lang="en-US" sz="1100"/>
+                    </a:p>
+                    <a:p>
+                      <a:pPr algn="ctr" marL="0" indent="0" lvl="0">
+                        <a:lnSpc>
+                          <a:spcPts val="3360"/>
+                        </a:lnSpc>
+                        <a:spcBef>
+                          <a:spcPct val="0"/>
+                        </a:spcBef>
+                      </a:pPr>
+                      <a:r>
+                        <a:rPr lang="en-US" sz="2400" strike="noStrike" u="none">
+                          <a:solidFill>
+                            <a:srgbClr val="000000"/>
+                          </a:solidFill>
+                          <a:latin typeface="Red Hat Display"/>
+                          <a:ea typeface="Red Hat Display"/>
+                          <a:cs typeface="Red Hat Display"/>
+                          <a:sym typeface="Red Hat Display"/>
+                        </a:rPr>
+                        <a:t>  Anh (24162006)</a:t>
+                      </a:r>
+                    </a:p>
+                    <a:p>
+                      <a:pPr algn="ctr" marL="0" indent="0" lvl="0">
+                        <a:lnSpc>
+                          <a:spcPts val="3360"/>
+                        </a:lnSpc>
+                        <a:spcBef>
+                          <a:spcPct val="0"/>
+                        </a:spcBef>
+                      </a:pPr>
+                      <a:r>
+                        <a:rPr lang="en-US" sz="2400" strike="noStrike" u="none">
+                          <a:solidFill>
+                            <a:srgbClr val="000000"/>
+                          </a:solidFill>
+                          <a:latin typeface="Red Hat Display"/>
+                          <a:ea typeface="Red Hat Display"/>
+                          <a:cs typeface="Red Hat Display"/>
+                          <a:sym typeface="Red Hat Display"/>
+                        </a:rPr>
+                        <a:t>  </a:t>
+                      </a:r>
                     </a:p>
                   </a:txBody>
                   <a:tcPr marL="76200" marR="76200" marT="76200" marB="76200" anchor="ctr">
@@ -15581,62 +16635,6 @@
           </a:graphicData>
         </a:graphic>
       </p:graphicFrame>
-      <p:sp>
-        <p:nvSpPr>
-          <p:cNvPr name="TextBox 11" id="11"/>
-          <p:cNvSpPr txBox="true"/>
-          <p:nvPr/>
-        </p:nvSpPr>
-        <p:spPr>
-          <a:xfrm rot="0">
-            <a:off x="1631077" y="7964047"/>
-            <a:ext cx="15025846" cy="481330"/>
-          </a:xfrm>
-          <a:prstGeom prst="rect">
-            <a:avLst/>
-          </a:prstGeom>
-        </p:spPr>
-        <p:txBody>
-          <a:bodyPr anchor="t" rtlCol="false" tIns="0" lIns="0" bIns="0" rIns="0">
-            <a:spAutoFit/>
-          </a:bodyPr>
-          <a:lstStyle/>
-          <a:p>
-            <a:pPr algn="ctr">
-              <a:lnSpc>
-                <a:spcPts val="3919"/>
-              </a:lnSpc>
-              <a:spcBef>
-                <a:spcPct val="0"/>
-              </a:spcBef>
-            </a:pPr>
-            <a:r>
-              <a:rPr lang="en-US" b="true" sz="2799">
-                <a:solidFill>
-                  <a:srgbClr val="2D2261"/>
-                </a:solidFill>
-                <a:latin typeface="Red Hat Display Bold"/>
-                <a:ea typeface="Red Hat Display Bold"/>
-                <a:cs typeface="Red Hat Display Bold"/>
-                <a:sym typeface="Red Hat Display Bold"/>
-              </a:rPr>
-              <a:t>Đánh giá chung:</a:t>
-            </a:r>
-            <a:r>
-              <a:rPr lang="en-US" sz="2799">
-                <a:solidFill>
-                  <a:srgbClr val="2D2261"/>
-                </a:solidFill>
-                <a:latin typeface="Red Hat Display"/>
-                <a:ea typeface="Red Hat Display"/>
-                <a:cs typeface="Red Hat Display"/>
-                <a:sym typeface="Red Hat Display"/>
-              </a:rPr>
-              <a:t> Cả ba thành viên hoàn thành đúng tiến độ, phối hợp qua Git và review chéo PR.</a:t>
-            </a:r>
-          </a:p>
-        </p:txBody>
-      </p:sp>
     </p:spTree>
   </p:cSld>
   <p:clrMapOvr>
@@ -24267,31 +25265,7 @@
                 <a:cs typeface="Red Hat Display Bold"/>
                 <a:sym typeface="Red Hat Display Bold"/>
               </a:rPr>
-              <a:t>RMSE</a:t>
-            </a:r>
-            <a:r>
-              <a:rPr lang="en-US" sz="2499">
-                <a:solidFill>
-                  <a:srgbClr val="000000"/>
-                </a:solidFill>
-                <a:latin typeface="Red Hat Display"/>
-                <a:ea typeface="Red Hat Display"/>
-                <a:cs typeface="Red Hat Display"/>
-                <a:sym typeface="Red Hat Display"/>
-              </a:rPr>
-              <a:t>, </a:t>
-            </a:r>
-            <a:r>
-              <a:rPr lang="en-US" b="true" sz="2499">
-                <a:solidFill>
-                  <a:srgbClr val="000000"/>
-                </a:solidFill>
-                <a:latin typeface="Red Hat Display Bold"/>
-                <a:ea typeface="Red Hat Display Bold"/>
-                <a:cs typeface="Red Hat Display Bold"/>
-                <a:sym typeface="Red Hat Display Bold"/>
-              </a:rPr>
-              <a:t>MAE</a:t>
+              <a:t>RMSE, MAE</a:t>
             </a:r>
             <a:r>
               <a:rPr lang="en-US" sz="2499">
@@ -24750,7 +25724,7 @@
           <p:nvPr/>
         </p:nvGraphicFramePr>
         <p:xfrm>
-          <a:off x="797362" y="1847238"/>
+          <a:off x="797362" y="1296065"/>
           <a:ext cx="6423399" cy="4000500"/>
         </p:xfrm>
         <a:graphic>
@@ -26350,8 +27324,8 @@
         </p:nvSpPr>
         <p:spPr>
           <a:xfrm flipH="false" flipV="false" rot="0">
-            <a:off x="8880064" y="1336248"/>
-            <a:ext cx="9087909" cy="5452745"/>
+            <a:off x="8237780" y="1028700"/>
+            <a:ext cx="9887819" cy="5932692"/>
           </a:xfrm>
           <a:custGeom>
             <a:avLst/>
@@ -26360,18 +27334,18 @@
             <a:cxnLst/>
             <a:rect r="r" b="b" t="t" l="l"/>
             <a:pathLst>
-              <a:path h="5452745" w="9087909">
+              <a:path h="5932692" w="9887819">
                 <a:moveTo>
                   <a:pt x="0" y="0"/>
                 </a:moveTo>
                 <a:lnTo>
-                  <a:pt x="9087909" y="0"/>
-                </a:lnTo>
-                <a:lnTo>
-                  <a:pt x="9087909" y="5452745"/>
-                </a:lnTo>
-                <a:lnTo>
-                  <a:pt x="0" y="5452745"/>
+                  <a:pt x="9887819" y="0"/>
+                </a:lnTo>
+                <a:lnTo>
+                  <a:pt x="9887819" y="5932692"/>
+                </a:lnTo>
+                <a:lnTo>
+                  <a:pt x="0" y="5932692"/>
                 </a:lnTo>
                 <a:lnTo>
                   <a:pt x="0" y="0"/>
@@ -26396,7 +27370,7 @@
         </p:nvSpPr>
         <p:spPr>
           <a:xfrm rot="0">
-            <a:off x="3931825" y="332856"/>
+            <a:off x="4009061" y="-635"/>
             <a:ext cx="11436870" cy="781685"/>
           </a:xfrm>
           <a:prstGeom prst="rect">
@@ -26437,8 +27411,8 @@
         </p:nvSpPr>
         <p:spPr>
           <a:xfrm rot="0">
-            <a:off x="797362" y="5921375"/>
-            <a:ext cx="8082702" cy="4365625"/>
+            <a:off x="797362" y="5328981"/>
+            <a:ext cx="8082702" cy="5241925"/>
           </a:xfrm>
           <a:prstGeom prst="rect">
             <a:avLst/>
@@ -26534,7 +27508,7 @@
                 <a:cs typeface="Red Hat Display"/>
                 <a:sym typeface="Red Hat Display"/>
               </a:rPr>
-              <a:t>0,72). Mô hình này không thắng mọi metric (ví dụ: ETS có MAPE 2,08%, thấp hơn ETS Damped 2,10%).</a:t>
+              <a:t>0,72). Mô hình này không thắng hoàn toàn (ETS có MAPE 2,08%, thấp hơn ETS Damped 2,10%).</a:t>
             </a:r>
           </a:p>
           <a:p>
@@ -26567,7 +27541,7 @@
                 <a:cs typeface="Red Hat Display"/>
                 <a:sym typeface="Red Hat Display"/>
               </a:rPr>
-              <a:t>Naive dẫn đầu độ ổn định.</a:t>
+              <a:t>Khi thử nghiệm cuộn trên nhiều giai đoạn khác nhau của lịch sử, mô hình ngây thơ Naive lại là mô hình ổn định nhất.</a:t>
             </a:r>
           </a:p>
           <a:p>
@@ -26600,7 +27574,7 @@
                 <a:cs typeface="Red Hat Display"/>
                 <a:sym typeface="Red Hat Display"/>
               </a:rPr>
-              <a:t>Bác bỏ H₀​ white-noise residual ở tất cả fitted models → Vẫn còn residual autocorrelation.</a:t>
+              <a:t>Tất cả các mô hình đều thất bại trong việc đưa sai số về dạng nhiễu trắng (vẫn còn hiện tượng tự tương quan phần dư).</a:t>
             </a:r>
           </a:p>
           <a:p>
@@ -26620,7 +27594,7 @@
         </p:nvSpPr>
         <p:spPr>
           <a:xfrm rot="0">
-            <a:off x="797362" y="1301138"/>
+            <a:off x="771624" y="793750"/>
             <a:ext cx="8676988" cy="422275"/>
           </a:xfrm>
           <a:prstGeom prst="rect">
@@ -26673,7 +27647,7 @@
         </p:nvSpPr>
         <p:spPr>
           <a:xfrm rot="0">
-            <a:off x="11799118" y="6903049"/>
+            <a:off x="11799118" y="6996003"/>
             <a:ext cx="3975973" cy="330200"/>
           </a:xfrm>
           <a:prstGeom prst="rect">
@@ -26717,7 +27691,7 @@
         </p:nvSpPr>
         <p:spPr>
           <a:xfrm rot="0">
-            <a:off x="9474349" y="7328255"/>
+            <a:off x="9448611" y="7528267"/>
             <a:ext cx="8676988" cy="2174875"/>
           </a:xfrm>
           <a:prstGeom prst="rect">

--- a/presentation/bao_cao_demo.pptx
+++ b/presentation/bao_cao_demo.pptx
@@ -24,29 +24,30 @@
     <p:sldId id="272" r:id="rId22"/>
     <p:sldId id="273" r:id="rId23"/>
     <p:sldId id="274" r:id="rId24"/>
+    <p:sldId id="275" r:id="rId25"/>
   </p:sldIdLst>
   <p:sldSz cx="18288000" cy="10287000"/>
   <p:notesSz cx="6858000" cy="9144000"/>
   <p:embeddedFontLst>
     <p:embeddedFont>
       <p:font typeface="Red Hat Display Bold" charset="1" panose="02010803040201060303"/>
-      <p:regular r:id="rId25"/>
+      <p:regular r:id="rId26"/>
     </p:embeddedFont>
     <p:embeddedFont>
       <p:font typeface="Red Hat Display" charset="1" panose="02010503040201060303"/>
-      <p:regular r:id="rId26"/>
+      <p:regular r:id="rId27"/>
     </p:embeddedFont>
     <p:embeddedFont>
       <p:font typeface="Roboto Slab Bold" charset="1" panose="00000000000000000000"/>
-      <p:regular r:id="rId27"/>
+      <p:regular r:id="rId28"/>
     </p:embeddedFont>
     <p:embeddedFont>
       <p:font typeface="Roboto Slab" charset="1" panose="00000000000000000000"/>
-      <p:regular r:id="rId28"/>
+      <p:regular r:id="rId29"/>
     </p:embeddedFont>
     <p:embeddedFont>
       <p:font typeface="Red Hat Display Italics" charset="1" panose="020105030402010D0303"/>
-      <p:regular r:id="rId29"/>
+      <p:regular r:id="rId30"/>
     </p:embeddedFont>
   </p:embeddedFontLst>
   <p:defaultTextStyle>
@@ -4594,148 +4595,9 @@
           </a:blipFill>
         </p:spPr>
       </p:sp>
-      <p:sp>
-        <p:nvSpPr>
-          <p:cNvPr name="TextBox 12" id="12"/>
-          <p:cNvSpPr txBox="true"/>
-          <p:nvPr/>
-        </p:nvSpPr>
-        <p:spPr>
-          <a:xfrm rot="0">
-            <a:off x="0" y="3388872"/>
-            <a:ext cx="7828767" cy="5434330"/>
-          </a:xfrm>
-          <a:prstGeom prst="rect">
-            <a:avLst/>
-          </a:prstGeom>
-        </p:spPr>
-        <p:txBody>
-          <a:bodyPr anchor="t" rtlCol="false" tIns="0" lIns="0" bIns="0" rIns="0">
-            <a:spAutoFit/>
-          </a:bodyPr>
-          <a:lstStyle/>
-          <a:p>
-            <a:pPr algn="l" marL="604518" indent="-302259" lvl="1">
-              <a:lnSpc>
-                <a:spcPts val="3919"/>
-              </a:lnSpc>
-              <a:buFont typeface="Arial"/>
-              <a:buChar char="•"/>
-            </a:pPr>
-            <a:r>
-              <a:rPr lang="en-US" sz="2799">
-                <a:solidFill>
-                  <a:srgbClr val="2D2261"/>
-                </a:solidFill>
-                <a:latin typeface="Roboto Slab"/>
-                <a:ea typeface="Roboto Slab"/>
-                <a:cs typeface="Roboto Slab"/>
-                <a:sym typeface="Roboto Slab"/>
-              </a:rPr>
-              <a:t>Forecast giá trả lời mức giá kỳ vọng; GARCH trả lời mức biến động có điều kiện.</a:t>
-            </a:r>
-          </a:p>
-          <a:p>
-            <a:pPr algn="l" marL="604518" indent="-302259" lvl="1">
-              <a:lnSpc>
-                <a:spcPts val="3919"/>
-              </a:lnSpc>
-              <a:buFont typeface="Arial"/>
-              <a:buChar char="•"/>
-            </a:pPr>
-            <a:r>
-              <a:rPr lang="en-US" sz="2799">
-                <a:solidFill>
-                  <a:srgbClr val="2D2261"/>
-                </a:solidFill>
-                <a:latin typeface="Roboto Slab"/>
-                <a:ea typeface="Roboto Slab"/>
-                <a:cs typeface="Roboto Slab"/>
-                <a:sym typeface="Roboto Slab"/>
-              </a:rPr>
-              <a:t>Log return: rₜ = log(Pₜ) − log(Pₜ₋₁); chuỗi dừng theo ADF.</a:t>
-            </a:r>
-          </a:p>
-          <a:p>
-            <a:pPr algn="l" marL="604518" indent="-302259" lvl="1">
-              <a:lnSpc>
-                <a:spcPts val="3919"/>
-              </a:lnSpc>
-              <a:buFont typeface="Arial"/>
-              <a:buChar char="•"/>
-            </a:pPr>
-            <a:r>
-              <a:rPr lang="en-US" sz="2799">
-                <a:solidFill>
-                  <a:srgbClr val="2D2261"/>
-                </a:solidFill>
-                <a:latin typeface="Roboto Slab"/>
-                <a:ea typeface="Roboto Slab"/>
-                <a:cs typeface="Roboto Slab"/>
-                <a:sym typeface="Roboto Slab"/>
-              </a:rPr>
-              <a:t>Return dao động quanh 0 nhưng </a:t>
-            </a:r>
-            <a:r>
-              <a:rPr lang="en-US" sz="2799">
-                <a:solidFill>
-                  <a:srgbClr val="2D2261"/>
-                </a:solidFill>
-                <a:latin typeface="Roboto Slab"/>
-                <a:ea typeface="Roboto Slab"/>
-                <a:cs typeface="Roboto Slab"/>
-                <a:sym typeface="Roboto Slab"/>
-              </a:rPr>
-              <a:t>rₜ² xuất hiện theo cụm lớn/nhỏ → volatility clustering.</a:t>
-            </a:r>
-          </a:p>
-          <a:p>
-            <a:pPr algn="l" marL="604518" indent="-302259" lvl="1">
-              <a:lnSpc>
-                <a:spcPts val="3919"/>
-              </a:lnSpc>
-              <a:buFont typeface="Arial"/>
-              <a:buChar char="•"/>
-            </a:pPr>
-            <a:r>
-              <a:rPr lang="en-US" sz="2799">
-                <a:solidFill>
-                  <a:srgbClr val="2D2261"/>
-                </a:solidFill>
-                <a:latin typeface="Roboto Slab"/>
-                <a:ea typeface="Roboto Slab"/>
-                <a:cs typeface="Roboto Slab"/>
-                <a:sym typeface="Roboto Slab"/>
-              </a:rPr>
-              <a:t>ARCH-LM: H₀ = không có ARCH effect; p ≈ 1,09 × 10⁻³⁸ → bác bỏ H₀.</a:t>
-            </a:r>
-          </a:p>
-          <a:p>
-            <a:pPr algn="l" marL="604518" indent="-302259" lvl="1">
-              <a:lnSpc>
-                <a:spcPts val="3919"/>
-              </a:lnSpc>
-              <a:buFont typeface="Arial"/>
-              <a:buChar char="•"/>
-            </a:pPr>
-            <a:r>
-              <a:rPr lang="en-US" sz="2799">
-                <a:solidFill>
-                  <a:srgbClr val="2D2261"/>
-                </a:solidFill>
-                <a:latin typeface="Roboto Slab"/>
-                <a:ea typeface="Roboto Slab"/>
-                <a:cs typeface="Roboto Slab"/>
-                <a:sym typeface="Roboto Slab"/>
-              </a:rPr>
-              <a:t>Quyết định: dùng 2.786 log returns để mô hình hóa variance thay đổi theo thời gian.</a:t>
-            </a:r>
-          </a:p>
-        </p:txBody>
-      </p:sp>
       <p:graphicFrame>
         <p:nvGraphicFramePr>
-          <p:cNvPr name="Table 13" id="13"/>
+          <p:cNvPr name="Table 12" id="12"/>
           <p:cNvGraphicFramePr>
             <a:graphicFrameLocks noGrp="true"/>
           </p:cNvGraphicFramePr>
@@ -4743,7 +4605,7 @@
         </p:nvGraphicFramePr>
         <p:xfrm>
           <a:off x="8672338" y="1500998"/>
-          <a:ext cx="9615662" cy="5867400"/>
+          <a:ext cx="9615662" cy="5901408"/>
         </p:xfrm>
         <a:graphic>
           <a:graphicData uri="http://schemas.openxmlformats.org/drawingml/2006/table">
@@ -4753,7 +4615,7 @@
                 <a:gridCol w="1304902"/>
                 <a:gridCol w="8310760"/>
               </a:tblGrid>
-              <a:tr h="651933">
+              <a:tr h="655712">
                 <a:tc>
                   <a:txBody>
                     <a:bodyPr anchor="t" rtlCol="false"/>
@@ -4891,7 +4753,7 @@
                   </a:tcPr>
                 </a:tc>
               </a:tr>
-              <a:tr h="651933">
+              <a:tr h="655712">
                 <a:tc>
                   <a:txBody>
                     <a:bodyPr anchor="t" rtlCol="false"/>
@@ -5029,7 +4891,7 @@
                   </a:tcPr>
                 </a:tc>
               </a:tr>
-              <a:tr h="651933">
+              <a:tr h="655712">
                 <a:tc>
                   <a:txBody>
                     <a:bodyPr anchor="t" rtlCol="false"/>
@@ -5167,7 +5029,7 @@
                   </a:tcPr>
                 </a:tc>
               </a:tr>
-              <a:tr h="651933">
+              <a:tr h="655712">
                 <a:tc>
                   <a:txBody>
                     <a:bodyPr anchor="t" rtlCol="false"/>
@@ -5305,7 +5167,7 @@
                   </a:tcPr>
                 </a:tc>
               </a:tr>
-              <a:tr h="651933">
+              <a:tr h="655712">
                 <a:tc>
                   <a:txBody>
                     <a:bodyPr anchor="t" rtlCol="false"/>
@@ -5443,7 +5305,7 @@
                   </a:tcPr>
                 </a:tc>
               </a:tr>
-              <a:tr h="651933">
+              <a:tr h="655712">
                 <a:tc>
                   <a:txBody>
                     <a:bodyPr anchor="t" rtlCol="false"/>
@@ -5581,7 +5443,7 @@
                   </a:tcPr>
                 </a:tc>
               </a:tr>
-              <a:tr h="651933">
+              <a:tr h="655712">
                 <a:tc>
                   <a:txBody>
                     <a:bodyPr anchor="t" rtlCol="false"/>
@@ -5719,7 +5581,7 @@
                   </a:tcPr>
                 </a:tc>
               </a:tr>
-              <a:tr h="651933">
+              <a:tr h="655712">
                 <a:tc>
                   <a:txBody>
                     <a:bodyPr anchor="t" rtlCol="false"/>
@@ -5857,7 +5719,7 @@
                   </a:tcPr>
                 </a:tc>
               </a:tr>
-              <a:tr h="651933">
+              <a:tr h="655712">
                 <a:tc>
                   <a:txBody>
                     <a:bodyPr anchor="t" rtlCol="false"/>
@@ -6001,13 +5863,140 @@
       </p:graphicFrame>
       <p:sp>
         <p:nvSpPr>
+          <p:cNvPr name="TextBox 13" id="13"/>
+          <p:cNvSpPr txBox="true"/>
+          <p:nvPr/>
+        </p:nvSpPr>
+        <p:spPr>
+          <a:xfrm rot="0">
+            <a:off x="618111" y="3427562"/>
+            <a:ext cx="7490701" cy="5251679"/>
+          </a:xfrm>
+          <a:prstGeom prst="rect">
+            <a:avLst/>
+          </a:prstGeom>
+        </p:spPr>
+        <p:txBody>
+          <a:bodyPr anchor="t" rtlCol="false" tIns="0" lIns="0" bIns="0" rIns="0">
+            <a:spAutoFit/>
+          </a:bodyPr>
+          <a:lstStyle/>
+          <a:p>
+            <a:pPr algn="l" marL="604518" indent="-302259" lvl="1">
+              <a:lnSpc>
+                <a:spcPts val="3483"/>
+              </a:lnSpc>
+              <a:buFont typeface="Arial"/>
+              <a:buChar char="•"/>
+            </a:pPr>
+            <a:r>
+              <a:rPr lang="en-US" sz="2799">
+                <a:solidFill>
+                  <a:srgbClr val="2D2261"/>
+                </a:solidFill>
+                <a:latin typeface="Red Hat Display"/>
+                <a:ea typeface="Red Hat Display"/>
+                <a:cs typeface="Red Hat Display"/>
+                <a:sym typeface="Red Hat Display"/>
+              </a:rPr>
+              <a:t>Return được tách thành mean và innovation. </a:t>
+            </a:r>
+          </a:p>
+          <a:p>
+            <a:pPr algn="l" marL="604518" indent="-302259" lvl="1">
+              <a:lnSpc>
+                <a:spcPts val="3483"/>
+              </a:lnSpc>
+              <a:buFont typeface="Arial"/>
+              <a:buChar char="•"/>
+            </a:pPr>
+            <a:r>
+              <a:rPr lang="en-US" sz="2799">
+                <a:solidFill>
+                  <a:srgbClr val="2D2261"/>
+                </a:solidFill>
+                <a:latin typeface="Red Hat Display"/>
+                <a:ea typeface="Red Hat Display"/>
+                <a:cs typeface="Red Hat Display"/>
+                <a:sym typeface="Red Hat Display"/>
+              </a:rPr>
+              <a:t>Innovation bằng volatility có điều kiện nhân standardized shock. </a:t>
+            </a:r>
+          </a:p>
+          <a:p>
+            <a:pPr algn="l" marL="604518" indent="-302259" lvl="1">
+              <a:lnSpc>
+                <a:spcPts val="3483"/>
+              </a:lnSpc>
+              <a:buFont typeface="Arial"/>
+              <a:buChar char="•"/>
+            </a:pPr>
+            <a:r>
+              <a:rPr lang="en-US" sz="2799">
+                <a:solidFill>
+                  <a:srgbClr val="2D2261"/>
+                </a:solidFill>
+                <a:latin typeface="Red Hat Display"/>
+                <a:ea typeface="Red Hat Display"/>
+                <a:cs typeface="Red Hat Display"/>
+                <a:sym typeface="Red Hat Display"/>
+              </a:rPr>
+              <a:t>Trong variance equation, omega là nền dài hạn, alpha đo phản ứng với tin mới qua bình phương shock hôm trước, còn beta đo trí nhớ của variance hôm trước. </a:t>
+            </a:r>
+          </a:p>
+          <a:p>
+            <a:pPr algn="l" marL="604518" indent="-302259" lvl="1">
+              <a:lnSpc>
+                <a:spcPts val="3483"/>
+              </a:lnSpc>
+              <a:buFont typeface="Arial"/>
+              <a:buChar char="•"/>
+            </a:pPr>
+            <a:r>
+              <a:rPr lang="en-US" sz="2799">
+                <a:solidFill>
+                  <a:srgbClr val="2D2261"/>
+                </a:solidFill>
+                <a:latin typeface="Red Hat Display"/>
+                <a:ea typeface="Red Hat Display"/>
+                <a:cs typeface="Red Hat Display"/>
+                <a:sym typeface="Red Hat Display"/>
+              </a:rPr>
+              <a:t>Với sGARCH, alpha cộng beta gần 1 cho thấy tác động volatility tồn tại lâu. </a:t>
+            </a:r>
+          </a:p>
+          <a:p>
+            <a:pPr algn="l" marL="604518" indent="-302259" lvl="1">
+              <a:lnSpc>
+                <a:spcPts val="3483"/>
+              </a:lnSpc>
+              <a:buFont typeface="Arial"/>
+              <a:buChar char="•"/>
+            </a:pPr>
+            <a:r>
+              <a:rPr lang="en-US" sz="2799">
+                <a:solidFill>
+                  <a:srgbClr val="2D2261"/>
+                </a:solidFill>
+                <a:latin typeface="Red Hat Display"/>
+                <a:ea typeface="Red Hat Display"/>
+                <a:cs typeface="Red Hat Display"/>
+                <a:sym typeface="Red Hat Display"/>
+              </a:rPr>
+              <a:t>Công thức cộng này không áp dụng máy móc cho eGARCH.</a:t>
+            </a:r>
+          </a:p>
+        </p:txBody>
+      </p:sp>
+      <p:sp>
+        <p:nvSpPr>
           <p:cNvPr name="TextBox 14" id="14"/>
           <p:cNvSpPr txBox="true"/>
           <p:nvPr/>
         </p:nvSpPr>
         <p:spPr>
           <a:xfrm rot="0">
-            <a:off x="8672338" y="7726125"/>
+            <a:off x="8672338" y="7392880"/>
             <a:ext cx="9615662" cy="2184629"/>
           </a:xfrm>
           <a:prstGeom prst="rect">
@@ -6020,7 +6009,7 @@
           </a:bodyPr>
           <a:lstStyle/>
           <a:p>
-            <a:pPr algn="ctr">
+            <a:pPr algn="l">
               <a:lnSpc>
                 <a:spcPts val="3483"/>
               </a:lnSpc>
@@ -6038,7 +6027,29 @@
                 <a:cs typeface="Red Hat Display"/>
                 <a:sym typeface="Red Hat Display"/>
               </a:rPr>
-              <a:t>GARCH không dự báo trực tiếp giá cổ phiếu mà ước lượng mức biến động có điều kiện của log return. Volatility hôm nay được cập nhật từ shock mới và volatility trong quá khứ; vì vậy mô hình phù hợp với hiện tượng biến động tập trung theo cụm.</a:t>
+              <a:t>GARCH không dự báo trực tiếp giá cổ phiếu mà ước lượng mức biến động có điều kiện của log return. </a:t>
+            </a:r>
+          </a:p>
+          <a:p>
+            <a:pPr algn="l">
+              <a:lnSpc>
+                <a:spcPts val="3483"/>
+              </a:lnSpc>
+              <a:spcBef>
+                <a:spcPct val="0"/>
+              </a:spcBef>
+            </a:pPr>
+            <a:r>
+              <a:rPr lang="en-US" sz="2799">
+                <a:solidFill>
+                  <a:srgbClr val="2D2261"/>
+                </a:solidFill>
+                <a:latin typeface="Red Hat Display"/>
+                <a:ea typeface="Red Hat Display"/>
+                <a:cs typeface="Red Hat Display"/>
+                <a:sym typeface="Red Hat Display"/>
+              </a:rPr>
+              <a:t>Volatility hôm nay được cập nhật từ shock mới và volatility trong quá khứ; vì vậy mô hình phù hợp với hiện tượng biến động tập trung theo cụm.</a:t>
             </a:r>
           </a:p>
         </p:txBody>
@@ -9521,7 +9532,7 @@
                 <a:cs typeface="Red Hat Display Bold"/>
                 <a:sym typeface="Red Hat Display Bold"/>
               </a:rPr>
-              <a:t>Đánh giá hiệu suất mô hình </a:t>
+              <a:t>Kết quả kiểm định</a:t>
             </a:r>
           </a:p>
         </p:txBody>
@@ -9736,30 +9747,96 @@
           </a:blipFill>
         </p:spPr>
       </p:sp>
+      <p:sp>
+        <p:nvSpPr>
+          <p:cNvPr name="TextBox 10" id="10"/>
+          <p:cNvSpPr txBox="true"/>
+          <p:nvPr/>
+        </p:nvSpPr>
+        <p:spPr>
+          <a:xfrm rot="0">
+            <a:off x="2980865" y="7345255"/>
+            <a:ext cx="12188052" cy="1967230"/>
+          </a:xfrm>
+          <a:prstGeom prst="rect">
+            <a:avLst/>
+          </a:prstGeom>
+        </p:spPr>
+        <p:txBody>
+          <a:bodyPr anchor="t" rtlCol="false" tIns="0" lIns="0" bIns="0" rIns="0">
+            <a:spAutoFit/>
+          </a:bodyPr>
+          <a:lstStyle/>
+          <a:p>
+            <a:pPr algn="l">
+              <a:lnSpc>
+                <a:spcPts val="3919"/>
+              </a:lnSpc>
+            </a:pPr>
+            <a:r>
+              <a:rPr lang="en-US" sz="2799">
+                <a:solidFill>
+                  <a:srgbClr val="000000"/>
+                </a:solidFill>
+                <a:latin typeface="Red Hat Display"/>
+                <a:ea typeface="Red Hat Display"/>
+                <a:cs typeface="Red Hat Display"/>
+                <a:sym typeface="Red Hat Display"/>
+              </a:rPr>
+              <a:t>P-value ≥ 0,05 (chưa</a:t>
+            </a:r>
+            <a:r>
+              <a:rPr lang="en-US" sz="2799">
+                <a:solidFill>
+                  <a:srgbClr val="000000"/>
+                </a:solidFill>
+                <a:latin typeface="Red Hat Display"/>
+                <a:ea typeface="Red Hat Display"/>
+                <a:cs typeface="Red Hat Display"/>
+                <a:sym typeface="Red Hat Display"/>
+              </a:rPr>
+              <a:t> bác bỏ H₀) được xem là đạt đối với 4 kiểm định đầu tiên. Riêng kiểm</a:t>
+            </a:r>
+            <a:r>
+              <a:rPr lang="en-US" sz="2799">
+                <a:solidFill>
+                  <a:srgbClr val="000000"/>
+                </a:solidFill>
+                <a:latin typeface="Red Hat Display"/>
+                <a:ea typeface="Red Hat Display"/>
+                <a:cs typeface="Red Hat Display"/>
+                <a:sym typeface="Red Hat Display"/>
+              </a:rPr>
+              <a:t> định Nyblom so sánh test statistic với critical value. Cả 4 mô hình đều giải quyết được các hiệu ứng phương sai, nhưng chỉ eGARCH là có tham số ổn định qua thời gian.</a:t>
+            </a:r>
+          </a:p>
+        </p:txBody>
+      </p:sp>
       <p:graphicFrame>
         <p:nvGraphicFramePr>
-          <p:cNvPr name="Table 10" id="10"/>
+          <p:cNvPr name="Table 11" id="11"/>
           <p:cNvGraphicFramePr>
             <a:graphicFrameLocks noGrp="true"/>
           </p:cNvGraphicFramePr>
           <p:nvPr/>
         </p:nvGraphicFramePr>
         <p:xfrm>
-          <a:off x="2986250" y="1351619"/>
-          <a:ext cx="12232473" cy="3695700"/>
+          <a:off x="3417041" y="1440434"/>
+          <a:ext cx="11315700" cy="5636079"/>
         </p:xfrm>
         <a:graphic>
           <a:graphicData uri="http://schemas.openxmlformats.org/drawingml/2006/table">
             <a:tbl>
               <a:tblPr/>
               <a:tblGrid>
-                <a:gridCol w="2446495"/>
-                <a:gridCol w="2446495"/>
-                <a:gridCol w="2446495"/>
-                <a:gridCol w="2446495"/>
-                <a:gridCol w="2446495"/>
+                <a:gridCol w="1885950"/>
+                <a:gridCol w="1885950"/>
+                <a:gridCol w="1885950"/>
+                <a:gridCol w="1885950"/>
+                <a:gridCol w="1885950"/>
+                <a:gridCol w="1885950"/>
               </a:tblGrid>
-              <a:tr h="1077912">
+              <a:tr h="629714">
                 <a:tc>
                   <a:txBody>
                     <a:bodyPr anchor="t" rtlCol="false"/>
@@ -9784,13 +9861,13 @@
                           <a:cs typeface="Red Hat Display Bold"/>
                           <a:sym typeface="Red Hat Display Bold"/>
                         </a:rPr>
-                        <a:t>Model</a:t>
+                        <a:t>Diagnostic</a:t>
                       </a:r>
                       <a:endParaRPr lang="en-US" sz="1100"/>
                     </a:p>
                   </a:txBody>
                   <a:tcPr marL="76200" marR="76200" marT="76200" marB="76200" anchor="ctr">
-                    <a:lnL cmpd="sng" algn="ctr" cap="flat" w="38100">
+                    <a:lnL cmpd="sng" algn="ctr" cap="flat" w="9525">
                       <a:solidFill>
                         <a:srgbClr val="000000"/>
                       </a:solidFill>
@@ -9799,7 +9876,7 @@
                       <a:headEnd type="none" w="med" len="med"/>
                       <a:tailEnd type="none" w="med" len="med"/>
                     </a:lnL>
-                    <a:lnR cmpd="sng" algn="ctr" cap="flat" w="38100">
+                    <a:lnR cmpd="sng" algn="ctr" cap="flat" w="9525">
                       <a:solidFill>
                         <a:srgbClr val="000000"/>
                       </a:solidFill>
@@ -9808,7 +9885,7 @@
                       <a:headEnd type="none" w="med" len="med"/>
                       <a:tailEnd type="none" w="med" len="med"/>
                     </a:lnR>
-                    <a:lnT cmpd="sng" algn="ctr" cap="flat" w="38100">
+                    <a:lnT cmpd="sng" algn="ctr" cap="flat" w="9525">
                       <a:solidFill>
                         <a:srgbClr val="000000"/>
                       </a:solidFill>
@@ -9817,7 +9894,7 @@
                       <a:headEnd type="none" w="med" len="med"/>
                       <a:tailEnd type="none" w="med" len="med"/>
                     </a:lnT>
-                    <a:lnB cmpd="sng" algn="ctr" cap="flat" w="38100">
+                    <a:lnB cmpd="sng" algn="ctr" cap="flat" w="12668">
                       <a:solidFill>
                         <a:srgbClr val="000000"/>
                       </a:solidFill>
@@ -9855,13 +9932,13 @@
                           <a:cs typeface="Red Hat Display Bold"/>
                           <a:sym typeface="Red Hat Display Bold"/>
                         </a:rPr>
-                        <a:t>AIC</a:t>
+                        <a:t>sGARCH-N</a:t>
                       </a:r>
                       <a:endParaRPr lang="en-US" sz="1100"/>
                     </a:p>
                   </a:txBody>
                   <a:tcPr marL="76200" marR="76200" marT="76200" marB="76200" anchor="ctr">
-                    <a:lnL cmpd="sng" algn="ctr" cap="flat" w="38100">
+                    <a:lnL cmpd="sng" algn="ctr" cap="flat" w="9525">
                       <a:solidFill>
                         <a:srgbClr val="000000"/>
                       </a:solidFill>
@@ -9870,7 +9947,7 @@
                       <a:headEnd type="none" w="med" len="med"/>
                       <a:tailEnd type="none" w="med" len="med"/>
                     </a:lnL>
-                    <a:lnR cmpd="sng" algn="ctr" cap="flat" w="38100">
+                    <a:lnR cmpd="sng" algn="ctr" cap="flat" w="9525">
                       <a:solidFill>
                         <a:srgbClr val="000000"/>
                       </a:solidFill>
@@ -9879,7 +9956,7 @@
                       <a:headEnd type="none" w="med" len="med"/>
                       <a:tailEnd type="none" w="med" len="med"/>
                     </a:lnR>
-                    <a:lnT cmpd="sng" algn="ctr" cap="flat" w="38100">
+                    <a:lnT cmpd="sng" algn="ctr" cap="flat" w="9525">
                       <a:solidFill>
                         <a:srgbClr val="000000"/>
                       </a:solidFill>
@@ -9888,7 +9965,7 @@
                       <a:headEnd type="none" w="med" len="med"/>
                       <a:tailEnd type="none" w="med" len="med"/>
                     </a:lnT>
-                    <a:lnB cmpd="sng" algn="ctr" cap="flat" w="38100">
+                    <a:lnB cmpd="sng" algn="ctr" cap="flat" w="12668">
                       <a:solidFill>
                         <a:srgbClr val="000000"/>
                       </a:solidFill>
@@ -9926,13 +10003,13 @@
                           <a:cs typeface="Red Hat Display Bold"/>
                           <a:sym typeface="Red Hat Display Bold"/>
                         </a:rPr>
-                        <a:t>Persistence</a:t>
+                        <a:t>sGARCH-t</a:t>
                       </a:r>
                       <a:endParaRPr lang="en-US" sz="1100"/>
                     </a:p>
                   </a:txBody>
                   <a:tcPr marL="76200" marR="76200" marT="76200" marB="76200" anchor="ctr">
-                    <a:lnL cmpd="sng" algn="ctr" cap="flat" w="38100">
+                    <a:lnL cmpd="sng" algn="ctr" cap="flat" w="9525">
                       <a:solidFill>
                         <a:srgbClr val="000000"/>
                       </a:solidFill>
@@ -9941,7 +10018,7 @@
                       <a:headEnd type="none" w="med" len="med"/>
                       <a:tailEnd type="none" w="med" len="med"/>
                     </a:lnL>
-                    <a:lnR cmpd="sng" algn="ctr" cap="flat" w="38100">
+                    <a:lnR cmpd="sng" algn="ctr" cap="flat" w="9525">
                       <a:solidFill>
                         <a:srgbClr val="000000"/>
                       </a:solidFill>
@@ -9950,7 +10027,7 @@
                       <a:headEnd type="none" w="med" len="med"/>
                       <a:tailEnd type="none" w="med" len="med"/>
                     </a:lnR>
-                    <a:lnT cmpd="sng" algn="ctr" cap="flat" w="38100">
+                    <a:lnT cmpd="sng" algn="ctr" cap="flat" w="9525">
                       <a:solidFill>
                         <a:srgbClr val="000000"/>
                       </a:solidFill>
@@ -9959,7 +10036,7 @@
                       <a:headEnd type="none" w="med" len="med"/>
                       <a:tailEnd type="none" w="med" len="med"/>
                     </a:lnT>
-                    <a:lnB cmpd="sng" algn="ctr" cap="flat" w="38100">
+                    <a:lnB cmpd="sng" algn="ctr" cap="flat" w="12668">
                       <a:solidFill>
                         <a:srgbClr val="000000"/>
                       </a:solidFill>
@@ -9997,13 +10074,13 @@
                           <a:cs typeface="Red Hat Display Bold"/>
                           <a:sym typeface="Red Hat Display Bold"/>
                         </a:rPr>
-                        <a:t>Core diag.</a:t>
+                        <a:t>eGARCH-t</a:t>
                       </a:r>
                       <a:endParaRPr lang="en-US" sz="1100"/>
                     </a:p>
                   </a:txBody>
                   <a:tcPr marL="76200" marR="76200" marT="76200" marB="76200" anchor="ctr">
-                    <a:lnL cmpd="sng" algn="ctr" cap="flat" w="38100">
+                    <a:lnL cmpd="sng" algn="ctr" cap="flat" w="9525">
                       <a:solidFill>
                         <a:srgbClr val="000000"/>
                       </a:solidFill>
@@ -10012,7 +10089,7 @@
                       <a:headEnd type="none" w="med" len="med"/>
                       <a:tailEnd type="none" w="med" len="med"/>
                     </a:lnL>
-                    <a:lnR cmpd="sng" algn="ctr" cap="flat" w="38100">
+                    <a:lnR cmpd="sng" algn="ctr" cap="flat" w="9525">
                       <a:solidFill>
                         <a:srgbClr val="000000"/>
                       </a:solidFill>
@@ -10021,7 +10098,7 @@
                       <a:headEnd type="none" w="med" len="med"/>
                       <a:tailEnd type="none" w="med" len="med"/>
                     </a:lnR>
-                    <a:lnT cmpd="sng" algn="ctr" cap="flat" w="38100">
+                    <a:lnT cmpd="sng" algn="ctr" cap="flat" w="9525">
                       <a:solidFill>
                         <a:srgbClr val="000000"/>
                       </a:solidFill>
@@ -10030,7 +10107,7 @@
                       <a:headEnd type="none" w="med" len="med"/>
                       <a:tailEnd type="none" w="med" len="med"/>
                     </a:lnT>
-                    <a:lnB cmpd="sng" algn="ctr" cap="flat" w="38100">
+                    <a:lnB cmpd="sng" algn="ctr" cap="flat" w="12668">
                       <a:solidFill>
                         <a:srgbClr val="000000"/>
                       </a:solidFill>
@@ -10068,13 +10145,13 @@
                           <a:cs typeface="Red Hat Display Bold"/>
                           <a:sym typeface="Red Hat Display Bold"/>
                         </a:rPr>
-                        <a:t>Nyblom stable?</a:t>
+                        <a:t>GJR-t</a:t>
                       </a:r>
                       <a:endParaRPr lang="en-US" sz="1100"/>
                     </a:p>
                   </a:txBody>
                   <a:tcPr marL="76200" marR="76200" marT="76200" marB="76200" anchor="ctr">
-                    <a:lnL cmpd="sng" algn="ctr" cap="flat" w="38100">
+                    <a:lnL cmpd="sng" algn="ctr" cap="flat" w="9525">
                       <a:solidFill>
                         <a:srgbClr val="000000"/>
                       </a:solidFill>
@@ -10083,7 +10160,7 @@
                       <a:headEnd type="none" w="med" len="med"/>
                       <a:tailEnd type="none" w="med" len="med"/>
                     </a:lnL>
-                    <a:lnR cmpd="sng" algn="ctr" cap="flat" w="38100">
+                    <a:lnR cmpd="sng" algn="ctr" cap="flat" w="9525">
                       <a:solidFill>
                         <a:srgbClr val="000000"/>
                       </a:solidFill>
@@ -10092,7 +10169,7 @@
                       <a:headEnd type="none" w="med" len="med"/>
                       <a:tailEnd type="none" w="med" len="med"/>
                     </a:lnR>
-                    <a:lnT cmpd="sng" algn="ctr" cap="flat" w="38100">
+                    <a:lnT cmpd="sng" algn="ctr" cap="flat" w="9525">
                       <a:solidFill>
                         <a:srgbClr val="000000"/>
                       </a:solidFill>
@@ -10101,7 +10178,78 @@
                       <a:headEnd type="none" w="med" len="med"/>
                       <a:tailEnd type="none" w="med" len="med"/>
                     </a:lnT>
-                    <a:lnB cmpd="sng" algn="ctr" cap="flat" w="38100">
+                    <a:lnB cmpd="sng" algn="ctr" cap="flat" w="12668">
+                      <a:solidFill>
+                        <a:srgbClr val="000000"/>
+                      </a:solidFill>
+                      <a:prstDash val="solid"/>
+                      <a:round/>
+                      <a:headEnd type="none" w="med" len="med"/>
+                      <a:tailEnd type="none" w="med" len="med"/>
+                    </a:lnB>
+                    <a:solidFill>
+                      <a:srgbClr val="FFFFFF"/>
+                    </a:solidFill>
+                  </a:tcPr>
+                </a:tc>
+                <a:tc>
+                  <a:txBody>
+                    <a:bodyPr anchor="t" rtlCol="false"/>
+                    <a:lstStyle/>
+                    <a:p>
+                      <a:pPr algn="ctr" marL="0" indent="0" lvl="0">
+                        <a:lnSpc>
+                          <a:spcPts val="3360"/>
+                        </a:lnSpc>
+                        <a:spcBef>
+                          <a:spcPct val="0"/>
+                        </a:spcBef>
+                        <a:defRPr/>
+                      </a:pPr>
+                      <a:r>
+                        <a:rPr lang="en-US" b="true" sz="2400" strike="noStrike" u="none">
+                          <a:solidFill>
+                            <a:srgbClr val="000000"/>
+                          </a:solidFill>
+                          <a:latin typeface="Red Hat Display Bold"/>
+                          <a:ea typeface="Red Hat Display Bold"/>
+                          <a:cs typeface="Red Hat Display Bold"/>
+                          <a:sym typeface="Red Hat Display Bold"/>
+                        </a:rPr>
+                        <a:t>Kết quả</a:t>
+                      </a:r>
+                      <a:endParaRPr lang="en-US" sz="1100"/>
+                    </a:p>
+                  </a:txBody>
+                  <a:tcPr marL="76200" marR="76200" marT="76200" marB="76200" anchor="ctr">
+                    <a:lnL cmpd="sng" algn="ctr" cap="flat" w="9525">
+                      <a:solidFill>
+                        <a:srgbClr val="000000"/>
+                      </a:solidFill>
+                      <a:prstDash val="solid"/>
+                      <a:round/>
+                      <a:headEnd type="none" w="med" len="med"/>
+                      <a:tailEnd type="none" w="med" len="med"/>
+                    </a:lnL>
+                    <a:lnR cmpd="sng" algn="ctr" cap="flat" w="9525">
+                      <a:solidFill>
+                        <a:srgbClr val="000000"/>
+                      </a:solidFill>
+                      <a:prstDash val="solid"/>
+                      <a:round/>
+                      <a:headEnd type="none" w="med" len="med"/>
+                      <a:tailEnd type="none" w="med" len="med"/>
+                    </a:lnR>
+                    <a:lnT cmpd="sng" algn="ctr" cap="flat" w="9525">
+                      <a:solidFill>
+                        <a:srgbClr val="000000"/>
+                      </a:solidFill>
+                      <a:prstDash val="solid"/>
+                      <a:round/>
+                      <a:headEnd type="none" w="med" len="med"/>
+                      <a:tailEnd type="none" w="med" len="med"/>
+                    </a:lnT>
+                    <a:lnB cmpd="sng" algn="ctr" cap="flat" w="12668">
                       <a:solidFill>
                         <a:srgbClr val="000000"/>
                       </a:solidFill>
@@ -10116,7 +10264,7 @@
                   </a:tcPr>
                 </a:tc>
               </a:tr>
-              <a:tr h="654447">
+              <a:tr h="629714">
                 <a:tc>
                   <a:txBody>
                     <a:bodyPr anchor="t" rtlCol="false"/>
@@ -10141,31 +10289,31 @@
                           <a:cs typeface="Red Hat Display"/>
                           <a:sym typeface="Red Hat Display"/>
                         </a:rPr>
-                        <a:t>GJR-GARCH-t</a:t>
+                        <a:t>LB residual</a:t>
                       </a:r>
                       <a:endParaRPr lang="en-US" sz="1100"/>
                     </a:p>
                   </a:txBody>
                   <a:tcPr marL="76200" marR="76200" marT="76200" marB="76200" anchor="ctr">
-                    <a:lnL cmpd="sng" algn="ctr" cap="flat" w="38100">
-                      <a:solidFill>
-                        <a:srgbClr val="000000"/>
+                    <a:lnL cmpd="sng" algn="ctr" cap="flat" w="9525">
+                      <a:solidFill>
+                        <a:srgbClr val="D9D9D9"/>
                       </a:solidFill>
                       <a:prstDash val="solid"/>
                       <a:round/>
                       <a:headEnd type="none" w="med" len="med"/>
                       <a:tailEnd type="none" w="med" len="med"/>
                     </a:lnL>
-                    <a:lnR cmpd="sng" algn="ctr" cap="flat" w="38100">
-                      <a:solidFill>
-                        <a:srgbClr val="000000"/>
+                    <a:lnR cmpd="sng" algn="ctr" cap="flat" w="9525">
+                      <a:solidFill>
+                        <a:srgbClr val="D9D9D9"/>
                       </a:solidFill>
                       <a:prstDash val="solid"/>
                       <a:round/>
                       <a:headEnd type="none" w="med" len="med"/>
                       <a:tailEnd type="none" w="med" len="med"/>
                     </a:lnR>
-                    <a:lnT cmpd="sng" algn="ctr" cap="flat" w="38100">
+                    <a:lnT cmpd="sng" algn="ctr" cap="flat" w="12668">
                       <a:solidFill>
                         <a:srgbClr val="000000"/>
                       </a:solidFill>
@@ -10174,9 +10322,9 @@
                       <a:headEnd type="none" w="med" len="med"/>
                       <a:tailEnd type="none" w="med" len="med"/>
                     </a:lnT>
-                    <a:lnB cmpd="sng" algn="ctr" cap="flat" w="38100">
-                      <a:solidFill>
-                        <a:srgbClr val="000000"/>
+                    <a:lnB cmpd="sng" algn="ctr" cap="flat" w="9525">
+                      <a:solidFill>
+                        <a:srgbClr val="D9D9D9"/>
                       </a:solidFill>
                       <a:prstDash val="solid"/>
                       <a:round/>
@@ -10212,31 +10360,31 @@
                           <a:cs typeface="Red Hat Display"/>
                           <a:sym typeface="Red Hat Display"/>
                         </a:rPr>
-                        <a:t>−5,6344</a:t>
+                        <a:t>0,817</a:t>
                       </a:r>
                       <a:endParaRPr lang="en-US" sz="1100"/>
                     </a:p>
                   </a:txBody>
                   <a:tcPr marL="76200" marR="76200" marT="76200" marB="76200" anchor="ctr">
-                    <a:lnL cmpd="sng" algn="ctr" cap="flat" w="38100">
-                      <a:solidFill>
-                        <a:srgbClr val="000000"/>
+                    <a:lnL cmpd="sng" algn="ctr" cap="flat" w="9525">
+                      <a:solidFill>
+                        <a:srgbClr val="D9D9D9"/>
                       </a:solidFill>
                       <a:prstDash val="solid"/>
                       <a:round/>
                       <a:headEnd type="none" w="med" len="med"/>
                       <a:tailEnd type="none" w="med" len="med"/>
                     </a:lnL>
-                    <a:lnR cmpd="sng" algn="ctr" cap="flat" w="38100">
-                      <a:solidFill>
-                        <a:srgbClr val="000000"/>
+                    <a:lnR cmpd="sng" algn="ctr" cap="flat" w="9525">
+                      <a:solidFill>
+                        <a:srgbClr val="D9D9D9"/>
                       </a:solidFill>
                       <a:prstDash val="solid"/>
                       <a:round/>
                       <a:headEnd type="none" w="med" len="med"/>
                       <a:tailEnd type="none" w="med" len="med"/>
                     </a:lnR>
-                    <a:lnT cmpd="sng" algn="ctr" cap="flat" w="38100">
+                    <a:lnT cmpd="sng" algn="ctr" cap="flat" w="12668">
                       <a:solidFill>
                         <a:srgbClr val="000000"/>
                       </a:solidFill>
@@ -10245,9 +10393,9 @@
                       <a:headEnd type="none" w="med" len="med"/>
                       <a:tailEnd type="none" w="med" len="med"/>
                     </a:lnT>
-                    <a:lnB cmpd="sng" algn="ctr" cap="flat" w="38100">
-                      <a:solidFill>
-                        <a:srgbClr val="000000"/>
+                    <a:lnB cmpd="sng" algn="ctr" cap="flat" w="9525">
+                      <a:solidFill>
+                        <a:srgbClr val="D9D9D9"/>
                       </a:solidFill>
                       <a:prstDash val="solid"/>
                       <a:round/>
@@ -10283,31 +10431,31 @@
                           <a:cs typeface="Red Hat Display"/>
                           <a:sym typeface="Red Hat Display"/>
                         </a:rPr>
-                        <a:t>0,9857</a:t>
+                        <a:t>0,859</a:t>
                       </a:r>
                       <a:endParaRPr lang="en-US" sz="1100"/>
                     </a:p>
                   </a:txBody>
                   <a:tcPr marL="76200" marR="76200" marT="76200" marB="76200" anchor="ctr">
-                    <a:lnL cmpd="sng" algn="ctr" cap="flat" w="38100">
-                      <a:solidFill>
-                        <a:srgbClr val="000000"/>
+                    <a:lnL cmpd="sng" algn="ctr" cap="flat" w="9525">
+                      <a:solidFill>
+                        <a:srgbClr val="D9D9D9"/>
                       </a:solidFill>
                       <a:prstDash val="solid"/>
                       <a:round/>
                       <a:headEnd type="none" w="med" len="med"/>
                       <a:tailEnd type="none" w="med" len="med"/>
                     </a:lnL>
-                    <a:lnR cmpd="sng" algn="ctr" cap="flat" w="38100">
-                      <a:solidFill>
-                        <a:srgbClr val="000000"/>
+                    <a:lnR cmpd="sng" algn="ctr" cap="flat" w="9525">
+                      <a:solidFill>
+                        <a:srgbClr val="D9D9D9"/>
                       </a:solidFill>
                       <a:prstDash val="solid"/>
                       <a:round/>
                       <a:headEnd type="none" w="med" len="med"/>
                       <a:tailEnd type="none" w="med" len="med"/>
                     </a:lnR>
-                    <a:lnT cmpd="sng" algn="ctr" cap="flat" w="38100">
+                    <a:lnT cmpd="sng" algn="ctr" cap="flat" w="12668">
                       <a:solidFill>
                         <a:srgbClr val="000000"/>
                       </a:solidFill>
@@ -10316,9 +10464,9 @@
                       <a:headEnd type="none" w="med" len="med"/>
                       <a:tailEnd type="none" w="med" len="med"/>
                     </a:lnT>
-                    <a:lnB cmpd="sng" algn="ctr" cap="flat" w="38100">
-                      <a:solidFill>
-                        <a:srgbClr val="000000"/>
+                    <a:lnB cmpd="sng" algn="ctr" cap="flat" w="9525">
+                      <a:solidFill>
+                        <a:srgbClr val="D9D9D9"/>
                       </a:solidFill>
                       <a:prstDash val="solid"/>
                       <a:round/>
@@ -10354,31 +10502,31 @@
                           <a:cs typeface="Red Hat Display"/>
                           <a:sym typeface="Red Hat Display"/>
                         </a:rPr>
-                        <a:t>Đạt</a:t>
+                        <a:t>0,877</a:t>
                       </a:r>
                       <a:endParaRPr lang="en-US" sz="1100"/>
                     </a:p>
                   </a:txBody>
                   <a:tcPr marL="76200" marR="76200" marT="76200" marB="76200" anchor="ctr">
-                    <a:lnL cmpd="sng" algn="ctr" cap="flat" w="38100">
-                      <a:solidFill>
-                        <a:srgbClr val="000000"/>
+                    <a:lnL cmpd="sng" algn="ctr" cap="flat" w="9525">
+                      <a:solidFill>
+                        <a:srgbClr val="D9D9D9"/>
                       </a:solidFill>
                       <a:prstDash val="solid"/>
                       <a:round/>
                       <a:headEnd type="none" w="med" len="med"/>
                       <a:tailEnd type="none" w="med" len="med"/>
                     </a:lnL>
-                    <a:lnR cmpd="sng" algn="ctr" cap="flat" w="38100">
-                      <a:solidFill>
-                        <a:srgbClr val="000000"/>
+                    <a:lnR cmpd="sng" algn="ctr" cap="flat" w="9525">
+                      <a:solidFill>
+                        <a:srgbClr val="D9D9D9"/>
                       </a:solidFill>
                       <a:prstDash val="solid"/>
                       <a:round/>
                       <a:headEnd type="none" w="med" len="med"/>
                       <a:tailEnd type="none" w="med" len="med"/>
                     </a:lnR>
-                    <a:lnT cmpd="sng" algn="ctr" cap="flat" w="38100">
+                    <a:lnT cmpd="sng" algn="ctr" cap="flat" w="12668">
                       <a:solidFill>
                         <a:srgbClr val="000000"/>
                       </a:solidFill>
@@ -10387,9 +10535,9 @@
                       <a:headEnd type="none" w="med" len="med"/>
                       <a:tailEnd type="none" w="med" len="med"/>
                     </a:lnT>
-                    <a:lnB cmpd="sng" algn="ctr" cap="flat" w="38100">
-                      <a:solidFill>
-                        <a:srgbClr val="000000"/>
+                    <a:lnB cmpd="sng" algn="ctr" cap="flat" w="9525">
+                      <a:solidFill>
+                        <a:srgbClr val="D9D9D9"/>
                       </a:solidFill>
                       <a:prstDash val="solid"/>
                       <a:round/>
@@ -10425,31 +10573,31 @@
                           <a:cs typeface="Red Hat Display"/>
                           <a:sym typeface="Red Hat Display"/>
                         </a:rPr>
-                        <a:t>❌ Không</a:t>
+                        <a:t>0,868</a:t>
                       </a:r>
                       <a:endParaRPr lang="en-US" sz="1100"/>
                     </a:p>
                   </a:txBody>
                   <a:tcPr marL="76200" marR="76200" marT="76200" marB="76200" anchor="ctr">
-                    <a:lnL cmpd="sng" algn="ctr" cap="flat" w="38100">
-                      <a:solidFill>
-                        <a:srgbClr val="000000"/>
+                    <a:lnL cmpd="sng" algn="ctr" cap="flat" w="9525">
+                      <a:solidFill>
+                        <a:srgbClr val="D9D9D9"/>
                       </a:solidFill>
                       <a:prstDash val="solid"/>
                       <a:round/>
                       <a:headEnd type="none" w="med" len="med"/>
                       <a:tailEnd type="none" w="med" len="med"/>
                     </a:lnL>
-                    <a:lnR cmpd="sng" algn="ctr" cap="flat" w="38100">
-                      <a:solidFill>
-                        <a:srgbClr val="000000"/>
+                    <a:lnR cmpd="sng" algn="ctr" cap="flat" w="9525">
+                      <a:solidFill>
+                        <a:srgbClr val="D9D9D9"/>
                       </a:solidFill>
                       <a:prstDash val="solid"/>
                       <a:round/>
                       <a:headEnd type="none" w="med" len="med"/>
                       <a:tailEnd type="none" w="med" len="med"/>
                     </a:lnR>
-                    <a:lnT cmpd="sng" algn="ctr" cap="flat" w="38100">
+                    <a:lnT cmpd="sng" algn="ctr" cap="flat" w="12668">
                       <a:solidFill>
                         <a:srgbClr val="000000"/>
                       </a:solidFill>
@@ -10458,82 +10606,9 @@
                       <a:headEnd type="none" w="med" len="med"/>
                       <a:tailEnd type="none" w="med" len="med"/>
                     </a:lnT>
-                    <a:lnB cmpd="sng" algn="ctr" cap="flat" w="38100">
-                      <a:solidFill>
-                        <a:srgbClr val="000000"/>
-                      </a:solidFill>
-                      <a:prstDash val="solid"/>
-                      <a:round/>
-                      <a:headEnd type="none" w="med" len="med"/>
-                      <a:tailEnd type="none" w="med" len="med"/>
-                    </a:lnB>
-                    <a:solidFill>
-                      <a:srgbClr val="FFFFFF"/>
-                    </a:solidFill>
-                  </a:tcPr>
-                </a:tc>
-              </a:tr>
-              <a:tr h="654447">
-                <a:tc>
-                  <a:txBody>
-                    <a:bodyPr anchor="t" rtlCol="false"/>
-                    <a:lstStyle/>
-                    <a:p>
-                      <a:pPr algn="ctr" marL="0" indent="0" lvl="0">
-                        <a:lnSpc>
-                          <a:spcPts val="3360"/>
-                        </a:lnSpc>
-                        <a:spcBef>
-                          <a:spcPct val="0"/>
-                        </a:spcBef>
-                        <a:defRPr/>
-                      </a:pPr>
-                      <a:r>
-                        <a:rPr lang="en-US" sz="2400" strike="noStrike" u="none">
-                          <a:solidFill>
-                            <a:srgbClr val="000000"/>
-                          </a:solidFill>
-                          <a:latin typeface="Red Hat Display"/>
-                          <a:ea typeface="Red Hat Display"/>
-                          <a:cs typeface="Red Hat Display"/>
-                          <a:sym typeface="Red Hat Display"/>
-                        </a:rPr>
-                        <a:t>eGARCH-t</a:t>
-                      </a:r>
-                      <a:endParaRPr lang="en-US" sz="1100"/>
-                    </a:p>
-                  </a:txBody>
-                  <a:tcPr marL="76200" marR="76200" marT="76200" marB="76200" anchor="ctr">
-                    <a:lnL cmpd="sng" algn="ctr" cap="flat" w="38100">
-                      <a:solidFill>
-                        <a:srgbClr val="000000"/>
-                      </a:solidFill>
-                      <a:prstDash val="solid"/>
-                      <a:round/>
-                      <a:headEnd type="none" w="med" len="med"/>
-                      <a:tailEnd type="none" w="med" len="med"/>
-                    </a:lnL>
-                    <a:lnR cmpd="sng" algn="ctr" cap="flat" w="38100">
-                      <a:solidFill>
-                        <a:srgbClr val="000000"/>
-                      </a:solidFill>
-                      <a:prstDash val="solid"/>
-                      <a:round/>
-                      <a:headEnd type="none" w="med" len="med"/>
-                      <a:tailEnd type="none" w="med" len="med"/>
-                    </a:lnR>
-                    <a:lnT cmpd="sng" algn="ctr" cap="flat" w="38100">
-                      <a:solidFill>
-                        <a:srgbClr val="000000"/>
-                      </a:solidFill>
-                      <a:prstDash val="solid"/>
-                      <a:round/>
-                      <a:headEnd type="none" w="med" len="med"/>
-                      <a:tailEnd type="none" w="med" len="med"/>
-                    </a:lnT>
-                    <a:lnB cmpd="sng" algn="ctr" cap="flat" w="38100">
-                      <a:solidFill>
-                        <a:srgbClr val="000000"/>
+                    <a:lnB cmpd="sng" algn="ctr" cap="flat" w="9525">
+                      <a:solidFill>
+                        <a:srgbClr val="D9D9D9"/>
                       </a:solidFill>
                       <a:prstDash val="solid"/>
                       <a:round/>
@@ -10569,31 +10644,31 @@
                           <a:cs typeface="Red Hat Display"/>
                           <a:sym typeface="Red Hat Display"/>
                         </a:rPr>
-                        <a:t>−5,6331</a:t>
+                        <a:t>✅ Cả 4</a:t>
                       </a:r>
                       <a:endParaRPr lang="en-US" sz="1100"/>
                     </a:p>
                   </a:txBody>
                   <a:tcPr marL="76200" marR="76200" marT="76200" marB="76200" anchor="ctr">
-                    <a:lnL cmpd="sng" algn="ctr" cap="flat" w="38100">
-                      <a:solidFill>
-                        <a:srgbClr val="000000"/>
+                    <a:lnL cmpd="sng" algn="ctr" cap="flat" w="9525">
+                      <a:solidFill>
+                        <a:srgbClr val="D9D9D9"/>
                       </a:solidFill>
                       <a:prstDash val="solid"/>
                       <a:round/>
                       <a:headEnd type="none" w="med" len="med"/>
                       <a:tailEnd type="none" w="med" len="med"/>
                     </a:lnL>
-                    <a:lnR cmpd="sng" algn="ctr" cap="flat" w="38100">
-                      <a:solidFill>
-                        <a:srgbClr val="000000"/>
+                    <a:lnR cmpd="sng" algn="ctr" cap="flat" w="9525">
+                      <a:solidFill>
+                        <a:srgbClr val="D9D9D9"/>
                       </a:solidFill>
                       <a:prstDash val="solid"/>
                       <a:round/>
                       <a:headEnd type="none" w="med" len="med"/>
                       <a:tailEnd type="none" w="med" len="med"/>
                     </a:lnR>
-                    <a:lnT cmpd="sng" algn="ctr" cap="flat" w="38100">
+                    <a:lnT cmpd="sng" algn="ctr" cap="flat" w="12668">
                       <a:solidFill>
                         <a:srgbClr val="000000"/>
                       </a:solidFill>
@@ -10602,9 +10677,82 @@
                       <a:headEnd type="none" w="med" len="med"/>
                       <a:tailEnd type="none" w="med" len="med"/>
                     </a:lnT>
-                    <a:lnB cmpd="sng" algn="ctr" cap="flat" w="38100">
-                      <a:solidFill>
-                        <a:srgbClr val="000000"/>
+                    <a:lnB cmpd="sng" algn="ctr" cap="flat" w="9525">
+                      <a:solidFill>
+                        <a:srgbClr val="D9D9D9"/>
+                      </a:solidFill>
+                      <a:prstDash val="solid"/>
+                      <a:round/>
+                      <a:headEnd type="none" w="med" len="med"/>
+                      <a:tailEnd type="none" w="med" len="med"/>
+                    </a:lnB>
+                    <a:solidFill>
+                      <a:srgbClr val="FFFFFF"/>
+                    </a:solidFill>
+                  </a:tcPr>
+                </a:tc>
+              </a:tr>
+              <a:tr h="628351">
+                <a:tc>
+                  <a:txBody>
+                    <a:bodyPr anchor="t" rtlCol="false"/>
+                    <a:lstStyle/>
+                    <a:p>
+                      <a:pPr algn="ctr" marL="0" indent="0" lvl="0">
+                        <a:lnSpc>
+                          <a:spcPts val="3360"/>
+                        </a:lnSpc>
+                        <a:spcBef>
+                          <a:spcPct val="0"/>
+                        </a:spcBef>
+                        <a:defRPr/>
+                      </a:pPr>
+                      <a:r>
+                        <a:rPr lang="en-US" sz="2400" strike="noStrike" u="none">
+                          <a:solidFill>
+                            <a:srgbClr val="000000"/>
+                          </a:solidFill>
+                          <a:latin typeface="Red Hat Display"/>
+                          <a:ea typeface="Red Hat Display"/>
+                          <a:cs typeface="Red Hat Display"/>
+                          <a:sym typeface="Red Hat Display"/>
+                        </a:rPr>
+                        <a:t>LB squared</a:t>
+                      </a:r>
+                      <a:endParaRPr lang="en-US" sz="1100"/>
+                    </a:p>
+                  </a:txBody>
+                  <a:tcPr marL="76200" marR="76200" marT="76200" marB="76200" anchor="ctr">
+                    <a:lnL cmpd="sng" algn="ctr" cap="flat" w="9525">
+                      <a:solidFill>
+                        <a:srgbClr val="D9D9D9"/>
+                      </a:solidFill>
+                      <a:prstDash val="solid"/>
+                      <a:round/>
+                      <a:headEnd type="none" w="med" len="med"/>
+                      <a:tailEnd type="none" w="med" len="med"/>
+                    </a:lnL>
+                    <a:lnR cmpd="sng" algn="ctr" cap="flat" w="9525">
+                      <a:solidFill>
+                        <a:srgbClr val="D9D9D9"/>
+                      </a:solidFill>
+                      <a:prstDash val="solid"/>
+                      <a:round/>
+                      <a:headEnd type="none" w="med" len="med"/>
+                      <a:tailEnd type="none" w="med" len="med"/>
+                    </a:lnR>
+                    <a:lnT cmpd="sng" algn="ctr" cap="flat" w="9525">
+                      <a:solidFill>
+                        <a:srgbClr val="D9D9D9"/>
+                      </a:solidFill>
+                      <a:prstDash val="solid"/>
+                      <a:round/>
+                      <a:headEnd type="none" w="med" len="med"/>
+                      <a:tailEnd type="none" w="med" len="med"/>
+                    </a:lnT>
+                    <a:lnB cmpd="sng" algn="ctr" cap="flat" w="9525">
+                      <a:solidFill>
+                        <a:srgbClr val="D9D9D9"/>
                       </a:solidFill>
                       <a:prstDash val="solid"/>
                       <a:round/>
@@ -10640,42 +10788,42 @@
                           <a:cs typeface="Red Hat Display"/>
                           <a:sym typeface="Red Hat Display"/>
                         </a:rPr>
-                        <a:t>0,9627</a:t>
+                        <a:t>0,881</a:t>
                       </a:r>
                       <a:endParaRPr lang="en-US" sz="1100"/>
                     </a:p>
                   </a:txBody>
                   <a:tcPr marL="76200" marR="76200" marT="76200" marB="76200" anchor="ctr">
-                    <a:lnL cmpd="sng" algn="ctr" cap="flat" w="38100">
-                      <a:solidFill>
-                        <a:srgbClr val="000000"/>
+                    <a:lnL cmpd="sng" algn="ctr" cap="flat" w="9525">
+                      <a:solidFill>
+                        <a:srgbClr val="D9D9D9"/>
                       </a:solidFill>
                       <a:prstDash val="solid"/>
                       <a:round/>
                       <a:headEnd type="none" w="med" len="med"/>
                       <a:tailEnd type="none" w="med" len="med"/>
                     </a:lnL>
-                    <a:lnR cmpd="sng" algn="ctr" cap="flat" w="38100">
-                      <a:solidFill>
-                        <a:srgbClr val="000000"/>
+                    <a:lnR cmpd="sng" algn="ctr" cap="flat" w="9525">
+                      <a:solidFill>
+                        <a:srgbClr val="D9D9D9"/>
                       </a:solidFill>
                       <a:prstDash val="solid"/>
                       <a:round/>
                       <a:headEnd type="none" w="med" len="med"/>
                       <a:tailEnd type="none" w="med" len="med"/>
                     </a:lnR>
-                    <a:lnT cmpd="sng" algn="ctr" cap="flat" w="38100">
-                      <a:solidFill>
-                        <a:srgbClr val="000000"/>
+                    <a:lnT cmpd="sng" algn="ctr" cap="flat" w="9525">
+                      <a:solidFill>
+                        <a:srgbClr val="D9D9D9"/>
                       </a:solidFill>
                       <a:prstDash val="solid"/>
                       <a:round/>
                       <a:headEnd type="none" w="med" len="med"/>
                       <a:tailEnd type="none" w="med" len="med"/>
                     </a:lnT>
-                    <a:lnB cmpd="sng" algn="ctr" cap="flat" w="38100">
-                      <a:solidFill>
-                        <a:srgbClr val="000000"/>
+                    <a:lnB cmpd="sng" algn="ctr" cap="flat" w="9525">
+                      <a:solidFill>
+                        <a:srgbClr val="D9D9D9"/>
                       </a:solidFill>
                       <a:prstDash val="solid"/>
                       <a:round/>
@@ -10711,42 +10859,42 @@
                           <a:cs typeface="Red Hat Display"/>
                           <a:sym typeface="Red Hat Display"/>
                         </a:rPr>
-                        <a:t>Đạt</a:t>
+                        <a:t>0,783</a:t>
                       </a:r>
                       <a:endParaRPr lang="en-US" sz="1100"/>
                     </a:p>
                   </a:txBody>
                   <a:tcPr marL="76200" marR="76200" marT="76200" marB="76200" anchor="ctr">
-                    <a:lnL cmpd="sng" algn="ctr" cap="flat" w="38100">
-                      <a:solidFill>
-                        <a:srgbClr val="000000"/>
+                    <a:lnL cmpd="sng" algn="ctr" cap="flat" w="9525">
+                      <a:solidFill>
+                        <a:srgbClr val="D9D9D9"/>
                       </a:solidFill>
                       <a:prstDash val="solid"/>
                       <a:round/>
                       <a:headEnd type="none" w="med" len="med"/>
                       <a:tailEnd type="none" w="med" len="med"/>
                     </a:lnL>
-                    <a:lnR cmpd="sng" algn="ctr" cap="flat" w="38100">
-                      <a:solidFill>
-                        <a:srgbClr val="000000"/>
+                    <a:lnR cmpd="sng" algn="ctr" cap="flat" w="9525">
+                      <a:solidFill>
+                        <a:srgbClr val="D9D9D9"/>
                       </a:solidFill>
                       <a:prstDash val="solid"/>
                       <a:round/>
                       <a:headEnd type="none" w="med" len="med"/>
                       <a:tailEnd type="none" w="med" len="med"/>
                     </a:lnR>
-                    <a:lnT cmpd="sng" algn="ctr" cap="flat" w="38100">
-                      <a:solidFill>
-                        <a:srgbClr val="000000"/>
+                    <a:lnT cmpd="sng" algn="ctr" cap="flat" w="9525">
+                      <a:solidFill>
+                        <a:srgbClr val="D9D9D9"/>
                       </a:solidFill>
                       <a:prstDash val="solid"/>
                       <a:round/>
                       <a:headEnd type="none" w="med" len="med"/>
                       <a:tailEnd type="none" w="med" len="med"/>
                     </a:lnT>
-                    <a:lnB cmpd="sng" algn="ctr" cap="flat" w="38100">
-                      <a:solidFill>
-                        <a:srgbClr val="000000"/>
+                    <a:lnB cmpd="sng" algn="ctr" cap="flat" w="9525">
+                      <a:solidFill>
+                        <a:srgbClr val="D9D9D9"/>
                       </a:solidFill>
                       <a:prstDash val="solid"/>
                       <a:round/>
@@ -10782,115 +10930,42 @@
                           <a:cs typeface="Red Hat Display"/>
                           <a:sym typeface="Red Hat Display"/>
                         </a:rPr>
-                        <a:t>✅ Có</a:t>
+                        <a:t>0,842</a:t>
                       </a:r>
                       <a:endParaRPr lang="en-US" sz="1100"/>
                     </a:p>
                   </a:txBody>
                   <a:tcPr marL="76200" marR="76200" marT="76200" marB="76200" anchor="ctr">
-                    <a:lnL cmpd="sng" algn="ctr" cap="flat" w="38100">
-                      <a:solidFill>
-                        <a:srgbClr val="000000"/>
+                    <a:lnL cmpd="sng" algn="ctr" cap="flat" w="9525">
+                      <a:solidFill>
+                        <a:srgbClr val="D9D9D9"/>
                       </a:solidFill>
                       <a:prstDash val="solid"/>
                       <a:round/>
                       <a:headEnd type="none" w="med" len="med"/>
                       <a:tailEnd type="none" w="med" len="med"/>
                     </a:lnL>
-                    <a:lnR cmpd="sng" algn="ctr" cap="flat" w="38100">
-                      <a:solidFill>
-                        <a:srgbClr val="000000"/>
+                    <a:lnR cmpd="sng" algn="ctr" cap="flat" w="9525">
+                      <a:solidFill>
+                        <a:srgbClr val="D9D9D9"/>
                       </a:solidFill>
                       <a:prstDash val="solid"/>
                       <a:round/>
                       <a:headEnd type="none" w="med" len="med"/>
                       <a:tailEnd type="none" w="med" len="med"/>
                     </a:lnR>
-                    <a:lnT cmpd="sng" algn="ctr" cap="flat" w="38100">
-                      <a:solidFill>
-                        <a:srgbClr val="000000"/>
+                    <a:lnT cmpd="sng" algn="ctr" cap="flat" w="9525">
+                      <a:solidFill>
+                        <a:srgbClr val="D9D9D9"/>
                       </a:solidFill>
                       <a:prstDash val="solid"/>
                       <a:round/>
                       <a:headEnd type="none" w="med" len="med"/>
                       <a:tailEnd type="none" w="med" len="med"/>
                     </a:lnT>
-                    <a:lnB cmpd="sng" algn="ctr" cap="flat" w="38100">
-                      <a:solidFill>
-                        <a:srgbClr val="000000"/>
-                      </a:solidFill>
-                      <a:prstDash val="solid"/>
-                      <a:round/>
-                      <a:headEnd type="none" w="med" len="med"/>
-                      <a:tailEnd type="none" w="med" len="med"/>
-                    </a:lnB>
-                    <a:solidFill>
-                      <a:srgbClr val="FFFFFF"/>
-                    </a:solidFill>
-                  </a:tcPr>
-                </a:tc>
-              </a:tr>
-              <a:tr h="654447">
-                <a:tc>
-                  <a:txBody>
-                    <a:bodyPr anchor="t" rtlCol="false"/>
-                    <a:lstStyle/>
-                    <a:p>
-                      <a:pPr algn="ctr" marL="0" indent="0" lvl="0">
-                        <a:lnSpc>
-                          <a:spcPts val="3360"/>
-                        </a:lnSpc>
-                        <a:spcBef>
-                          <a:spcPct val="0"/>
-                        </a:spcBef>
-                        <a:defRPr/>
-                      </a:pPr>
-                      <a:r>
-                        <a:rPr lang="en-US" sz="2400" strike="noStrike" u="none">
-                          <a:solidFill>
-                            <a:srgbClr val="000000"/>
-                          </a:solidFill>
-                          <a:latin typeface="Red Hat Display"/>
-                          <a:ea typeface="Red Hat Display"/>
-                          <a:cs typeface="Red Hat Display"/>
-                          <a:sym typeface="Red Hat Display"/>
-                        </a:rPr>
-                        <a:t>sGARCH-t</a:t>
-                      </a:r>
-                      <a:endParaRPr lang="en-US" sz="1100"/>
-                    </a:p>
-                  </a:txBody>
-                  <a:tcPr marL="76200" marR="76200" marT="76200" marB="76200" anchor="ctr">
-                    <a:lnL cmpd="sng" algn="ctr" cap="flat" w="38100">
-                      <a:solidFill>
-                        <a:srgbClr val="000000"/>
-                      </a:solidFill>
-                      <a:prstDash val="solid"/>
-                      <a:round/>
-                      <a:headEnd type="none" w="med" len="med"/>
-                      <a:tailEnd type="none" w="med" len="med"/>
-                    </a:lnL>
-                    <a:lnR cmpd="sng" algn="ctr" cap="flat" w="38100">
-                      <a:solidFill>
-                        <a:srgbClr val="000000"/>
-                      </a:solidFill>
-                      <a:prstDash val="solid"/>
-                      <a:round/>
-                      <a:headEnd type="none" w="med" len="med"/>
-                      <a:tailEnd type="none" w="med" len="med"/>
-                    </a:lnR>
-                    <a:lnT cmpd="sng" algn="ctr" cap="flat" w="38100">
-                      <a:solidFill>
-                        <a:srgbClr val="000000"/>
-                      </a:solidFill>
-                      <a:prstDash val="solid"/>
-                      <a:round/>
-                      <a:headEnd type="none" w="med" len="med"/>
-                      <a:tailEnd type="none" w="med" len="med"/>
-                    </a:lnT>
-                    <a:lnB cmpd="sng" algn="ctr" cap="flat" w="38100">
-                      <a:solidFill>
-                        <a:srgbClr val="000000"/>
+                    <a:lnB cmpd="sng" algn="ctr" cap="flat" w="9525">
+                      <a:solidFill>
+                        <a:srgbClr val="D9D9D9"/>
                       </a:solidFill>
                       <a:prstDash val="solid"/>
                       <a:round/>
@@ -10926,42 +11001,42 @@
                           <a:cs typeface="Red Hat Display"/>
                           <a:sym typeface="Red Hat Display"/>
                         </a:rPr>
-                        <a:t>−5,6317</a:t>
+                        <a:t>0,632</a:t>
                       </a:r>
                       <a:endParaRPr lang="en-US" sz="1100"/>
                     </a:p>
                   </a:txBody>
                   <a:tcPr marL="76200" marR="76200" marT="76200" marB="76200" anchor="ctr">
-                    <a:lnL cmpd="sng" algn="ctr" cap="flat" w="38100">
-                      <a:solidFill>
-                        <a:srgbClr val="000000"/>
+                    <a:lnL cmpd="sng" algn="ctr" cap="flat" w="9525">
+                      <a:solidFill>
+                        <a:srgbClr val="D9D9D9"/>
                       </a:solidFill>
                       <a:prstDash val="solid"/>
                       <a:round/>
                       <a:headEnd type="none" w="med" len="med"/>
                       <a:tailEnd type="none" w="med" len="med"/>
                     </a:lnL>
-                    <a:lnR cmpd="sng" algn="ctr" cap="flat" w="38100">
-                      <a:solidFill>
-                        <a:srgbClr val="000000"/>
+                    <a:lnR cmpd="sng" algn="ctr" cap="flat" w="9525">
+                      <a:solidFill>
+                        <a:srgbClr val="D9D9D9"/>
                       </a:solidFill>
                       <a:prstDash val="solid"/>
                       <a:round/>
                       <a:headEnd type="none" w="med" len="med"/>
                       <a:tailEnd type="none" w="med" len="med"/>
                     </a:lnR>
-                    <a:lnT cmpd="sng" algn="ctr" cap="flat" w="38100">
-                      <a:solidFill>
-                        <a:srgbClr val="000000"/>
+                    <a:lnT cmpd="sng" algn="ctr" cap="flat" w="9525">
+                      <a:solidFill>
+                        <a:srgbClr val="D9D9D9"/>
                       </a:solidFill>
                       <a:prstDash val="solid"/>
                       <a:round/>
                       <a:headEnd type="none" w="med" len="med"/>
                       <a:tailEnd type="none" w="med" len="med"/>
                     </a:lnT>
-                    <a:lnB cmpd="sng" algn="ctr" cap="flat" w="38100">
-                      <a:solidFill>
-                        <a:srgbClr val="000000"/>
+                    <a:lnB cmpd="sng" algn="ctr" cap="flat" w="9525">
+                      <a:solidFill>
+                        <a:srgbClr val="D9D9D9"/>
                       </a:solidFill>
                       <a:prstDash val="solid"/>
                       <a:round/>
@@ -10997,42 +11072,115 @@
                           <a:cs typeface="Red Hat Display"/>
                           <a:sym typeface="Red Hat Display"/>
                         </a:rPr>
-                        <a:t>0,9891</a:t>
+                        <a:t>✅ Cả 4</a:t>
                       </a:r>
                       <a:endParaRPr lang="en-US" sz="1100"/>
                     </a:p>
                   </a:txBody>
                   <a:tcPr marL="76200" marR="76200" marT="76200" marB="76200" anchor="ctr">
-                    <a:lnL cmpd="sng" algn="ctr" cap="flat" w="38100">
-                      <a:solidFill>
-                        <a:srgbClr val="000000"/>
+                    <a:lnL cmpd="sng" algn="ctr" cap="flat" w="9525">
+                      <a:solidFill>
+                        <a:srgbClr val="D9D9D9"/>
                       </a:solidFill>
                       <a:prstDash val="solid"/>
                       <a:round/>
                       <a:headEnd type="none" w="med" len="med"/>
                       <a:tailEnd type="none" w="med" len="med"/>
                     </a:lnL>
-                    <a:lnR cmpd="sng" algn="ctr" cap="flat" w="38100">
-                      <a:solidFill>
-                        <a:srgbClr val="000000"/>
+                    <a:lnR cmpd="sng" algn="ctr" cap="flat" w="9525">
+                      <a:solidFill>
+                        <a:srgbClr val="D9D9D9"/>
                       </a:solidFill>
                       <a:prstDash val="solid"/>
                       <a:round/>
                       <a:headEnd type="none" w="med" len="med"/>
                       <a:tailEnd type="none" w="med" len="med"/>
                     </a:lnR>
-                    <a:lnT cmpd="sng" algn="ctr" cap="flat" w="38100">
-                      <a:solidFill>
-                        <a:srgbClr val="000000"/>
+                    <a:lnT cmpd="sng" algn="ctr" cap="flat" w="9525">
+                      <a:solidFill>
+                        <a:srgbClr val="D9D9D9"/>
                       </a:solidFill>
                       <a:prstDash val="solid"/>
                       <a:round/>
                       <a:headEnd type="none" w="med" len="med"/>
                       <a:tailEnd type="none" w="med" len="med"/>
                     </a:lnT>
-                    <a:lnB cmpd="sng" algn="ctr" cap="flat" w="38100">
-                      <a:solidFill>
-                        <a:srgbClr val="000000"/>
+                    <a:lnB cmpd="sng" algn="ctr" cap="flat" w="9525">
+                      <a:solidFill>
+                        <a:srgbClr val="D9D9D9"/>
+                      </a:solidFill>
+                      <a:prstDash val="solid"/>
+                      <a:round/>
+                      <a:headEnd type="none" w="med" len="med"/>
+                      <a:tailEnd type="none" w="med" len="med"/>
+                    </a:lnB>
+                    <a:solidFill>
+                      <a:srgbClr val="FFFFFF"/>
+                    </a:solidFill>
+                  </a:tcPr>
+                </a:tc>
+              </a:tr>
+              <a:tr h="628351">
+                <a:tc>
+                  <a:txBody>
+                    <a:bodyPr anchor="t" rtlCol="false"/>
+                    <a:lstStyle/>
+                    <a:p>
+                      <a:pPr algn="ctr" marL="0" indent="0" lvl="0">
+                        <a:lnSpc>
+                          <a:spcPts val="3360"/>
+                        </a:lnSpc>
+                        <a:spcBef>
+                          <a:spcPct val="0"/>
+                        </a:spcBef>
+                        <a:defRPr/>
+                      </a:pPr>
+                      <a:r>
+                        <a:rPr lang="en-US" sz="2400" strike="noStrike" u="none">
+                          <a:solidFill>
+                            <a:srgbClr val="000000"/>
+                          </a:solidFill>
+                          <a:latin typeface="Red Hat Display"/>
+                          <a:ea typeface="Red Hat Display"/>
+                          <a:cs typeface="Red Hat Display"/>
+                          <a:sym typeface="Red Hat Display"/>
+                        </a:rPr>
+                        <a:t>ARCH-LM</a:t>
+                      </a:r>
+                      <a:endParaRPr lang="en-US" sz="1100"/>
+                    </a:p>
+                  </a:txBody>
+                  <a:tcPr marL="76200" marR="76200" marT="76200" marB="76200" anchor="ctr">
+                    <a:lnL cmpd="sng" algn="ctr" cap="flat" w="9525">
+                      <a:solidFill>
+                        <a:srgbClr val="D9D9D9"/>
+                      </a:solidFill>
+                      <a:prstDash val="solid"/>
+                      <a:round/>
+                      <a:headEnd type="none" w="med" len="med"/>
+                      <a:tailEnd type="none" w="med" len="med"/>
+                    </a:lnL>
+                    <a:lnR cmpd="sng" algn="ctr" cap="flat" w="9525">
+                      <a:solidFill>
+                        <a:srgbClr val="D9D9D9"/>
+                      </a:solidFill>
+                      <a:prstDash val="solid"/>
+                      <a:round/>
+                      <a:headEnd type="none" w="med" len="med"/>
+                      <a:tailEnd type="none" w="med" len="med"/>
+                    </a:lnR>
+                    <a:lnT cmpd="sng" algn="ctr" cap="flat" w="9525">
+                      <a:solidFill>
+                        <a:srgbClr val="D9D9D9"/>
+                      </a:solidFill>
+                      <a:prstDash val="solid"/>
+                      <a:round/>
+                      <a:headEnd type="none" w="med" len="med"/>
+                      <a:tailEnd type="none" w="med" len="med"/>
+                    </a:lnT>
+                    <a:lnB cmpd="sng" algn="ctr" cap="flat" w="9525">
+                      <a:solidFill>
+                        <a:srgbClr val="D9D9D9"/>
                       </a:solidFill>
                       <a:prstDash val="solid"/>
                       <a:round/>
@@ -11068,42 +11216,42 @@
                           <a:cs typeface="Red Hat Display"/>
                           <a:sym typeface="Red Hat Display"/>
                         </a:rPr>
-                        <a:t>Đạt</a:t>
+                        <a:t>0,81</a:t>
                       </a:r>
                       <a:endParaRPr lang="en-US" sz="1100"/>
                     </a:p>
                   </a:txBody>
                   <a:tcPr marL="76200" marR="76200" marT="76200" marB="76200" anchor="ctr">
-                    <a:lnL cmpd="sng" algn="ctr" cap="flat" w="38100">
-                      <a:solidFill>
-                        <a:srgbClr val="000000"/>
+                    <a:lnL cmpd="sng" algn="ctr" cap="flat" w="9525">
+                      <a:solidFill>
+                        <a:srgbClr val="D9D9D9"/>
                       </a:solidFill>
                       <a:prstDash val="solid"/>
                       <a:round/>
                       <a:headEnd type="none" w="med" len="med"/>
                       <a:tailEnd type="none" w="med" len="med"/>
                     </a:lnL>
-                    <a:lnR cmpd="sng" algn="ctr" cap="flat" w="38100">
-                      <a:solidFill>
-                        <a:srgbClr val="000000"/>
+                    <a:lnR cmpd="sng" algn="ctr" cap="flat" w="9525">
+                      <a:solidFill>
+                        <a:srgbClr val="D9D9D9"/>
                       </a:solidFill>
                       <a:prstDash val="solid"/>
                       <a:round/>
                       <a:headEnd type="none" w="med" len="med"/>
                       <a:tailEnd type="none" w="med" len="med"/>
                     </a:lnR>
-                    <a:lnT cmpd="sng" algn="ctr" cap="flat" w="38100">
-                      <a:solidFill>
-                        <a:srgbClr val="000000"/>
+                    <a:lnT cmpd="sng" algn="ctr" cap="flat" w="9525">
+                      <a:solidFill>
+                        <a:srgbClr val="D9D9D9"/>
                       </a:solidFill>
                       <a:prstDash val="solid"/>
                       <a:round/>
                       <a:headEnd type="none" w="med" len="med"/>
                       <a:tailEnd type="none" w="med" len="med"/>
                     </a:lnT>
-                    <a:lnB cmpd="sng" algn="ctr" cap="flat" w="38100">
-                      <a:solidFill>
-                        <a:srgbClr val="000000"/>
+                    <a:lnB cmpd="sng" algn="ctr" cap="flat" w="9525">
+                      <a:solidFill>
+                        <a:srgbClr val="D9D9D9"/>
                       </a:solidFill>
                       <a:prstDash val="solid"/>
                       <a:round/>
@@ -11139,115 +11287,42 @@
                           <a:cs typeface="Red Hat Display"/>
                           <a:sym typeface="Red Hat Display"/>
                         </a:rPr>
-                        <a:t>❌ Không</a:t>
+                        <a:t>0,494</a:t>
                       </a:r>
                       <a:endParaRPr lang="en-US" sz="1100"/>
                     </a:p>
                   </a:txBody>
                   <a:tcPr marL="76200" marR="76200" marT="76200" marB="76200" anchor="ctr">
-                    <a:lnL cmpd="sng" algn="ctr" cap="flat" w="38100">
-                      <a:solidFill>
-                        <a:srgbClr val="000000"/>
+                    <a:lnL cmpd="sng" algn="ctr" cap="flat" w="9525">
+                      <a:solidFill>
+                        <a:srgbClr val="D9D9D9"/>
                       </a:solidFill>
                       <a:prstDash val="solid"/>
                       <a:round/>
                       <a:headEnd type="none" w="med" len="med"/>
                       <a:tailEnd type="none" w="med" len="med"/>
                     </a:lnL>
-                    <a:lnR cmpd="sng" algn="ctr" cap="flat" w="38100">
-                      <a:solidFill>
-                        <a:srgbClr val="000000"/>
+                    <a:lnR cmpd="sng" algn="ctr" cap="flat" w="9525">
+                      <a:solidFill>
+                        <a:srgbClr val="D9D9D9"/>
                       </a:solidFill>
                       <a:prstDash val="solid"/>
                       <a:round/>
                       <a:headEnd type="none" w="med" len="med"/>
                       <a:tailEnd type="none" w="med" len="med"/>
                     </a:lnR>
-                    <a:lnT cmpd="sng" algn="ctr" cap="flat" w="38100">
-                      <a:solidFill>
-                        <a:srgbClr val="000000"/>
+                    <a:lnT cmpd="sng" algn="ctr" cap="flat" w="9525">
+                      <a:solidFill>
+                        <a:srgbClr val="D9D9D9"/>
                       </a:solidFill>
                       <a:prstDash val="solid"/>
                       <a:round/>
                       <a:headEnd type="none" w="med" len="med"/>
                       <a:tailEnd type="none" w="med" len="med"/>
                     </a:lnT>
-                    <a:lnB cmpd="sng" algn="ctr" cap="flat" w="38100">
-                      <a:solidFill>
-                        <a:srgbClr val="000000"/>
-                      </a:solidFill>
-                      <a:prstDash val="solid"/>
-                      <a:round/>
-                      <a:headEnd type="none" w="med" len="med"/>
-                      <a:tailEnd type="none" w="med" len="med"/>
-                    </a:lnB>
-                    <a:solidFill>
-                      <a:srgbClr val="FFFFFF"/>
-                    </a:solidFill>
-                  </a:tcPr>
-                </a:tc>
-              </a:tr>
-              <a:tr h="654447">
-                <a:tc>
-                  <a:txBody>
-                    <a:bodyPr anchor="t" rtlCol="false"/>
-                    <a:lstStyle/>
-                    <a:p>
-                      <a:pPr algn="ctr" marL="0" indent="0" lvl="0">
-                        <a:lnSpc>
-                          <a:spcPts val="3360"/>
-                        </a:lnSpc>
-                        <a:spcBef>
-                          <a:spcPct val="0"/>
-                        </a:spcBef>
-                        <a:defRPr/>
-                      </a:pPr>
-                      <a:r>
-                        <a:rPr lang="en-US" sz="2400" strike="noStrike" u="none">
-                          <a:solidFill>
-                            <a:srgbClr val="000000"/>
-                          </a:solidFill>
-                          <a:latin typeface="Red Hat Display"/>
-                          <a:ea typeface="Red Hat Display"/>
-                          <a:cs typeface="Red Hat Display"/>
-                          <a:sym typeface="Red Hat Display"/>
-                        </a:rPr>
-                        <a:t>sGARCH-N</a:t>
-                      </a:r>
-                      <a:endParaRPr lang="en-US" sz="1100"/>
-                    </a:p>
-                  </a:txBody>
-                  <a:tcPr marL="76200" marR="76200" marT="76200" marB="76200" anchor="ctr">
-                    <a:lnL cmpd="sng" algn="ctr" cap="flat" w="38100">
-                      <a:solidFill>
-                        <a:srgbClr val="000000"/>
-                      </a:solidFill>
-                      <a:prstDash val="solid"/>
-                      <a:round/>
-                      <a:headEnd type="none" w="med" len="med"/>
-                      <a:tailEnd type="none" w="med" len="med"/>
-                    </a:lnL>
-                    <a:lnR cmpd="sng" algn="ctr" cap="flat" w="38100">
-                      <a:solidFill>
-                        <a:srgbClr val="000000"/>
-                      </a:solidFill>
-                      <a:prstDash val="solid"/>
-                      <a:round/>
-                      <a:headEnd type="none" w="med" len="med"/>
-                      <a:tailEnd type="none" w="med" len="med"/>
-                    </a:lnR>
-                    <a:lnT cmpd="sng" algn="ctr" cap="flat" w="38100">
-                      <a:solidFill>
-                        <a:srgbClr val="000000"/>
-                      </a:solidFill>
-                      <a:prstDash val="solid"/>
-                      <a:round/>
-                      <a:headEnd type="none" w="med" len="med"/>
-                      <a:tailEnd type="none" w="med" len="med"/>
-                    </a:lnT>
-                    <a:lnB cmpd="sng" algn="ctr" cap="flat" w="38100">
-                      <a:solidFill>
-                        <a:srgbClr val="000000"/>
+                    <a:lnB cmpd="sng" algn="ctr" cap="flat" w="9525">
+                      <a:solidFill>
+                        <a:srgbClr val="D9D9D9"/>
                       </a:solidFill>
                       <a:prstDash val="solid"/>
                       <a:round/>
@@ -11283,42 +11358,42 @@
                           <a:cs typeface="Red Hat Display"/>
                           <a:sym typeface="Red Hat Display"/>
                         </a:rPr>
-                        <a:t>−5,5073</a:t>
+                        <a:t>0,646</a:t>
                       </a:r>
                       <a:endParaRPr lang="en-US" sz="1100"/>
                     </a:p>
                   </a:txBody>
                   <a:tcPr marL="76200" marR="76200" marT="76200" marB="76200" anchor="ctr">
-                    <a:lnL cmpd="sng" algn="ctr" cap="flat" w="38100">
-                      <a:solidFill>
-                        <a:srgbClr val="000000"/>
+                    <a:lnL cmpd="sng" algn="ctr" cap="flat" w="9525">
+                      <a:solidFill>
+                        <a:srgbClr val="D9D9D9"/>
                       </a:solidFill>
                       <a:prstDash val="solid"/>
                       <a:round/>
                       <a:headEnd type="none" w="med" len="med"/>
                       <a:tailEnd type="none" w="med" len="med"/>
                     </a:lnL>
-                    <a:lnR cmpd="sng" algn="ctr" cap="flat" w="38100">
-                      <a:solidFill>
-                        <a:srgbClr val="000000"/>
+                    <a:lnR cmpd="sng" algn="ctr" cap="flat" w="9525">
+                      <a:solidFill>
+                        <a:srgbClr val="D9D9D9"/>
                       </a:solidFill>
                       <a:prstDash val="solid"/>
                       <a:round/>
                       <a:headEnd type="none" w="med" len="med"/>
                       <a:tailEnd type="none" w="med" len="med"/>
                     </a:lnR>
-                    <a:lnT cmpd="sng" algn="ctr" cap="flat" w="38100">
-                      <a:solidFill>
-                        <a:srgbClr val="000000"/>
+                    <a:lnT cmpd="sng" algn="ctr" cap="flat" w="9525">
+                      <a:solidFill>
+                        <a:srgbClr val="D9D9D9"/>
                       </a:solidFill>
                       <a:prstDash val="solid"/>
                       <a:round/>
                       <a:headEnd type="none" w="med" len="med"/>
                       <a:tailEnd type="none" w="med" len="med"/>
                     </a:lnT>
-                    <a:lnB cmpd="sng" algn="ctr" cap="flat" w="38100">
-                      <a:solidFill>
-                        <a:srgbClr val="000000"/>
+                    <a:lnB cmpd="sng" algn="ctr" cap="flat" w="9525">
+                      <a:solidFill>
+                        <a:srgbClr val="D9D9D9"/>
                       </a:solidFill>
                       <a:prstDash val="solid"/>
                       <a:round/>
@@ -11354,42 +11429,42 @@
                           <a:cs typeface="Red Hat Display"/>
                           <a:sym typeface="Red Hat Display"/>
                         </a:rPr>
-                        <a:t>0,9645</a:t>
+                        <a:t>0,366</a:t>
                       </a:r>
                       <a:endParaRPr lang="en-US" sz="1100"/>
                     </a:p>
                   </a:txBody>
                   <a:tcPr marL="76200" marR="76200" marT="76200" marB="76200" anchor="ctr">
-                    <a:lnL cmpd="sng" algn="ctr" cap="flat" w="38100">
-                      <a:solidFill>
-                        <a:srgbClr val="000000"/>
+                    <a:lnL cmpd="sng" algn="ctr" cap="flat" w="9525">
+                      <a:solidFill>
+                        <a:srgbClr val="D9D9D9"/>
                       </a:solidFill>
                       <a:prstDash val="solid"/>
                       <a:round/>
                       <a:headEnd type="none" w="med" len="med"/>
                       <a:tailEnd type="none" w="med" len="med"/>
                     </a:lnL>
-                    <a:lnR cmpd="sng" algn="ctr" cap="flat" w="38100">
-                      <a:solidFill>
-                        <a:srgbClr val="000000"/>
+                    <a:lnR cmpd="sng" algn="ctr" cap="flat" w="9525">
+                      <a:solidFill>
+                        <a:srgbClr val="D9D9D9"/>
                       </a:solidFill>
                       <a:prstDash val="solid"/>
                       <a:round/>
                       <a:headEnd type="none" w="med" len="med"/>
                       <a:tailEnd type="none" w="med" len="med"/>
                     </a:lnR>
-                    <a:lnT cmpd="sng" algn="ctr" cap="flat" w="38100">
-                      <a:solidFill>
-                        <a:srgbClr val="000000"/>
+                    <a:lnT cmpd="sng" algn="ctr" cap="flat" w="9525">
+                      <a:solidFill>
+                        <a:srgbClr val="D9D9D9"/>
                       </a:solidFill>
                       <a:prstDash val="solid"/>
                       <a:round/>
                       <a:headEnd type="none" w="med" len="med"/>
                       <a:tailEnd type="none" w="med" len="med"/>
                     </a:lnT>
-                    <a:lnB cmpd="sng" algn="ctr" cap="flat" w="38100">
-                      <a:solidFill>
-                        <a:srgbClr val="000000"/>
+                    <a:lnB cmpd="sng" algn="ctr" cap="flat" w="9525">
+                      <a:solidFill>
+                        <a:srgbClr val="D9D9D9"/>
                       </a:solidFill>
                       <a:prstDash val="solid"/>
                       <a:round/>
@@ -11425,42 +11500,115 @@
                           <a:cs typeface="Red Hat Display"/>
                           <a:sym typeface="Red Hat Display"/>
                         </a:rPr>
-                        <a:t>Đạt</a:t>
+                        <a:t>✅ Cả 4</a:t>
                       </a:r>
                       <a:endParaRPr lang="en-US" sz="1100"/>
                     </a:p>
                   </a:txBody>
                   <a:tcPr marL="76200" marR="76200" marT="76200" marB="76200" anchor="ctr">
-                    <a:lnL cmpd="sng" algn="ctr" cap="flat" w="38100">
-                      <a:solidFill>
-                        <a:srgbClr val="000000"/>
+                    <a:lnL cmpd="sng" algn="ctr" cap="flat" w="9525">
+                      <a:solidFill>
+                        <a:srgbClr val="D9D9D9"/>
                       </a:solidFill>
                       <a:prstDash val="solid"/>
                       <a:round/>
                       <a:headEnd type="none" w="med" len="med"/>
                       <a:tailEnd type="none" w="med" len="med"/>
                     </a:lnL>
-                    <a:lnR cmpd="sng" algn="ctr" cap="flat" w="38100">
-                      <a:solidFill>
-                        <a:srgbClr val="000000"/>
+                    <a:lnR cmpd="sng" algn="ctr" cap="flat" w="9525">
+                      <a:solidFill>
+                        <a:srgbClr val="D9D9D9"/>
                       </a:solidFill>
                       <a:prstDash val="solid"/>
                       <a:round/>
                       <a:headEnd type="none" w="med" len="med"/>
                       <a:tailEnd type="none" w="med" len="med"/>
                     </a:lnR>
-                    <a:lnT cmpd="sng" algn="ctr" cap="flat" w="38100">
-                      <a:solidFill>
-                        <a:srgbClr val="000000"/>
+                    <a:lnT cmpd="sng" algn="ctr" cap="flat" w="9525">
+                      <a:solidFill>
+                        <a:srgbClr val="D9D9D9"/>
                       </a:solidFill>
                       <a:prstDash val="solid"/>
                       <a:round/>
                       <a:headEnd type="none" w="med" len="med"/>
                       <a:tailEnd type="none" w="med" len="med"/>
                     </a:lnT>
-                    <a:lnB cmpd="sng" algn="ctr" cap="flat" w="38100">
-                      <a:solidFill>
-                        <a:srgbClr val="000000"/>
+                    <a:lnB cmpd="sng" algn="ctr" cap="flat" w="9525">
+                      <a:solidFill>
+                        <a:srgbClr val="D9D9D9"/>
+                      </a:solidFill>
+                      <a:prstDash val="solid"/>
+                      <a:round/>
+                      <a:headEnd type="none" w="med" len="med"/>
+                      <a:tailEnd type="none" w="med" len="med"/>
+                    </a:lnB>
+                    <a:solidFill>
+                      <a:srgbClr val="FFFFFF"/>
+                    </a:solidFill>
+                  </a:tcPr>
+                </a:tc>
+              </a:tr>
+              <a:tr h="1039983">
+                <a:tc>
+                  <a:txBody>
+                    <a:bodyPr anchor="t" rtlCol="false"/>
+                    <a:lstStyle/>
+                    <a:p>
+                      <a:pPr algn="ctr" marL="0" indent="0" lvl="0">
+                        <a:lnSpc>
+                          <a:spcPts val="3360"/>
+                        </a:lnSpc>
+                        <a:spcBef>
+                          <a:spcPct val="0"/>
+                        </a:spcBef>
+                        <a:defRPr/>
+                      </a:pPr>
+                      <a:r>
+                        <a:rPr lang="en-US" sz="2400" strike="noStrike" u="none">
+                          <a:solidFill>
+                            <a:srgbClr val="000000"/>
+                          </a:solidFill>
+                          <a:latin typeface="Red Hat Display"/>
+                          <a:ea typeface="Red Hat Display"/>
+                          <a:cs typeface="Red Hat Display"/>
+                          <a:sym typeface="Red Hat Display"/>
+                        </a:rPr>
+                        <a:t>Sign-bias joint</a:t>
+                      </a:r>
+                      <a:endParaRPr lang="en-US" sz="1100"/>
+                    </a:p>
+                  </a:txBody>
+                  <a:tcPr marL="76200" marR="76200" marT="76200" marB="76200" anchor="ctr">
+                    <a:lnL cmpd="sng" algn="ctr" cap="flat" w="9525">
+                      <a:solidFill>
+                        <a:srgbClr val="D9D9D9"/>
+                      </a:solidFill>
+                      <a:prstDash val="solid"/>
+                      <a:round/>
+                      <a:headEnd type="none" w="med" len="med"/>
+                      <a:tailEnd type="none" w="med" len="med"/>
+                    </a:lnL>
+                    <a:lnR cmpd="sng" algn="ctr" cap="flat" w="9525">
+                      <a:solidFill>
+                        <a:srgbClr val="D9D9D9"/>
+                      </a:solidFill>
+                      <a:prstDash val="solid"/>
+                      <a:round/>
+                      <a:headEnd type="none" w="med" len="med"/>
+                      <a:tailEnd type="none" w="med" len="med"/>
+                    </a:lnR>
+                    <a:lnT cmpd="sng" algn="ctr" cap="flat" w="9525">
+                      <a:solidFill>
+                        <a:srgbClr val="D9D9D9"/>
+                      </a:solidFill>
+                      <a:prstDash val="solid"/>
+                      <a:round/>
+                      <a:headEnd type="none" w="med" len="med"/>
+                      <a:tailEnd type="none" w="med" len="med"/>
+                    </a:lnT>
+                    <a:lnB cmpd="sng" algn="ctr" cap="flat" w="9525">
+                      <a:solidFill>
+                        <a:srgbClr val="D9D9D9"/>
                       </a:solidFill>
                       <a:prstDash val="solid"/>
                       <a:round/>
@@ -11496,42 +11644,1182 @@
                           <a:cs typeface="Red Hat Display"/>
                           <a:sym typeface="Red Hat Display"/>
                         </a:rPr>
-                        <a:t>❌ Không</a:t>
+                        <a:t>0,103</a:t>
                       </a:r>
                       <a:endParaRPr lang="en-US" sz="1100"/>
                     </a:p>
                   </a:txBody>
                   <a:tcPr marL="76200" marR="76200" marT="76200" marB="76200" anchor="ctr">
-                    <a:lnL cmpd="sng" algn="ctr" cap="flat" w="38100">
-                      <a:solidFill>
-                        <a:srgbClr val="000000"/>
+                    <a:lnL cmpd="sng" algn="ctr" cap="flat" w="9525">
+                      <a:solidFill>
+                        <a:srgbClr val="D9D9D9"/>
                       </a:solidFill>
                       <a:prstDash val="solid"/>
                       <a:round/>
                       <a:headEnd type="none" w="med" len="med"/>
                       <a:tailEnd type="none" w="med" len="med"/>
                     </a:lnL>
-                    <a:lnR cmpd="sng" algn="ctr" cap="flat" w="38100">
-                      <a:solidFill>
-                        <a:srgbClr val="000000"/>
+                    <a:lnR cmpd="sng" algn="ctr" cap="flat" w="9525">
+                      <a:solidFill>
+                        <a:srgbClr val="D9D9D9"/>
                       </a:solidFill>
                       <a:prstDash val="solid"/>
                       <a:round/>
                       <a:headEnd type="none" w="med" len="med"/>
                       <a:tailEnd type="none" w="med" len="med"/>
                     </a:lnR>
-                    <a:lnT cmpd="sng" algn="ctr" cap="flat" w="38100">
-                      <a:solidFill>
-                        <a:srgbClr val="000000"/>
+                    <a:lnT cmpd="sng" algn="ctr" cap="flat" w="9525">
+                      <a:solidFill>
+                        <a:srgbClr val="D9D9D9"/>
                       </a:solidFill>
                       <a:prstDash val="solid"/>
                       <a:round/>
                       <a:headEnd type="none" w="med" len="med"/>
                       <a:tailEnd type="none" w="med" len="med"/>
                     </a:lnT>
-                    <a:lnB cmpd="sng" algn="ctr" cap="flat" w="38100">
-                      <a:solidFill>
-                        <a:srgbClr val="000000"/>
+                    <a:lnB cmpd="sng" algn="ctr" cap="flat" w="9525">
+                      <a:solidFill>
+                        <a:srgbClr val="D9D9D9"/>
+                      </a:solidFill>
+                      <a:prstDash val="solid"/>
+                      <a:round/>
+                      <a:headEnd type="none" w="med" len="med"/>
+                      <a:tailEnd type="none" w="med" len="med"/>
+                    </a:lnB>
+                    <a:solidFill>
+                      <a:srgbClr val="FFFFFF"/>
+                    </a:solidFill>
+                  </a:tcPr>
+                </a:tc>
+                <a:tc>
+                  <a:txBody>
+                    <a:bodyPr anchor="t" rtlCol="false"/>
+                    <a:lstStyle/>
+                    <a:p>
+                      <a:pPr algn="ctr" marL="0" indent="0" lvl="0">
+                        <a:lnSpc>
+                          <a:spcPts val="3360"/>
+                        </a:lnSpc>
+                        <a:spcBef>
+                          <a:spcPct val="0"/>
+                        </a:spcBef>
+                        <a:defRPr/>
+                      </a:pPr>
+                      <a:r>
+                        <a:rPr lang="en-US" sz="2400" strike="noStrike" u="none">
+                          <a:solidFill>
+                            <a:srgbClr val="000000"/>
+                          </a:solidFill>
+                          <a:latin typeface="Red Hat Display"/>
+                          <a:ea typeface="Red Hat Display"/>
+                          <a:cs typeface="Red Hat Display"/>
+                          <a:sym typeface="Red Hat Display"/>
+                        </a:rPr>
+                        <a:t>0,06</a:t>
+                      </a:r>
+                      <a:endParaRPr lang="en-US" sz="1100"/>
+                    </a:p>
+                  </a:txBody>
+                  <a:tcPr marL="76200" marR="76200" marT="76200" marB="76200" anchor="ctr">
+                    <a:lnL cmpd="sng" algn="ctr" cap="flat" w="9525">
+                      <a:solidFill>
+                        <a:srgbClr val="D9D9D9"/>
+                      </a:solidFill>
+                      <a:prstDash val="solid"/>
+                      <a:round/>
+                      <a:headEnd type="none" w="med" len="med"/>
+                      <a:tailEnd type="none" w="med" len="med"/>
+                    </a:lnL>
+                    <a:lnR cmpd="sng" algn="ctr" cap="flat" w="9525">
+                      <a:solidFill>
+                        <a:srgbClr val="D9D9D9"/>
+                      </a:solidFill>
+                      <a:prstDash val="solid"/>
+                      <a:round/>
+                      <a:headEnd type="none" w="med" len="med"/>
+                      <a:tailEnd type="none" w="med" len="med"/>
+                    </a:lnR>
+                    <a:lnT cmpd="sng" algn="ctr" cap="flat" w="9525">
+                      <a:solidFill>
+                        <a:srgbClr val="D9D9D9"/>
+                      </a:solidFill>
+                      <a:prstDash val="solid"/>
+                      <a:round/>
+                      <a:headEnd type="none" w="med" len="med"/>
+                      <a:tailEnd type="none" w="med" len="med"/>
+                    </a:lnT>
+                    <a:lnB cmpd="sng" algn="ctr" cap="flat" w="9525">
+                      <a:solidFill>
+                        <a:srgbClr val="D9D9D9"/>
+                      </a:solidFill>
+                      <a:prstDash val="solid"/>
+                      <a:round/>
+                      <a:headEnd type="none" w="med" len="med"/>
+                      <a:tailEnd type="none" w="med" len="med"/>
+                    </a:lnB>
+                    <a:solidFill>
+                      <a:srgbClr val="FFFFFF"/>
+                    </a:solidFill>
+                  </a:tcPr>
+                </a:tc>
+                <a:tc>
+                  <a:txBody>
+                    <a:bodyPr anchor="t" rtlCol="false"/>
+                    <a:lstStyle/>
+                    <a:p>
+                      <a:pPr algn="ctr" marL="0" indent="0" lvl="0">
+                        <a:lnSpc>
+                          <a:spcPts val="3360"/>
+                        </a:lnSpc>
+                        <a:spcBef>
+                          <a:spcPct val="0"/>
+                        </a:spcBef>
+                        <a:defRPr/>
+                      </a:pPr>
+                      <a:r>
+                        <a:rPr lang="en-US" sz="2400" strike="noStrike" u="none">
+                          <a:solidFill>
+                            <a:srgbClr val="000000"/>
+                          </a:solidFill>
+                          <a:latin typeface="Red Hat Display"/>
+                          <a:ea typeface="Red Hat Display"/>
+                          <a:cs typeface="Red Hat Display"/>
+                          <a:sym typeface="Red Hat Display"/>
+                        </a:rPr>
+                        <a:t>0,102</a:t>
+                      </a:r>
+                      <a:endParaRPr lang="en-US" sz="1100"/>
+                    </a:p>
+                  </a:txBody>
+                  <a:tcPr marL="76200" marR="76200" marT="76200" marB="76200" anchor="ctr">
+                    <a:lnL cmpd="sng" algn="ctr" cap="flat" w="9525">
+                      <a:solidFill>
+                        <a:srgbClr val="D9D9D9"/>
+                      </a:solidFill>
+                      <a:prstDash val="solid"/>
+                      <a:round/>
+                      <a:headEnd type="none" w="med" len="med"/>
+                      <a:tailEnd type="none" w="med" len="med"/>
+                    </a:lnL>
+                    <a:lnR cmpd="sng" algn="ctr" cap="flat" w="9525">
+                      <a:solidFill>
+                        <a:srgbClr val="D9D9D9"/>
+                      </a:solidFill>
+                      <a:prstDash val="solid"/>
+                      <a:round/>
+                      <a:headEnd type="none" w="med" len="med"/>
+                      <a:tailEnd type="none" w="med" len="med"/>
+                    </a:lnR>
+                    <a:lnT cmpd="sng" algn="ctr" cap="flat" w="9525">
+                      <a:solidFill>
+                        <a:srgbClr val="D9D9D9"/>
+                      </a:solidFill>
+                      <a:prstDash val="solid"/>
+                      <a:round/>
+                      <a:headEnd type="none" w="med" len="med"/>
+                      <a:tailEnd type="none" w="med" len="med"/>
+                    </a:lnT>
+                    <a:lnB cmpd="sng" algn="ctr" cap="flat" w="9525">
+                      <a:solidFill>
+                        <a:srgbClr val="D9D9D9"/>
+                      </a:solidFill>
+                      <a:prstDash val="solid"/>
+                      <a:round/>
+                      <a:headEnd type="none" w="med" len="med"/>
+                      <a:tailEnd type="none" w="med" len="med"/>
+                    </a:lnB>
+                    <a:solidFill>
+                      <a:srgbClr val="FFFFFF"/>
+                    </a:solidFill>
+                  </a:tcPr>
+                </a:tc>
+                <a:tc>
+                  <a:txBody>
+                    <a:bodyPr anchor="t" rtlCol="false"/>
+                    <a:lstStyle/>
+                    <a:p>
+                      <a:pPr algn="ctr" marL="0" indent="0" lvl="0">
+                        <a:lnSpc>
+                          <a:spcPts val="3360"/>
+                        </a:lnSpc>
+                        <a:spcBef>
+                          <a:spcPct val="0"/>
+                        </a:spcBef>
+                        <a:defRPr/>
+                      </a:pPr>
+                      <a:r>
+                        <a:rPr lang="en-US" sz="2400" strike="noStrike" u="none">
+                          <a:solidFill>
+                            <a:srgbClr val="000000"/>
+                          </a:solidFill>
+                          <a:latin typeface="Red Hat Display"/>
+                          <a:ea typeface="Red Hat Display"/>
+                          <a:cs typeface="Red Hat Display"/>
+                          <a:sym typeface="Red Hat Display"/>
+                        </a:rPr>
+                        <a:t>0,086</a:t>
+                      </a:r>
+                      <a:endParaRPr lang="en-US" sz="1100"/>
+                    </a:p>
+                  </a:txBody>
+                  <a:tcPr marL="76200" marR="76200" marT="76200" marB="76200" anchor="ctr">
+                    <a:lnL cmpd="sng" algn="ctr" cap="flat" w="9525">
+                      <a:solidFill>
+                        <a:srgbClr val="D9D9D9"/>
+                      </a:solidFill>
+                      <a:prstDash val="solid"/>
+                      <a:round/>
+                      <a:headEnd type="none" w="med" len="med"/>
+                      <a:tailEnd type="none" w="med" len="med"/>
+                    </a:lnL>
+                    <a:lnR cmpd="sng" algn="ctr" cap="flat" w="9525">
+                      <a:solidFill>
+                        <a:srgbClr val="D9D9D9"/>
+                      </a:solidFill>
+                      <a:prstDash val="solid"/>
+                      <a:round/>
+                      <a:headEnd type="none" w="med" len="med"/>
+                      <a:tailEnd type="none" w="med" len="med"/>
+                    </a:lnR>
+                    <a:lnT cmpd="sng" algn="ctr" cap="flat" w="9525">
+                      <a:solidFill>
+                        <a:srgbClr val="D9D9D9"/>
+                      </a:solidFill>
+                      <a:prstDash val="solid"/>
+                      <a:round/>
+                      <a:headEnd type="none" w="med" len="med"/>
+                      <a:tailEnd type="none" w="med" len="med"/>
+                    </a:lnT>
+                    <a:lnB cmpd="sng" algn="ctr" cap="flat" w="9525">
+                      <a:solidFill>
+                        <a:srgbClr val="D9D9D9"/>
+                      </a:solidFill>
+                      <a:prstDash val="solid"/>
+                      <a:round/>
+                      <a:headEnd type="none" w="med" len="med"/>
+                      <a:tailEnd type="none" w="med" len="med"/>
+                    </a:lnB>
+                    <a:solidFill>
+                      <a:srgbClr val="FFFFFF"/>
+                    </a:solidFill>
+                  </a:tcPr>
+                </a:tc>
+                <a:tc>
+                  <a:txBody>
+                    <a:bodyPr anchor="t" rtlCol="false"/>
+                    <a:lstStyle/>
+                    <a:p>
+                      <a:pPr algn="ctr" marL="0" indent="0" lvl="0">
+                        <a:lnSpc>
+                          <a:spcPts val="3360"/>
+                        </a:lnSpc>
+                        <a:spcBef>
+                          <a:spcPct val="0"/>
+                        </a:spcBef>
+                        <a:defRPr/>
+                      </a:pPr>
+                      <a:r>
+                        <a:rPr lang="en-US" sz="2400" strike="noStrike" u="none">
+                          <a:solidFill>
+                            <a:srgbClr val="000000"/>
+                          </a:solidFill>
+                          <a:latin typeface="Red Hat Display"/>
+                          <a:ea typeface="Red Hat Display"/>
+                          <a:cs typeface="Red Hat Display"/>
+                          <a:sym typeface="Red Hat Display"/>
+                        </a:rPr>
+                        <a:t>✅ Cả 4</a:t>
+                      </a:r>
+                      <a:endParaRPr lang="en-US" sz="1100"/>
+                    </a:p>
+                  </a:txBody>
+                  <a:tcPr marL="76200" marR="76200" marT="76200" marB="76200" anchor="ctr">
+                    <a:lnL cmpd="sng" algn="ctr" cap="flat" w="9525">
+                      <a:solidFill>
+                        <a:srgbClr val="D9D9D9"/>
+                      </a:solidFill>
+                      <a:prstDash val="solid"/>
+                      <a:round/>
+                      <a:headEnd type="none" w="med" len="med"/>
+                      <a:tailEnd type="none" w="med" len="med"/>
+                    </a:lnL>
+                    <a:lnR cmpd="sng" algn="ctr" cap="flat" w="9525">
+                      <a:solidFill>
+                        <a:srgbClr val="D9D9D9"/>
+                      </a:solidFill>
+                      <a:prstDash val="solid"/>
+                      <a:round/>
+                      <a:headEnd type="none" w="med" len="med"/>
+                      <a:tailEnd type="none" w="med" len="med"/>
+                    </a:lnR>
+                    <a:lnT cmpd="sng" algn="ctr" cap="flat" w="9525">
+                      <a:solidFill>
+                        <a:srgbClr val="D9D9D9"/>
+                      </a:solidFill>
+                      <a:prstDash val="solid"/>
+                      <a:round/>
+                      <a:headEnd type="none" w="med" len="med"/>
+                      <a:tailEnd type="none" w="med" len="med"/>
+                    </a:lnT>
+                    <a:lnB cmpd="sng" algn="ctr" cap="flat" w="9525">
+                      <a:solidFill>
+                        <a:srgbClr val="D9D9D9"/>
+                      </a:solidFill>
+                      <a:prstDash val="solid"/>
+                      <a:round/>
+                      <a:headEnd type="none" w="med" len="med"/>
+                      <a:tailEnd type="none" w="med" len="med"/>
+                    </a:lnB>
+                    <a:solidFill>
+                      <a:srgbClr val="FFFFFF"/>
+                    </a:solidFill>
+                  </a:tcPr>
+                </a:tc>
+              </a:tr>
+              <a:tr h="1039983">
+                <a:tc>
+                  <a:txBody>
+                    <a:bodyPr anchor="t" rtlCol="false"/>
+                    <a:lstStyle/>
+                    <a:p>
+                      <a:pPr algn="ctr" marL="0" indent="0" lvl="0">
+                        <a:lnSpc>
+                          <a:spcPts val="3360"/>
+                        </a:lnSpc>
+                        <a:spcBef>
+                          <a:spcPct val="0"/>
+                        </a:spcBef>
+                        <a:defRPr/>
+                      </a:pPr>
+                      <a:r>
+                        <a:rPr lang="en-US" b="true" sz="2400" strike="noStrike" u="none">
+                          <a:solidFill>
+                            <a:srgbClr val="000000"/>
+                          </a:solidFill>
+                          <a:latin typeface="Red Hat Display Bold"/>
+                          <a:ea typeface="Red Hat Display Bold"/>
+                          <a:cs typeface="Red Hat Display Bold"/>
+                          <a:sym typeface="Red Hat Display Bold"/>
+                        </a:rPr>
+                        <a:t>Nyblom (stat/crit)</a:t>
+                      </a:r>
+                      <a:endParaRPr lang="en-US" sz="1100"/>
+                    </a:p>
+                  </a:txBody>
+                  <a:tcPr marL="76200" marR="76200" marT="76200" marB="76200" anchor="ctr">
+                    <a:lnL cmpd="sng" algn="ctr" cap="flat" w="9525">
+                      <a:solidFill>
+                        <a:srgbClr val="D9D9D9"/>
+                      </a:solidFill>
+                      <a:prstDash val="solid"/>
+                      <a:round/>
+                      <a:headEnd type="none" w="med" len="med"/>
+                      <a:tailEnd type="none" w="med" len="med"/>
+                    </a:lnL>
+                    <a:lnR cmpd="sng" algn="ctr" cap="flat" w="9525">
+                      <a:solidFill>
+                        <a:srgbClr val="D9D9D9"/>
+                      </a:solidFill>
+                      <a:prstDash val="solid"/>
+                      <a:round/>
+                      <a:headEnd type="none" w="med" len="med"/>
+                      <a:tailEnd type="none" w="med" len="med"/>
+                    </a:lnR>
+                    <a:lnT cmpd="sng" algn="ctr" cap="flat" w="9525">
+                      <a:solidFill>
+                        <a:srgbClr val="D9D9D9"/>
+                      </a:solidFill>
+                      <a:prstDash val="solid"/>
+                      <a:round/>
+                      <a:headEnd type="none" w="med" len="med"/>
+                      <a:tailEnd type="none" w="med" len="med"/>
+                    </a:lnT>
+                    <a:lnB cmpd="sng" algn="ctr" cap="flat" w="9525">
+                      <a:solidFill>
+                        <a:srgbClr val="D9D9D9"/>
+                      </a:solidFill>
+                      <a:prstDash val="solid"/>
+                      <a:round/>
+                      <a:headEnd type="none" w="med" len="med"/>
+                      <a:tailEnd type="none" w="med" len="med"/>
+                    </a:lnB>
+                    <a:solidFill>
+                      <a:srgbClr val="FFFFFF"/>
+                    </a:solidFill>
+                  </a:tcPr>
+                </a:tc>
+                <a:tc>
+                  <a:txBody>
+                    <a:bodyPr anchor="t" rtlCol="false"/>
+                    <a:lstStyle/>
+                    <a:p>
+                      <a:pPr algn="ctr" marL="0" indent="0" lvl="0">
+                        <a:lnSpc>
+                          <a:spcPts val="3360"/>
+                        </a:lnSpc>
+                        <a:spcBef>
+                          <a:spcPct val="0"/>
+                        </a:spcBef>
+                        <a:defRPr/>
+                      </a:pPr>
+                      <a:r>
+                        <a:rPr lang="en-US" b="true" sz="2400" strike="noStrike" u="none">
+                          <a:solidFill>
+                            <a:srgbClr val="000000"/>
+                          </a:solidFill>
+                          <a:latin typeface="Red Hat Display Bold"/>
+                          <a:ea typeface="Red Hat Display Bold"/>
+                          <a:cs typeface="Red Hat Display Bold"/>
+                          <a:sym typeface="Red Hat Display Bold"/>
+                        </a:rPr>
+                        <a:t>12,90/1,24</a:t>
+                      </a:r>
+                      <a:endParaRPr lang="en-US" sz="1100"/>
+                    </a:p>
+                  </a:txBody>
+                  <a:tcPr marL="76200" marR="76200" marT="76200" marB="76200" anchor="ctr">
+                    <a:lnL cmpd="sng" algn="ctr" cap="flat" w="9525">
+                      <a:solidFill>
+                        <a:srgbClr val="D9D9D9"/>
+                      </a:solidFill>
+                      <a:prstDash val="solid"/>
+                      <a:round/>
+                      <a:headEnd type="none" w="med" len="med"/>
+                      <a:tailEnd type="none" w="med" len="med"/>
+                    </a:lnL>
+                    <a:lnR cmpd="sng" algn="ctr" cap="flat" w="9525">
+                      <a:solidFill>
+                        <a:srgbClr val="D9D9D9"/>
+                      </a:solidFill>
+                      <a:prstDash val="solid"/>
+                      <a:round/>
+                      <a:headEnd type="none" w="med" len="med"/>
+                      <a:tailEnd type="none" w="med" len="med"/>
+                    </a:lnR>
+                    <a:lnT cmpd="sng" algn="ctr" cap="flat" w="9525">
+                      <a:solidFill>
+                        <a:srgbClr val="D9D9D9"/>
+                      </a:solidFill>
+                      <a:prstDash val="solid"/>
+                      <a:round/>
+                      <a:headEnd type="none" w="med" len="med"/>
+                      <a:tailEnd type="none" w="med" len="med"/>
+                    </a:lnT>
+                    <a:lnB cmpd="sng" algn="ctr" cap="flat" w="9525">
+                      <a:solidFill>
+                        <a:srgbClr val="D9D9D9"/>
+                      </a:solidFill>
+                      <a:prstDash val="solid"/>
+                      <a:round/>
+                      <a:headEnd type="none" w="med" len="med"/>
+                      <a:tailEnd type="none" w="med" len="med"/>
+                    </a:lnB>
+                    <a:solidFill>
+                      <a:srgbClr val="FFFFFF"/>
+                    </a:solidFill>
+                  </a:tcPr>
+                </a:tc>
+                <a:tc>
+                  <a:txBody>
+                    <a:bodyPr anchor="t" rtlCol="false"/>
+                    <a:lstStyle/>
+                    <a:p>
+                      <a:pPr algn="ctr" marL="0" indent="0" lvl="0">
+                        <a:lnSpc>
+                          <a:spcPts val="3360"/>
+                        </a:lnSpc>
+                        <a:spcBef>
+                          <a:spcPct val="0"/>
+                        </a:spcBef>
+                        <a:defRPr/>
+                      </a:pPr>
+                      <a:r>
+                        <a:rPr lang="en-US" b="true" sz="2400" strike="noStrike" u="none">
+                          <a:solidFill>
+                            <a:srgbClr val="000000"/>
+                          </a:solidFill>
+                          <a:latin typeface="Red Hat Display Bold"/>
+                          <a:ea typeface="Red Hat Display Bold"/>
+                          <a:cs typeface="Red Hat Display Bold"/>
+                          <a:sym typeface="Red Hat Display Bold"/>
+                        </a:rPr>
+                        <a:t>11,89/1,47</a:t>
+                      </a:r>
+                      <a:endParaRPr lang="en-US" sz="1100"/>
+                    </a:p>
+                  </a:txBody>
+                  <a:tcPr marL="76200" marR="76200" marT="76200" marB="76200" anchor="ctr">
+                    <a:lnL cmpd="sng" algn="ctr" cap="flat" w="9525">
+                      <a:solidFill>
+                        <a:srgbClr val="D9D9D9"/>
+                      </a:solidFill>
+                      <a:prstDash val="solid"/>
+                      <a:round/>
+                      <a:headEnd type="none" w="med" len="med"/>
+                      <a:tailEnd type="none" w="med" len="med"/>
+                    </a:lnL>
+                    <a:lnR cmpd="sng" algn="ctr" cap="flat" w="9525">
+                      <a:solidFill>
+                        <a:srgbClr val="D9D9D9"/>
+                      </a:solidFill>
+                      <a:prstDash val="solid"/>
+                      <a:round/>
+                      <a:headEnd type="none" w="med" len="med"/>
+                      <a:tailEnd type="none" w="med" len="med"/>
+                    </a:lnR>
+                    <a:lnT cmpd="sng" algn="ctr" cap="flat" w="9525">
+                      <a:solidFill>
+                        <a:srgbClr val="D9D9D9"/>
+                      </a:solidFill>
+                      <a:prstDash val="solid"/>
+                      <a:round/>
+                      <a:headEnd type="none" w="med" len="med"/>
+                      <a:tailEnd type="none" w="med" len="med"/>
+                    </a:lnT>
+                    <a:lnB cmpd="sng" algn="ctr" cap="flat" w="9525">
+                      <a:solidFill>
+                        <a:srgbClr val="D9D9D9"/>
+                      </a:solidFill>
+                      <a:prstDash val="solid"/>
+                      <a:round/>
+                      <a:headEnd type="none" w="med" len="med"/>
+                      <a:tailEnd type="none" w="med" len="med"/>
+                    </a:lnB>
+                    <a:solidFill>
+                      <a:srgbClr val="FFFFFF"/>
+                    </a:solidFill>
+                  </a:tcPr>
+                </a:tc>
+                <a:tc>
+                  <a:txBody>
+                    <a:bodyPr anchor="t" rtlCol="false"/>
+                    <a:lstStyle/>
+                    <a:p>
+                      <a:pPr algn="ctr" marL="0" indent="0" lvl="0">
+                        <a:lnSpc>
+                          <a:spcPts val="3360"/>
+                        </a:lnSpc>
+                        <a:spcBef>
+                          <a:spcPct val="0"/>
+                        </a:spcBef>
+                        <a:defRPr/>
+                      </a:pPr>
+                      <a:r>
+                        <a:rPr lang="en-US" b="true" sz="2400" strike="noStrike" u="none">
+                          <a:solidFill>
+                            <a:srgbClr val="000000"/>
+                          </a:solidFill>
+                          <a:latin typeface="Red Hat Display Bold"/>
+                          <a:ea typeface="Red Hat Display Bold"/>
+                          <a:cs typeface="Red Hat Display Bold"/>
+                          <a:sym typeface="Red Hat Display Bold"/>
+                        </a:rPr>
+                        <a:t>1,50/1,68</a:t>
+                      </a:r>
+                      <a:endParaRPr lang="en-US" sz="1100"/>
+                    </a:p>
+                  </a:txBody>
+                  <a:tcPr marL="76200" marR="76200" marT="76200" marB="76200" anchor="ctr">
+                    <a:lnL cmpd="sng" algn="ctr" cap="flat" w="9525">
+                      <a:solidFill>
+                        <a:srgbClr val="D9D9D9"/>
+                      </a:solidFill>
+                      <a:prstDash val="solid"/>
+                      <a:round/>
+                      <a:headEnd type="none" w="med" len="med"/>
+                      <a:tailEnd type="none" w="med" len="med"/>
+                    </a:lnL>
+                    <a:lnR cmpd="sng" algn="ctr" cap="flat" w="9525">
+                      <a:solidFill>
+                        <a:srgbClr val="D9D9D9"/>
+                      </a:solidFill>
+                      <a:prstDash val="solid"/>
+                      <a:round/>
+                      <a:headEnd type="none" w="med" len="med"/>
+                      <a:tailEnd type="none" w="med" len="med"/>
+                    </a:lnR>
+                    <a:lnT cmpd="sng" algn="ctr" cap="flat" w="9525">
+                      <a:solidFill>
+                        <a:srgbClr val="D9D9D9"/>
+                      </a:solidFill>
+                      <a:prstDash val="solid"/>
+                      <a:round/>
+                      <a:headEnd type="none" w="med" len="med"/>
+                      <a:tailEnd type="none" w="med" len="med"/>
+                    </a:lnT>
+                    <a:lnB cmpd="sng" algn="ctr" cap="flat" w="9525">
+                      <a:solidFill>
+                        <a:srgbClr val="D9D9D9"/>
+                      </a:solidFill>
+                      <a:prstDash val="solid"/>
+                      <a:round/>
+                      <a:headEnd type="none" w="med" len="med"/>
+                      <a:tailEnd type="none" w="med" len="med"/>
+                    </a:lnB>
+                    <a:solidFill>
+                      <a:srgbClr val="FFFFFF"/>
+                    </a:solidFill>
+                  </a:tcPr>
+                </a:tc>
+                <a:tc>
+                  <a:txBody>
+                    <a:bodyPr anchor="t" rtlCol="false"/>
+                    <a:lstStyle/>
+                    <a:p>
+                      <a:pPr algn="ctr" marL="0" indent="0" lvl="0">
+                        <a:lnSpc>
+                          <a:spcPts val="3360"/>
+                        </a:lnSpc>
+                        <a:spcBef>
+                          <a:spcPct val="0"/>
+                        </a:spcBef>
+                        <a:defRPr/>
+                      </a:pPr>
+                      <a:r>
+                        <a:rPr lang="en-US" b="true" sz="2400" strike="noStrike" u="none">
+                          <a:solidFill>
+                            <a:srgbClr val="000000"/>
+                          </a:solidFill>
+                          <a:latin typeface="Red Hat Display Bold"/>
+                          <a:ea typeface="Red Hat Display Bold"/>
+                          <a:cs typeface="Red Hat Display Bold"/>
+                          <a:sym typeface="Red Hat Display Bold"/>
+                        </a:rPr>
+                        <a:t>27,35/1,68</a:t>
+                      </a:r>
+                      <a:endParaRPr lang="en-US" sz="1100"/>
+                    </a:p>
+                  </a:txBody>
+                  <a:tcPr marL="76200" marR="76200" marT="76200" marB="76200" anchor="ctr">
+                    <a:lnL cmpd="sng" algn="ctr" cap="flat" w="9525">
+                      <a:solidFill>
+                        <a:srgbClr val="D9D9D9"/>
+                      </a:solidFill>
+                      <a:prstDash val="solid"/>
+                      <a:round/>
+                      <a:headEnd type="none" w="med" len="med"/>
+                      <a:tailEnd type="none" w="med" len="med"/>
+                    </a:lnL>
+                    <a:lnR cmpd="sng" algn="ctr" cap="flat" w="9525">
+                      <a:solidFill>
+                        <a:srgbClr val="D9D9D9"/>
+                      </a:solidFill>
+                      <a:prstDash val="solid"/>
+                      <a:round/>
+                      <a:headEnd type="none" w="med" len="med"/>
+                      <a:tailEnd type="none" w="med" len="med"/>
+                    </a:lnR>
+                    <a:lnT cmpd="sng" algn="ctr" cap="flat" w="9525">
+                      <a:solidFill>
+                        <a:srgbClr val="D9D9D9"/>
+                      </a:solidFill>
+                      <a:prstDash val="solid"/>
+                      <a:round/>
+                      <a:headEnd type="none" w="med" len="med"/>
+                      <a:tailEnd type="none" w="med" len="med"/>
+                    </a:lnT>
+                    <a:lnB cmpd="sng" algn="ctr" cap="flat" w="9525">
+                      <a:solidFill>
+                        <a:srgbClr val="D9D9D9"/>
+                      </a:solidFill>
+                      <a:prstDash val="solid"/>
+                      <a:round/>
+                      <a:headEnd type="none" w="med" len="med"/>
+                      <a:tailEnd type="none" w="med" len="med"/>
+                    </a:lnB>
+                    <a:solidFill>
+                      <a:srgbClr val="FFFFFF"/>
+                    </a:solidFill>
+                  </a:tcPr>
+                </a:tc>
+                <a:tc>
+                  <a:txBody>
+                    <a:bodyPr anchor="t" rtlCol="false"/>
+                    <a:lstStyle/>
+                    <a:p>
+                      <a:pPr algn="ctr" marL="0" indent="0" lvl="0">
+                        <a:lnSpc>
+                          <a:spcPts val="3360"/>
+                        </a:lnSpc>
+                        <a:spcBef>
+                          <a:spcPct val="0"/>
+                        </a:spcBef>
+                        <a:defRPr/>
+                      </a:pPr>
+                      <a:r>
+                        <a:rPr lang="en-US" b="true" sz="2400" strike="noStrike" u="none">
+                          <a:solidFill>
+                            <a:srgbClr val="000000"/>
+                          </a:solidFill>
+                          <a:latin typeface="Red Hat Display Bold"/>
+                          <a:ea typeface="Red Hat Display Bold"/>
+                          <a:cs typeface="Red Hat Display Bold"/>
+                          <a:sym typeface="Red Hat Display Bold"/>
+                        </a:rPr>
+                        <a:t>✅ eGARCH</a:t>
+                      </a:r>
+                      <a:endParaRPr lang="en-US" sz="1100"/>
+                    </a:p>
+                  </a:txBody>
+                  <a:tcPr marL="76200" marR="76200" marT="76200" marB="76200" anchor="ctr">
+                    <a:lnL cmpd="sng" algn="ctr" cap="flat" w="9525">
+                      <a:solidFill>
+                        <a:srgbClr val="D9D9D9"/>
+                      </a:solidFill>
+                      <a:prstDash val="solid"/>
+                      <a:round/>
+                      <a:headEnd type="none" w="med" len="med"/>
+                      <a:tailEnd type="none" w="med" len="med"/>
+                    </a:lnL>
+                    <a:lnR cmpd="sng" algn="ctr" cap="flat" w="9525">
+                      <a:solidFill>
+                        <a:srgbClr val="D9D9D9"/>
+                      </a:solidFill>
+                      <a:prstDash val="solid"/>
+                      <a:round/>
+                      <a:headEnd type="none" w="med" len="med"/>
+                      <a:tailEnd type="none" w="med" len="med"/>
+                    </a:lnR>
+                    <a:lnT cmpd="sng" algn="ctr" cap="flat" w="9525">
+                      <a:solidFill>
+                        <a:srgbClr val="D9D9D9"/>
+                      </a:solidFill>
+                      <a:prstDash val="solid"/>
+                      <a:round/>
+                      <a:headEnd type="none" w="med" len="med"/>
+                      <a:tailEnd type="none" w="med" len="med"/>
+                    </a:lnT>
+                    <a:lnB cmpd="sng" algn="ctr" cap="flat" w="9525">
+                      <a:solidFill>
+                        <a:srgbClr val="D9D9D9"/>
+                      </a:solidFill>
+                      <a:prstDash val="solid"/>
+                      <a:round/>
+                      <a:headEnd type="none" w="med" len="med"/>
+                      <a:tailEnd type="none" w="med" len="med"/>
+                    </a:lnB>
+                    <a:solidFill>
+                      <a:srgbClr val="FFFFFF"/>
+                    </a:solidFill>
+                  </a:tcPr>
+                </a:tc>
+              </a:tr>
+              <a:tr h="1039983">
+                <a:tc>
+                  <a:txBody>
+                    <a:bodyPr anchor="t" rtlCol="false"/>
+                    <a:lstStyle/>
+                    <a:p>
+                      <a:pPr algn="ctr" marL="0" indent="0" lvl="0">
+                        <a:lnSpc>
+                          <a:spcPts val="3360"/>
+                        </a:lnSpc>
+                        <a:spcBef>
+                          <a:spcPct val="0"/>
+                        </a:spcBef>
+                        <a:defRPr/>
+                      </a:pPr>
+                      <a:r>
+                        <a:rPr lang="en-US" sz="2400" strike="noStrike" u="none">
+                          <a:solidFill>
+                            <a:srgbClr val="000000"/>
+                          </a:solidFill>
+                          <a:latin typeface="Red Hat Display"/>
+                          <a:ea typeface="Red Hat Display"/>
+                          <a:cs typeface="Red Hat Display"/>
+                          <a:sym typeface="Red Hat Display"/>
+                        </a:rPr>
+                        <a:t>Pearson GOF</a:t>
+                      </a:r>
+                      <a:endParaRPr lang="en-US" sz="1100"/>
+                    </a:p>
+                  </a:txBody>
+                  <a:tcPr marL="76200" marR="76200" marT="76200" marB="76200" anchor="ctr">
+                    <a:lnL cmpd="sng" algn="ctr" cap="flat" w="9525">
+                      <a:solidFill>
+                        <a:srgbClr val="D9D9D9"/>
+                      </a:solidFill>
+                      <a:prstDash val="solid"/>
+                      <a:round/>
+                      <a:headEnd type="none" w="med" len="med"/>
+                      <a:tailEnd type="none" w="med" len="med"/>
+                    </a:lnL>
+                    <a:lnR cmpd="sng" algn="ctr" cap="flat" w="9525">
+                      <a:solidFill>
+                        <a:srgbClr val="D9D9D9"/>
+                      </a:solidFill>
+                      <a:prstDash val="solid"/>
+                      <a:round/>
+                      <a:headEnd type="none" w="med" len="med"/>
+                      <a:tailEnd type="none" w="med" len="med"/>
+                    </a:lnR>
+                    <a:lnT cmpd="sng" algn="ctr" cap="flat" w="9525">
+                      <a:solidFill>
+                        <a:srgbClr val="D9D9D9"/>
+                      </a:solidFill>
+                      <a:prstDash val="solid"/>
+                      <a:round/>
+                      <a:headEnd type="none" w="med" len="med"/>
+                      <a:tailEnd type="none" w="med" len="med"/>
+                    </a:lnT>
+                    <a:lnB cmpd="sng" algn="ctr" cap="flat" w="9525">
+                      <a:solidFill>
+                        <a:srgbClr val="D9D9D9"/>
+                      </a:solidFill>
+                      <a:prstDash val="solid"/>
+                      <a:round/>
+                      <a:headEnd type="none" w="med" len="med"/>
+                      <a:tailEnd type="none" w="med" len="med"/>
+                    </a:lnB>
+                    <a:solidFill>
+                      <a:srgbClr val="FFFFFF"/>
+                    </a:solidFill>
+                  </a:tcPr>
+                </a:tc>
+                <a:tc>
+                  <a:txBody>
+                    <a:bodyPr anchor="t" rtlCol="false"/>
+                    <a:lstStyle/>
+                    <a:p>
+                      <a:pPr algn="ctr" marL="0" indent="0" lvl="0">
+                        <a:lnSpc>
+                          <a:spcPts val="3360"/>
+                        </a:lnSpc>
+                        <a:spcBef>
+                          <a:spcPct val="0"/>
+                        </a:spcBef>
+                        <a:defRPr/>
+                      </a:pPr>
+                      <a:r>
+                        <a:rPr lang="en-US" sz="2400" strike="noStrike" u="none">
+                          <a:solidFill>
+                            <a:srgbClr val="000000"/>
+                          </a:solidFill>
+                          <a:latin typeface="Red Hat Display"/>
+                          <a:ea typeface="Red Hat Display"/>
+                          <a:cs typeface="Red Hat Display"/>
+                          <a:sym typeface="Red Hat Display"/>
+                        </a:rPr>
+                        <a:t>≈ 0</a:t>
+                      </a:r>
+                      <a:endParaRPr lang="en-US" sz="1100"/>
+                    </a:p>
+                  </a:txBody>
+                  <a:tcPr marL="76200" marR="76200" marT="76200" marB="76200" anchor="ctr">
+                    <a:lnL cmpd="sng" algn="ctr" cap="flat" w="9525">
+                      <a:solidFill>
+                        <a:srgbClr val="D9D9D9"/>
+                      </a:solidFill>
+                      <a:prstDash val="solid"/>
+                      <a:round/>
+                      <a:headEnd type="none" w="med" len="med"/>
+                      <a:tailEnd type="none" w="med" len="med"/>
+                    </a:lnL>
+                    <a:lnR cmpd="sng" algn="ctr" cap="flat" w="9525">
+                      <a:solidFill>
+                        <a:srgbClr val="D9D9D9"/>
+                      </a:solidFill>
+                      <a:prstDash val="solid"/>
+                      <a:round/>
+                      <a:headEnd type="none" w="med" len="med"/>
+                      <a:tailEnd type="none" w="med" len="med"/>
+                    </a:lnR>
+                    <a:lnT cmpd="sng" algn="ctr" cap="flat" w="9525">
+                      <a:solidFill>
+                        <a:srgbClr val="D9D9D9"/>
+                      </a:solidFill>
+                      <a:prstDash val="solid"/>
+                      <a:round/>
+                      <a:headEnd type="none" w="med" len="med"/>
+                      <a:tailEnd type="none" w="med" len="med"/>
+                    </a:lnT>
+                    <a:lnB cmpd="sng" algn="ctr" cap="flat" w="9525">
+                      <a:solidFill>
+                        <a:srgbClr val="D9D9D9"/>
+                      </a:solidFill>
+                      <a:prstDash val="solid"/>
+                      <a:round/>
+                      <a:headEnd type="none" w="med" len="med"/>
+                      <a:tailEnd type="none" w="med" len="med"/>
+                    </a:lnB>
+                    <a:solidFill>
+                      <a:srgbClr val="FFFFFF"/>
+                    </a:solidFill>
+                  </a:tcPr>
+                </a:tc>
+                <a:tc>
+                  <a:txBody>
+                    <a:bodyPr anchor="t" rtlCol="false"/>
+                    <a:lstStyle/>
+                    <a:p>
+                      <a:pPr algn="ctr" marL="0" indent="0" lvl="0">
+                        <a:lnSpc>
+                          <a:spcPts val="3360"/>
+                        </a:lnSpc>
+                        <a:spcBef>
+                          <a:spcPct val="0"/>
+                        </a:spcBef>
+                        <a:defRPr/>
+                      </a:pPr>
+                      <a:r>
+                        <a:rPr lang="en-US" sz="2400" strike="noStrike" u="none">
+                          <a:solidFill>
+                            <a:srgbClr val="000000"/>
+                          </a:solidFill>
+                          <a:latin typeface="Red Hat Display"/>
+                          <a:ea typeface="Red Hat Display"/>
+                          <a:cs typeface="Red Hat Display"/>
+                          <a:sym typeface="Red Hat Display"/>
+                        </a:rPr>
+                        <a:t>1,4 × 10⁻¹¹</a:t>
+                      </a:r>
+                      <a:endParaRPr lang="en-US" sz="1100"/>
+                    </a:p>
+                  </a:txBody>
+                  <a:tcPr marL="76200" marR="76200" marT="76200" marB="76200" anchor="ctr">
+                    <a:lnL cmpd="sng" algn="ctr" cap="flat" w="9525">
+                      <a:solidFill>
+                        <a:srgbClr val="D9D9D9"/>
+                      </a:solidFill>
+                      <a:prstDash val="solid"/>
+                      <a:round/>
+                      <a:headEnd type="none" w="med" len="med"/>
+                      <a:tailEnd type="none" w="med" len="med"/>
+                    </a:lnL>
+                    <a:lnR cmpd="sng" algn="ctr" cap="flat" w="9525">
+                      <a:solidFill>
+                        <a:srgbClr val="D9D9D9"/>
+                      </a:solidFill>
+                      <a:prstDash val="solid"/>
+                      <a:round/>
+                      <a:headEnd type="none" w="med" len="med"/>
+                      <a:tailEnd type="none" w="med" len="med"/>
+                    </a:lnR>
+                    <a:lnT cmpd="sng" algn="ctr" cap="flat" w="9525">
+                      <a:solidFill>
+                        <a:srgbClr val="D9D9D9"/>
+                      </a:solidFill>
+                      <a:prstDash val="solid"/>
+                      <a:round/>
+                      <a:headEnd type="none" w="med" len="med"/>
+                      <a:tailEnd type="none" w="med" len="med"/>
+                    </a:lnT>
+                    <a:lnB cmpd="sng" algn="ctr" cap="flat" w="9525">
+                      <a:solidFill>
+                        <a:srgbClr val="D9D9D9"/>
+                      </a:solidFill>
+                      <a:prstDash val="solid"/>
+                      <a:round/>
+                      <a:headEnd type="none" w="med" len="med"/>
+                      <a:tailEnd type="none" w="med" len="med"/>
+                    </a:lnB>
+                    <a:solidFill>
+                      <a:srgbClr val="FFFFFF"/>
+                    </a:solidFill>
+                  </a:tcPr>
+                </a:tc>
+                <a:tc>
+                  <a:txBody>
+                    <a:bodyPr anchor="t" rtlCol="false"/>
+                    <a:lstStyle/>
+                    <a:p>
+                      <a:pPr algn="ctr" marL="0" indent="0" lvl="0">
+                        <a:lnSpc>
+                          <a:spcPts val="3360"/>
+                        </a:lnSpc>
+                        <a:spcBef>
+                          <a:spcPct val="0"/>
+                        </a:spcBef>
+                        <a:defRPr/>
+                      </a:pPr>
+                      <a:r>
+                        <a:rPr lang="en-US" sz="2400" strike="noStrike" u="none">
+                          <a:solidFill>
+                            <a:srgbClr val="000000"/>
+                          </a:solidFill>
+                          <a:latin typeface="Red Hat Display"/>
+                          <a:ea typeface="Red Hat Display"/>
+                          <a:cs typeface="Red Hat Display"/>
+                          <a:sym typeface="Red Hat Display"/>
+                        </a:rPr>
+                        <a:t>2,0 × 10⁻¹⁵</a:t>
+                      </a:r>
+                      <a:endParaRPr lang="en-US" sz="1100"/>
+                    </a:p>
+                  </a:txBody>
+                  <a:tcPr marL="76200" marR="76200" marT="76200" marB="76200" anchor="ctr">
+                    <a:lnL cmpd="sng" algn="ctr" cap="flat" w="9525">
+                      <a:solidFill>
+                        <a:srgbClr val="D9D9D9"/>
+                      </a:solidFill>
+                      <a:prstDash val="solid"/>
+                      <a:round/>
+                      <a:headEnd type="none" w="med" len="med"/>
+                      <a:tailEnd type="none" w="med" len="med"/>
+                    </a:lnL>
+                    <a:lnR cmpd="sng" algn="ctr" cap="flat" w="9525">
+                      <a:solidFill>
+                        <a:srgbClr val="D9D9D9"/>
+                      </a:solidFill>
+                      <a:prstDash val="solid"/>
+                      <a:round/>
+                      <a:headEnd type="none" w="med" len="med"/>
+                      <a:tailEnd type="none" w="med" len="med"/>
+                    </a:lnR>
+                    <a:lnT cmpd="sng" algn="ctr" cap="flat" w="9525">
+                      <a:solidFill>
+                        <a:srgbClr val="D9D9D9"/>
+                      </a:solidFill>
+                      <a:prstDash val="solid"/>
+                      <a:round/>
+                      <a:headEnd type="none" w="med" len="med"/>
+                      <a:tailEnd type="none" w="med" len="med"/>
+                    </a:lnT>
+                    <a:lnB cmpd="sng" algn="ctr" cap="flat" w="9525">
+                      <a:solidFill>
+                        <a:srgbClr val="D9D9D9"/>
+                      </a:solidFill>
+                      <a:prstDash val="solid"/>
+                      <a:round/>
+                      <a:headEnd type="none" w="med" len="med"/>
+                      <a:tailEnd type="none" w="med" len="med"/>
+                    </a:lnB>
+                    <a:solidFill>
+                      <a:srgbClr val="FFFFFF"/>
+                    </a:solidFill>
+                  </a:tcPr>
+                </a:tc>
+                <a:tc>
+                  <a:txBody>
+                    <a:bodyPr anchor="t" rtlCol="false"/>
+                    <a:lstStyle/>
+                    <a:p>
+                      <a:pPr algn="ctr" marL="0" indent="0" lvl="0">
+                        <a:lnSpc>
+                          <a:spcPts val="3360"/>
+                        </a:lnSpc>
+                        <a:spcBef>
+                          <a:spcPct val="0"/>
+                        </a:spcBef>
+                        <a:defRPr/>
+                      </a:pPr>
+                      <a:r>
+                        <a:rPr lang="en-US" sz="2400" strike="noStrike" u="none">
+                          <a:solidFill>
+                            <a:srgbClr val="000000"/>
+                          </a:solidFill>
+                          <a:latin typeface="Red Hat Display"/>
+                          <a:ea typeface="Red Hat Display"/>
+                          <a:cs typeface="Red Hat Display"/>
+                          <a:sym typeface="Red Hat Display"/>
+                        </a:rPr>
+                        <a:t>5,4 × 10⁻¹⁴</a:t>
+                      </a:r>
+                      <a:endParaRPr lang="en-US" sz="1100"/>
+                    </a:p>
+                  </a:txBody>
+                  <a:tcPr marL="76200" marR="76200" marT="76200" marB="76200" anchor="ctr">
+                    <a:lnL cmpd="sng" algn="ctr" cap="flat" w="9525">
+                      <a:solidFill>
+                        <a:srgbClr val="D9D9D9"/>
+                      </a:solidFill>
+                      <a:prstDash val="solid"/>
+                      <a:round/>
+                      <a:headEnd type="none" w="med" len="med"/>
+                      <a:tailEnd type="none" w="med" len="med"/>
+                    </a:lnL>
+                    <a:lnR cmpd="sng" algn="ctr" cap="flat" w="9525">
+                      <a:solidFill>
+                        <a:srgbClr val="D9D9D9"/>
+                      </a:solidFill>
+                      <a:prstDash val="solid"/>
+                      <a:round/>
+                      <a:headEnd type="none" w="med" len="med"/>
+                      <a:tailEnd type="none" w="med" len="med"/>
+                    </a:lnR>
+                    <a:lnT cmpd="sng" algn="ctr" cap="flat" w="9525">
+                      <a:solidFill>
+                        <a:srgbClr val="D9D9D9"/>
+                      </a:solidFill>
+                      <a:prstDash val="solid"/>
+                      <a:round/>
+                      <a:headEnd type="none" w="med" len="med"/>
+                      <a:tailEnd type="none" w="med" len="med"/>
+                    </a:lnT>
+                    <a:lnB cmpd="sng" algn="ctr" cap="flat" w="9525">
+                      <a:solidFill>
+                        <a:srgbClr val="D9D9D9"/>
+                      </a:solidFill>
+                      <a:prstDash val="solid"/>
+                      <a:round/>
+                      <a:headEnd type="none" w="med" len="med"/>
+                      <a:tailEnd type="none" w="med" len="med"/>
+                    </a:lnB>
+                    <a:solidFill>
+                      <a:srgbClr val="FFFFFF"/>
+                    </a:solidFill>
+                  </a:tcPr>
+                </a:tc>
+                <a:tc>
+                  <a:txBody>
+                    <a:bodyPr anchor="t" rtlCol="false"/>
+                    <a:lstStyle/>
+                    <a:p>
+                      <a:pPr algn="ctr" marL="0" indent="0" lvl="0">
+                        <a:lnSpc>
+                          <a:spcPts val="3360"/>
+                        </a:lnSpc>
+                        <a:spcBef>
+                          <a:spcPct val="0"/>
+                        </a:spcBef>
+                        <a:defRPr/>
+                      </a:pPr>
+                      <a:r>
+                        <a:rPr lang="en-US" sz="2400" strike="noStrike" u="none">
+                          <a:solidFill>
+                            <a:srgbClr val="000000"/>
+                          </a:solidFill>
+                          <a:latin typeface="Red Hat Display"/>
+                          <a:ea typeface="Red Hat Display"/>
+                          <a:cs typeface="Red Hat Display"/>
+                          <a:sym typeface="Red Hat Display"/>
+                        </a:rPr>
+                        <a:t>❌ Cả 4</a:t>
+                      </a:r>
+                      <a:endParaRPr lang="en-US" sz="1100"/>
+                    </a:p>
+                  </a:txBody>
+                  <a:tcPr marL="76200" marR="76200" marT="76200" marB="76200" anchor="ctr">
+                    <a:lnL cmpd="sng" algn="ctr" cap="flat" w="9525">
+                      <a:solidFill>
+                        <a:srgbClr val="D9D9D9"/>
+                      </a:solidFill>
+                      <a:prstDash val="solid"/>
+                      <a:round/>
+                      <a:headEnd type="none" w="med" len="med"/>
+                      <a:tailEnd type="none" w="med" len="med"/>
+                    </a:lnL>
+                    <a:lnR cmpd="sng" algn="ctr" cap="flat" w="9525">
+                      <a:solidFill>
+                        <a:srgbClr val="D9D9D9"/>
+                      </a:solidFill>
+                      <a:prstDash val="solid"/>
+                      <a:round/>
+                      <a:headEnd type="none" w="med" len="med"/>
+                      <a:tailEnd type="none" w="med" len="med"/>
+                    </a:lnR>
+                    <a:lnT cmpd="sng" algn="ctr" cap="flat" w="9525">
+                      <a:solidFill>
+                        <a:srgbClr val="D9D9D9"/>
+                      </a:solidFill>
+                      <a:prstDash val="solid"/>
+                      <a:round/>
+                      <a:headEnd type="none" w="med" len="med"/>
+                      <a:tailEnd type="none" w="med" len="med"/>
+                    </a:lnT>
+                    <a:lnB cmpd="sng" algn="ctr" cap="flat" w="9525">
+                      <a:solidFill>
+                        <a:srgbClr val="D9D9D9"/>
                       </a:solidFill>
                       <a:prstDash val="solid"/>
                       <a:round/>
@@ -11548,231 +12836,6 @@
           </a:graphicData>
         </a:graphic>
       </p:graphicFrame>
-      <p:sp>
-        <p:nvSpPr>
-          <p:cNvPr name="TextBox 11" id="11"/>
-          <p:cNvSpPr txBox="true"/>
-          <p:nvPr/>
-        </p:nvSpPr>
-        <p:spPr>
-          <a:xfrm rot="0">
-            <a:off x="2980865" y="5638164"/>
-            <a:ext cx="12188052" cy="1967230"/>
-          </a:xfrm>
-          <a:prstGeom prst="rect">
-            <a:avLst/>
-          </a:prstGeom>
-        </p:spPr>
-        <p:txBody>
-          <a:bodyPr anchor="t" rtlCol="false" tIns="0" lIns="0" bIns="0" rIns="0">
-            <a:spAutoFit/>
-          </a:bodyPr>
-          <a:lstStyle/>
-          <a:p>
-            <a:pPr algn="l">
-              <a:lnSpc>
-                <a:spcPts val="3919"/>
-              </a:lnSpc>
-            </a:pPr>
-            <a:r>
-              <a:rPr lang="en-US" sz="2799">
-                <a:solidFill>
-                  <a:srgbClr val="000000"/>
-                </a:solidFill>
-                <a:latin typeface="Red Hat Display"/>
-                <a:ea typeface="Red Hat Display"/>
-                <a:cs typeface="Red Hat Display"/>
-                <a:sym typeface="Red Hat Display"/>
-              </a:rPr>
-              <a:t>Lựa chọn:</a:t>
-            </a:r>
-            <a:r>
-              <a:rPr lang="en-US" sz="2799">
-                <a:solidFill>
-                  <a:srgbClr val="000000"/>
-                </a:solidFill>
-                <a:latin typeface="Red Hat Display"/>
-                <a:ea typeface="Red Hat Display"/>
-                <a:cs typeface="Red Hat Display"/>
-                <a:sym typeface="Red Hat Display"/>
-              </a:rPr>
-              <a:t> eGARCH-Student-t là ứng viên cân bằng vì:</a:t>
-            </a:r>
-          </a:p>
-          <a:p>
-            <a:pPr algn="l" marL="604518" indent="-302259" lvl="1">
-              <a:lnSpc>
-                <a:spcPts val="3919"/>
-              </a:lnSpc>
-              <a:buFont typeface="Arial"/>
-              <a:buChar char="•"/>
-            </a:pPr>
-            <a:r>
-              <a:rPr lang="en-US" sz="2799">
-                <a:solidFill>
-                  <a:srgbClr val="000000"/>
-                </a:solidFill>
-                <a:latin typeface="Red Hat Display"/>
-                <a:ea typeface="Red Hat Display"/>
-                <a:cs typeface="Red Hat Display"/>
-                <a:sym typeface="Red Hat Display"/>
-              </a:rPr>
-              <a:t>AIC chỉ kém GJR khoảng 0,00137.</a:t>
-            </a:r>
-          </a:p>
-          <a:p>
-            <a:pPr algn="l" marL="604518" indent="-302259" lvl="1">
-              <a:lnSpc>
-                <a:spcPts val="3919"/>
-              </a:lnSpc>
-              <a:buFont typeface="Arial"/>
-              <a:buChar char="•"/>
-            </a:pPr>
-            <a:r>
-              <a:rPr lang="en-US" sz="2799">
-                <a:solidFill>
-                  <a:srgbClr val="000000"/>
-                </a:solidFill>
-                <a:latin typeface="Red Hat Display"/>
-                <a:ea typeface="Red Hat Display"/>
-                <a:cs typeface="Red Hat Display"/>
-                <a:sym typeface="Red Hat Display"/>
-              </a:rPr>
-              <a:t>Core residual diagnostics đạt + Nyblom stability đạt.</a:t>
-            </a:r>
-          </a:p>
-          <a:p>
-            <a:pPr algn="l" marL="604518" indent="-302259" lvl="1">
-              <a:lnSpc>
-                <a:spcPts val="3919"/>
-              </a:lnSpc>
-              <a:buFont typeface="Arial"/>
-              <a:buChar char="•"/>
-            </a:pPr>
-            <a:r>
-              <a:rPr lang="en-US" sz="2799">
-                <a:solidFill>
-                  <a:srgbClr val="000000"/>
-                </a:solidFill>
-                <a:latin typeface="Red Hat Display"/>
-                <a:ea typeface="Red Hat Display"/>
-                <a:cs typeface="Red Hat Display"/>
-                <a:sym typeface="Red Hat Display"/>
-              </a:rPr>
-              <a:t>Tuy nhiên Pearson GOF bác bỏ distribution fit → đây là hạn chế.</a:t>
-            </a:r>
-          </a:p>
-        </p:txBody>
-      </p:sp>
-      <p:sp>
-        <p:nvSpPr>
-          <p:cNvPr name="TextBox 12" id="12"/>
-          <p:cNvSpPr txBox="true"/>
-          <p:nvPr/>
-        </p:nvSpPr>
-        <p:spPr>
-          <a:xfrm rot="0">
-            <a:off x="3752633" y="5105400"/>
-            <a:ext cx="10699707" cy="306705"/>
-          </a:xfrm>
-          <a:prstGeom prst="rect">
-            <a:avLst/>
-          </a:prstGeom>
-        </p:spPr>
-        <p:txBody>
-          <a:bodyPr anchor="t" rtlCol="false" tIns="0" lIns="0" bIns="0" rIns="0">
-            <a:spAutoFit/>
-          </a:bodyPr>
-          <a:lstStyle/>
-          <a:p>
-            <a:pPr algn="ctr">
-              <a:lnSpc>
-                <a:spcPts val="2520"/>
-              </a:lnSpc>
-              <a:spcBef>
-                <a:spcPct val="0"/>
-              </a:spcBef>
-            </a:pPr>
-            <a:r>
-              <a:rPr lang="en-US" b="true" sz="1800">
-                <a:solidFill>
-                  <a:srgbClr val="000000"/>
-                </a:solidFill>
-                <a:latin typeface="Red Hat Display Bold"/>
-                <a:ea typeface="Red Hat Display Bold"/>
-                <a:cs typeface="Red Hat Display Bold"/>
-                <a:sym typeface="Red Hat Display Bold"/>
-              </a:rPr>
-              <a:t>Bảng nguồn:</a:t>
-            </a:r>
-            <a:r>
-              <a:rPr lang="en-US" sz="1800">
-                <a:solidFill>
-                  <a:srgbClr val="000000"/>
-                </a:solidFill>
-                <a:latin typeface="Red Hat Display"/>
-                <a:ea typeface="Red Hat Display"/>
-                <a:cs typeface="Red Hat Display"/>
-                <a:sym typeface="Red Hat Display"/>
-              </a:rPr>
-              <a:t> output/tables/volatility_model_comparison.csv.</a:t>
-            </a:r>
-          </a:p>
-        </p:txBody>
-      </p:sp>
-      <p:sp>
-        <p:nvSpPr>
-          <p:cNvPr name="TextBox 13" id="13"/>
-          <p:cNvSpPr txBox="true"/>
-          <p:nvPr/>
-        </p:nvSpPr>
-        <p:spPr>
-          <a:xfrm rot="0">
-            <a:off x="1005119" y="7786370"/>
-            <a:ext cx="16194735" cy="1471930"/>
-          </a:xfrm>
-          <a:prstGeom prst="rect">
-            <a:avLst/>
-          </a:prstGeom>
-        </p:spPr>
-        <p:txBody>
-          <a:bodyPr anchor="t" rtlCol="false" tIns="0" lIns="0" bIns="0" rIns="0">
-            <a:spAutoFit/>
-          </a:bodyPr>
-          <a:lstStyle/>
-          <a:p>
-            <a:pPr algn="l">
-              <a:lnSpc>
-                <a:spcPts val="3919"/>
-              </a:lnSpc>
-            </a:pPr>
-            <a:r>
-              <a:rPr lang="en-US" sz="2799">
-                <a:solidFill>
-                  <a:srgbClr val="000000"/>
-                </a:solidFill>
-                <a:latin typeface="Red Hat Display"/>
-                <a:ea typeface="Red Hat Display"/>
-                <a:cs typeface="Red Hat Display"/>
-                <a:sym typeface="Red Hat Display"/>
-              </a:rPr>
-              <a:t>GJR-</a:t>
-            </a:r>
-            <a:r>
-              <a:rPr lang="en-US" sz="2799">
-                <a:solidFill>
-                  <a:srgbClr val="000000"/>
-                </a:solidFill>
-                <a:latin typeface="Red Hat Display"/>
-                <a:ea typeface="Red Hat Display"/>
-                <a:cs typeface="Red Hat Display"/>
-                <a:sym typeface="Red Hat Display"/>
-              </a:rPr>
-              <a:t>GARCH-t có AIC thấp nhất nhưng không đạt Nyblom joint stability. eGARCH-t chỉ kém 0,00137 AIC, đồng thời đạt core diagnostics và Nyblom stability, nên được chọn là ứng viên cân bằng. Đây không phải mô hình hoàn hảo vì Pearson GOF vẫn bác bỏ distribution fit.</a:t>
-            </a:r>
-          </a:p>
-        </p:txBody>
-      </p:sp>
     </p:spTree>
   </p:cSld>
   <p:clrMapOvr>
@@ -12149,6 +13212,2363 @@
           </a:blipFill>
         </p:spPr>
       </p:sp>
+      <p:graphicFrame>
+        <p:nvGraphicFramePr>
+          <p:cNvPr name="Table 10" id="10"/>
+          <p:cNvGraphicFramePr>
+            <a:graphicFrameLocks noGrp="true"/>
+          </p:cNvGraphicFramePr>
+          <p:nvPr/>
+        </p:nvGraphicFramePr>
+        <p:xfrm>
+          <a:off x="2986250" y="1351619"/>
+          <a:ext cx="12232473" cy="3695700"/>
+        </p:xfrm>
+        <a:graphic>
+          <a:graphicData uri="http://schemas.openxmlformats.org/drawingml/2006/table">
+            <a:tbl>
+              <a:tblPr/>
+              <a:tblGrid>
+                <a:gridCol w="2446495"/>
+                <a:gridCol w="2446495"/>
+                <a:gridCol w="2446495"/>
+                <a:gridCol w="2446495"/>
+                <a:gridCol w="2446495"/>
+              </a:tblGrid>
+              <a:tr h="1077912">
+                <a:tc>
+                  <a:txBody>
+                    <a:bodyPr anchor="t" rtlCol="false"/>
+                    <a:lstStyle/>
+                    <a:p>
+                      <a:pPr algn="ctr" marL="0" indent="0" lvl="0">
+                        <a:lnSpc>
+                          <a:spcPts val="3360"/>
+                        </a:lnSpc>
+                        <a:spcBef>
+                          <a:spcPct val="0"/>
+                        </a:spcBef>
+                        <a:defRPr/>
+                      </a:pPr>
+                      <a:r>
+                        <a:rPr lang="en-US" b="true" sz="2400" strike="noStrike" u="none">
+                          <a:solidFill>
+                            <a:srgbClr val="000000"/>
+                          </a:solidFill>
+                          <a:latin typeface="Red Hat Display Bold"/>
+                          <a:ea typeface="Red Hat Display Bold"/>
+                          <a:cs typeface="Red Hat Display Bold"/>
+                          <a:sym typeface="Red Hat Display Bold"/>
+                        </a:rPr>
+                        <a:t>Model</a:t>
+                      </a:r>
+                      <a:endParaRPr lang="en-US" sz="1100"/>
+                    </a:p>
+                  </a:txBody>
+                  <a:tcPr marL="76200" marR="76200" marT="76200" marB="76200" anchor="ctr">
+                    <a:lnL cmpd="sng" algn="ctr" cap="flat" w="38100">
+                      <a:solidFill>
+                        <a:srgbClr val="000000"/>
+                      </a:solidFill>
+                      <a:prstDash val="solid"/>
+                      <a:round/>
+                      <a:headEnd type="none" w="med" len="med"/>
+                      <a:tailEnd type="none" w="med" len="med"/>
+                    </a:lnL>
+                    <a:lnR cmpd="sng" algn="ctr" cap="flat" w="38100">
+                      <a:solidFill>
+                        <a:srgbClr val="000000"/>
+                      </a:solidFill>
+                      <a:prstDash val="solid"/>
+                      <a:round/>
+                      <a:headEnd type="none" w="med" len="med"/>
+                      <a:tailEnd type="none" w="med" len="med"/>
+                    </a:lnR>
+                    <a:lnT cmpd="sng" algn="ctr" cap="flat" w="38100">
+                      <a:solidFill>
+                        <a:srgbClr val="000000"/>
+                      </a:solidFill>
+                      <a:prstDash val="solid"/>
+                      <a:round/>
+                      <a:headEnd type="none" w="med" len="med"/>
+                      <a:tailEnd type="none" w="med" len="med"/>
+                    </a:lnT>
+                    <a:lnB cmpd="sng" algn="ctr" cap="flat" w="38100">
+                      <a:solidFill>
+                        <a:srgbClr val="000000"/>
+                      </a:solidFill>
+                      <a:prstDash val="solid"/>
+                      <a:round/>
+                      <a:headEnd type="none" w="med" len="med"/>
+                      <a:tailEnd type="none" w="med" len="med"/>
+                    </a:lnB>
+                    <a:solidFill>
+                      <a:srgbClr val="FFFFFF"/>
+                    </a:solidFill>
+                  </a:tcPr>
+                </a:tc>
+                <a:tc>
+                  <a:txBody>
+                    <a:bodyPr anchor="t" rtlCol="false"/>
+                    <a:lstStyle/>
+                    <a:p>
+                      <a:pPr algn="ctr" marL="0" indent="0" lvl="0">
+                        <a:lnSpc>
+                          <a:spcPts val="3360"/>
+                        </a:lnSpc>
+                        <a:spcBef>
+                          <a:spcPct val="0"/>
+                        </a:spcBef>
+                        <a:defRPr/>
+                      </a:pPr>
+                      <a:r>
+                        <a:rPr lang="en-US" b="true" sz="2400" strike="noStrike" u="none">
+                          <a:solidFill>
+                            <a:srgbClr val="000000"/>
+                          </a:solidFill>
+                          <a:latin typeface="Red Hat Display Bold"/>
+                          <a:ea typeface="Red Hat Display Bold"/>
+                          <a:cs typeface="Red Hat Display Bold"/>
+                          <a:sym typeface="Red Hat Display Bold"/>
+                        </a:rPr>
+                        <a:t>AIC</a:t>
+                      </a:r>
+                      <a:endParaRPr lang="en-US" sz="1100"/>
+                    </a:p>
+                  </a:txBody>
+                  <a:tcPr marL="76200" marR="76200" marT="76200" marB="76200" anchor="ctr">
+                    <a:lnL cmpd="sng" algn="ctr" cap="flat" w="38100">
+                      <a:solidFill>
+                        <a:srgbClr val="000000"/>
+                      </a:solidFill>
+                      <a:prstDash val="solid"/>
+                      <a:round/>
+                      <a:headEnd type="none" w="med" len="med"/>
+                      <a:tailEnd type="none" w="med" len="med"/>
+                    </a:lnL>
+                    <a:lnR cmpd="sng" algn="ctr" cap="flat" w="38100">
+                      <a:solidFill>
+                        <a:srgbClr val="000000"/>
+                      </a:solidFill>
+                      <a:prstDash val="solid"/>
+                      <a:round/>
+                      <a:headEnd type="none" w="med" len="med"/>
+                      <a:tailEnd type="none" w="med" len="med"/>
+                    </a:lnR>
+                    <a:lnT cmpd="sng" algn="ctr" cap="flat" w="38100">
+                      <a:solidFill>
+                        <a:srgbClr val="000000"/>
+                      </a:solidFill>
+                      <a:prstDash val="solid"/>
+                      <a:round/>
+                      <a:headEnd type="none" w="med" len="med"/>
+                      <a:tailEnd type="none" w="med" len="med"/>
+                    </a:lnT>
+                    <a:lnB cmpd="sng" algn="ctr" cap="flat" w="38100">
+                      <a:solidFill>
+                        <a:srgbClr val="000000"/>
+                      </a:solidFill>
+                      <a:prstDash val="solid"/>
+                      <a:round/>
+                      <a:headEnd type="none" w="med" len="med"/>
+                      <a:tailEnd type="none" w="med" len="med"/>
+                    </a:lnB>
+                    <a:solidFill>
+                      <a:srgbClr val="FFFFFF"/>
+                    </a:solidFill>
+                  </a:tcPr>
+                </a:tc>
+                <a:tc>
+                  <a:txBody>
+                    <a:bodyPr anchor="t" rtlCol="false"/>
+                    <a:lstStyle/>
+                    <a:p>
+                      <a:pPr algn="ctr" marL="0" indent="0" lvl="0">
+                        <a:lnSpc>
+                          <a:spcPts val="3360"/>
+                        </a:lnSpc>
+                        <a:spcBef>
+                          <a:spcPct val="0"/>
+                        </a:spcBef>
+                        <a:defRPr/>
+                      </a:pPr>
+                      <a:r>
+                        <a:rPr lang="en-US" b="true" sz="2400" strike="noStrike" u="none">
+                          <a:solidFill>
+                            <a:srgbClr val="000000"/>
+                          </a:solidFill>
+                          <a:latin typeface="Red Hat Display Bold"/>
+                          <a:ea typeface="Red Hat Display Bold"/>
+                          <a:cs typeface="Red Hat Display Bold"/>
+                          <a:sym typeface="Red Hat Display Bold"/>
+                        </a:rPr>
+                        <a:t>Persistence</a:t>
+                      </a:r>
+                      <a:endParaRPr lang="en-US" sz="1100"/>
+                    </a:p>
+                  </a:txBody>
+                  <a:tcPr marL="76200" marR="76200" marT="76200" marB="76200" anchor="ctr">
+                    <a:lnL cmpd="sng" algn="ctr" cap="flat" w="38100">
+                      <a:solidFill>
+                        <a:srgbClr val="000000"/>
+                      </a:solidFill>
+                      <a:prstDash val="solid"/>
+                      <a:round/>
+                      <a:headEnd type="none" w="med" len="med"/>
+                      <a:tailEnd type="none" w="med" len="med"/>
+                    </a:lnL>
+                    <a:lnR cmpd="sng" algn="ctr" cap="flat" w="38100">
+                      <a:solidFill>
+                        <a:srgbClr val="000000"/>
+                      </a:solidFill>
+                      <a:prstDash val="solid"/>
+                      <a:round/>
+                      <a:headEnd type="none" w="med" len="med"/>
+                      <a:tailEnd type="none" w="med" len="med"/>
+                    </a:lnR>
+                    <a:lnT cmpd="sng" algn="ctr" cap="flat" w="38100">
+                      <a:solidFill>
+                        <a:srgbClr val="000000"/>
+                      </a:solidFill>
+                      <a:prstDash val="solid"/>
+                      <a:round/>
+                      <a:headEnd type="none" w="med" len="med"/>
+                      <a:tailEnd type="none" w="med" len="med"/>
+                    </a:lnT>
+                    <a:lnB cmpd="sng" algn="ctr" cap="flat" w="38100">
+                      <a:solidFill>
+                        <a:srgbClr val="000000"/>
+                      </a:solidFill>
+                      <a:prstDash val="solid"/>
+                      <a:round/>
+                      <a:headEnd type="none" w="med" len="med"/>
+                      <a:tailEnd type="none" w="med" len="med"/>
+                    </a:lnB>
+                    <a:solidFill>
+                      <a:srgbClr val="FFFFFF"/>
+                    </a:solidFill>
+                  </a:tcPr>
+                </a:tc>
+                <a:tc>
+                  <a:txBody>
+                    <a:bodyPr anchor="t" rtlCol="false"/>
+                    <a:lstStyle/>
+                    <a:p>
+                      <a:pPr algn="ctr" marL="0" indent="0" lvl="0">
+                        <a:lnSpc>
+                          <a:spcPts val="3360"/>
+                        </a:lnSpc>
+                        <a:spcBef>
+                          <a:spcPct val="0"/>
+                        </a:spcBef>
+                        <a:defRPr/>
+                      </a:pPr>
+                      <a:r>
+                        <a:rPr lang="en-US" b="true" sz="2400" strike="noStrike" u="none">
+                          <a:solidFill>
+                            <a:srgbClr val="000000"/>
+                          </a:solidFill>
+                          <a:latin typeface="Red Hat Display Bold"/>
+                          <a:ea typeface="Red Hat Display Bold"/>
+                          <a:cs typeface="Red Hat Display Bold"/>
+                          <a:sym typeface="Red Hat Display Bold"/>
+                        </a:rPr>
+                        <a:t>Core diag.</a:t>
+                      </a:r>
+                      <a:endParaRPr lang="en-US" sz="1100"/>
+                    </a:p>
+                  </a:txBody>
+                  <a:tcPr marL="76200" marR="76200" marT="76200" marB="76200" anchor="ctr">
+                    <a:lnL cmpd="sng" algn="ctr" cap="flat" w="38100">
+                      <a:solidFill>
+                        <a:srgbClr val="000000"/>
+                      </a:solidFill>
+                      <a:prstDash val="solid"/>
+                      <a:round/>
+                      <a:headEnd type="none" w="med" len="med"/>
+                      <a:tailEnd type="none" w="med" len="med"/>
+                    </a:lnL>
+                    <a:lnR cmpd="sng" algn="ctr" cap="flat" w="38100">
+                      <a:solidFill>
+                        <a:srgbClr val="000000"/>
+                      </a:solidFill>
+                      <a:prstDash val="solid"/>
+                      <a:round/>
+                      <a:headEnd type="none" w="med" len="med"/>
+                      <a:tailEnd type="none" w="med" len="med"/>
+                    </a:lnR>
+                    <a:lnT cmpd="sng" algn="ctr" cap="flat" w="38100">
+                      <a:solidFill>
+                        <a:srgbClr val="000000"/>
+                      </a:solidFill>
+                      <a:prstDash val="solid"/>
+                      <a:round/>
+                      <a:headEnd type="none" w="med" len="med"/>
+                      <a:tailEnd type="none" w="med" len="med"/>
+                    </a:lnT>
+                    <a:lnB cmpd="sng" algn="ctr" cap="flat" w="38100">
+                      <a:solidFill>
+                        <a:srgbClr val="000000"/>
+                      </a:solidFill>
+                      <a:prstDash val="solid"/>
+                      <a:round/>
+                      <a:headEnd type="none" w="med" len="med"/>
+                      <a:tailEnd type="none" w="med" len="med"/>
+                    </a:lnB>
+                    <a:solidFill>
+                      <a:srgbClr val="FFFFFF"/>
+                    </a:solidFill>
+                  </a:tcPr>
+                </a:tc>
+                <a:tc>
+                  <a:txBody>
+                    <a:bodyPr anchor="t" rtlCol="false"/>
+                    <a:lstStyle/>
+                    <a:p>
+                      <a:pPr algn="ctr" marL="0" indent="0" lvl="0">
+                        <a:lnSpc>
+                          <a:spcPts val="3360"/>
+                        </a:lnSpc>
+                        <a:spcBef>
+                          <a:spcPct val="0"/>
+                        </a:spcBef>
+                        <a:defRPr/>
+                      </a:pPr>
+                      <a:r>
+                        <a:rPr lang="en-US" b="true" sz="2400" strike="noStrike" u="none">
+                          <a:solidFill>
+                            <a:srgbClr val="000000"/>
+                          </a:solidFill>
+                          <a:latin typeface="Red Hat Display Bold"/>
+                          <a:ea typeface="Red Hat Display Bold"/>
+                          <a:cs typeface="Red Hat Display Bold"/>
+                          <a:sym typeface="Red Hat Display Bold"/>
+                        </a:rPr>
+                        <a:t>Nyblom stable?</a:t>
+                      </a:r>
+                      <a:endParaRPr lang="en-US" sz="1100"/>
+                    </a:p>
+                  </a:txBody>
+                  <a:tcPr marL="76200" marR="76200" marT="76200" marB="76200" anchor="ctr">
+                    <a:lnL cmpd="sng" algn="ctr" cap="flat" w="38100">
+                      <a:solidFill>
+                        <a:srgbClr val="000000"/>
+                      </a:solidFill>
+                      <a:prstDash val="solid"/>
+                      <a:round/>
+                      <a:headEnd type="none" w="med" len="med"/>
+                      <a:tailEnd type="none" w="med" len="med"/>
+                    </a:lnL>
+                    <a:lnR cmpd="sng" algn="ctr" cap="flat" w="38100">
+                      <a:solidFill>
+                        <a:srgbClr val="000000"/>
+                      </a:solidFill>
+                      <a:prstDash val="solid"/>
+                      <a:round/>
+                      <a:headEnd type="none" w="med" len="med"/>
+                      <a:tailEnd type="none" w="med" len="med"/>
+                    </a:lnR>
+                    <a:lnT cmpd="sng" algn="ctr" cap="flat" w="38100">
+                      <a:solidFill>
+                        <a:srgbClr val="000000"/>
+                      </a:solidFill>
+                      <a:prstDash val="solid"/>
+                      <a:round/>
+                      <a:headEnd type="none" w="med" len="med"/>
+                      <a:tailEnd type="none" w="med" len="med"/>
+                    </a:lnT>
+                    <a:lnB cmpd="sng" algn="ctr" cap="flat" w="38100">
+                      <a:solidFill>
+                        <a:srgbClr val="000000"/>
+                      </a:solidFill>
+                      <a:prstDash val="solid"/>
+                      <a:round/>
+                      <a:headEnd type="none" w="med" len="med"/>
+                      <a:tailEnd type="none" w="med" len="med"/>
+                    </a:lnB>
+                    <a:solidFill>
+                      <a:srgbClr val="FFFFFF"/>
+                    </a:solidFill>
+                  </a:tcPr>
+                </a:tc>
+              </a:tr>
+              <a:tr h="654447">
+                <a:tc>
+                  <a:txBody>
+                    <a:bodyPr anchor="t" rtlCol="false"/>
+                    <a:lstStyle/>
+                    <a:p>
+                      <a:pPr algn="ctr" marL="0" indent="0" lvl="0">
+                        <a:lnSpc>
+                          <a:spcPts val="3360"/>
+                        </a:lnSpc>
+                        <a:spcBef>
+                          <a:spcPct val="0"/>
+                        </a:spcBef>
+                        <a:defRPr/>
+                      </a:pPr>
+                      <a:r>
+                        <a:rPr lang="en-US" sz="2400" strike="noStrike" u="none">
+                          <a:solidFill>
+                            <a:srgbClr val="000000"/>
+                          </a:solidFill>
+                          <a:latin typeface="Red Hat Display"/>
+                          <a:ea typeface="Red Hat Display"/>
+                          <a:cs typeface="Red Hat Display"/>
+                          <a:sym typeface="Red Hat Display"/>
+                        </a:rPr>
+                        <a:t>GJR-GARCH-t</a:t>
+                      </a:r>
+                      <a:endParaRPr lang="en-US" sz="1100"/>
+                    </a:p>
+                  </a:txBody>
+                  <a:tcPr marL="76200" marR="76200" marT="76200" marB="76200" anchor="ctr">
+                    <a:lnL cmpd="sng" algn="ctr" cap="flat" w="38100">
+                      <a:solidFill>
+                        <a:srgbClr val="000000"/>
+                      </a:solidFill>
+                      <a:prstDash val="solid"/>
+                      <a:round/>
+                      <a:headEnd type="none" w="med" len="med"/>
+                      <a:tailEnd type="none" w="med" len="med"/>
+                    </a:lnL>
+                    <a:lnR cmpd="sng" algn="ctr" cap="flat" w="38100">
+                      <a:solidFill>
+                        <a:srgbClr val="000000"/>
+                      </a:solidFill>
+                      <a:prstDash val="solid"/>
+                      <a:round/>
+                      <a:headEnd type="none" w="med" len="med"/>
+                      <a:tailEnd type="none" w="med" len="med"/>
+                    </a:lnR>
+                    <a:lnT cmpd="sng" algn="ctr" cap="flat" w="38100">
+                      <a:solidFill>
+                        <a:srgbClr val="000000"/>
+                      </a:solidFill>
+                      <a:prstDash val="solid"/>
+                      <a:round/>
+                      <a:headEnd type="none" w="med" len="med"/>
+                      <a:tailEnd type="none" w="med" len="med"/>
+                    </a:lnT>
+                    <a:lnB cmpd="sng" algn="ctr" cap="flat" w="38100">
+                      <a:solidFill>
+                        <a:srgbClr val="000000"/>
+                      </a:solidFill>
+                      <a:prstDash val="solid"/>
+                      <a:round/>
+                      <a:headEnd type="none" w="med" len="med"/>
+                      <a:tailEnd type="none" w="med" len="med"/>
+                    </a:lnB>
+                    <a:solidFill>
+                      <a:srgbClr val="FFFFFF"/>
+                    </a:solidFill>
+                  </a:tcPr>
+                </a:tc>
+                <a:tc>
+                  <a:txBody>
+                    <a:bodyPr anchor="t" rtlCol="false"/>
+                    <a:lstStyle/>
+                    <a:p>
+                      <a:pPr algn="ctr" marL="0" indent="0" lvl="0">
+                        <a:lnSpc>
+                          <a:spcPts val="3360"/>
+                        </a:lnSpc>
+                        <a:spcBef>
+                          <a:spcPct val="0"/>
+                        </a:spcBef>
+                        <a:defRPr/>
+                      </a:pPr>
+                      <a:r>
+                        <a:rPr lang="en-US" sz="2400" strike="noStrike" u="none">
+                          <a:solidFill>
+                            <a:srgbClr val="000000"/>
+                          </a:solidFill>
+                          <a:latin typeface="Red Hat Display"/>
+                          <a:ea typeface="Red Hat Display"/>
+                          <a:cs typeface="Red Hat Display"/>
+                          <a:sym typeface="Red Hat Display"/>
+                        </a:rPr>
+                        <a:t>−5,6344</a:t>
+                      </a:r>
+                      <a:endParaRPr lang="en-US" sz="1100"/>
+                    </a:p>
+                  </a:txBody>
+                  <a:tcPr marL="76200" marR="76200" marT="76200" marB="76200" anchor="ctr">
+                    <a:lnL cmpd="sng" algn="ctr" cap="flat" w="38100">
+                      <a:solidFill>
+                        <a:srgbClr val="000000"/>
+                      </a:solidFill>
+                      <a:prstDash val="solid"/>
+                      <a:round/>
+                      <a:headEnd type="none" w="med" len="med"/>
+                      <a:tailEnd type="none" w="med" len="med"/>
+                    </a:lnL>
+                    <a:lnR cmpd="sng" algn="ctr" cap="flat" w="38100">
+                      <a:solidFill>
+                        <a:srgbClr val="000000"/>
+                      </a:solidFill>
+                      <a:prstDash val="solid"/>
+                      <a:round/>
+                      <a:headEnd type="none" w="med" len="med"/>
+                      <a:tailEnd type="none" w="med" len="med"/>
+                    </a:lnR>
+                    <a:lnT cmpd="sng" algn="ctr" cap="flat" w="38100">
+                      <a:solidFill>
+                        <a:srgbClr val="000000"/>
+                      </a:solidFill>
+                      <a:prstDash val="solid"/>
+                      <a:round/>
+                      <a:headEnd type="none" w="med" len="med"/>
+                      <a:tailEnd type="none" w="med" len="med"/>
+                    </a:lnT>
+                    <a:lnB cmpd="sng" algn="ctr" cap="flat" w="38100">
+                      <a:solidFill>
+                        <a:srgbClr val="000000"/>
+                      </a:solidFill>
+                      <a:prstDash val="solid"/>
+                      <a:round/>
+                      <a:headEnd type="none" w="med" len="med"/>
+                      <a:tailEnd type="none" w="med" len="med"/>
+                    </a:lnB>
+                    <a:solidFill>
+                      <a:srgbClr val="FFFFFF"/>
+                    </a:solidFill>
+                  </a:tcPr>
+                </a:tc>
+                <a:tc>
+                  <a:txBody>
+                    <a:bodyPr anchor="t" rtlCol="false"/>
+                    <a:lstStyle/>
+                    <a:p>
+                      <a:pPr algn="ctr" marL="0" indent="0" lvl="0">
+                        <a:lnSpc>
+                          <a:spcPts val="3360"/>
+                        </a:lnSpc>
+                        <a:spcBef>
+                          <a:spcPct val="0"/>
+                        </a:spcBef>
+                        <a:defRPr/>
+                      </a:pPr>
+                      <a:r>
+                        <a:rPr lang="en-US" sz="2400" strike="noStrike" u="none">
+                          <a:solidFill>
+                            <a:srgbClr val="000000"/>
+                          </a:solidFill>
+                          <a:latin typeface="Red Hat Display"/>
+                          <a:ea typeface="Red Hat Display"/>
+                          <a:cs typeface="Red Hat Display"/>
+                          <a:sym typeface="Red Hat Display"/>
+                        </a:rPr>
+                        <a:t>0,9857</a:t>
+                      </a:r>
+                      <a:endParaRPr lang="en-US" sz="1100"/>
+                    </a:p>
+                  </a:txBody>
+                  <a:tcPr marL="76200" marR="76200" marT="76200" marB="76200" anchor="ctr">
+                    <a:lnL cmpd="sng" algn="ctr" cap="flat" w="38100">
+                      <a:solidFill>
+                        <a:srgbClr val="000000"/>
+                      </a:solidFill>
+                      <a:prstDash val="solid"/>
+                      <a:round/>
+                      <a:headEnd type="none" w="med" len="med"/>
+                      <a:tailEnd type="none" w="med" len="med"/>
+                    </a:lnL>
+                    <a:lnR cmpd="sng" algn="ctr" cap="flat" w="38100">
+                      <a:solidFill>
+                        <a:srgbClr val="000000"/>
+                      </a:solidFill>
+                      <a:prstDash val="solid"/>
+                      <a:round/>
+                      <a:headEnd type="none" w="med" len="med"/>
+                      <a:tailEnd type="none" w="med" len="med"/>
+                    </a:lnR>
+                    <a:lnT cmpd="sng" algn="ctr" cap="flat" w="38100">
+                      <a:solidFill>
+                        <a:srgbClr val="000000"/>
+                      </a:solidFill>
+                      <a:prstDash val="solid"/>
+                      <a:round/>
+                      <a:headEnd type="none" w="med" len="med"/>
+                      <a:tailEnd type="none" w="med" len="med"/>
+                    </a:lnT>
+                    <a:lnB cmpd="sng" algn="ctr" cap="flat" w="38100">
+                      <a:solidFill>
+                        <a:srgbClr val="000000"/>
+                      </a:solidFill>
+                      <a:prstDash val="solid"/>
+                      <a:round/>
+                      <a:headEnd type="none" w="med" len="med"/>
+                      <a:tailEnd type="none" w="med" len="med"/>
+                    </a:lnB>
+                    <a:solidFill>
+                      <a:srgbClr val="FFFFFF"/>
+                    </a:solidFill>
+                  </a:tcPr>
+                </a:tc>
+                <a:tc>
+                  <a:txBody>
+                    <a:bodyPr anchor="t" rtlCol="false"/>
+                    <a:lstStyle/>
+                    <a:p>
+                      <a:pPr algn="ctr" marL="0" indent="0" lvl="0">
+                        <a:lnSpc>
+                          <a:spcPts val="3360"/>
+                        </a:lnSpc>
+                        <a:spcBef>
+                          <a:spcPct val="0"/>
+                        </a:spcBef>
+                        <a:defRPr/>
+                      </a:pPr>
+                      <a:r>
+                        <a:rPr lang="en-US" sz="2400" strike="noStrike" u="none">
+                          <a:solidFill>
+                            <a:srgbClr val="000000"/>
+                          </a:solidFill>
+                          <a:latin typeface="Red Hat Display"/>
+                          <a:ea typeface="Red Hat Display"/>
+                          <a:cs typeface="Red Hat Display"/>
+                          <a:sym typeface="Red Hat Display"/>
+                        </a:rPr>
+                        <a:t>Đạt</a:t>
+                      </a:r>
+                      <a:endParaRPr lang="en-US" sz="1100"/>
+                    </a:p>
+                  </a:txBody>
+                  <a:tcPr marL="76200" marR="76200" marT="76200" marB="76200" anchor="ctr">
+                    <a:lnL cmpd="sng" algn="ctr" cap="flat" w="38100">
+                      <a:solidFill>
+                        <a:srgbClr val="000000"/>
+                      </a:solidFill>
+                      <a:prstDash val="solid"/>
+                      <a:round/>
+                      <a:headEnd type="none" w="med" len="med"/>
+                      <a:tailEnd type="none" w="med" len="med"/>
+                    </a:lnL>
+                    <a:lnR cmpd="sng" algn="ctr" cap="flat" w="38100">
+                      <a:solidFill>
+                        <a:srgbClr val="000000"/>
+                      </a:solidFill>
+                      <a:prstDash val="solid"/>
+                      <a:round/>
+                      <a:headEnd type="none" w="med" len="med"/>
+                      <a:tailEnd type="none" w="med" len="med"/>
+                    </a:lnR>
+                    <a:lnT cmpd="sng" algn="ctr" cap="flat" w="38100">
+                      <a:solidFill>
+                        <a:srgbClr val="000000"/>
+                      </a:solidFill>
+                      <a:prstDash val="solid"/>
+                      <a:round/>
+                      <a:headEnd type="none" w="med" len="med"/>
+                      <a:tailEnd type="none" w="med" len="med"/>
+                    </a:lnT>
+                    <a:lnB cmpd="sng" algn="ctr" cap="flat" w="38100">
+                      <a:solidFill>
+                        <a:srgbClr val="000000"/>
+                      </a:solidFill>
+                      <a:prstDash val="solid"/>
+                      <a:round/>
+                      <a:headEnd type="none" w="med" len="med"/>
+                      <a:tailEnd type="none" w="med" len="med"/>
+                    </a:lnB>
+                    <a:solidFill>
+                      <a:srgbClr val="FFFFFF"/>
+                    </a:solidFill>
+                  </a:tcPr>
+                </a:tc>
+                <a:tc>
+                  <a:txBody>
+                    <a:bodyPr anchor="t" rtlCol="false"/>
+                    <a:lstStyle/>
+                    <a:p>
+                      <a:pPr algn="ctr" marL="0" indent="0" lvl="0">
+                        <a:lnSpc>
+                          <a:spcPts val="3360"/>
+                        </a:lnSpc>
+                        <a:spcBef>
+                          <a:spcPct val="0"/>
+                        </a:spcBef>
+                        <a:defRPr/>
+                      </a:pPr>
+                      <a:r>
+                        <a:rPr lang="en-US" sz="2400" strike="noStrike" u="none">
+                          <a:solidFill>
+                            <a:srgbClr val="000000"/>
+                          </a:solidFill>
+                          <a:latin typeface="Red Hat Display"/>
+                          <a:ea typeface="Red Hat Display"/>
+                          <a:cs typeface="Red Hat Display"/>
+                          <a:sym typeface="Red Hat Display"/>
+                        </a:rPr>
+                        <a:t>❌ Không</a:t>
+                      </a:r>
+                      <a:endParaRPr lang="en-US" sz="1100"/>
+                    </a:p>
+                  </a:txBody>
+                  <a:tcPr marL="76200" marR="76200" marT="76200" marB="76200" anchor="ctr">
+                    <a:lnL cmpd="sng" algn="ctr" cap="flat" w="38100">
+                      <a:solidFill>
+                        <a:srgbClr val="000000"/>
+                      </a:solidFill>
+                      <a:prstDash val="solid"/>
+                      <a:round/>
+                      <a:headEnd type="none" w="med" len="med"/>
+                      <a:tailEnd type="none" w="med" len="med"/>
+                    </a:lnL>
+                    <a:lnR cmpd="sng" algn="ctr" cap="flat" w="38100">
+                      <a:solidFill>
+                        <a:srgbClr val="000000"/>
+                      </a:solidFill>
+                      <a:prstDash val="solid"/>
+                      <a:round/>
+                      <a:headEnd type="none" w="med" len="med"/>
+                      <a:tailEnd type="none" w="med" len="med"/>
+                    </a:lnR>
+                    <a:lnT cmpd="sng" algn="ctr" cap="flat" w="38100">
+                      <a:solidFill>
+                        <a:srgbClr val="000000"/>
+                      </a:solidFill>
+                      <a:prstDash val="solid"/>
+                      <a:round/>
+                      <a:headEnd type="none" w="med" len="med"/>
+                      <a:tailEnd type="none" w="med" len="med"/>
+                    </a:lnT>
+                    <a:lnB cmpd="sng" algn="ctr" cap="flat" w="38100">
+                      <a:solidFill>
+                        <a:srgbClr val="000000"/>
+                      </a:solidFill>
+                      <a:prstDash val="solid"/>
+                      <a:round/>
+                      <a:headEnd type="none" w="med" len="med"/>
+                      <a:tailEnd type="none" w="med" len="med"/>
+                    </a:lnB>
+                    <a:solidFill>
+                      <a:srgbClr val="FFFFFF"/>
+                    </a:solidFill>
+                  </a:tcPr>
+                </a:tc>
+              </a:tr>
+              <a:tr h="654447">
+                <a:tc>
+                  <a:txBody>
+                    <a:bodyPr anchor="t" rtlCol="false"/>
+                    <a:lstStyle/>
+                    <a:p>
+                      <a:pPr algn="ctr" marL="0" indent="0" lvl="0">
+                        <a:lnSpc>
+                          <a:spcPts val="3360"/>
+                        </a:lnSpc>
+                        <a:spcBef>
+                          <a:spcPct val="0"/>
+                        </a:spcBef>
+                        <a:defRPr/>
+                      </a:pPr>
+                      <a:r>
+                        <a:rPr lang="en-US" sz="2400" strike="noStrike" u="none">
+                          <a:solidFill>
+                            <a:srgbClr val="000000"/>
+                          </a:solidFill>
+                          <a:latin typeface="Red Hat Display"/>
+                          <a:ea typeface="Red Hat Display"/>
+                          <a:cs typeface="Red Hat Display"/>
+                          <a:sym typeface="Red Hat Display"/>
+                        </a:rPr>
+                        <a:t>eGARCH-t</a:t>
+                      </a:r>
+                      <a:endParaRPr lang="en-US" sz="1100"/>
+                    </a:p>
+                  </a:txBody>
+                  <a:tcPr marL="76200" marR="76200" marT="76200" marB="76200" anchor="ctr">
+                    <a:lnL cmpd="sng" algn="ctr" cap="flat" w="38100">
+                      <a:solidFill>
+                        <a:srgbClr val="000000"/>
+                      </a:solidFill>
+                      <a:prstDash val="solid"/>
+                      <a:round/>
+                      <a:headEnd type="none" w="med" len="med"/>
+                      <a:tailEnd type="none" w="med" len="med"/>
+                    </a:lnL>
+                    <a:lnR cmpd="sng" algn="ctr" cap="flat" w="38100">
+                      <a:solidFill>
+                        <a:srgbClr val="000000"/>
+                      </a:solidFill>
+                      <a:prstDash val="solid"/>
+                      <a:round/>
+                      <a:headEnd type="none" w="med" len="med"/>
+                      <a:tailEnd type="none" w="med" len="med"/>
+                    </a:lnR>
+                    <a:lnT cmpd="sng" algn="ctr" cap="flat" w="38100">
+                      <a:solidFill>
+                        <a:srgbClr val="000000"/>
+                      </a:solidFill>
+                      <a:prstDash val="solid"/>
+                      <a:round/>
+                      <a:headEnd type="none" w="med" len="med"/>
+                      <a:tailEnd type="none" w="med" len="med"/>
+                    </a:lnT>
+                    <a:lnB cmpd="sng" algn="ctr" cap="flat" w="38100">
+                      <a:solidFill>
+                        <a:srgbClr val="000000"/>
+                      </a:solidFill>
+                      <a:prstDash val="solid"/>
+                      <a:round/>
+                      <a:headEnd type="none" w="med" len="med"/>
+                      <a:tailEnd type="none" w="med" len="med"/>
+                    </a:lnB>
+                    <a:solidFill>
+                      <a:srgbClr val="FFFFFF"/>
+                    </a:solidFill>
+                  </a:tcPr>
+                </a:tc>
+                <a:tc>
+                  <a:txBody>
+                    <a:bodyPr anchor="t" rtlCol="false"/>
+                    <a:lstStyle/>
+                    <a:p>
+                      <a:pPr algn="ctr" marL="0" indent="0" lvl="0">
+                        <a:lnSpc>
+                          <a:spcPts val="3360"/>
+                        </a:lnSpc>
+                        <a:spcBef>
+                          <a:spcPct val="0"/>
+                        </a:spcBef>
+                        <a:defRPr/>
+                      </a:pPr>
+                      <a:r>
+                        <a:rPr lang="en-US" sz="2400" strike="noStrike" u="none">
+                          <a:solidFill>
+                            <a:srgbClr val="000000"/>
+                          </a:solidFill>
+                          <a:latin typeface="Red Hat Display"/>
+                          <a:ea typeface="Red Hat Display"/>
+                          <a:cs typeface="Red Hat Display"/>
+                          <a:sym typeface="Red Hat Display"/>
+                        </a:rPr>
+                        <a:t>−5,6331</a:t>
+                      </a:r>
+                      <a:endParaRPr lang="en-US" sz="1100"/>
+                    </a:p>
+                  </a:txBody>
+                  <a:tcPr marL="76200" marR="76200" marT="76200" marB="76200" anchor="ctr">
+                    <a:lnL cmpd="sng" algn="ctr" cap="flat" w="38100">
+                      <a:solidFill>
+                        <a:srgbClr val="000000"/>
+                      </a:solidFill>
+                      <a:prstDash val="solid"/>
+                      <a:round/>
+                      <a:headEnd type="none" w="med" len="med"/>
+                      <a:tailEnd type="none" w="med" len="med"/>
+                    </a:lnL>
+                    <a:lnR cmpd="sng" algn="ctr" cap="flat" w="38100">
+                      <a:solidFill>
+                        <a:srgbClr val="000000"/>
+                      </a:solidFill>
+                      <a:prstDash val="solid"/>
+                      <a:round/>
+                      <a:headEnd type="none" w="med" len="med"/>
+                      <a:tailEnd type="none" w="med" len="med"/>
+                    </a:lnR>
+                    <a:lnT cmpd="sng" algn="ctr" cap="flat" w="38100">
+                      <a:solidFill>
+                        <a:srgbClr val="000000"/>
+                      </a:solidFill>
+                      <a:prstDash val="solid"/>
+                      <a:round/>
+                      <a:headEnd type="none" w="med" len="med"/>
+                      <a:tailEnd type="none" w="med" len="med"/>
+                    </a:lnT>
+                    <a:lnB cmpd="sng" algn="ctr" cap="flat" w="38100">
+                      <a:solidFill>
+                        <a:srgbClr val="000000"/>
+                      </a:solidFill>
+                      <a:prstDash val="solid"/>
+                      <a:round/>
+                      <a:headEnd type="none" w="med" len="med"/>
+                      <a:tailEnd type="none" w="med" len="med"/>
+                    </a:lnB>
+                    <a:solidFill>
+                      <a:srgbClr val="FFFFFF"/>
+                    </a:solidFill>
+                  </a:tcPr>
+                </a:tc>
+                <a:tc>
+                  <a:txBody>
+                    <a:bodyPr anchor="t" rtlCol="false"/>
+                    <a:lstStyle/>
+                    <a:p>
+                      <a:pPr algn="ctr" marL="0" indent="0" lvl="0">
+                        <a:lnSpc>
+                          <a:spcPts val="3360"/>
+                        </a:lnSpc>
+                        <a:spcBef>
+                          <a:spcPct val="0"/>
+                        </a:spcBef>
+                        <a:defRPr/>
+                      </a:pPr>
+                      <a:r>
+                        <a:rPr lang="en-US" sz="2400" strike="noStrike" u="none">
+                          <a:solidFill>
+                            <a:srgbClr val="000000"/>
+                          </a:solidFill>
+                          <a:latin typeface="Red Hat Display"/>
+                          <a:ea typeface="Red Hat Display"/>
+                          <a:cs typeface="Red Hat Display"/>
+                          <a:sym typeface="Red Hat Display"/>
+                        </a:rPr>
+                        <a:t>0,9627</a:t>
+                      </a:r>
+                      <a:endParaRPr lang="en-US" sz="1100"/>
+                    </a:p>
+                  </a:txBody>
+                  <a:tcPr marL="76200" marR="76200" marT="76200" marB="76200" anchor="ctr">
+                    <a:lnL cmpd="sng" algn="ctr" cap="flat" w="38100">
+                      <a:solidFill>
+                        <a:srgbClr val="000000"/>
+                      </a:solidFill>
+                      <a:prstDash val="solid"/>
+                      <a:round/>
+                      <a:headEnd type="none" w="med" len="med"/>
+                      <a:tailEnd type="none" w="med" len="med"/>
+                    </a:lnL>
+                    <a:lnR cmpd="sng" algn="ctr" cap="flat" w="38100">
+                      <a:solidFill>
+                        <a:srgbClr val="000000"/>
+                      </a:solidFill>
+                      <a:prstDash val="solid"/>
+                      <a:round/>
+                      <a:headEnd type="none" w="med" len="med"/>
+                      <a:tailEnd type="none" w="med" len="med"/>
+                    </a:lnR>
+                    <a:lnT cmpd="sng" algn="ctr" cap="flat" w="38100">
+                      <a:solidFill>
+                        <a:srgbClr val="000000"/>
+                      </a:solidFill>
+                      <a:prstDash val="solid"/>
+                      <a:round/>
+                      <a:headEnd type="none" w="med" len="med"/>
+                      <a:tailEnd type="none" w="med" len="med"/>
+                    </a:lnT>
+                    <a:lnB cmpd="sng" algn="ctr" cap="flat" w="38100">
+                      <a:solidFill>
+                        <a:srgbClr val="000000"/>
+                      </a:solidFill>
+                      <a:prstDash val="solid"/>
+                      <a:round/>
+                      <a:headEnd type="none" w="med" len="med"/>
+                      <a:tailEnd type="none" w="med" len="med"/>
+                    </a:lnB>
+                    <a:solidFill>
+                      <a:srgbClr val="FFFFFF"/>
+                    </a:solidFill>
+                  </a:tcPr>
+                </a:tc>
+                <a:tc>
+                  <a:txBody>
+                    <a:bodyPr anchor="t" rtlCol="false"/>
+                    <a:lstStyle/>
+                    <a:p>
+                      <a:pPr algn="ctr" marL="0" indent="0" lvl="0">
+                        <a:lnSpc>
+                          <a:spcPts val="3360"/>
+                        </a:lnSpc>
+                        <a:spcBef>
+                          <a:spcPct val="0"/>
+                        </a:spcBef>
+                        <a:defRPr/>
+                      </a:pPr>
+                      <a:r>
+                        <a:rPr lang="en-US" sz="2400" strike="noStrike" u="none">
+                          <a:solidFill>
+                            <a:srgbClr val="000000"/>
+                          </a:solidFill>
+                          <a:latin typeface="Red Hat Display"/>
+                          <a:ea typeface="Red Hat Display"/>
+                          <a:cs typeface="Red Hat Display"/>
+                          <a:sym typeface="Red Hat Display"/>
+                        </a:rPr>
+                        <a:t>Đạt</a:t>
+                      </a:r>
+                      <a:endParaRPr lang="en-US" sz="1100"/>
+                    </a:p>
+                  </a:txBody>
+                  <a:tcPr marL="76200" marR="76200" marT="76200" marB="76200" anchor="ctr">
+                    <a:lnL cmpd="sng" algn="ctr" cap="flat" w="38100">
+                      <a:solidFill>
+                        <a:srgbClr val="000000"/>
+                      </a:solidFill>
+                      <a:prstDash val="solid"/>
+                      <a:round/>
+                      <a:headEnd type="none" w="med" len="med"/>
+                      <a:tailEnd type="none" w="med" len="med"/>
+                    </a:lnL>
+                    <a:lnR cmpd="sng" algn="ctr" cap="flat" w="38100">
+                      <a:solidFill>
+                        <a:srgbClr val="000000"/>
+                      </a:solidFill>
+                      <a:prstDash val="solid"/>
+                      <a:round/>
+                      <a:headEnd type="none" w="med" len="med"/>
+                      <a:tailEnd type="none" w="med" len="med"/>
+                    </a:lnR>
+                    <a:lnT cmpd="sng" algn="ctr" cap="flat" w="38100">
+                      <a:solidFill>
+                        <a:srgbClr val="000000"/>
+                      </a:solidFill>
+                      <a:prstDash val="solid"/>
+                      <a:round/>
+                      <a:headEnd type="none" w="med" len="med"/>
+                      <a:tailEnd type="none" w="med" len="med"/>
+                    </a:lnT>
+                    <a:lnB cmpd="sng" algn="ctr" cap="flat" w="38100">
+                      <a:solidFill>
+                        <a:srgbClr val="000000"/>
+                      </a:solidFill>
+                      <a:prstDash val="solid"/>
+                      <a:round/>
+                      <a:headEnd type="none" w="med" len="med"/>
+                      <a:tailEnd type="none" w="med" len="med"/>
+                    </a:lnB>
+                    <a:solidFill>
+                      <a:srgbClr val="FFFFFF"/>
+                    </a:solidFill>
+                  </a:tcPr>
+                </a:tc>
+                <a:tc>
+                  <a:txBody>
+                    <a:bodyPr anchor="t" rtlCol="false"/>
+                    <a:lstStyle/>
+                    <a:p>
+                      <a:pPr algn="ctr" marL="0" indent="0" lvl="0">
+                        <a:lnSpc>
+                          <a:spcPts val="3360"/>
+                        </a:lnSpc>
+                        <a:spcBef>
+                          <a:spcPct val="0"/>
+                        </a:spcBef>
+                        <a:defRPr/>
+                      </a:pPr>
+                      <a:r>
+                        <a:rPr lang="en-US" sz="2400" strike="noStrike" u="none">
+                          <a:solidFill>
+                            <a:srgbClr val="000000"/>
+                          </a:solidFill>
+                          <a:latin typeface="Red Hat Display"/>
+                          <a:ea typeface="Red Hat Display"/>
+                          <a:cs typeface="Red Hat Display"/>
+                          <a:sym typeface="Red Hat Display"/>
+                        </a:rPr>
+                        <a:t>✅ Có</a:t>
+                      </a:r>
+                      <a:endParaRPr lang="en-US" sz="1100"/>
+                    </a:p>
+                  </a:txBody>
+                  <a:tcPr marL="76200" marR="76200" marT="76200" marB="76200" anchor="ctr">
+                    <a:lnL cmpd="sng" algn="ctr" cap="flat" w="38100">
+                      <a:solidFill>
+                        <a:srgbClr val="000000"/>
+                      </a:solidFill>
+                      <a:prstDash val="solid"/>
+                      <a:round/>
+                      <a:headEnd type="none" w="med" len="med"/>
+                      <a:tailEnd type="none" w="med" len="med"/>
+                    </a:lnL>
+                    <a:lnR cmpd="sng" algn="ctr" cap="flat" w="38100">
+                      <a:solidFill>
+                        <a:srgbClr val="000000"/>
+                      </a:solidFill>
+                      <a:prstDash val="solid"/>
+                      <a:round/>
+                      <a:headEnd type="none" w="med" len="med"/>
+                      <a:tailEnd type="none" w="med" len="med"/>
+                    </a:lnR>
+                    <a:lnT cmpd="sng" algn="ctr" cap="flat" w="38100">
+                      <a:solidFill>
+                        <a:srgbClr val="000000"/>
+                      </a:solidFill>
+                      <a:prstDash val="solid"/>
+                      <a:round/>
+                      <a:headEnd type="none" w="med" len="med"/>
+                      <a:tailEnd type="none" w="med" len="med"/>
+                    </a:lnT>
+                    <a:lnB cmpd="sng" algn="ctr" cap="flat" w="38100">
+                      <a:solidFill>
+                        <a:srgbClr val="000000"/>
+                      </a:solidFill>
+                      <a:prstDash val="solid"/>
+                      <a:round/>
+                      <a:headEnd type="none" w="med" len="med"/>
+                      <a:tailEnd type="none" w="med" len="med"/>
+                    </a:lnB>
+                    <a:solidFill>
+                      <a:srgbClr val="FFFFFF"/>
+                    </a:solidFill>
+                  </a:tcPr>
+                </a:tc>
+              </a:tr>
+              <a:tr h="654447">
+                <a:tc>
+                  <a:txBody>
+                    <a:bodyPr anchor="t" rtlCol="false"/>
+                    <a:lstStyle/>
+                    <a:p>
+                      <a:pPr algn="ctr" marL="0" indent="0" lvl="0">
+                        <a:lnSpc>
+                          <a:spcPts val="3360"/>
+                        </a:lnSpc>
+                        <a:spcBef>
+                          <a:spcPct val="0"/>
+                        </a:spcBef>
+                        <a:defRPr/>
+                      </a:pPr>
+                      <a:r>
+                        <a:rPr lang="en-US" sz="2400" strike="noStrike" u="none">
+                          <a:solidFill>
+                            <a:srgbClr val="000000"/>
+                          </a:solidFill>
+                          <a:latin typeface="Red Hat Display"/>
+                          <a:ea typeface="Red Hat Display"/>
+                          <a:cs typeface="Red Hat Display"/>
+                          <a:sym typeface="Red Hat Display"/>
+                        </a:rPr>
+                        <a:t>sGARCH-t</a:t>
+                      </a:r>
+                      <a:endParaRPr lang="en-US" sz="1100"/>
+                    </a:p>
+                  </a:txBody>
+                  <a:tcPr marL="76200" marR="76200" marT="76200" marB="76200" anchor="ctr">
+                    <a:lnL cmpd="sng" algn="ctr" cap="flat" w="38100">
+                      <a:solidFill>
+                        <a:srgbClr val="000000"/>
+                      </a:solidFill>
+                      <a:prstDash val="solid"/>
+                      <a:round/>
+                      <a:headEnd type="none" w="med" len="med"/>
+                      <a:tailEnd type="none" w="med" len="med"/>
+                    </a:lnL>
+                    <a:lnR cmpd="sng" algn="ctr" cap="flat" w="38100">
+                      <a:solidFill>
+                        <a:srgbClr val="000000"/>
+                      </a:solidFill>
+                      <a:prstDash val="solid"/>
+                      <a:round/>
+                      <a:headEnd type="none" w="med" len="med"/>
+                      <a:tailEnd type="none" w="med" len="med"/>
+                    </a:lnR>
+                    <a:lnT cmpd="sng" algn="ctr" cap="flat" w="38100">
+                      <a:solidFill>
+                        <a:srgbClr val="000000"/>
+                      </a:solidFill>
+                      <a:prstDash val="solid"/>
+                      <a:round/>
+                      <a:headEnd type="none" w="med" len="med"/>
+                      <a:tailEnd type="none" w="med" len="med"/>
+                    </a:lnT>
+                    <a:lnB cmpd="sng" algn="ctr" cap="flat" w="38100">
+                      <a:solidFill>
+                        <a:srgbClr val="000000"/>
+                      </a:solidFill>
+                      <a:prstDash val="solid"/>
+                      <a:round/>
+                      <a:headEnd type="none" w="med" len="med"/>
+                      <a:tailEnd type="none" w="med" len="med"/>
+                    </a:lnB>
+                    <a:solidFill>
+                      <a:srgbClr val="FFFFFF"/>
+                    </a:solidFill>
+                  </a:tcPr>
+                </a:tc>
+                <a:tc>
+                  <a:txBody>
+                    <a:bodyPr anchor="t" rtlCol="false"/>
+                    <a:lstStyle/>
+                    <a:p>
+                      <a:pPr algn="ctr" marL="0" indent="0" lvl="0">
+                        <a:lnSpc>
+                          <a:spcPts val="3360"/>
+                        </a:lnSpc>
+                        <a:spcBef>
+                          <a:spcPct val="0"/>
+                        </a:spcBef>
+                        <a:defRPr/>
+                      </a:pPr>
+                      <a:r>
+                        <a:rPr lang="en-US" sz="2400" strike="noStrike" u="none">
+                          <a:solidFill>
+                            <a:srgbClr val="000000"/>
+                          </a:solidFill>
+                          <a:latin typeface="Red Hat Display"/>
+                          <a:ea typeface="Red Hat Display"/>
+                          <a:cs typeface="Red Hat Display"/>
+                          <a:sym typeface="Red Hat Display"/>
+                        </a:rPr>
+                        <a:t>−5,6317</a:t>
+                      </a:r>
+                      <a:endParaRPr lang="en-US" sz="1100"/>
+                    </a:p>
+                  </a:txBody>
+                  <a:tcPr marL="76200" marR="76200" marT="76200" marB="76200" anchor="ctr">
+                    <a:lnL cmpd="sng" algn="ctr" cap="flat" w="38100">
+                      <a:solidFill>
+                        <a:srgbClr val="000000"/>
+                      </a:solidFill>
+                      <a:prstDash val="solid"/>
+                      <a:round/>
+                      <a:headEnd type="none" w="med" len="med"/>
+                      <a:tailEnd type="none" w="med" len="med"/>
+                    </a:lnL>
+                    <a:lnR cmpd="sng" algn="ctr" cap="flat" w="38100">
+                      <a:solidFill>
+                        <a:srgbClr val="000000"/>
+                      </a:solidFill>
+                      <a:prstDash val="solid"/>
+                      <a:round/>
+                      <a:headEnd type="none" w="med" len="med"/>
+                      <a:tailEnd type="none" w="med" len="med"/>
+                    </a:lnR>
+                    <a:lnT cmpd="sng" algn="ctr" cap="flat" w="38100">
+                      <a:solidFill>
+                        <a:srgbClr val="000000"/>
+                      </a:solidFill>
+                      <a:prstDash val="solid"/>
+                      <a:round/>
+                      <a:headEnd type="none" w="med" len="med"/>
+                      <a:tailEnd type="none" w="med" len="med"/>
+                    </a:lnT>
+                    <a:lnB cmpd="sng" algn="ctr" cap="flat" w="38100">
+                      <a:solidFill>
+                        <a:srgbClr val="000000"/>
+                      </a:solidFill>
+                      <a:prstDash val="solid"/>
+                      <a:round/>
+                      <a:headEnd type="none" w="med" len="med"/>
+                      <a:tailEnd type="none" w="med" len="med"/>
+                    </a:lnB>
+                    <a:solidFill>
+                      <a:srgbClr val="FFFFFF"/>
+                    </a:solidFill>
+                  </a:tcPr>
+                </a:tc>
+                <a:tc>
+                  <a:txBody>
+                    <a:bodyPr anchor="t" rtlCol="false"/>
+                    <a:lstStyle/>
+                    <a:p>
+                      <a:pPr algn="ctr" marL="0" indent="0" lvl="0">
+                        <a:lnSpc>
+                          <a:spcPts val="3360"/>
+                        </a:lnSpc>
+                        <a:spcBef>
+                          <a:spcPct val="0"/>
+                        </a:spcBef>
+                        <a:defRPr/>
+                      </a:pPr>
+                      <a:r>
+                        <a:rPr lang="en-US" sz="2400" strike="noStrike" u="none">
+                          <a:solidFill>
+                            <a:srgbClr val="000000"/>
+                          </a:solidFill>
+                          <a:latin typeface="Red Hat Display"/>
+                          <a:ea typeface="Red Hat Display"/>
+                          <a:cs typeface="Red Hat Display"/>
+                          <a:sym typeface="Red Hat Display"/>
+                        </a:rPr>
+                        <a:t>0,9891</a:t>
+                      </a:r>
+                      <a:endParaRPr lang="en-US" sz="1100"/>
+                    </a:p>
+                  </a:txBody>
+                  <a:tcPr marL="76200" marR="76200" marT="76200" marB="76200" anchor="ctr">
+                    <a:lnL cmpd="sng" algn="ctr" cap="flat" w="38100">
+                      <a:solidFill>
+                        <a:srgbClr val="000000"/>
+                      </a:solidFill>
+                      <a:prstDash val="solid"/>
+                      <a:round/>
+                      <a:headEnd type="none" w="med" len="med"/>
+                      <a:tailEnd type="none" w="med" len="med"/>
+                    </a:lnL>
+                    <a:lnR cmpd="sng" algn="ctr" cap="flat" w="38100">
+                      <a:solidFill>
+                        <a:srgbClr val="000000"/>
+                      </a:solidFill>
+                      <a:prstDash val="solid"/>
+                      <a:round/>
+                      <a:headEnd type="none" w="med" len="med"/>
+                      <a:tailEnd type="none" w="med" len="med"/>
+                    </a:lnR>
+                    <a:lnT cmpd="sng" algn="ctr" cap="flat" w="38100">
+                      <a:solidFill>
+                        <a:srgbClr val="000000"/>
+                      </a:solidFill>
+                      <a:prstDash val="solid"/>
+                      <a:round/>
+                      <a:headEnd type="none" w="med" len="med"/>
+                      <a:tailEnd type="none" w="med" len="med"/>
+                    </a:lnT>
+                    <a:lnB cmpd="sng" algn="ctr" cap="flat" w="38100">
+                      <a:solidFill>
+                        <a:srgbClr val="000000"/>
+                      </a:solidFill>
+                      <a:prstDash val="solid"/>
+                      <a:round/>
+                      <a:headEnd type="none" w="med" len="med"/>
+                      <a:tailEnd type="none" w="med" len="med"/>
+                    </a:lnB>
+                    <a:solidFill>
+                      <a:srgbClr val="FFFFFF"/>
+                    </a:solidFill>
+                  </a:tcPr>
+                </a:tc>
+                <a:tc>
+                  <a:txBody>
+                    <a:bodyPr anchor="t" rtlCol="false"/>
+                    <a:lstStyle/>
+                    <a:p>
+                      <a:pPr algn="ctr" marL="0" indent="0" lvl="0">
+                        <a:lnSpc>
+                          <a:spcPts val="3360"/>
+                        </a:lnSpc>
+                        <a:spcBef>
+                          <a:spcPct val="0"/>
+                        </a:spcBef>
+                        <a:defRPr/>
+                      </a:pPr>
+                      <a:r>
+                        <a:rPr lang="en-US" sz="2400" strike="noStrike" u="none">
+                          <a:solidFill>
+                            <a:srgbClr val="000000"/>
+                          </a:solidFill>
+                          <a:latin typeface="Red Hat Display"/>
+                          <a:ea typeface="Red Hat Display"/>
+                          <a:cs typeface="Red Hat Display"/>
+                          <a:sym typeface="Red Hat Display"/>
+                        </a:rPr>
+                        <a:t>Đạt</a:t>
+                      </a:r>
+                      <a:endParaRPr lang="en-US" sz="1100"/>
+                    </a:p>
+                  </a:txBody>
+                  <a:tcPr marL="76200" marR="76200" marT="76200" marB="76200" anchor="ctr">
+                    <a:lnL cmpd="sng" algn="ctr" cap="flat" w="38100">
+                      <a:solidFill>
+                        <a:srgbClr val="000000"/>
+                      </a:solidFill>
+                      <a:prstDash val="solid"/>
+                      <a:round/>
+                      <a:headEnd type="none" w="med" len="med"/>
+                      <a:tailEnd type="none" w="med" len="med"/>
+                    </a:lnL>
+                    <a:lnR cmpd="sng" algn="ctr" cap="flat" w="38100">
+                      <a:solidFill>
+                        <a:srgbClr val="000000"/>
+                      </a:solidFill>
+                      <a:prstDash val="solid"/>
+                      <a:round/>
+                      <a:headEnd type="none" w="med" len="med"/>
+                      <a:tailEnd type="none" w="med" len="med"/>
+                    </a:lnR>
+                    <a:lnT cmpd="sng" algn="ctr" cap="flat" w="38100">
+                      <a:solidFill>
+                        <a:srgbClr val="000000"/>
+                      </a:solidFill>
+                      <a:prstDash val="solid"/>
+                      <a:round/>
+                      <a:headEnd type="none" w="med" len="med"/>
+                      <a:tailEnd type="none" w="med" len="med"/>
+                    </a:lnT>
+                    <a:lnB cmpd="sng" algn="ctr" cap="flat" w="38100">
+                      <a:solidFill>
+                        <a:srgbClr val="000000"/>
+                      </a:solidFill>
+                      <a:prstDash val="solid"/>
+                      <a:round/>
+                      <a:headEnd type="none" w="med" len="med"/>
+                      <a:tailEnd type="none" w="med" len="med"/>
+                    </a:lnB>
+                    <a:solidFill>
+                      <a:srgbClr val="FFFFFF"/>
+                    </a:solidFill>
+                  </a:tcPr>
+                </a:tc>
+                <a:tc>
+                  <a:txBody>
+                    <a:bodyPr anchor="t" rtlCol="false"/>
+                    <a:lstStyle/>
+                    <a:p>
+                      <a:pPr algn="ctr" marL="0" indent="0" lvl="0">
+                        <a:lnSpc>
+                          <a:spcPts val="3360"/>
+                        </a:lnSpc>
+                        <a:spcBef>
+                          <a:spcPct val="0"/>
+                        </a:spcBef>
+                        <a:defRPr/>
+                      </a:pPr>
+                      <a:r>
+                        <a:rPr lang="en-US" sz="2400" strike="noStrike" u="none">
+                          <a:solidFill>
+                            <a:srgbClr val="000000"/>
+                          </a:solidFill>
+                          <a:latin typeface="Red Hat Display"/>
+                          <a:ea typeface="Red Hat Display"/>
+                          <a:cs typeface="Red Hat Display"/>
+                          <a:sym typeface="Red Hat Display"/>
+                        </a:rPr>
+                        <a:t>❌ Không</a:t>
+                      </a:r>
+                      <a:endParaRPr lang="en-US" sz="1100"/>
+                    </a:p>
+                  </a:txBody>
+                  <a:tcPr marL="76200" marR="76200" marT="76200" marB="76200" anchor="ctr">
+                    <a:lnL cmpd="sng" algn="ctr" cap="flat" w="38100">
+                      <a:solidFill>
+                        <a:srgbClr val="000000"/>
+                      </a:solidFill>
+                      <a:prstDash val="solid"/>
+                      <a:round/>
+                      <a:headEnd type="none" w="med" len="med"/>
+                      <a:tailEnd type="none" w="med" len="med"/>
+                    </a:lnL>
+                    <a:lnR cmpd="sng" algn="ctr" cap="flat" w="38100">
+                      <a:solidFill>
+                        <a:srgbClr val="000000"/>
+                      </a:solidFill>
+                      <a:prstDash val="solid"/>
+                      <a:round/>
+                      <a:headEnd type="none" w="med" len="med"/>
+                      <a:tailEnd type="none" w="med" len="med"/>
+                    </a:lnR>
+                    <a:lnT cmpd="sng" algn="ctr" cap="flat" w="38100">
+                      <a:solidFill>
+                        <a:srgbClr val="000000"/>
+                      </a:solidFill>
+                      <a:prstDash val="solid"/>
+                      <a:round/>
+                      <a:headEnd type="none" w="med" len="med"/>
+                      <a:tailEnd type="none" w="med" len="med"/>
+                    </a:lnT>
+                    <a:lnB cmpd="sng" algn="ctr" cap="flat" w="38100">
+                      <a:solidFill>
+                        <a:srgbClr val="000000"/>
+                      </a:solidFill>
+                      <a:prstDash val="solid"/>
+                      <a:round/>
+                      <a:headEnd type="none" w="med" len="med"/>
+                      <a:tailEnd type="none" w="med" len="med"/>
+                    </a:lnB>
+                    <a:solidFill>
+                      <a:srgbClr val="FFFFFF"/>
+                    </a:solidFill>
+                  </a:tcPr>
+                </a:tc>
+              </a:tr>
+              <a:tr h="654447">
+                <a:tc>
+                  <a:txBody>
+                    <a:bodyPr anchor="t" rtlCol="false"/>
+                    <a:lstStyle/>
+                    <a:p>
+                      <a:pPr algn="ctr" marL="0" indent="0" lvl="0">
+                        <a:lnSpc>
+                          <a:spcPts val="3360"/>
+                        </a:lnSpc>
+                        <a:spcBef>
+                          <a:spcPct val="0"/>
+                        </a:spcBef>
+                        <a:defRPr/>
+                      </a:pPr>
+                      <a:r>
+                        <a:rPr lang="en-US" sz="2400" strike="noStrike" u="none">
+                          <a:solidFill>
+                            <a:srgbClr val="000000"/>
+                          </a:solidFill>
+                          <a:latin typeface="Red Hat Display"/>
+                          <a:ea typeface="Red Hat Display"/>
+                          <a:cs typeface="Red Hat Display"/>
+                          <a:sym typeface="Red Hat Display"/>
+                        </a:rPr>
+                        <a:t>sGARCH-N</a:t>
+                      </a:r>
+                      <a:endParaRPr lang="en-US" sz="1100"/>
+                    </a:p>
+                  </a:txBody>
+                  <a:tcPr marL="76200" marR="76200" marT="76200" marB="76200" anchor="ctr">
+                    <a:lnL cmpd="sng" algn="ctr" cap="flat" w="38100">
+                      <a:solidFill>
+                        <a:srgbClr val="000000"/>
+                      </a:solidFill>
+                      <a:prstDash val="solid"/>
+                      <a:round/>
+                      <a:headEnd type="none" w="med" len="med"/>
+                      <a:tailEnd type="none" w="med" len="med"/>
+                    </a:lnL>
+                    <a:lnR cmpd="sng" algn="ctr" cap="flat" w="38100">
+                      <a:solidFill>
+                        <a:srgbClr val="000000"/>
+                      </a:solidFill>
+                      <a:prstDash val="solid"/>
+                      <a:round/>
+                      <a:headEnd type="none" w="med" len="med"/>
+                      <a:tailEnd type="none" w="med" len="med"/>
+                    </a:lnR>
+                    <a:lnT cmpd="sng" algn="ctr" cap="flat" w="38100">
+                      <a:solidFill>
+                        <a:srgbClr val="000000"/>
+                      </a:solidFill>
+                      <a:prstDash val="solid"/>
+                      <a:round/>
+                      <a:headEnd type="none" w="med" len="med"/>
+                      <a:tailEnd type="none" w="med" len="med"/>
+                    </a:lnT>
+                    <a:lnB cmpd="sng" algn="ctr" cap="flat" w="38100">
+                      <a:solidFill>
+                        <a:srgbClr val="000000"/>
+                      </a:solidFill>
+                      <a:prstDash val="solid"/>
+                      <a:round/>
+                      <a:headEnd type="none" w="med" len="med"/>
+                      <a:tailEnd type="none" w="med" len="med"/>
+                    </a:lnB>
+                    <a:solidFill>
+                      <a:srgbClr val="FFFFFF"/>
+                    </a:solidFill>
+                  </a:tcPr>
+                </a:tc>
+                <a:tc>
+                  <a:txBody>
+                    <a:bodyPr anchor="t" rtlCol="false"/>
+                    <a:lstStyle/>
+                    <a:p>
+                      <a:pPr algn="ctr" marL="0" indent="0" lvl="0">
+                        <a:lnSpc>
+                          <a:spcPts val="3360"/>
+                        </a:lnSpc>
+                        <a:spcBef>
+                          <a:spcPct val="0"/>
+                        </a:spcBef>
+                        <a:defRPr/>
+                      </a:pPr>
+                      <a:r>
+                        <a:rPr lang="en-US" sz="2400" strike="noStrike" u="none">
+                          <a:solidFill>
+                            <a:srgbClr val="000000"/>
+                          </a:solidFill>
+                          <a:latin typeface="Red Hat Display"/>
+                          <a:ea typeface="Red Hat Display"/>
+                          <a:cs typeface="Red Hat Display"/>
+                          <a:sym typeface="Red Hat Display"/>
+                        </a:rPr>
+                        <a:t>−5,5073</a:t>
+                      </a:r>
+                      <a:endParaRPr lang="en-US" sz="1100"/>
+                    </a:p>
+                  </a:txBody>
+                  <a:tcPr marL="76200" marR="76200" marT="76200" marB="76200" anchor="ctr">
+                    <a:lnL cmpd="sng" algn="ctr" cap="flat" w="38100">
+                      <a:solidFill>
+                        <a:srgbClr val="000000"/>
+                      </a:solidFill>
+                      <a:prstDash val="solid"/>
+                      <a:round/>
+                      <a:headEnd type="none" w="med" len="med"/>
+                      <a:tailEnd type="none" w="med" len="med"/>
+                    </a:lnL>
+                    <a:lnR cmpd="sng" algn="ctr" cap="flat" w="38100">
+                      <a:solidFill>
+                        <a:srgbClr val="000000"/>
+                      </a:solidFill>
+                      <a:prstDash val="solid"/>
+                      <a:round/>
+                      <a:headEnd type="none" w="med" len="med"/>
+                      <a:tailEnd type="none" w="med" len="med"/>
+                    </a:lnR>
+                    <a:lnT cmpd="sng" algn="ctr" cap="flat" w="38100">
+                      <a:solidFill>
+                        <a:srgbClr val="000000"/>
+                      </a:solidFill>
+                      <a:prstDash val="solid"/>
+                      <a:round/>
+                      <a:headEnd type="none" w="med" len="med"/>
+                      <a:tailEnd type="none" w="med" len="med"/>
+                    </a:lnT>
+                    <a:lnB cmpd="sng" algn="ctr" cap="flat" w="38100">
+                      <a:solidFill>
+                        <a:srgbClr val="000000"/>
+                      </a:solidFill>
+                      <a:prstDash val="solid"/>
+                      <a:round/>
+                      <a:headEnd type="none" w="med" len="med"/>
+                      <a:tailEnd type="none" w="med" len="med"/>
+                    </a:lnB>
+                    <a:solidFill>
+                      <a:srgbClr val="FFFFFF"/>
+                    </a:solidFill>
+                  </a:tcPr>
+                </a:tc>
+                <a:tc>
+                  <a:txBody>
+                    <a:bodyPr anchor="t" rtlCol="false"/>
+                    <a:lstStyle/>
+                    <a:p>
+                      <a:pPr algn="ctr" marL="0" indent="0" lvl="0">
+                        <a:lnSpc>
+                          <a:spcPts val="3360"/>
+                        </a:lnSpc>
+                        <a:spcBef>
+                          <a:spcPct val="0"/>
+                        </a:spcBef>
+                        <a:defRPr/>
+                      </a:pPr>
+                      <a:r>
+                        <a:rPr lang="en-US" sz="2400" strike="noStrike" u="none">
+                          <a:solidFill>
+                            <a:srgbClr val="000000"/>
+                          </a:solidFill>
+                          <a:latin typeface="Red Hat Display"/>
+                          <a:ea typeface="Red Hat Display"/>
+                          <a:cs typeface="Red Hat Display"/>
+                          <a:sym typeface="Red Hat Display"/>
+                        </a:rPr>
+                        <a:t>0,9645</a:t>
+                      </a:r>
+                      <a:endParaRPr lang="en-US" sz="1100"/>
+                    </a:p>
+                  </a:txBody>
+                  <a:tcPr marL="76200" marR="76200" marT="76200" marB="76200" anchor="ctr">
+                    <a:lnL cmpd="sng" algn="ctr" cap="flat" w="38100">
+                      <a:solidFill>
+                        <a:srgbClr val="000000"/>
+                      </a:solidFill>
+                      <a:prstDash val="solid"/>
+                      <a:round/>
+                      <a:headEnd type="none" w="med" len="med"/>
+                      <a:tailEnd type="none" w="med" len="med"/>
+                    </a:lnL>
+                    <a:lnR cmpd="sng" algn="ctr" cap="flat" w="38100">
+                      <a:solidFill>
+                        <a:srgbClr val="000000"/>
+                      </a:solidFill>
+                      <a:prstDash val="solid"/>
+                      <a:round/>
+                      <a:headEnd type="none" w="med" len="med"/>
+                      <a:tailEnd type="none" w="med" len="med"/>
+                    </a:lnR>
+                    <a:lnT cmpd="sng" algn="ctr" cap="flat" w="38100">
+                      <a:solidFill>
+                        <a:srgbClr val="000000"/>
+                      </a:solidFill>
+                      <a:prstDash val="solid"/>
+                      <a:round/>
+                      <a:headEnd type="none" w="med" len="med"/>
+                      <a:tailEnd type="none" w="med" len="med"/>
+                    </a:lnT>
+                    <a:lnB cmpd="sng" algn="ctr" cap="flat" w="38100">
+                      <a:solidFill>
+                        <a:srgbClr val="000000"/>
+                      </a:solidFill>
+                      <a:prstDash val="solid"/>
+                      <a:round/>
+                      <a:headEnd type="none" w="med" len="med"/>
+                      <a:tailEnd type="none" w="med" len="med"/>
+                    </a:lnB>
+                    <a:solidFill>
+                      <a:srgbClr val="FFFFFF"/>
+                    </a:solidFill>
+                  </a:tcPr>
+                </a:tc>
+                <a:tc>
+                  <a:txBody>
+                    <a:bodyPr anchor="t" rtlCol="false"/>
+                    <a:lstStyle/>
+                    <a:p>
+                      <a:pPr algn="ctr" marL="0" indent="0" lvl="0">
+                        <a:lnSpc>
+                          <a:spcPts val="3360"/>
+                        </a:lnSpc>
+                        <a:spcBef>
+                          <a:spcPct val="0"/>
+                        </a:spcBef>
+                        <a:defRPr/>
+                      </a:pPr>
+                      <a:r>
+                        <a:rPr lang="en-US" sz="2400" strike="noStrike" u="none">
+                          <a:solidFill>
+                            <a:srgbClr val="000000"/>
+                          </a:solidFill>
+                          <a:latin typeface="Red Hat Display"/>
+                          <a:ea typeface="Red Hat Display"/>
+                          <a:cs typeface="Red Hat Display"/>
+                          <a:sym typeface="Red Hat Display"/>
+                        </a:rPr>
+                        <a:t>Đạt</a:t>
+                      </a:r>
+                      <a:endParaRPr lang="en-US" sz="1100"/>
+                    </a:p>
+                  </a:txBody>
+                  <a:tcPr marL="76200" marR="76200" marT="76200" marB="76200" anchor="ctr">
+                    <a:lnL cmpd="sng" algn="ctr" cap="flat" w="38100">
+                      <a:solidFill>
+                        <a:srgbClr val="000000"/>
+                      </a:solidFill>
+                      <a:prstDash val="solid"/>
+                      <a:round/>
+                      <a:headEnd type="none" w="med" len="med"/>
+                      <a:tailEnd type="none" w="med" len="med"/>
+                    </a:lnL>
+                    <a:lnR cmpd="sng" algn="ctr" cap="flat" w="38100">
+                      <a:solidFill>
+                        <a:srgbClr val="000000"/>
+                      </a:solidFill>
+                      <a:prstDash val="solid"/>
+                      <a:round/>
+                      <a:headEnd type="none" w="med" len="med"/>
+                      <a:tailEnd type="none" w="med" len="med"/>
+                    </a:lnR>
+                    <a:lnT cmpd="sng" algn="ctr" cap="flat" w="38100">
+                      <a:solidFill>
+                        <a:srgbClr val="000000"/>
+                      </a:solidFill>
+                      <a:prstDash val="solid"/>
+                      <a:round/>
+                      <a:headEnd type="none" w="med" len="med"/>
+                      <a:tailEnd type="none" w="med" len="med"/>
+                    </a:lnT>
+                    <a:lnB cmpd="sng" algn="ctr" cap="flat" w="38100">
+                      <a:solidFill>
+                        <a:srgbClr val="000000"/>
+                      </a:solidFill>
+                      <a:prstDash val="solid"/>
+                      <a:round/>
+                      <a:headEnd type="none" w="med" len="med"/>
+                      <a:tailEnd type="none" w="med" len="med"/>
+                    </a:lnB>
+                    <a:solidFill>
+                      <a:srgbClr val="FFFFFF"/>
+                    </a:solidFill>
+                  </a:tcPr>
+                </a:tc>
+                <a:tc>
+                  <a:txBody>
+                    <a:bodyPr anchor="t" rtlCol="false"/>
+                    <a:lstStyle/>
+                    <a:p>
+                      <a:pPr algn="ctr" marL="0" indent="0" lvl="0">
+                        <a:lnSpc>
+                          <a:spcPts val="3360"/>
+                        </a:lnSpc>
+                        <a:spcBef>
+                          <a:spcPct val="0"/>
+                        </a:spcBef>
+                        <a:defRPr/>
+                      </a:pPr>
+                      <a:r>
+                        <a:rPr lang="en-US" sz="2400" strike="noStrike" u="none">
+                          <a:solidFill>
+                            <a:srgbClr val="000000"/>
+                          </a:solidFill>
+                          <a:latin typeface="Red Hat Display"/>
+                          <a:ea typeface="Red Hat Display"/>
+                          <a:cs typeface="Red Hat Display"/>
+                          <a:sym typeface="Red Hat Display"/>
+                        </a:rPr>
+                        <a:t>❌ Không</a:t>
+                      </a:r>
+                      <a:endParaRPr lang="en-US" sz="1100"/>
+                    </a:p>
+                  </a:txBody>
+                  <a:tcPr marL="76200" marR="76200" marT="76200" marB="76200" anchor="ctr">
+                    <a:lnL cmpd="sng" algn="ctr" cap="flat" w="38100">
+                      <a:solidFill>
+                        <a:srgbClr val="000000"/>
+                      </a:solidFill>
+                      <a:prstDash val="solid"/>
+                      <a:round/>
+                      <a:headEnd type="none" w="med" len="med"/>
+                      <a:tailEnd type="none" w="med" len="med"/>
+                    </a:lnL>
+                    <a:lnR cmpd="sng" algn="ctr" cap="flat" w="38100">
+                      <a:solidFill>
+                        <a:srgbClr val="000000"/>
+                      </a:solidFill>
+                      <a:prstDash val="solid"/>
+                      <a:round/>
+                      <a:headEnd type="none" w="med" len="med"/>
+                      <a:tailEnd type="none" w="med" len="med"/>
+                    </a:lnR>
+                    <a:lnT cmpd="sng" algn="ctr" cap="flat" w="38100">
+                      <a:solidFill>
+                        <a:srgbClr val="000000"/>
+                      </a:solidFill>
+                      <a:prstDash val="solid"/>
+                      <a:round/>
+                      <a:headEnd type="none" w="med" len="med"/>
+                      <a:tailEnd type="none" w="med" len="med"/>
+                    </a:lnT>
+                    <a:lnB cmpd="sng" algn="ctr" cap="flat" w="38100">
+                      <a:solidFill>
+                        <a:srgbClr val="000000"/>
+                      </a:solidFill>
+                      <a:prstDash val="solid"/>
+                      <a:round/>
+                      <a:headEnd type="none" w="med" len="med"/>
+                      <a:tailEnd type="none" w="med" len="med"/>
+                    </a:lnB>
+                    <a:solidFill>
+                      <a:srgbClr val="FFFFFF"/>
+                    </a:solidFill>
+                  </a:tcPr>
+                </a:tc>
+              </a:tr>
+            </a:tbl>
+          </a:graphicData>
+        </a:graphic>
+      </p:graphicFrame>
+      <p:sp>
+        <p:nvSpPr>
+          <p:cNvPr name="TextBox 11" id="11"/>
+          <p:cNvSpPr txBox="true"/>
+          <p:nvPr/>
+        </p:nvSpPr>
+        <p:spPr>
+          <a:xfrm rot="0">
+            <a:off x="2980865" y="5638164"/>
+            <a:ext cx="12188052" cy="1967230"/>
+          </a:xfrm>
+          <a:prstGeom prst="rect">
+            <a:avLst/>
+          </a:prstGeom>
+        </p:spPr>
+        <p:txBody>
+          <a:bodyPr anchor="t" rtlCol="false" tIns="0" lIns="0" bIns="0" rIns="0">
+            <a:spAutoFit/>
+          </a:bodyPr>
+          <a:lstStyle/>
+          <a:p>
+            <a:pPr algn="just">
+              <a:lnSpc>
+                <a:spcPts val="3919"/>
+              </a:lnSpc>
+            </a:pPr>
+            <a:r>
+              <a:rPr lang="en-US" sz="2799">
+                <a:solidFill>
+                  <a:srgbClr val="000000"/>
+                </a:solidFill>
+                <a:latin typeface="Red Hat Display"/>
+                <a:ea typeface="Red Hat Display"/>
+                <a:cs typeface="Red Hat Display"/>
+                <a:sym typeface="Red Hat Display"/>
+              </a:rPr>
+              <a:t>Lựa chọn:</a:t>
+            </a:r>
+            <a:r>
+              <a:rPr lang="en-US" sz="2799">
+                <a:solidFill>
+                  <a:srgbClr val="000000"/>
+                </a:solidFill>
+                <a:latin typeface="Red Hat Display"/>
+                <a:ea typeface="Red Hat Display"/>
+                <a:cs typeface="Red Hat Display"/>
+                <a:sym typeface="Red Hat Display"/>
+              </a:rPr>
+              <a:t> eGARCH-Student-t là ứng viên cân bằng vì:</a:t>
+            </a:r>
+          </a:p>
+          <a:p>
+            <a:pPr algn="just" marL="604518" indent="-302259" lvl="1">
+              <a:lnSpc>
+                <a:spcPts val="3919"/>
+              </a:lnSpc>
+              <a:buFont typeface="Arial"/>
+              <a:buChar char="•"/>
+            </a:pPr>
+            <a:r>
+              <a:rPr lang="en-US" sz="2799">
+                <a:solidFill>
+                  <a:srgbClr val="000000"/>
+                </a:solidFill>
+                <a:latin typeface="Red Hat Display"/>
+                <a:ea typeface="Red Hat Display"/>
+                <a:cs typeface="Red Hat Display"/>
+                <a:sym typeface="Red Hat Display"/>
+              </a:rPr>
+              <a:t>AIC chỉ kém GJR khoảng 0,00137.</a:t>
+            </a:r>
+          </a:p>
+          <a:p>
+            <a:pPr algn="just" marL="604518" indent="-302259" lvl="1">
+              <a:lnSpc>
+                <a:spcPts val="3919"/>
+              </a:lnSpc>
+              <a:buFont typeface="Arial"/>
+              <a:buChar char="•"/>
+            </a:pPr>
+            <a:r>
+              <a:rPr lang="en-US" sz="2799">
+                <a:solidFill>
+                  <a:srgbClr val="000000"/>
+                </a:solidFill>
+                <a:latin typeface="Red Hat Display"/>
+                <a:ea typeface="Red Hat Display"/>
+                <a:cs typeface="Red Hat Display"/>
+                <a:sym typeface="Red Hat Display"/>
+              </a:rPr>
+              <a:t>Core residual diagnostics đạt + Nyblom stability đạt.</a:t>
+            </a:r>
+          </a:p>
+          <a:p>
+            <a:pPr algn="just" marL="604518" indent="-302259" lvl="1">
+              <a:lnSpc>
+                <a:spcPts val="3919"/>
+              </a:lnSpc>
+              <a:buFont typeface="Arial"/>
+              <a:buChar char="•"/>
+            </a:pPr>
+            <a:r>
+              <a:rPr lang="en-US" sz="2799">
+                <a:solidFill>
+                  <a:srgbClr val="000000"/>
+                </a:solidFill>
+                <a:latin typeface="Red Hat Display"/>
+                <a:ea typeface="Red Hat Display"/>
+                <a:cs typeface="Red Hat Display"/>
+                <a:sym typeface="Red Hat Display"/>
+              </a:rPr>
+              <a:t>Tuy nhiên Pearson GOF bác bỏ distribution fit → đây là hạn chế.</a:t>
+            </a:r>
+          </a:p>
+        </p:txBody>
+      </p:sp>
+      <p:sp>
+        <p:nvSpPr>
+          <p:cNvPr name="TextBox 12" id="12"/>
+          <p:cNvSpPr txBox="true"/>
+          <p:nvPr/>
+        </p:nvSpPr>
+        <p:spPr>
+          <a:xfrm rot="0">
+            <a:off x="1005119" y="7786370"/>
+            <a:ext cx="16194735" cy="1471930"/>
+          </a:xfrm>
+          <a:prstGeom prst="rect">
+            <a:avLst/>
+          </a:prstGeom>
+        </p:spPr>
+        <p:txBody>
+          <a:bodyPr anchor="t" rtlCol="false" tIns="0" lIns="0" bIns="0" rIns="0">
+            <a:spAutoFit/>
+          </a:bodyPr>
+          <a:lstStyle/>
+          <a:p>
+            <a:pPr algn="l">
+              <a:lnSpc>
+                <a:spcPts val="3919"/>
+              </a:lnSpc>
+            </a:pPr>
+            <a:r>
+              <a:rPr lang="en-US" sz="2799">
+                <a:solidFill>
+                  <a:srgbClr val="000000"/>
+                </a:solidFill>
+                <a:latin typeface="Red Hat Display"/>
+                <a:ea typeface="Red Hat Display"/>
+                <a:cs typeface="Red Hat Display"/>
+                <a:sym typeface="Red Hat Display"/>
+              </a:rPr>
+              <a:t>GJR-</a:t>
+            </a:r>
+            <a:r>
+              <a:rPr lang="en-US" sz="2799">
+                <a:solidFill>
+                  <a:srgbClr val="000000"/>
+                </a:solidFill>
+                <a:latin typeface="Red Hat Display"/>
+                <a:ea typeface="Red Hat Display"/>
+                <a:cs typeface="Red Hat Display"/>
+                <a:sym typeface="Red Hat Display"/>
+              </a:rPr>
+              <a:t>GARCH-t có AIC thấp nhất nhưng không đạt Nyblom joint stability. eGARCH-t chỉ kém 0,00137 AIC, đồng thời đạt core diagnostics và Nyblom stability, nên được chọn là ứng viên cân bằng. Đây không phải mô hình hoàn hảo vì Pearson GOF vẫn bác bỏ distribution fit.</a:t>
+            </a:r>
+          </a:p>
+        </p:txBody>
+      </p:sp>
+    </p:spTree>
+  </p:cSld>
+  <p:clrMapOvr>
+    <a:masterClrMapping/>
+  </p:clrMapOvr>
+</p:sld>
+</file>
+
+<file path=ppt/slides/slide16.xml><?xml version="1.0" encoding="utf-8"?>
+<p:sld xmlns:p="http://schemas.openxmlformats.org/presentationml/2006/main" xmlns:a="http://schemas.openxmlformats.org/drawingml/2006/main" xmlns:r="http://schemas.openxmlformats.org/officeDocument/2006/relationships">
+  <p:cSld>
+    <p:bg>
+      <p:bgPr>
+        <a:solidFill>
+          <a:srgbClr val="FBFCFE"/>
+        </a:solidFill>
+      </p:bgPr>
+    </p:bg>
+    <p:spTree>
+      <p:nvGrpSpPr>
+        <p:cNvPr id="1" name=""/>
+        <p:cNvGrpSpPr/>
+        <p:nvPr/>
+      </p:nvGrpSpPr>
+      <p:grpSpPr>
+        <a:xfrm>
+          <a:off x="0" y="0"/>
+          <a:ext cx="0" cy="0"/>
+          <a:chOff x="0" y="0"/>
+          <a:chExt cx="0" cy="0"/>
+        </a:xfrm>
+      </p:grpSpPr>
+      <p:grpSp>
+        <p:nvGrpSpPr>
+          <p:cNvPr name="Group 2" id="2"/>
+          <p:cNvGrpSpPr/>
+          <p:nvPr/>
+        </p:nvGrpSpPr>
+        <p:grpSpPr>
+          <a:xfrm rot="0">
+            <a:off x="1064565" y="3271849"/>
+            <a:ext cx="1029499" cy="1029499"/>
+            <a:chOff x="0" y="0"/>
+            <a:chExt cx="812800" cy="812800"/>
+          </a:xfrm>
+        </p:grpSpPr>
+        <p:sp>
+          <p:nvSpPr>
+            <p:cNvPr name="Freeform 3" id="3"/>
+            <p:cNvSpPr/>
+            <p:nvPr/>
+          </p:nvSpPr>
+          <p:spPr>
+            <a:xfrm flipH="false" flipV="false" rot="0">
+              <a:off x="0" y="0"/>
+              <a:ext cx="812800" cy="812800"/>
+            </a:xfrm>
+            <a:custGeom>
+              <a:avLst/>
+              <a:gdLst/>
+              <a:ahLst/>
+              <a:cxnLst/>
+              <a:rect r="r" b="b" t="t" l="l"/>
+              <a:pathLst>
+                <a:path h="812800" w="812800">
+                  <a:moveTo>
+                    <a:pt x="406400" y="0"/>
+                  </a:moveTo>
+                  <a:cubicBezTo>
+                    <a:pt x="181951" y="0"/>
+                    <a:pt x="0" y="181951"/>
+                    <a:pt x="0" y="406400"/>
+                  </a:cubicBezTo>
+                  <a:cubicBezTo>
+                    <a:pt x="0" y="630849"/>
+                    <a:pt x="181951" y="812800"/>
+                    <a:pt x="406400" y="812800"/>
+                  </a:cubicBezTo>
+                  <a:cubicBezTo>
+                    <a:pt x="630849" y="812800"/>
+                    <a:pt x="812800" y="630849"/>
+                    <a:pt x="812800" y="406400"/>
+                  </a:cubicBezTo>
+                  <a:cubicBezTo>
+                    <a:pt x="812800" y="181951"/>
+                    <a:pt x="630849" y="0"/>
+                    <a:pt x="406400" y="0"/>
+                  </a:cubicBezTo>
+                  <a:close/>
+                </a:path>
+              </a:pathLst>
+            </a:custGeom>
+            <a:solidFill>
+              <a:srgbClr val="FFFFFF"/>
+            </a:solidFill>
+          </p:spPr>
+        </p:sp>
+        <p:sp>
+          <p:nvSpPr>
+            <p:cNvPr name="TextBox 4" id="4"/>
+            <p:cNvSpPr txBox="true"/>
+            <p:nvPr/>
+          </p:nvSpPr>
+          <p:spPr>
+            <a:xfrm>
+              <a:off x="76200" y="28575"/>
+              <a:ext cx="660400" cy="708025"/>
+            </a:xfrm>
+            <a:prstGeom prst="rect">
+              <a:avLst/>
+            </a:prstGeom>
+          </p:spPr>
+          <p:txBody>
+            <a:bodyPr anchor="ctr" rtlCol="false" tIns="50800" lIns="50800" bIns="50800" rIns="50800"/>
+            <a:lstStyle/>
+            <a:p>
+              <a:pPr algn="ctr">
+                <a:lnSpc>
+                  <a:spcPts val="3032"/>
+                </a:lnSpc>
+              </a:pPr>
+            </a:p>
+          </p:txBody>
+        </p:sp>
+      </p:grpSp>
+      <p:sp>
+        <p:nvSpPr>
+          <p:cNvPr name="TextBox 5" id="5"/>
+          <p:cNvSpPr txBox="true"/>
+          <p:nvPr/>
+        </p:nvSpPr>
+        <p:spPr>
+          <a:xfrm rot="0">
+            <a:off x="3059638" y="332856"/>
+            <a:ext cx="12168724" cy="781685"/>
+          </a:xfrm>
+          <a:prstGeom prst="rect">
+            <a:avLst/>
+          </a:prstGeom>
+        </p:spPr>
+        <p:txBody>
+          <a:bodyPr anchor="t" rtlCol="false" tIns="0" lIns="0" bIns="0" rIns="0">
+            <a:spAutoFit/>
+          </a:bodyPr>
+          <a:lstStyle/>
+          <a:p>
+            <a:pPr algn="ctr">
+              <a:lnSpc>
+                <a:spcPts val="6220"/>
+              </a:lnSpc>
+            </a:pPr>
+            <a:r>
+              <a:rPr lang="en-US" b="true" sz="5000">
+                <a:solidFill>
+                  <a:srgbClr val="2D2261"/>
+                </a:solidFill>
+                <a:latin typeface="Red Hat Display Bold"/>
+                <a:ea typeface="Red Hat Display Bold"/>
+                <a:cs typeface="Red Hat Display Bold"/>
+                <a:sym typeface="Red Hat Display Bold"/>
+              </a:rPr>
+              <a:t>Đánh giá hiệu suất mô hình </a:t>
+            </a:r>
+          </a:p>
+        </p:txBody>
+      </p:sp>
+      <p:sp>
+        <p:nvSpPr>
+          <p:cNvPr name="Freeform 6" id="6"/>
+          <p:cNvSpPr/>
+          <p:nvPr/>
+        </p:nvSpPr>
+        <p:spPr>
+          <a:xfrm flipH="false" flipV="false" rot="1026841">
+            <a:off x="15466248" y="-1931974"/>
+            <a:ext cx="6727323" cy="4586811"/>
+          </a:xfrm>
+          <a:custGeom>
+            <a:avLst/>
+            <a:gdLst/>
+            <a:ahLst/>
+            <a:cxnLst/>
+            <a:rect r="r" b="b" t="t" l="l"/>
+            <a:pathLst>
+              <a:path h="4586811" w="6727323">
+                <a:moveTo>
+                  <a:pt x="0" y="0"/>
+                </a:moveTo>
+                <a:lnTo>
+                  <a:pt x="6727323" y="0"/>
+                </a:lnTo>
+                <a:lnTo>
+                  <a:pt x="6727323" y="4586811"/>
+                </a:lnTo>
+                <a:lnTo>
+                  <a:pt x="0" y="4586811"/>
+                </a:lnTo>
+                <a:lnTo>
+                  <a:pt x="0" y="0"/>
+                </a:lnTo>
+                <a:close/>
+              </a:path>
+            </a:pathLst>
+          </a:custGeom>
+          <a:blipFill>
+            <a:blip r:embed="rId2">
+              <a:alphaModFix amt="50000"/>
+              <a:extLst>
+                <a:ext uri="{96DAC541-7B7A-43D3-8B79-37D633B846F1}">
+                  <asvg:svgBlip xmlns:asvg="http://schemas.microsoft.com/office/drawing/2016/SVG/main" r:embed="rId3"/>
+                </a:ext>
+              </a:extLst>
+            </a:blip>
+            <a:stretch>
+              <a:fillRect l="0" t="0" r="0" b="0"/>
+            </a:stretch>
+          </a:blipFill>
+        </p:spPr>
+      </p:sp>
+      <p:sp>
+        <p:nvSpPr>
+          <p:cNvPr name="Freeform 7" id="7"/>
+          <p:cNvSpPr/>
+          <p:nvPr/>
+        </p:nvSpPr>
+        <p:spPr>
+          <a:xfrm flipH="false" flipV="false" rot="635325">
+            <a:off x="-1442576" y="8071855"/>
+            <a:ext cx="7907020" cy="6699403"/>
+          </a:xfrm>
+          <a:custGeom>
+            <a:avLst/>
+            <a:gdLst/>
+            <a:ahLst/>
+            <a:cxnLst/>
+            <a:rect r="r" b="b" t="t" l="l"/>
+            <a:pathLst>
+              <a:path h="6699403" w="7907020">
+                <a:moveTo>
+                  <a:pt x="0" y="0"/>
+                </a:moveTo>
+                <a:lnTo>
+                  <a:pt x="7907020" y="0"/>
+                </a:lnTo>
+                <a:lnTo>
+                  <a:pt x="7907020" y="6699403"/>
+                </a:lnTo>
+                <a:lnTo>
+                  <a:pt x="0" y="6699403"/>
+                </a:lnTo>
+                <a:lnTo>
+                  <a:pt x="0" y="0"/>
+                </a:lnTo>
+                <a:close/>
+              </a:path>
+            </a:pathLst>
+          </a:custGeom>
+          <a:blipFill>
+            <a:blip r:embed="rId4">
+              <a:alphaModFix amt="50000"/>
+              <a:extLst>
+                <a:ext uri="{96DAC541-7B7A-43D3-8B79-37D633B846F1}">
+                  <asvg:svgBlip xmlns:asvg="http://schemas.microsoft.com/office/drawing/2016/SVG/main" r:embed="rId5"/>
+                </a:ext>
+              </a:extLst>
+            </a:blip>
+            <a:stretch>
+              <a:fillRect l="0" t="0" r="0" b="0"/>
+            </a:stretch>
+          </a:blipFill>
+        </p:spPr>
+      </p:sp>
+      <p:sp>
+        <p:nvSpPr>
+          <p:cNvPr name="Freeform 8" id="8"/>
+          <p:cNvSpPr/>
+          <p:nvPr/>
+        </p:nvSpPr>
+        <p:spPr>
+          <a:xfrm flipH="false" flipV="false" rot="-226878">
+            <a:off x="-1669960" y="-642345"/>
+            <a:ext cx="4576141" cy="2579280"/>
+          </a:xfrm>
+          <a:custGeom>
+            <a:avLst/>
+            <a:gdLst/>
+            <a:ahLst/>
+            <a:cxnLst/>
+            <a:rect r="r" b="b" t="t" l="l"/>
+            <a:pathLst>
+              <a:path h="2579280" w="4576141">
+                <a:moveTo>
+                  <a:pt x="0" y="0"/>
+                </a:moveTo>
+                <a:lnTo>
+                  <a:pt x="4576142" y="0"/>
+                </a:lnTo>
+                <a:lnTo>
+                  <a:pt x="4576142" y="2579280"/>
+                </a:lnTo>
+                <a:lnTo>
+                  <a:pt x="0" y="2579280"/>
+                </a:lnTo>
+                <a:lnTo>
+                  <a:pt x="0" y="0"/>
+                </a:lnTo>
+                <a:close/>
+              </a:path>
+            </a:pathLst>
+          </a:custGeom>
+          <a:blipFill>
+            <a:blip r:embed="rId6">
+              <a:extLst>
+                <a:ext uri="{96DAC541-7B7A-43D3-8B79-37D633B846F1}">
+                  <asvg:svgBlip xmlns:asvg="http://schemas.microsoft.com/office/drawing/2016/SVG/main" r:embed="rId7"/>
+                </a:ext>
+              </a:extLst>
+            </a:blip>
+            <a:stretch>
+              <a:fillRect l="0" t="0" r="0" b="0"/>
+            </a:stretch>
+          </a:blipFill>
+        </p:spPr>
+      </p:sp>
+      <p:sp>
+        <p:nvSpPr>
+          <p:cNvPr name="Freeform 9" id="9"/>
+          <p:cNvSpPr/>
+          <p:nvPr/>
+        </p:nvSpPr>
+        <p:spPr>
+          <a:xfrm flipH="false" flipV="false" rot="2830696">
+            <a:off x="14939466" y="8144946"/>
+            <a:ext cx="2835471" cy="4114800"/>
+          </a:xfrm>
+          <a:custGeom>
+            <a:avLst/>
+            <a:gdLst/>
+            <a:ahLst/>
+            <a:cxnLst/>
+            <a:rect r="r" b="b" t="t" l="l"/>
+            <a:pathLst>
+              <a:path h="4114800" w="2835471">
+                <a:moveTo>
+                  <a:pt x="0" y="0"/>
+                </a:moveTo>
+                <a:lnTo>
+                  <a:pt x="2835471" y="0"/>
+                </a:lnTo>
+                <a:lnTo>
+                  <a:pt x="2835471" y="4114800"/>
+                </a:lnTo>
+                <a:lnTo>
+                  <a:pt x="0" y="4114800"/>
+                </a:lnTo>
+                <a:lnTo>
+                  <a:pt x="0" y="0"/>
+                </a:lnTo>
+                <a:close/>
+              </a:path>
+            </a:pathLst>
+          </a:custGeom>
+          <a:blipFill>
+            <a:blip r:embed="rId8">
+              <a:extLst>
+                <a:ext uri="{96DAC541-7B7A-43D3-8B79-37D633B846F1}">
+                  <asvg:svgBlip xmlns:asvg="http://schemas.microsoft.com/office/drawing/2016/SVG/main" r:embed="rId9"/>
+                </a:ext>
+              </a:extLst>
+            </a:blip>
+            <a:stretch>
+              <a:fillRect l="0" t="0" r="0" b="0"/>
+            </a:stretch>
+          </a:blipFill>
+        </p:spPr>
+      </p:sp>
       <p:sp>
         <p:nvSpPr>
           <p:cNvPr name="Freeform 10" id="10"/>
@@ -12256,7 +15676,7 @@
 </p:sld>
 </file>
 
-<file path=ppt/slides/slide16.xml><?xml version="1.0" encoding="utf-8"?>
+<file path=ppt/slides/slide17.xml><?xml version="1.0" encoding="utf-8"?>
 <p:sld xmlns:p="http://schemas.openxmlformats.org/presentationml/2006/main" xmlns:a="http://schemas.openxmlformats.org/drawingml/2006/main" xmlns:r="http://schemas.openxmlformats.org/officeDocument/2006/relationships">
   <p:cSld>
     <p:bg>
@@ -12877,7 +16297,7 @@
 </p:sld>
 </file>
 
-<file path=ppt/slides/slide17.xml><?xml version="1.0" encoding="utf-8"?>
+<file path=ppt/slides/slide18.xml><?xml version="1.0" encoding="utf-8"?>
 <p:sld xmlns:p="http://schemas.openxmlformats.org/presentationml/2006/main" xmlns:a="http://schemas.openxmlformats.org/drawingml/2006/main" xmlns:r="http://schemas.openxmlformats.org/officeDocument/2006/relationships">
   <p:cSld>
     <p:bg>
@@ -13473,7 +16893,7 @@
 </p:sld>
 </file>
 
-<file path=ppt/slides/slide18.xml><?xml version="1.0" encoding="utf-8"?>
+<file path=ppt/slides/slide19.xml><?xml version="1.0" encoding="utf-8"?>
 <p:sld xmlns:p="http://schemas.openxmlformats.org/presentationml/2006/main" xmlns:a="http://schemas.openxmlformats.org/drawingml/2006/main" xmlns:r="http://schemas.openxmlformats.org/officeDocument/2006/relationships">
   <p:cSld>
     <p:bg>
@@ -13850,22 +17270,21 @@
           <p:nvPr/>
         </p:nvGraphicFramePr>
         <p:xfrm>
-          <a:off x="0" y="1374988"/>
-          <a:ext cx="18288000" cy="8915400"/>
+          <a:off x="0" y="1286946"/>
+          <a:ext cx="18288000" cy="8914791"/>
         </p:xfrm>
         <a:graphic>
           <a:graphicData uri="http://schemas.openxmlformats.org/drawingml/2006/table">
             <a:tbl>
               <a:tblPr/>
               <a:tblGrid>
-                <a:gridCol w="2604395"/>
-                <a:gridCol w="1469009"/>
-                <a:gridCol w="4787892"/>
-                <a:gridCol w="3367637"/>
-                <a:gridCol w="3066165"/>
-                <a:gridCol w="2992902"/>
+                <a:gridCol w="3114016"/>
+                <a:gridCol w="1756460"/>
+                <a:gridCol w="5724773"/>
+                <a:gridCol w="4026607"/>
+                <a:gridCol w="3666143"/>
               </a:tblGrid>
-              <a:tr h="1913176">
+              <a:tr h="1913177">
                 <a:tc>
                   <a:txBody>
                     <a:bodyPr anchor="t" rtlCol="false"/>
@@ -14425,133 +17844,8 @@
                     </a:solidFill>
                   </a:tcPr>
                 </a:tc>
-                <a:tc>
-                  <a:txBody>
-                    <a:bodyPr anchor="t" rtlCol="false"/>
-                    <a:lstStyle/>
-                    <a:p>
-                      <a:pPr algn="ctr" marL="0" indent="0" lvl="0">
-                        <a:lnSpc>
-                          <a:spcPts val="3360"/>
-                        </a:lnSpc>
-                        <a:spcBef>
-                          <a:spcPct val="0"/>
-                        </a:spcBef>
-                        <a:defRPr/>
-                      </a:pPr>
-                      <a:endParaRPr lang="en-US" sz="1100"/>
-                    </a:p>
-                    <a:p>
-                      <a:pPr algn="ctr" marL="0" indent="0" lvl="0">
-                        <a:lnSpc>
-                          <a:spcPts val="3360"/>
-                        </a:lnSpc>
-                        <a:spcBef>
-                          <a:spcPct val="0"/>
-                        </a:spcBef>
-                      </a:pPr>
-                      <a:r>
-                        <a:rPr lang="en-US" b="true" sz="2400" strike="noStrike" u="none">
-                          <a:solidFill>
-                            <a:srgbClr val="000000"/>
-                          </a:solidFill>
-                          <a:latin typeface="Red Hat Display Bold"/>
-                          <a:ea typeface="Red Hat Display Bold"/>
-                          <a:cs typeface="Red Hat Display Bold"/>
-                          <a:sym typeface="Red Hat Display Bold"/>
-                        </a:rPr>
-                        <a:t>   Thành</a:t>
-                      </a:r>
-                    </a:p>
-                    <a:p>
-                      <a:pPr algn="ctr" marL="0" indent="0" lvl="0">
-                        <a:lnSpc>
-                          <a:spcPts val="3360"/>
-                        </a:lnSpc>
-                        <a:spcBef>
-                          <a:spcPct val="0"/>
-                        </a:spcBef>
-                      </a:pPr>
-                      <a:r>
-                        <a:rPr lang="en-US" b="true" sz="2400" strike="noStrike" u="none">
-                          <a:solidFill>
-                            <a:srgbClr val="000000"/>
-                          </a:solidFill>
-                          <a:latin typeface="Red Hat Display Bold"/>
-                          <a:ea typeface="Red Hat Display Bold"/>
-                          <a:cs typeface="Red Hat Display Bold"/>
-                          <a:sym typeface="Red Hat Display Bold"/>
-                        </a:rPr>
-                        <a:t>   viên</a:t>
-                      </a:r>
-                    </a:p>
-                    <a:p>
-                      <a:pPr algn="ctr" marL="0" indent="0" lvl="0">
-                        <a:lnSpc>
-                          <a:spcPts val="3360"/>
-                        </a:lnSpc>
-                        <a:spcBef>
-                          <a:spcPct val="0"/>
-                        </a:spcBef>
-                      </a:pPr>
-                      <a:r>
-                        <a:rPr lang="en-US" b="true" sz="2400" strike="noStrike" u="none">
-                          <a:solidFill>
-                            <a:srgbClr val="000000"/>
-                          </a:solidFill>
-                          <a:latin typeface="Red Hat Display Bold"/>
-                          <a:ea typeface="Red Hat Display Bold"/>
-                          <a:cs typeface="Red Hat Display Bold"/>
-                          <a:sym typeface="Red Hat Display Bold"/>
-                        </a:rPr>
-                        <a:t>   </a:t>
-                      </a:r>
-                    </a:p>
-                  </a:txBody>
-                  <a:tcPr marL="76200" marR="76200" marT="76200" marB="76200" anchor="ctr">
-                    <a:lnL cmpd="sng" algn="ctr" cap="flat" w="38100">
-                      <a:solidFill>
-                        <a:srgbClr val="000000"/>
-                      </a:solidFill>
-                      <a:prstDash val="solid"/>
-                      <a:round/>
-                      <a:headEnd type="none" w="med" len="med"/>
-                      <a:tailEnd type="none" w="med" len="med"/>
-                    </a:lnL>
-                    <a:lnR cmpd="sng" algn="ctr" cap="flat" w="38100">
-                      <a:solidFill>
-                        <a:srgbClr val="000000"/>
-                      </a:solidFill>
-                      <a:prstDash val="solid"/>
-                      <a:round/>
-                      <a:headEnd type="none" w="med" len="med"/>
-                      <a:tailEnd type="none" w="med" len="med"/>
-                    </a:lnR>
-                    <a:lnT cmpd="sng" algn="ctr" cap="flat" w="38100">
-                      <a:solidFill>
-                        <a:srgbClr val="000000"/>
-                      </a:solidFill>
-                      <a:prstDash val="solid"/>
-                      <a:round/>
-                      <a:headEnd type="none" w="med" len="med"/>
-                      <a:tailEnd type="none" w="med" len="med"/>
-                    </a:lnT>
-                    <a:lnB cmpd="sng" algn="ctr" cap="flat" w="38100">
-                      <a:solidFill>
-                        <a:srgbClr val="000000"/>
-                      </a:solidFill>
-                      <a:prstDash val="solid"/>
-                      <a:round/>
-                      <a:headEnd type="none" w="med" len="med"/>
-                      <a:tailEnd type="none" w="med" len="med"/>
-                    </a:lnB>
-                    <a:solidFill>
-                      <a:srgbClr val="FBFCFE"/>
-                    </a:solidFill>
-                  </a:tcPr>
-                </a:tc>
               </a:tr>
-              <a:tr h="2334075">
+              <a:tr h="2333463">
                 <a:tc>
                   <a:txBody>
                     <a:bodyPr anchor="t" rtlCol="false"/>
@@ -15044,131 +18338,6 @@
                           <a:sym typeface="Red Hat Display"/>
                         </a:rPr>
                         <a:t>  Notebook, R/01, R/02, dữ liệu và hình EDA</a:t>
-                      </a:r>
-                    </a:p>
-                    <a:p>
-                      <a:pPr algn="ctr" marL="0" indent="0" lvl="0">
-                        <a:lnSpc>
-                          <a:spcPts val="3360"/>
-                        </a:lnSpc>
-                        <a:spcBef>
-                          <a:spcPct val="0"/>
-                        </a:spcBef>
-                      </a:pPr>
-                      <a:r>
-                        <a:rPr lang="en-US" sz="2400" strike="noStrike" u="none">
-                          <a:solidFill>
-                            <a:srgbClr val="000000"/>
-                          </a:solidFill>
-                          <a:latin typeface="Red Hat Display"/>
-                          <a:ea typeface="Red Hat Display"/>
-                          <a:cs typeface="Red Hat Display"/>
-                          <a:sym typeface="Red Hat Display"/>
-                        </a:rPr>
-                        <a:t>  </a:t>
-                      </a:r>
-                    </a:p>
-                  </a:txBody>
-                  <a:tcPr marL="76200" marR="76200" marT="76200" marB="76200" anchor="ctr">
-                    <a:lnL cmpd="sng" algn="ctr" cap="flat" w="38100">
-                      <a:solidFill>
-                        <a:srgbClr val="000000"/>
-                      </a:solidFill>
-                      <a:prstDash val="solid"/>
-                      <a:round/>
-                      <a:headEnd type="none" w="med" len="med"/>
-                      <a:tailEnd type="none" w="med" len="med"/>
-                    </a:lnL>
-                    <a:lnR cmpd="sng" algn="ctr" cap="flat" w="38100">
-                      <a:solidFill>
-                        <a:srgbClr val="000000"/>
-                      </a:solidFill>
-                      <a:prstDash val="solid"/>
-                      <a:round/>
-                      <a:headEnd type="none" w="med" len="med"/>
-                      <a:tailEnd type="none" w="med" len="med"/>
-                    </a:lnR>
-                    <a:lnT cmpd="sng" algn="ctr" cap="flat" w="38100">
-                      <a:solidFill>
-                        <a:srgbClr val="000000"/>
-                      </a:solidFill>
-                      <a:prstDash val="solid"/>
-                      <a:round/>
-                      <a:headEnd type="none" w="med" len="med"/>
-                      <a:tailEnd type="none" w="med" len="med"/>
-                    </a:lnT>
-                    <a:lnB cmpd="sng" algn="ctr" cap="flat" w="38100">
-                      <a:solidFill>
-                        <a:srgbClr val="000000"/>
-                      </a:solidFill>
-                      <a:prstDash val="solid"/>
-                      <a:round/>
-                      <a:headEnd type="none" w="med" len="med"/>
-                      <a:tailEnd type="none" w="med" len="med"/>
-                    </a:lnB>
-                    <a:solidFill>
-                      <a:srgbClr val="FBFCFE"/>
-                    </a:solidFill>
-                  </a:tcPr>
-                </a:tc>
-                <a:tc>
-                  <a:txBody>
-                    <a:bodyPr anchor="t" rtlCol="false"/>
-                    <a:lstStyle/>
-                    <a:p>
-                      <a:pPr algn="ctr" marL="0" indent="0" lvl="0">
-                        <a:lnSpc>
-                          <a:spcPts val="3360"/>
-                        </a:lnSpc>
-                        <a:spcBef>
-                          <a:spcPct val="0"/>
-                        </a:spcBef>
-                        <a:defRPr/>
-                      </a:pPr>
-                      <a:endParaRPr lang="en-US" sz="1100"/>
-                    </a:p>
-                    <a:p>
-                      <a:pPr algn="ctr" marL="0" indent="0" lvl="0">
-                        <a:lnSpc>
-                          <a:spcPts val="3360"/>
-                        </a:lnSpc>
-                        <a:spcBef>
-                          <a:spcPct val="0"/>
-                        </a:spcBef>
-                      </a:pPr>
-                      <a:r>
-                        <a:rPr lang="en-US" sz="2400" strike="noStrike" u="none">
-                          <a:solidFill>
-                            <a:srgbClr val="000000"/>
-                          </a:solidFill>
-                          <a:latin typeface="Red Hat Display"/>
-                          <a:ea typeface="Red Hat Display"/>
-                          <a:cs typeface="Red Hat Display"/>
-                          <a:sym typeface="Red Hat Display"/>
-                        </a:rPr>
-                        <a:t>  Trần Thiên Lực</a:t>
-                      </a:r>
-                    </a:p>
-                    <a:p>
-                      <a:pPr algn="ctr" marL="0" indent="0" lvl="0">
-                        <a:lnSpc>
-                          <a:spcPts val="3360"/>
-                        </a:lnSpc>
-                        <a:spcBef>
-                          <a:spcPct val="0"/>
-                        </a:spcBef>
-                      </a:pPr>
-                      <a:r>
-                        <a:rPr lang="en-US" sz="2400" strike="noStrike" u="none">
-                          <a:solidFill>
-                            <a:srgbClr val="000000"/>
-                          </a:solidFill>
-                          <a:latin typeface="Red Hat Display"/>
-                          <a:ea typeface="Red Hat Display"/>
-                          <a:cs typeface="Red Hat Display"/>
-                          <a:sym typeface="Red Hat Display"/>
-                        </a:rPr>
-                        <a:t>  (24133037)</a:t>
                       </a:r>
                     </a:p>
                     <a:p>
@@ -15819,131 +18988,6 @@
                     </a:solidFill>
                   </a:tcPr>
                 </a:tc>
-                <a:tc>
-                  <a:txBody>
-                    <a:bodyPr anchor="t" rtlCol="false"/>
-                    <a:lstStyle/>
-                    <a:p>
-                      <a:pPr algn="ctr" marL="0" indent="0" lvl="0">
-                        <a:lnSpc>
-                          <a:spcPts val="3360"/>
-                        </a:lnSpc>
-                        <a:spcBef>
-                          <a:spcPct val="0"/>
-                        </a:spcBef>
-                        <a:defRPr/>
-                      </a:pPr>
-                      <a:endParaRPr lang="en-US" sz="1100"/>
-                    </a:p>
-                    <a:p>
-                      <a:pPr algn="ctr" marL="0" indent="0" lvl="0">
-                        <a:lnSpc>
-                          <a:spcPts val="3360"/>
-                        </a:lnSpc>
-                        <a:spcBef>
-                          <a:spcPct val="0"/>
-                        </a:spcBef>
-                      </a:pPr>
-                      <a:r>
-                        <a:rPr lang="en-US" sz="2400" strike="noStrike" u="none">
-                          <a:solidFill>
-                            <a:srgbClr val="000000"/>
-                          </a:solidFill>
-                          <a:latin typeface="Red Hat Display"/>
-                          <a:ea typeface="Red Hat Display"/>
-                          <a:cs typeface="Red Hat Display"/>
-                          <a:sym typeface="Red Hat Display"/>
-                        </a:rPr>
-                        <a:t>  Nguyễn Đức Học</a:t>
-                      </a:r>
-                    </a:p>
-                    <a:p>
-                      <a:pPr algn="ctr" marL="0" indent="0" lvl="0">
-                        <a:lnSpc>
-                          <a:spcPts val="3360"/>
-                        </a:lnSpc>
-                        <a:spcBef>
-                          <a:spcPct val="0"/>
-                        </a:spcBef>
-                      </a:pPr>
-                      <a:r>
-                        <a:rPr lang="en-US" sz="2400" strike="noStrike" u="none">
-                          <a:solidFill>
-                            <a:srgbClr val="000000"/>
-                          </a:solidFill>
-                          <a:latin typeface="Red Hat Display"/>
-                          <a:ea typeface="Red Hat Display"/>
-                          <a:cs typeface="Red Hat Display"/>
-                          <a:sym typeface="Red Hat Display"/>
-                        </a:rPr>
-                        <a:t>  (24162039)</a:t>
-                      </a:r>
-                    </a:p>
-                    <a:p>
-                      <a:pPr algn="ctr" marL="0" indent="0" lvl="0">
-                        <a:lnSpc>
-                          <a:spcPts val="3360"/>
-                        </a:lnSpc>
-                        <a:spcBef>
-                          <a:spcPct val="0"/>
-                        </a:spcBef>
-                      </a:pPr>
-                      <a:r>
-                        <a:rPr lang="en-US" sz="2400" strike="noStrike" u="none">
-                          <a:solidFill>
-                            <a:srgbClr val="000000"/>
-                          </a:solidFill>
-                          <a:latin typeface="Red Hat Display"/>
-                          <a:ea typeface="Red Hat Display"/>
-                          <a:cs typeface="Red Hat Display"/>
-                          <a:sym typeface="Red Hat Display"/>
-                        </a:rPr>
-                        <a:t>  </a:t>
-                      </a:r>
-                    </a:p>
-                  </a:txBody>
-                  <a:tcPr marL="76200" marR="76200" marT="76200" marB="76200" anchor="ctr">
-                    <a:lnL cmpd="sng" algn="ctr" cap="flat" w="38100">
-                      <a:solidFill>
-                        <a:srgbClr val="000000"/>
-                      </a:solidFill>
-                      <a:prstDash val="solid"/>
-                      <a:round/>
-                      <a:headEnd type="none" w="med" len="med"/>
-                      <a:tailEnd type="none" w="med" len="med"/>
-                    </a:lnL>
-                    <a:lnR cmpd="sng" algn="ctr" cap="flat" w="38100">
-                      <a:solidFill>
-                        <a:srgbClr val="000000"/>
-                      </a:solidFill>
-                      <a:prstDash val="solid"/>
-                      <a:round/>
-                      <a:headEnd type="none" w="med" len="med"/>
-                      <a:tailEnd type="none" w="med" len="med"/>
-                    </a:lnR>
-                    <a:lnT cmpd="sng" algn="ctr" cap="flat" w="38100">
-                      <a:solidFill>
-                        <a:srgbClr val="000000"/>
-                      </a:solidFill>
-                      <a:prstDash val="solid"/>
-                      <a:round/>
-                      <a:headEnd type="none" w="med" len="med"/>
-                      <a:tailEnd type="none" w="med" len="med"/>
-                    </a:lnT>
-                    <a:lnB cmpd="sng" algn="ctr" cap="flat" w="38100">
-                      <a:solidFill>
-                        <a:srgbClr val="000000"/>
-                      </a:solidFill>
-                      <a:prstDash val="solid"/>
-                      <a:round/>
-                      <a:headEnd type="none" w="med" len="med"/>
-                      <a:tailEnd type="none" w="med" len="med"/>
-                    </a:lnB>
-                    <a:solidFill>
-                      <a:srgbClr val="FBFCFE"/>
-                    </a:solidFill>
-                  </a:tcPr>
-                </a:tc>
               </a:tr>
               <a:tr h="2334075">
                 <a:tc>
@@ -16505,542 +19549,11 @@
                     </a:solidFill>
                   </a:tcPr>
                 </a:tc>
-                <a:tc>
-                  <a:txBody>
-                    <a:bodyPr anchor="t" rtlCol="false"/>
-                    <a:lstStyle/>
-                    <a:p>
-                      <a:pPr algn="ctr" marL="0" indent="0" lvl="0">
-                        <a:lnSpc>
-                          <a:spcPts val="3360"/>
-                        </a:lnSpc>
-                        <a:spcBef>
-                          <a:spcPct val="0"/>
-                        </a:spcBef>
-                        <a:defRPr/>
-                      </a:pPr>
-                      <a:endParaRPr lang="en-US" sz="1100"/>
-                    </a:p>
-                    <a:p>
-                      <a:pPr algn="ctr" marL="0" indent="0" lvl="0">
-                        <a:lnSpc>
-                          <a:spcPts val="3360"/>
-                        </a:lnSpc>
-                        <a:spcBef>
-                          <a:spcPct val="0"/>
-                        </a:spcBef>
-                      </a:pPr>
-                      <a:r>
-                        <a:rPr lang="en-US" sz="2400" strike="noStrike" u="none">
-                          <a:solidFill>
-                            <a:srgbClr val="000000"/>
-                          </a:solidFill>
-                          <a:latin typeface="Red Hat Display"/>
-                          <a:ea typeface="Red Hat Display"/>
-                          <a:cs typeface="Red Hat Display"/>
-                          <a:sym typeface="Red Hat Display"/>
-                        </a:rPr>
-                        <a:t>  Lê Đặng Hoàng</a:t>
-                      </a:r>
-                    </a:p>
-                    <a:p>
-                      <a:pPr algn="ctr" marL="0" indent="0" lvl="0">
-                        <a:lnSpc>
-                          <a:spcPts val="3360"/>
-                        </a:lnSpc>
-                        <a:spcBef>
-                          <a:spcPct val="0"/>
-                        </a:spcBef>
-                      </a:pPr>
-                      <a:r>
-                        <a:rPr lang="en-US" sz="2400" strike="noStrike" u="none">
-                          <a:solidFill>
-                            <a:srgbClr val="000000"/>
-                          </a:solidFill>
-                          <a:latin typeface="Red Hat Display"/>
-                          <a:ea typeface="Red Hat Display"/>
-                          <a:cs typeface="Red Hat Display"/>
-                          <a:sym typeface="Red Hat Display"/>
-                        </a:rPr>
-                        <a:t>  Anh (24162006)</a:t>
-                      </a:r>
-                    </a:p>
-                    <a:p>
-                      <a:pPr algn="ctr" marL="0" indent="0" lvl="0">
-                        <a:lnSpc>
-                          <a:spcPts val="3360"/>
-                        </a:lnSpc>
-                        <a:spcBef>
-                          <a:spcPct val="0"/>
-                        </a:spcBef>
-                      </a:pPr>
-                      <a:r>
-                        <a:rPr lang="en-US" sz="2400" strike="noStrike" u="none">
-                          <a:solidFill>
-                            <a:srgbClr val="000000"/>
-                          </a:solidFill>
-                          <a:latin typeface="Red Hat Display"/>
-                          <a:ea typeface="Red Hat Display"/>
-                          <a:cs typeface="Red Hat Display"/>
-                          <a:sym typeface="Red Hat Display"/>
-                        </a:rPr>
-                        <a:t>  </a:t>
-                      </a:r>
-                    </a:p>
-                  </a:txBody>
-                  <a:tcPr marL="76200" marR="76200" marT="76200" marB="76200" anchor="ctr">
-                    <a:lnL cmpd="sng" algn="ctr" cap="flat" w="38100">
-                      <a:solidFill>
-                        <a:srgbClr val="000000"/>
-                      </a:solidFill>
-                      <a:prstDash val="solid"/>
-                      <a:round/>
-                      <a:headEnd type="none" w="med" len="med"/>
-                      <a:tailEnd type="none" w="med" len="med"/>
-                    </a:lnL>
-                    <a:lnR cmpd="sng" algn="ctr" cap="flat" w="38100">
-                      <a:solidFill>
-                        <a:srgbClr val="000000"/>
-                      </a:solidFill>
-                      <a:prstDash val="solid"/>
-                      <a:round/>
-                      <a:headEnd type="none" w="med" len="med"/>
-                      <a:tailEnd type="none" w="med" len="med"/>
-                    </a:lnR>
-                    <a:lnT cmpd="sng" algn="ctr" cap="flat" w="38100">
-                      <a:solidFill>
-                        <a:srgbClr val="000000"/>
-                      </a:solidFill>
-                      <a:prstDash val="solid"/>
-                      <a:round/>
-                      <a:headEnd type="none" w="med" len="med"/>
-                      <a:tailEnd type="none" w="med" len="med"/>
-                    </a:lnT>
-                    <a:lnB cmpd="sng" algn="ctr" cap="flat" w="38100">
-                      <a:solidFill>
-                        <a:srgbClr val="000000"/>
-                      </a:solidFill>
-                      <a:prstDash val="solid"/>
-                      <a:round/>
-                      <a:headEnd type="none" w="med" len="med"/>
-                      <a:tailEnd type="none" w="med" len="med"/>
-                    </a:lnB>
-                    <a:solidFill>
-                      <a:srgbClr val="FBFCFE"/>
-                    </a:solidFill>
-                  </a:tcPr>
-                </a:tc>
               </a:tr>
             </a:tbl>
           </a:graphicData>
         </a:graphic>
       </p:graphicFrame>
-    </p:spTree>
-  </p:cSld>
-  <p:clrMapOvr>
-    <a:masterClrMapping/>
-  </p:clrMapOvr>
-</p:sld>
-</file>
-
-<file path=ppt/slides/slide19.xml><?xml version="1.0" encoding="utf-8"?>
-<p:sld xmlns:p="http://schemas.openxmlformats.org/presentationml/2006/main" xmlns:a="http://schemas.openxmlformats.org/drawingml/2006/main" xmlns:r="http://schemas.openxmlformats.org/officeDocument/2006/relationships">
-  <p:cSld>
-    <p:bg>
-      <p:bgPr>
-        <a:solidFill>
-          <a:srgbClr val="FBFCFE"/>
-        </a:solidFill>
-      </p:bgPr>
-    </p:bg>
-    <p:spTree>
-      <p:nvGrpSpPr>
-        <p:cNvPr id="1" name=""/>
-        <p:cNvGrpSpPr/>
-        <p:nvPr/>
-      </p:nvGrpSpPr>
-      <p:grpSpPr>
-        <a:xfrm>
-          <a:off x="0" y="0"/>
-          <a:ext cx="0" cy="0"/>
-          <a:chOff x="0" y="0"/>
-          <a:chExt cx="0" cy="0"/>
-        </a:xfrm>
-      </p:grpSpPr>
-      <p:sp>
-        <p:nvSpPr>
-          <p:cNvPr name="Freeform 2" id="2"/>
-          <p:cNvSpPr/>
-          <p:nvPr/>
-        </p:nvSpPr>
-        <p:spPr>
-          <a:xfrm flipH="false" flipV="false" rot="0">
-            <a:off x="8546751" y="743343"/>
-            <a:ext cx="10960234" cy="7472887"/>
-          </a:xfrm>
-          <a:custGeom>
-            <a:avLst/>
-            <a:gdLst/>
-            <a:ahLst/>
-            <a:cxnLst/>
-            <a:rect r="r" b="b" t="t" l="l"/>
-            <a:pathLst>
-              <a:path h="7472887" w="10960234">
-                <a:moveTo>
-                  <a:pt x="0" y="0"/>
-                </a:moveTo>
-                <a:lnTo>
-                  <a:pt x="10960235" y="0"/>
-                </a:lnTo>
-                <a:lnTo>
-                  <a:pt x="10960235" y="7472887"/>
-                </a:lnTo>
-                <a:lnTo>
-                  <a:pt x="0" y="7472887"/>
-                </a:lnTo>
-                <a:lnTo>
-                  <a:pt x="0" y="0"/>
-                </a:lnTo>
-                <a:close/>
-              </a:path>
-            </a:pathLst>
-          </a:custGeom>
-          <a:blipFill>
-            <a:blip r:embed="rId2">
-              <a:alphaModFix amt="50000"/>
-              <a:extLst>
-                <a:ext uri="{96DAC541-7B7A-43D3-8B79-37D633B846F1}">
-                  <asvg:svgBlip xmlns:asvg="http://schemas.microsoft.com/office/drawing/2016/SVG/main" r:embed="rId3"/>
-                </a:ext>
-              </a:extLst>
-            </a:blip>
-            <a:stretch>
-              <a:fillRect l="0" t="0" r="0" b="0"/>
-            </a:stretch>
-          </a:blipFill>
-        </p:spPr>
-      </p:sp>
-      <p:sp>
-        <p:nvSpPr>
-          <p:cNvPr name="Freeform 3" id="3"/>
-          <p:cNvSpPr/>
-          <p:nvPr/>
-        </p:nvSpPr>
-        <p:spPr>
-          <a:xfrm flipH="false" flipV="false" rot="635325">
-            <a:off x="-1336143" y="6923321"/>
-            <a:ext cx="9442126" cy="8000056"/>
-          </a:xfrm>
-          <a:custGeom>
-            <a:avLst/>
-            <a:gdLst/>
-            <a:ahLst/>
-            <a:cxnLst/>
-            <a:rect r="r" b="b" t="t" l="l"/>
-            <a:pathLst>
-              <a:path h="8000056" w="9442126">
-                <a:moveTo>
-                  <a:pt x="0" y="0"/>
-                </a:moveTo>
-                <a:lnTo>
-                  <a:pt x="9442126" y="0"/>
-                </a:lnTo>
-                <a:lnTo>
-                  <a:pt x="9442126" y="8000056"/>
-                </a:lnTo>
-                <a:lnTo>
-                  <a:pt x="0" y="8000056"/>
-                </a:lnTo>
-                <a:lnTo>
-                  <a:pt x="0" y="0"/>
-                </a:lnTo>
-                <a:close/>
-              </a:path>
-            </a:pathLst>
-          </a:custGeom>
-          <a:blipFill>
-            <a:blip r:embed="rId4">
-              <a:alphaModFix amt="50000"/>
-              <a:extLst>
-                <a:ext uri="{96DAC541-7B7A-43D3-8B79-37D633B846F1}">
-                  <asvg:svgBlip xmlns:asvg="http://schemas.microsoft.com/office/drawing/2016/SVG/main" r:embed="rId5"/>
-                </a:ext>
-              </a:extLst>
-            </a:blip>
-            <a:stretch>
-              <a:fillRect l="0" t="0" r="0" b="0"/>
-            </a:stretch>
-          </a:blipFill>
-        </p:spPr>
-      </p:sp>
-      <p:sp>
-        <p:nvSpPr>
-          <p:cNvPr name="Freeform 4" id="4"/>
-          <p:cNvSpPr/>
-          <p:nvPr/>
-        </p:nvSpPr>
-        <p:spPr>
-          <a:xfrm flipH="false" flipV="false" rot="-226878">
-            <a:off x="-216283" y="847655"/>
-            <a:ext cx="4576141" cy="2579280"/>
-          </a:xfrm>
-          <a:custGeom>
-            <a:avLst/>
-            <a:gdLst/>
-            <a:ahLst/>
-            <a:cxnLst/>
-            <a:rect r="r" b="b" t="t" l="l"/>
-            <a:pathLst>
-              <a:path h="2579280" w="4576141">
-                <a:moveTo>
-                  <a:pt x="0" y="0"/>
-                </a:moveTo>
-                <a:lnTo>
-                  <a:pt x="4576141" y="0"/>
-                </a:lnTo>
-                <a:lnTo>
-                  <a:pt x="4576141" y="2579280"/>
-                </a:lnTo>
-                <a:lnTo>
-                  <a:pt x="0" y="2579280"/>
-                </a:lnTo>
-                <a:lnTo>
-                  <a:pt x="0" y="0"/>
-                </a:lnTo>
-                <a:close/>
-              </a:path>
-            </a:pathLst>
-          </a:custGeom>
-          <a:blipFill>
-            <a:blip r:embed="rId6">
-              <a:extLst>
-                <a:ext uri="{96DAC541-7B7A-43D3-8B79-37D633B846F1}">
-                  <asvg:svgBlip xmlns:asvg="http://schemas.microsoft.com/office/drawing/2016/SVG/main" r:embed="rId7"/>
-                </a:ext>
-              </a:extLst>
-            </a:blip>
-            <a:stretch>
-              <a:fillRect l="0" t="0" r="0" b="0"/>
-            </a:stretch>
-          </a:blipFill>
-        </p:spPr>
-      </p:sp>
-      <p:sp>
-        <p:nvSpPr>
-          <p:cNvPr name="Freeform 5" id="5"/>
-          <p:cNvSpPr/>
-          <p:nvPr/>
-        </p:nvSpPr>
-        <p:spPr>
-          <a:xfrm flipH="false" flipV="false" rot="2830696">
-            <a:off x="12315724" y="8229600"/>
-            <a:ext cx="2835471" cy="4114800"/>
-          </a:xfrm>
-          <a:custGeom>
-            <a:avLst/>
-            <a:gdLst/>
-            <a:ahLst/>
-            <a:cxnLst/>
-            <a:rect r="r" b="b" t="t" l="l"/>
-            <a:pathLst>
-              <a:path h="4114800" w="2835471">
-                <a:moveTo>
-                  <a:pt x="0" y="0"/>
-                </a:moveTo>
-                <a:lnTo>
-                  <a:pt x="2835471" y="0"/>
-                </a:lnTo>
-                <a:lnTo>
-                  <a:pt x="2835471" y="4114800"/>
-                </a:lnTo>
-                <a:lnTo>
-                  <a:pt x="0" y="4114800"/>
-                </a:lnTo>
-                <a:lnTo>
-                  <a:pt x="0" y="0"/>
-                </a:lnTo>
-                <a:close/>
-              </a:path>
-            </a:pathLst>
-          </a:custGeom>
-          <a:blipFill>
-            <a:blip r:embed="rId8">
-              <a:extLst>
-                <a:ext uri="{96DAC541-7B7A-43D3-8B79-37D633B846F1}">
-                  <asvg:svgBlip xmlns:asvg="http://schemas.microsoft.com/office/drawing/2016/SVG/main" r:embed="rId9"/>
-                </a:ext>
-              </a:extLst>
-            </a:blip>
-            <a:stretch>
-              <a:fillRect l="0" t="0" r="0" b="0"/>
-            </a:stretch>
-          </a:blipFill>
-        </p:spPr>
-      </p:sp>
-      <p:sp>
-        <p:nvSpPr>
-          <p:cNvPr name="Freeform 6" id="6"/>
-          <p:cNvSpPr/>
-          <p:nvPr/>
-        </p:nvSpPr>
-        <p:spPr>
-          <a:xfrm flipH="false" flipV="false" rot="0">
-            <a:off x="13733460" y="743343"/>
-            <a:ext cx="3825295" cy="4114800"/>
-          </a:xfrm>
-          <a:custGeom>
-            <a:avLst/>
-            <a:gdLst/>
-            <a:ahLst/>
-            <a:cxnLst/>
-            <a:rect r="r" b="b" t="t" l="l"/>
-            <a:pathLst>
-              <a:path h="4114800" w="3825295">
-                <a:moveTo>
-                  <a:pt x="0" y="0"/>
-                </a:moveTo>
-                <a:lnTo>
-                  <a:pt x="3825295" y="0"/>
-                </a:lnTo>
-                <a:lnTo>
-                  <a:pt x="3825295" y="4114800"/>
-                </a:lnTo>
-                <a:lnTo>
-                  <a:pt x="0" y="4114800"/>
-                </a:lnTo>
-                <a:lnTo>
-                  <a:pt x="0" y="0"/>
-                </a:lnTo>
-                <a:close/>
-              </a:path>
-            </a:pathLst>
-          </a:custGeom>
-          <a:blipFill>
-            <a:blip r:embed="rId10">
-              <a:extLst>
-                <a:ext uri="{96DAC541-7B7A-43D3-8B79-37D633B846F1}">
-                  <asvg:svgBlip xmlns:asvg="http://schemas.microsoft.com/office/drawing/2016/SVG/main" r:embed="rId11"/>
-                </a:ext>
-              </a:extLst>
-            </a:blip>
-            <a:stretch>
-              <a:fillRect l="0" t="0" r="0" b="0"/>
-            </a:stretch>
-          </a:blipFill>
-        </p:spPr>
-      </p:sp>
-      <p:sp>
-        <p:nvSpPr>
-          <p:cNvPr name="Freeform 7" id="7"/>
-          <p:cNvSpPr/>
-          <p:nvPr/>
-        </p:nvSpPr>
-        <p:spPr>
-          <a:xfrm flipH="false" flipV="false" rot="0">
-            <a:off x="9989162" y="4479787"/>
-            <a:ext cx="4599878" cy="4114800"/>
-          </a:xfrm>
-          <a:custGeom>
-            <a:avLst/>
-            <a:gdLst/>
-            <a:ahLst/>
-            <a:cxnLst/>
-            <a:rect r="r" b="b" t="t" l="l"/>
-            <a:pathLst>
-              <a:path h="4114800" w="4599878">
-                <a:moveTo>
-                  <a:pt x="0" y="0"/>
-                </a:moveTo>
-                <a:lnTo>
-                  <a:pt x="4599878" y="0"/>
-                </a:lnTo>
-                <a:lnTo>
-                  <a:pt x="4599878" y="4114800"/>
-                </a:lnTo>
-                <a:lnTo>
-                  <a:pt x="0" y="4114800"/>
-                </a:lnTo>
-                <a:lnTo>
-                  <a:pt x="0" y="0"/>
-                </a:lnTo>
-                <a:close/>
-              </a:path>
-            </a:pathLst>
-          </a:custGeom>
-          <a:blipFill>
-            <a:blip r:embed="rId12">
-              <a:extLst>
-                <a:ext uri="{96DAC541-7B7A-43D3-8B79-37D633B846F1}">
-                  <asvg:svgBlip xmlns:asvg="http://schemas.microsoft.com/office/drawing/2016/SVG/main" r:embed="rId13"/>
-                </a:ext>
-              </a:extLst>
-            </a:blip>
-            <a:stretch>
-              <a:fillRect l="0" t="0" r="0" b="0"/>
-            </a:stretch>
-          </a:blipFill>
-        </p:spPr>
-      </p:sp>
-      <p:sp>
-        <p:nvSpPr>
-          <p:cNvPr name="TextBox 8" id="8"/>
-          <p:cNvSpPr txBox="true"/>
-          <p:nvPr/>
-        </p:nvSpPr>
-        <p:spPr>
-          <a:xfrm rot="0">
-            <a:off x="1753451" y="3682429"/>
-            <a:ext cx="9507300" cy="2603129"/>
-          </a:xfrm>
-          <a:prstGeom prst="rect">
-            <a:avLst/>
-          </a:prstGeom>
-        </p:spPr>
-        <p:txBody>
-          <a:bodyPr anchor="t" rtlCol="false" tIns="0" lIns="0" bIns="0" rIns="0">
-            <a:spAutoFit/>
-          </a:bodyPr>
-          <a:lstStyle/>
-          <a:p>
-            <a:pPr algn="l">
-              <a:lnSpc>
-                <a:spcPts val="10310"/>
-              </a:lnSpc>
-            </a:pPr>
-            <a:r>
-              <a:rPr lang="en-US" sz="8287" b="true">
-                <a:solidFill>
-                  <a:srgbClr val="2D2261"/>
-                </a:solidFill>
-                <a:latin typeface="Red Hat Display Bold"/>
-                <a:ea typeface="Red Hat Display Bold"/>
-                <a:cs typeface="Red Hat Display Bold"/>
-                <a:sym typeface="Red Hat Display Bold"/>
-              </a:rPr>
-              <a:t>THANKS FOR</a:t>
-            </a:r>
-          </a:p>
-          <a:p>
-            <a:pPr algn="l">
-              <a:lnSpc>
-                <a:spcPts val="10310"/>
-              </a:lnSpc>
-            </a:pPr>
-            <a:r>
-              <a:rPr lang="en-US" b="true" sz="8287">
-                <a:solidFill>
-                  <a:srgbClr val="2D2261"/>
-                </a:solidFill>
-                <a:latin typeface="Red Hat Display Bold"/>
-                <a:ea typeface="Red Hat Display Bold"/>
-                <a:cs typeface="Red Hat Display Bold"/>
-                <a:sym typeface="Red Hat Display Bold"/>
-              </a:rPr>
-              <a:t>LISTENING</a:t>
-            </a:r>
-          </a:p>
-        </p:txBody>
-      </p:sp>
     </p:spTree>
   </p:cSld>
   <p:clrMapOvr>
@@ -17560,6 +20073,412 @@
                 <a:sym typeface="Red Hat Display Bold"/>
               </a:rPr>
               <a:t>Giới thiệu về đề tài và bài toán nghiên cứu</a:t>
+            </a:r>
+          </a:p>
+        </p:txBody>
+      </p:sp>
+    </p:spTree>
+  </p:cSld>
+  <p:clrMapOvr>
+    <a:masterClrMapping/>
+  </p:clrMapOvr>
+</p:sld>
+</file>
+
+<file path=ppt/slides/slide20.xml><?xml version="1.0" encoding="utf-8"?>
+<p:sld xmlns:p="http://schemas.openxmlformats.org/presentationml/2006/main" xmlns:a="http://schemas.openxmlformats.org/drawingml/2006/main" xmlns:r="http://schemas.openxmlformats.org/officeDocument/2006/relationships">
+  <p:cSld>
+    <p:bg>
+      <p:bgPr>
+        <a:solidFill>
+          <a:srgbClr val="FBFCFE"/>
+        </a:solidFill>
+      </p:bgPr>
+    </p:bg>
+    <p:spTree>
+      <p:nvGrpSpPr>
+        <p:cNvPr id="1" name=""/>
+        <p:cNvGrpSpPr/>
+        <p:nvPr/>
+      </p:nvGrpSpPr>
+      <p:grpSpPr>
+        <a:xfrm>
+          <a:off x="0" y="0"/>
+          <a:ext cx="0" cy="0"/>
+          <a:chOff x="0" y="0"/>
+          <a:chExt cx="0" cy="0"/>
+        </a:xfrm>
+      </p:grpSpPr>
+      <p:sp>
+        <p:nvSpPr>
+          <p:cNvPr name="Freeform 2" id="2"/>
+          <p:cNvSpPr/>
+          <p:nvPr/>
+        </p:nvSpPr>
+        <p:spPr>
+          <a:xfrm flipH="false" flipV="false" rot="0">
+            <a:off x="8546751" y="743343"/>
+            <a:ext cx="10960234" cy="7472887"/>
+          </a:xfrm>
+          <a:custGeom>
+            <a:avLst/>
+            <a:gdLst/>
+            <a:ahLst/>
+            <a:cxnLst/>
+            <a:rect r="r" b="b" t="t" l="l"/>
+            <a:pathLst>
+              <a:path h="7472887" w="10960234">
+                <a:moveTo>
+                  <a:pt x="0" y="0"/>
+                </a:moveTo>
+                <a:lnTo>
+                  <a:pt x="10960235" y="0"/>
+                </a:lnTo>
+                <a:lnTo>
+                  <a:pt x="10960235" y="7472887"/>
+                </a:lnTo>
+                <a:lnTo>
+                  <a:pt x="0" y="7472887"/>
+                </a:lnTo>
+                <a:lnTo>
+                  <a:pt x="0" y="0"/>
+                </a:lnTo>
+                <a:close/>
+              </a:path>
+            </a:pathLst>
+          </a:custGeom>
+          <a:blipFill>
+            <a:blip r:embed="rId2">
+              <a:alphaModFix amt="50000"/>
+              <a:extLst>
+                <a:ext uri="{96DAC541-7B7A-43D3-8B79-37D633B846F1}">
+                  <asvg:svgBlip xmlns:asvg="http://schemas.microsoft.com/office/drawing/2016/SVG/main" r:embed="rId3"/>
+                </a:ext>
+              </a:extLst>
+            </a:blip>
+            <a:stretch>
+              <a:fillRect l="0" t="0" r="0" b="0"/>
+            </a:stretch>
+          </a:blipFill>
+        </p:spPr>
+      </p:sp>
+      <p:sp>
+        <p:nvSpPr>
+          <p:cNvPr name="Freeform 3" id="3"/>
+          <p:cNvSpPr/>
+          <p:nvPr/>
+        </p:nvSpPr>
+        <p:spPr>
+          <a:xfrm flipH="false" flipV="false" rot="635325">
+            <a:off x="-1336143" y="6923321"/>
+            <a:ext cx="9442126" cy="8000056"/>
+          </a:xfrm>
+          <a:custGeom>
+            <a:avLst/>
+            <a:gdLst/>
+            <a:ahLst/>
+            <a:cxnLst/>
+            <a:rect r="r" b="b" t="t" l="l"/>
+            <a:pathLst>
+              <a:path h="8000056" w="9442126">
+                <a:moveTo>
+                  <a:pt x="0" y="0"/>
+                </a:moveTo>
+                <a:lnTo>
+                  <a:pt x="9442126" y="0"/>
+                </a:lnTo>
+                <a:lnTo>
+                  <a:pt x="9442126" y="8000056"/>
+                </a:lnTo>
+                <a:lnTo>
+                  <a:pt x="0" y="8000056"/>
+                </a:lnTo>
+                <a:lnTo>
+                  <a:pt x="0" y="0"/>
+                </a:lnTo>
+                <a:close/>
+              </a:path>
+            </a:pathLst>
+          </a:custGeom>
+          <a:blipFill>
+            <a:blip r:embed="rId4">
+              <a:alphaModFix amt="50000"/>
+              <a:extLst>
+                <a:ext uri="{96DAC541-7B7A-43D3-8B79-37D633B846F1}">
+                  <asvg:svgBlip xmlns:asvg="http://schemas.microsoft.com/office/drawing/2016/SVG/main" r:embed="rId5"/>
+                </a:ext>
+              </a:extLst>
+            </a:blip>
+            <a:stretch>
+              <a:fillRect l="0" t="0" r="0" b="0"/>
+            </a:stretch>
+          </a:blipFill>
+        </p:spPr>
+      </p:sp>
+      <p:sp>
+        <p:nvSpPr>
+          <p:cNvPr name="Freeform 4" id="4"/>
+          <p:cNvSpPr/>
+          <p:nvPr/>
+        </p:nvSpPr>
+        <p:spPr>
+          <a:xfrm flipH="false" flipV="false" rot="-226878">
+            <a:off x="-216283" y="847655"/>
+            <a:ext cx="4576141" cy="2579280"/>
+          </a:xfrm>
+          <a:custGeom>
+            <a:avLst/>
+            <a:gdLst/>
+            <a:ahLst/>
+            <a:cxnLst/>
+            <a:rect r="r" b="b" t="t" l="l"/>
+            <a:pathLst>
+              <a:path h="2579280" w="4576141">
+                <a:moveTo>
+                  <a:pt x="0" y="0"/>
+                </a:moveTo>
+                <a:lnTo>
+                  <a:pt x="4576141" y="0"/>
+                </a:lnTo>
+                <a:lnTo>
+                  <a:pt x="4576141" y="2579280"/>
+                </a:lnTo>
+                <a:lnTo>
+                  <a:pt x="0" y="2579280"/>
+                </a:lnTo>
+                <a:lnTo>
+                  <a:pt x="0" y="0"/>
+                </a:lnTo>
+                <a:close/>
+              </a:path>
+            </a:pathLst>
+          </a:custGeom>
+          <a:blipFill>
+            <a:blip r:embed="rId6">
+              <a:extLst>
+                <a:ext uri="{96DAC541-7B7A-43D3-8B79-37D633B846F1}">
+                  <asvg:svgBlip xmlns:asvg="http://schemas.microsoft.com/office/drawing/2016/SVG/main" r:embed="rId7"/>
+                </a:ext>
+              </a:extLst>
+            </a:blip>
+            <a:stretch>
+              <a:fillRect l="0" t="0" r="0" b="0"/>
+            </a:stretch>
+          </a:blipFill>
+        </p:spPr>
+      </p:sp>
+      <p:sp>
+        <p:nvSpPr>
+          <p:cNvPr name="Freeform 5" id="5"/>
+          <p:cNvSpPr/>
+          <p:nvPr/>
+        </p:nvSpPr>
+        <p:spPr>
+          <a:xfrm flipH="false" flipV="false" rot="2830696">
+            <a:off x="12315724" y="8229600"/>
+            <a:ext cx="2835471" cy="4114800"/>
+          </a:xfrm>
+          <a:custGeom>
+            <a:avLst/>
+            <a:gdLst/>
+            <a:ahLst/>
+            <a:cxnLst/>
+            <a:rect r="r" b="b" t="t" l="l"/>
+            <a:pathLst>
+              <a:path h="4114800" w="2835471">
+                <a:moveTo>
+                  <a:pt x="0" y="0"/>
+                </a:moveTo>
+                <a:lnTo>
+                  <a:pt x="2835471" y="0"/>
+                </a:lnTo>
+                <a:lnTo>
+                  <a:pt x="2835471" y="4114800"/>
+                </a:lnTo>
+                <a:lnTo>
+                  <a:pt x="0" y="4114800"/>
+                </a:lnTo>
+                <a:lnTo>
+                  <a:pt x="0" y="0"/>
+                </a:lnTo>
+                <a:close/>
+              </a:path>
+            </a:pathLst>
+          </a:custGeom>
+          <a:blipFill>
+            <a:blip r:embed="rId8">
+              <a:extLst>
+                <a:ext uri="{96DAC541-7B7A-43D3-8B79-37D633B846F1}">
+                  <asvg:svgBlip xmlns:asvg="http://schemas.microsoft.com/office/drawing/2016/SVG/main" r:embed="rId9"/>
+                </a:ext>
+              </a:extLst>
+            </a:blip>
+            <a:stretch>
+              <a:fillRect l="0" t="0" r="0" b="0"/>
+            </a:stretch>
+          </a:blipFill>
+        </p:spPr>
+      </p:sp>
+      <p:sp>
+        <p:nvSpPr>
+          <p:cNvPr name="Freeform 6" id="6"/>
+          <p:cNvSpPr/>
+          <p:nvPr/>
+        </p:nvSpPr>
+        <p:spPr>
+          <a:xfrm flipH="false" flipV="false" rot="0">
+            <a:off x="13733460" y="743343"/>
+            <a:ext cx="3825295" cy="4114800"/>
+          </a:xfrm>
+          <a:custGeom>
+            <a:avLst/>
+            <a:gdLst/>
+            <a:ahLst/>
+            <a:cxnLst/>
+            <a:rect r="r" b="b" t="t" l="l"/>
+            <a:pathLst>
+              <a:path h="4114800" w="3825295">
+                <a:moveTo>
+                  <a:pt x="0" y="0"/>
+                </a:moveTo>
+                <a:lnTo>
+                  <a:pt x="3825295" y="0"/>
+                </a:lnTo>
+                <a:lnTo>
+                  <a:pt x="3825295" y="4114800"/>
+                </a:lnTo>
+                <a:lnTo>
+                  <a:pt x="0" y="4114800"/>
+                </a:lnTo>
+                <a:lnTo>
+                  <a:pt x="0" y="0"/>
+                </a:lnTo>
+                <a:close/>
+              </a:path>
+            </a:pathLst>
+          </a:custGeom>
+          <a:blipFill>
+            <a:blip r:embed="rId10">
+              <a:extLst>
+                <a:ext uri="{96DAC541-7B7A-43D3-8B79-37D633B846F1}">
+                  <asvg:svgBlip xmlns:asvg="http://schemas.microsoft.com/office/drawing/2016/SVG/main" r:embed="rId11"/>
+                </a:ext>
+              </a:extLst>
+            </a:blip>
+            <a:stretch>
+              <a:fillRect l="0" t="0" r="0" b="0"/>
+            </a:stretch>
+          </a:blipFill>
+        </p:spPr>
+      </p:sp>
+      <p:sp>
+        <p:nvSpPr>
+          <p:cNvPr name="Freeform 7" id="7"/>
+          <p:cNvSpPr/>
+          <p:nvPr/>
+        </p:nvSpPr>
+        <p:spPr>
+          <a:xfrm flipH="false" flipV="false" rot="0">
+            <a:off x="9989162" y="4479787"/>
+            <a:ext cx="4599878" cy="4114800"/>
+          </a:xfrm>
+          <a:custGeom>
+            <a:avLst/>
+            <a:gdLst/>
+            <a:ahLst/>
+            <a:cxnLst/>
+            <a:rect r="r" b="b" t="t" l="l"/>
+            <a:pathLst>
+              <a:path h="4114800" w="4599878">
+                <a:moveTo>
+                  <a:pt x="0" y="0"/>
+                </a:moveTo>
+                <a:lnTo>
+                  <a:pt x="4599878" y="0"/>
+                </a:lnTo>
+                <a:lnTo>
+                  <a:pt x="4599878" y="4114800"/>
+                </a:lnTo>
+                <a:lnTo>
+                  <a:pt x="0" y="4114800"/>
+                </a:lnTo>
+                <a:lnTo>
+                  <a:pt x="0" y="0"/>
+                </a:lnTo>
+                <a:close/>
+              </a:path>
+            </a:pathLst>
+          </a:custGeom>
+          <a:blipFill>
+            <a:blip r:embed="rId12">
+              <a:extLst>
+                <a:ext uri="{96DAC541-7B7A-43D3-8B79-37D633B846F1}">
+                  <asvg:svgBlip xmlns:asvg="http://schemas.microsoft.com/office/drawing/2016/SVG/main" r:embed="rId13"/>
+                </a:ext>
+              </a:extLst>
+            </a:blip>
+            <a:stretch>
+              <a:fillRect l="0" t="0" r="0" b="0"/>
+            </a:stretch>
+          </a:blipFill>
+        </p:spPr>
+      </p:sp>
+      <p:sp>
+        <p:nvSpPr>
+          <p:cNvPr name="TextBox 8" id="8"/>
+          <p:cNvSpPr txBox="true"/>
+          <p:nvPr/>
+        </p:nvSpPr>
+        <p:spPr>
+          <a:xfrm rot="0">
+            <a:off x="1753451" y="3682429"/>
+            <a:ext cx="9507300" cy="2603129"/>
+          </a:xfrm>
+          <a:prstGeom prst="rect">
+            <a:avLst/>
+          </a:prstGeom>
+        </p:spPr>
+        <p:txBody>
+          <a:bodyPr anchor="t" rtlCol="false" tIns="0" lIns="0" bIns="0" rIns="0">
+            <a:spAutoFit/>
+          </a:bodyPr>
+          <a:lstStyle/>
+          <a:p>
+            <a:pPr algn="l">
+              <a:lnSpc>
+                <a:spcPts val="10310"/>
+              </a:lnSpc>
+            </a:pPr>
+            <a:r>
+              <a:rPr lang="en-US" sz="8287" b="true">
+                <a:solidFill>
+                  <a:srgbClr val="2D2261"/>
+                </a:solidFill>
+                <a:latin typeface="Red Hat Display Bold"/>
+                <a:ea typeface="Red Hat Display Bold"/>
+                <a:cs typeface="Red Hat Display Bold"/>
+                <a:sym typeface="Red Hat Display Bold"/>
+              </a:rPr>
+              <a:t>THANKS FOR</a:t>
+            </a:r>
+          </a:p>
+          <a:p>
+            <a:pPr algn="l">
+              <a:lnSpc>
+                <a:spcPts val="10310"/>
+              </a:lnSpc>
+            </a:pPr>
+            <a:r>
+              <a:rPr lang="en-US" b="true" sz="8287">
+                <a:solidFill>
+                  <a:srgbClr val="2D2261"/>
+                </a:solidFill>
+                <a:latin typeface="Red Hat Display Bold"/>
+                <a:ea typeface="Red Hat Display Bold"/>
+                <a:cs typeface="Red Hat Display Bold"/>
+                <a:sym typeface="Red Hat Display Bold"/>
+              </a:rPr>
+              <a:t>LISTENING</a:t>
             </a:r>
           </a:p>
         </p:txBody>

--- a/presentation/bao_cao_demo.pptx
+++ b/presentation/bao_cao_demo.pptx
@@ -3950,8 +3950,8 @@
         </p:nvSpPr>
         <p:spPr>
           <a:xfrm rot="0">
-            <a:off x="1064565" y="7092950"/>
-            <a:ext cx="16230600" cy="2165350"/>
+            <a:off x="1064565" y="7073900"/>
+            <a:ext cx="16230600" cy="2462530"/>
           </a:xfrm>
           <a:prstGeom prst="rect">
             <a:avLst/>
@@ -3963,15 +3963,15 @@
           </a:bodyPr>
           <a:lstStyle/>
           <a:p>
-            <a:pPr algn="l" marL="539749" indent="-269875" lvl="1">
+            <a:pPr algn="l" marL="604518" indent="-302259" lvl="1">
               <a:lnSpc>
-                <a:spcPts val="3499"/>
+                <a:spcPts val="3919"/>
               </a:lnSpc>
               <a:buFont typeface="Arial"/>
               <a:buChar char="•"/>
             </a:pPr>
             <a:r>
-              <a:rPr lang="en-US" sz="2499">
+              <a:rPr lang="en-US" sz="2799">
                 <a:solidFill>
                   <a:srgbClr val="2D2261"/>
                 </a:solidFill>
@@ -3984,15 +3984,15 @@
             </a:r>
           </a:p>
           <a:p>
-            <a:pPr algn="l" marL="539749" indent="-269875" lvl="1">
+            <a:pPr algn="l" marL="604518" indent="-302259" lvl="1">
               <a:lnSpc>
-                <a:spcPts val="3499"/>
+                <a:spcPts val="3919"/>
               </a:lnSpc>
               <a:buFont typeface="Arial"/>
               <a:buChar char="•"/>
             </a:pPr>
             <a:r>
-              <a:rPr lang="en-US" sz="2499">
+              <a:rPr lang="en-US" sz="2799">
                 <a:solidFill>
                   <a:srgbClr val="2D2261"/>
                 </a:solidFill>
@@ -4005,15 +4005,15 @@
             </a:r>
           </a:p>
           <a:p>
-            <a:pPr algn="l" marL="539749" indent="-269875" lvl="1">
+            <a:pPr algn="l" marL="604518" indent="-302259" lvl="1">
               <a:lnSpc>
-                <a:spcPts val="3499"/>
+                <a:spcPts val="3919"/>
               </a:lnSpc>
               <a:buFont typeface="Arial"/>
               <a:buChar char="•"/>
             </a:pPr>
             <a:r>
-              <a:rPr lang="en-US" sz="2499">
+              <a:rPr lang="en-US" sz="2799">
                 <a:solidFill>
                   <a:srgbClr val="2D2261"/>
                 </a:solidFill>
@@ -4025,7 +4025,7 @@
               <a:t>Return dao động quanh 0 nhưng </a:t>
             </a:r>
             <a:r>
-              <a:rPr lang="en-US" sz="2499">
+              <a:rPr lang="en-US" sz="2799">
                 <a:solidFill>
                   <a:srgbClr val="2D2261"/>
                 </a:solidFill>
@@ -4038,15 +4038,15 @@
             </a:r>
           </a:p>
           <a:p>
-            <a:pPr algn="l" marL="539749" indent="-269875" lvl="1">
+            <a:pPr algn="l" marL="604518" indent="-302259" lvl="1">
               <a:lnSpc>
-                <a:spcPts val="3499"/>
+                <a:spcPts val="3919"/>
               </a:lnSpc>
               <a:buFont typeface="Arial"/>
               <a:buChar char="•"/>
             </a:pPr>
             <a:r>
-              <a:rPr lang="en-US" sz="2499">
+              <a:rPr lang="en-US" sz="2799">
                 <a:solidFill>
                   <a:srgbClr val="2D2261"/>
                 </a:solidFill>
@@ -4059,15 +4059,15 @@
             </a:r>
           </a:p>
           <a:p>
-            <a:pPr algn="l" marL="539749" indent="-269875" lvl="1">
+            <a:pPr algn="l" marL="604518" indent="-302259" lvl="1">
               <a:lnSpc>
-                <a:spcPts val="3499"/>
+                <a:spcPts val="3919"/>
               </a:lnSpc>
               <a:buFont typeface="Arial"/>
               <a:buChar char="•"/>
             </a:pPr>
             <a:r>
-              <a:rPr lang="en-US" sz="2499">
+              <a:rPr lang="en-US" sz="2799">
                 <a:solidFill>
                   <a:srgbClr val="2D2261"/>
                 </a:solidFill>
@@ -9755,7 +9755,7 @@
         </p:nvSpPr>
         <p:spPr>
           <a:xfrm rot="0">
-            <a:off x="2980865" y="7345255"/>
+            <a:off x="3049974" y="6658385"/>
             <a:ext cx="12188052" cy="1967230"/>
           </a:xfrm>
           <a:prstGeom prst="rect">
@@ -9821,22 +9821,22 @@
           <p:nvPr/>
         </p:nvGraphicFramePr>
         <p:xfrm>
-          <a:off x="3417041" y="1440434"/>
-          <a:ext cx="11315700" cy="5636079"/>
+          <a:off x="2225761" y="1661384"/>
+          <a:ext cx="13836479" cy="4572000"/>
         </p:xfrm>
         <a:graphic>
           <a:graphicData uri="http://schemas.openxmlformats.org/drawingml/2006/table">
             <a:tbl>
               <a:tblPr/>
               <a:tblGrid>
-                <a:gridCol w="1885950"/>
-                <a:gridCol w="1885950"/>
-                <a:gridCol w="1885950"/>
-                <a:gridCol w="1885950"/>
-                <a:gridCol w="1885950"/>
-                <a:gridCol w="1885950"/>
+                <a:gridCol w="3211420"/>
+                <a:gridCol w="1884790"/>
+                <a:gridCol w="1884790"/>
+                <a:gridCol w="1884790"/>
+                <a:gridCol w="1884790"/>
+                <a:gridCol w="3085899"/>
               </a:tblGrid>
-              <a:tr h="629714">
+              <a:tr h="653143">
                 <a:tc>
                   <a:txBody>
                     <a:bodyPr anchor="t" rtlCol="false"/>
@@ -9867,7 +9867,7 @@
                     </a:p>
                   </a:txBody>
                   <a:tcPr marL="76200" marR="76200" marT="76200" marB="76200" anchor="ctr">
-                    <a:lnL cmpd="sng" algn="ctr" cap="flat" w="9525">
+                    <a:lnL cmpd="sng" algn="ctr" cap="flat" w="38100">
                       <a:solidFill>
                         <a:srgbClr val="000000"/>
                       </a:solidFill>
@@ -9876,7 +9876,7 @@
                       <a:headEnd type="none" w="med" len="med"/>
                       <a:tailEnd type="none" w="med" len="med"/>
                     </a:lnL>
-                    <a:lnR cmpd="sng" algn="ctr" cap="flat" w="9525">
+                    <a:lnR cmpd="sng" algn="ctr" cap="flat" w="38100">
                       <a:solidFill>
                         <a:srgbClr val="000000"/>
                       </a:solidFill>
@@ -9885,7 +9885,7 @@
                       <a:headEnd type="none" w="med" len="med"/>
                       <a:tailEnd type="none" w="med" len="med"/>
                     </a:lnR>
-                    <a:lnT cmpd="sng" algn="ctr" cap="flat" w="9525">
+                    <a:lnT cmpd="sng" algn="ctr" cap="flat" w="38100">
                       <a:solidFill>
                         <a:srgbClr val="000000"/>
                       </a:solidFill>
@@ -9894,7 +9894,7 @@
                       <a:headEnd type="none" w="med" len="med"/>
                       <a:tailEnd type="none" w="med" len="med"/>
                     </a:lnT>
-                    <a:lnB cmpd="sng" algn="ctr" cap="flat" w="12668">
+                    <a:lnB cmpd="sng" algn="ctr" cap="flat" w="38100">
                       <a:solidFill>
                         <a:srgbClr val="000000"/>
                       </a:solidFill>
@@ -9938,7 +9938,7 @@
                     </a:p>
                   </a:txBody>
                   <a:tcPr marL="76200" marR="76200" marT="76200" marB="76200" anchor="ctr">
-                    <a:lnL cmpd="sng" algn="ctr" cap="flat" w="9525">
+                    <a:lnL cmpd="sng" algn="ctr" cap="flat" w="38100">
                       <a:solidFill>
                         <a:srgbClr val="000000"/>
                       </a:solidFill>
@@ -9947,7 +9947,7 @@
                       <a:headEnd type="none" w="med" len="med"/>
                       <a:tailEnd type="none" w="med" len="med"/>
                     </a:lnL>
-                    <a:lnR cmpd="sng" algn="ctr" cap="flat" w="9525">
+                    <a:lnR cmpd="sng" algn="ctr" cap="flat" w="38100">
                       <a:solidFill>
                         <a:srgbClr val="000000"/>
                       </a:solidFill>
@@ -9956,7 +9956,7 @@
                       <a:headEnd type="none" w="med" len="med"/>
                       <a:tailEnd type="none" w="med" len="med"/>
                     </a:lnR>
-                    <a:lnT cmpd="sng" algn="ctr" cap="flat" w="9525">
+                    <a:lnT cmpd="sng" algn="ctr" cap="flat" w="38100">
                       <a:solidFill>
                         <a:srgbClr val="000000"/>
                       </a:solidFill>
@@ -9965,7 +9965,7 @@
                       <a:headEnd type="none" w="med" len="med"/>
                       <a:tailEnd type="none" w="med" len="med"/>
                     </a:lnT>
-                    <a:lnB cmpd="sng" algn="ctr" cap="flat" w="12668">
+                    <a:lnB cmpd="sng" algn="ctr" cap="flat" w="38100">
                       <a:solidFill>
                         <a:srgbClr val="000000"/>
                       </a:solidFill>
@@ -10009,7 +10009,7 @@
                     </a:p>
                   </a:txBody>
                   <a:tcPr marL="76200" marR="76200" marT="76200" marB="76200" anchor="ctr">
-                    <a:lnL cmpd="sng" algn="ctr" cap="flat" w="9525">
+                    <a:lnL cmpd="sng" algn="ctr" cap="flat" w="38100">
                       <a:solidFill>
                         <a:srgbClr val="000000"/>
                       </a:solidFill>
@@ -10018,7 +10018,7 @@
                       <a:headEnd type="none" w="med" len="med"/>
                       <a:tailEnd type="none" w="med" len="med"/>
                     </a:lnL>
-                    <a:lnR cmpd="sng" algn="ctr" cap="flat" w="9525">
+                    <a:lnR cmpd="sng" algn="ctr" cap="flat" w="38100">
                       <a:solidFill>
                         <a:srgbClr val="000000"/>
                       </a:solidFill>
@@ -10027,7 +10027,7 @@
                       <a:headEnd type="none" w="med" len="med"/>
                       <a:tailEnd type="none" w="med" len="med"/>
                     </a:lnR>
-                    <a:lnT cmpd="sng" algn="ctr" cap="flat" w="9525">
+                    <a:lnT cmpd="sng" algn="ctr" cap="flat" w="38100">
                       <a:solidFill>
                         <a:srgbClr val="000000"/>
                       </a:solidFill>
@@ -10036,7 +10036,7 @@
                       <a:headEnd type="none" w="med" len="med"/>
                       <a:tailEnd type="none" w="med" len="med"/>
                     </a:lnT>
-                    <a:lnB cmpd="sng" algn="ctr" cap="flat" w="12668">
+                    <a:lnB cmpd="sng" algn="ctr" cap="flat" w="38100">
                       <a:solidFill>
                         <a:srgbClr val="000000"/>
                       </a:solidFill>
@@ -10080,7 +10080,7 @@
                     </a:p>
                   </a:txBody>
                   <a:tcPr marL="76200" marR="76200" marT="76200" marB="76200" anchor="ctr">
-                    <a:lnL cmpd="sng" algn="ctr" cap="flat" w="9525">
+                    <a:lnL cmpd="sng" algn="ctr" cap="flat" w="38100">
                       <a:solidFill>
                         <a:srgbClr val="000000"/>
                       </a:solidFill>
@@ -10089,7 +10089,7 @@
                       <a:headEnd type="none" w="med" len="med"/>
                       <a:tailEnd type="none" w="med" len="med"/>
                     </a:lnL>
-                    <a:lnR cmpd="sng" algn="ctr" cap="flat" w="9525">
+                    <a:lnR cmpd="sng" algn="ctr" cap="flat" w="38100">
                       <a:solidFill>
                         <a:srgbClr val="000000"/>
                       </a:solidFill>
@@ -10098,7 +10098,7 @@
                       <a:headEnd type="none" w="med" len="med"/>
                       <a:tailEnd type="none" w="med" len="med"/>
                     </a:lnR>
-                    <a:lnT cmpd="sng" algn="ctr" cap="flat" w="9525">
+                    <a:lnT cmpd="sng" algn="ctr" cap="flat" w="38100">
                       <a:solidFill>
                         <a:srgbClr val="000000"/>
                       </a:solidFill>
@@ -10107,7 +10107,7 @@
                       <a:headEnd type="none" w="med" len="med"/>
                       <a:tailEnd type="none" w="med" len="med"/>
                     </a:lnT>
-                    <a:lnB cmpd="sng" algn="ctr" cap="flat" w="12668">
+                    <a:lnB cmpd="sng" algn="ctr" cap="flat" w="38100">
                       <a:solidFill>
                         <a:srgbClr val="000000"/>
                       </a:solidFill>
@@ -10151,7 +10151,7 @@
                     </a:p>
                   </a:txBody>
                   <a:tcPr marL="76200" marR="76200" marT="76200" marB="76200" anchor="ctr">
-                    <a:lnL cmpd="sng" algn="ctr" cap="flat" w="9525">
+                    <a:lnL cmpd="sng" algn="ctr" cap="flat" w="38100">
                       <a:solidFill>
                         <a:srgbClr val="000000"/>
                       </a:solidFill>
@@ -10160,7 +10160,7 @@
                       <a:headEnd type="none" w="med" len="med"/>
                       <a:tailEnd type="none" w="med" len="med"/>
                     </a:lnL>
-                    <a:lnR cmpd="sng" algn="ctr" cap="flat" w="9525">
+                    <a:lnR cmpd="sng" algn="ctr" cap="flat" w="38100">
                       <a:solidFill>
                         <a:srgbClr val="000000"/>
                       </a:solidFill>
@@ -10169,7 +10169,7 @@
                       <a:headEnd type="none" w="med" len="med"/>
                       <a:tailEnd type="none" w="med" len="med"/>
                     </a:lnR>
-                    <a:lnT cmpd="sng" algn="ctr" cap="flat" w="9525">
+                    <a:lnT cmpd="sng" algn="ctr" cap="flat" w="38100">
                       <a:solidFill>
                         <a:srgbClr val="000000"/>
                       </a:solidFill>
@@ -10178,7 +10178,7 @@
                       <a:headEnd type="none" w="med" len="med"/>
                       <a:tailEnd type="none" w="med" len="med"/>
                     </a:lnT>
-                    <a:lnB cmpd="sng" algn="ctr" cap="flat" w="12668">
+                    <a:lnB cmpd="sng" algn="ctr" cap="flat" w="38100">
                       <a:solidFill>
                         <a:srgbClr val="000000"/>
                       </a:solidFill>
@@ -10222,7 +10222,7 @@
                     </a:p>
                   </a:txBody>
                   <a:tcPr marL="76200" marR="76200" marT="76200" marB="76200" anchor="ctr">
-                    <a:lnL cmpd="sng" algn="ctr" cap="flat" w="9525">
+                    <a:lnL cmpd="sng" algn="ctr" cap="flat" w="38100">
                       <a:solidFill>
                         <a:srgbClr val="000000"/>
                       </a:solidFill>
@@ -10231,7 +10231,7 @@
                       <a:headEnd type="none" w="med" len="med"/>
                       <a:tailEnd type="none" w="med" len="med"/>
                     </a:lnL>
-                    <a:lnR cmpd="sng" algn="ctr" cap="flat" w="9525">
+                    <a:lnR cmpd="sng" algn="ctr" cap="flat" w="38100">
                       <a:solidFill>
                         <a:srgbClr val="000000"/>
                       </a:solidFill>
@@ -10240,7 +10240,7 @@
                       <a:headEnd type="none" w="med" len="med"/>
                       <a:tailEnd type="none" w="med" len="med"/>
                     </a:lnR>
-                    <a:lnT cmpd="sng" algn="ctr" cap="flat" w="9525">
+                    <a:lnT cmpd="sng" algn="ctr" cap="flat" w="38100">
                       <a:solidFill>
                         <a:srgbClr val="000000"/>
                       </a:solidFill>
@@ -10249,7 +10249,7 @@
                       <a:headEnd type="none" w="med" len="med"/>
                       <a:tailEnd type="none" w="med" len="med"/>
                     </a:lnT>
-                    <a:lnB cmpd="sng" algn="ctr" cap="flat" w="12668">
+                    <a:lnB cmpd="sng" algn="ctr" cap="flat" w="38100">
                       <a:solidFill>
                         <a:srgbClr val="000000"/>
                       </a:solidFill>
@@ -10264,7 +10264,7 @@
                   </a:tcPr>
                 </a:tc>
               </a:tr>
-              <a:tr h="629714">
+              <a:tr h="653143">
                 <a:tc>
                   <a:txBody>
                     <a:bodyPr anchor="t" rtlCol="false"/>
@@ -10295,25 +10295,25 @@
                     </a:p>
                   </a:txBody>
                   <a:tcPr marL="76200" marR="76200" marT="76200" marB="76200" anchor="ctr">
-                    <a:lnL cmpd="sng" algn="ctr" cap="flat" w="9525">
-                      <a:solidFill>
-                        <a:srgbClr val="D9D9D9"/>
+                    <a:lnL cmpd="sng" algn="ctr" cap="flat" w="38100">
+                      <a:solidFill>
+                        <a:srgbClr val="000000"/>
                       </a:solidFill>
                       <a:prstDash val="solid"/>
                       <a:round/>
                       <a:headEnd type="none" w="med" len="med"/>
                       <a:tailEnd type="none" w="med" len="med"/>
                     </a:lnL>
-                    <a:lnR cmpd="sng" algn="ctr" cap="flat" w="9525">
-                      <a:solidFill>
-                        <a:srgbClr val="D9D9D9"/>
+                    <a:lnR cmpd="sng" algn="ctr" cap="flat" w="38100">
+                      <a:solidFill>
+                        <a:srgbClr val="000000"/>
                       </a:solidFill>
                       <a:prstDash val="solid"/>
                       <a:round/>
                       <a:headEnd type="none" w="med" len="med"/>
                       <a:tailEnd type="none" w="med" len="med"/>
                     </a:lnR>
-                    <a:lnT cmpd="sng" algn="ctr" cap="flat" w="12668">
+                    <a:lnT cmpd="sng" algn="ctr" cap="flat" w="38100">
                       <a:solidFill>
                         <a:srgbClr val="000000"/>
                       </a:solidFill>
@@ -10322,9 +10322,9 @@
                       <a:headEnd type="none" w="med" len="med"/>
                       <a:tailEnd type="none" w="med" len="med"/>
                     </a:lnT>
-                    <a:lnB cmpd="sng" algn="ctr" cap="flat" w="9525">
-                      <a:solidFill>
-                        <a:srgbClr val="D9D9D9"/>
+                    <a:lnB cmpd="sng" algn="ctr" cap="flat" w="38100">
+                      <a:solidFill>
+                        <a:srgbClr val="000000"/>
                       </a:solidFill>
                       <a:prstDash val="solid"/>
                       <a:round/>
@@ -10366,25 +10366,25 @@
                     </a:p>
                   </a:txBody>
                   <a:tcPr marL="76200" marR="76200" marT="76200" marB="76200" anchor="ctr">
-                    <a:lnL cmpd="sng" algn="ctr" cap="flat" w="9525">
-                      <a:solidFill>
-                        <a:srgbClr val="D9D9D9"/>
+                    <a:lnL cmpd="sng" algn="ctr" cap="flat" w="38100">
+                      <a:solidFill>
+                        <a:srgbClr val="000000"/>
                       </a:solidFill>
                       <a:prstDash val="solid"/>
                       <a:round/>
                       <a:headEnd type="none" w="med" len="med"/>
                       <a:tailEnd type="none" w="med" len="med"/>
                     </a:lnL>
-                    <a:lnR cmpd="sng" algn="ctr" cap="flat" w="9525">
-                      <a:solidFill>
-                        <a:srgbClr val="D9D9D9"/>
+                    <a:lnR cmpd="sng" algn="ctr" cap="flat" w="38100">
+                      <a:solidFill>
+                        <a:srgbClr val="000000"/>
                       </a:solidFill>
                       <a:prstDash val="solid"/>
                       <a:round/>
                       <a:headEnd type="none" w="med" len="med"/>
                       <a:tailEnd type="none" w="med" len="med"/>
                     </a:lnR>
-                    <a:lnT cmpd="sng" algn="ctr" cap="flat" w="12668">
+                    <a:lnT cmpd="sng" algn="ctr" cap="flat" w="38100">
                       <a:solidFill>
                         <a:srgbClr val="000000"/>
                       </a:solidFill>
@@ -10393,9 +10393,9 @@
                       <a:headEnd type="none" w="med" len="med"/>
                       <a:tailEnd type="none" w="med" len="med"/>
                     </a:lnT>
-                    <a:lnB cmpd="sng" algn="ctr" cap="flat" w="9525">
-                      <a:solidFill>
-                        <a:srgbClr val="D9D9D9"/>
+                    <a:lnB cmpd="sng" algn="ctr" cap="flat" w="38100">
+                      <a:solidFill>
+                        <a:srgbClr val="000000"/>
                       </a:solidFill>
                       <a:prstDash val="solid"/>
                       <a:round/>
@@ -10437,25 +10437,25 @@
                     </a:p>
                   </a:txBody>
                   <a:tcPr marL="76200" marR="76200" marT="76200" marB="76200" anchor="ctr">
-                    <a:lnL cmpd="sng" algn="ctr" cap="flat" w="9525">
-                      <a:solidFill>
-                        <a:srgbClr val="D9D9D9"/>
+                    <a:lnL cmpd="sng" algn="ctr" cap="flat" w="38100">
+                      <a:solidFill>
+                        <a:srgbClr val="000000"/>
                       </a:solidFill>
                       <a:prstDash val="solid"/>
                       <a:round/>
                       <a:headEnd type="none" w="med" len="med"/>
                       <a:tailEnd type="none" w="med" len="med"/>
                     </a:lnL>
-                    <a:lnR cmpd="sng" algn="ctr" cap="flat" w="9525">
-                      <a:solidFill>
-                        <a:srgbClr val="D9D9D9"/>
+                    <a:lnR cmpd="sng" algn="ctr" cap="flat" w="38100">
+                      <a:solidFill>
+                        <a:srgbClr val="000000"/>
                       </a:solidFill>
                       <a:prstDash val="solid"/>
                       <a:round/>
                       <a:headEnd type="none" w="med" len="med"/>
                       <a:tailEnd type="none" w="med" len="med"/>
                     </a:lnR>
-                    <a:lnT cmpd="sng" algn="ctr" cap="flat" w="12668">
+                    <a:lnT cmpd="sng" algn="ctr" cap="flat" w="38100">
                       <a:solidFill>
                         <a:srgbClr val="000000"/>
                       </a:solidFill>
@@ -10464,9 +10464,9 @@
                       <a:headEnd type="none" w="med" len="med"/>
                       <a:tailEnd type="none" w="med" len="med"/>
                     </a:lnT>
-                    <a:lnB cmpd="sng" algn="ctr" cap="flat" w="9525">
-                      <a:solidFill>
-                        <a:srgbClr val="D9D9D9"/>
+                    <a:lnB cmpd="sng" algn="ctr" cap="flat" w="38100">
+                      <a:solidFill>
+                        <a:srgbClr val="000000"/>
                       </a:solidFill>
                       <a:prstDash val="solid"/>
                       <a:round/>
@@ -10508,25 +10508,25 @@
                     </a:p>
                   </a:txBody>
                   <a:tcPr marL="76200" marR="76200" marT="76200" marB="76200" anchor="ctr">
-                    <a:lnL cmpd="sng" algn="ctr" cap="flat" w="9525">
-                      <a:solidFill>
-                        <a:srgbClr val="D9D9D9"/>
+                    <a:lnL cmpd="sng" algn="ctr" cap="flat" w="38100">
+                      <a:solidFill>
+                        <a:srgbClr val="000000"/>
                       </a:solidFill>
                       <a:prstDash val="solid"/>
                       <a:round/>
                       <a:headEnd type="none" w="med" len="med"/>
                       <a:tailEnd type="none" w="med" len="med"/>
                     </a:lnL>
-                    <a:lnR cmpd="sng" algn="ctr" cap="flat" w="9525">
-                      <a:solidFill>
-                        <a:srgbClr val="D9D9D9"/>
+                    <a:lnR cmpd="sng" algn="ctr" cap="flat" w="38100">
+                      <a:solidFill>
+                        <a:srgbClr val="000000"/>
                       </a:solidFill>
                       <a:prstDash val="solid"/>
                       <a:round/>
                       <a:headEnd type="none" w="med" len="med"/>
                       <a:tailEnd type="none" w="med" len="med"/>
                     </a:lnR>
-                    <a:lnT cmpd="sng" algn="ctr" cap="flat" w="12668">
+                    <a:lnT cmpd="sng" algn="ctr" cap="flat" w="38100">
                       <a:solidFill>
                         <a:srgbClr val="000000"/>
                       </a:solidFill>
@@ -10535,9 +10535,9 @@
                       <a:headEnd type="none" w="med" len="med"/>
                       <a:tailEnd type="none" w="med" len="med"/>
                     </a:lnT>
-                    <a:lnB cmpd="sng" algn="ctr" cap="flat" w="9525">
-                      <a:solidFill>
-                        <a:srgbClr val="D9D9D9"/>
+                    <a:lnB cmpd="sng" algn="ctr" cap="flat" w="38100">
+                      <a:solidFill>
+                        <a:srgbClr val="000000"/>
                       </a:solidFill>
                       <a:prstDash val="solid"/>
                       <a:round/>
@@ -10579,25 +10579,25 @@
                     </a:p>
                   </a:txBody>
                   <a:tcPr marL="76200" marR="76200" marT="76200" marB="76200" anchor="ctr">
-                    <a:lnL cmpd="sng" algn="ctr" cap="flat" w="9525">
-                      <a:solidFill>
-                        <a:srgbClr val="D9D9D9"/>
+                    <a:lnL cmpd="sng" algn="ctr" cap="flat" w="38100">
+                      <a:solidFill>
+                        <a:srgbClr val="000000"/>
                       </a:solidFill>
                       <a:prstDash val="solid"/>
                       <a:round/>
                       <a:headEnd type="none" w="med" len="med"/>
                       <a:tailEnd type="none" w="med" len="med"/>
                     </a:lnL>
-                    <a:lnR cmpd="sng" algn="ctr" cap="flat" w="9525">
-                      <a:solidFill>
-                        <a:srgbClr val="D9D9D9"/>
+                    <a:lnR cmpd="sng" algn="ctr" cap="flat" w="38100">
+                      <a:solidFill>
+                        <a:srgbClr val="000000"/>
                       </a:solidFill>
                       <a:prstDash val="solid"/>
                       <a:round/>
                       <a:headEnd type="none" w="med" len="med"/>
                       <a:tailEnd type="none" w="med" len="med"/>
                     </a:lnR>
-                    <a:lnT cmpd="sng" algn="ctr" cap="flat" w="12668">
+                    <a:lnT cmpd="sng" algn="ctr" cap="flat" w="38100">
                       <a:solidFill>
                         <a:srgbClr val="000000"/>
                       </a:solidFill>
@@ -10606,9 +10606,9 @@
                       <a:headEnd type="none" w="med" len="med"/>
                       <a:tailEnd type="none" w="med" len="med"/>
                     </a:lnT>
-                    <a:lnB cmpd="sng" algn="ctr" cap="flat" w="9525">
-                      <a:solidFill>
-                        <a:srgbClr val="D9D9D9"/>
+                    <a:lnB cmpd="sng" algn="ctr" cap="flat" w="38100">
+                      <a:solidFill>
+                        <a:srgbClr val="000000"/>
                       </a:solidFill>
                       <a:prstDash val="solid"/>
                       <a:round/>
@@ -10650,25 +10650,25 @@
                     </a:p>
                   </a:txBody>
                   <a:tcPr marL="76200" marR="76200" marT="76200" marB="76200" anchor="ctr">
-                    <a:lnL cmpd="sng" algn="ctr" cap="flat" w="9525">
-                      <a:solidFill>
-                        <a:srgbClr val="D9D9D9"/>
+                    <a:lnL cmpd="sng" algn="ctr" cap="flat" w="38100">
+                      <a:solidFill>
+                        <a:srgbClr val="000000"/>
                       </a:solidFill>
                       <a:prstDash val="solid"/>
                       <a:round/>
                       <a:headEnd type="none" w="med" len="med"/>
                       <a:tailEnd type="none" w="med" len="med"/>
                     </a:lnL>
-                    <a:lnR cmpd="sng" algn="ctr" cap="flat" w="9525">
-                      <a:solidFill>
-                        <a:srgbClr val="D9D9D9"/>
+                    <a:lnR cmpd="sng" algn="ctr" cap="flat" w="38100">
+                      <a:solidFill>
+                        <a:srgbClr val="000000"/>
                       </a:solidFill>
                       <a:prstDash val="solid"/>
                       <a:round/>
                       <a:headEnd type="none" w="med" len="med"/>
                       <a:tailEnd type="none" w="med" len="med"/>
                     </a:lnR>
-                    <a:lnT cmpd="sng" algn="ctr" cap="flat" w="12668">
+                    <a:lnT cmpd="sng" algn="ctr" cap="flat" w="38100">
                       <a:solidFill>
                         <a:srgbClr val="000000"/>
                       </a:solidFill>
@@ -10677,9 +10677,9 @@
                       <a:headEnd type="none" w="med" len="med"/>
                       <a:tailEnd type="none" w="med" len="med"/>
                     </a:lnT>
-                    <a:lnB cmpd="sng" algn="ctr" cap="flat" w="9525">
-                      <a:solidFill>
-                        <a:srgbClr val="D9D9D9"/>
+                    <a:lnB cmpd="sng" algn="ctr" cap="flat" w="38100">
+                      <a:solidFill>
+                        <a:srgbClr val="000000"/>
                       </a:solidFill>
                       <a:prstDash val="solid"/>
                       <a:round/>
@@ -10692,7 +10692,7 @@
                   </a:tcPr>
                 </a:tc>
               </a:tr>
-              <a:tr h="628351">
+              <a:tr h="653143">
                 <a:tc>
                   <a:txBody>
                     <a:bodyPr anchor="t" rtlCol="false"/>
@@ -10723,36 +10723,36 @@
                     </a:p>
                   </a:txBody>
                   <a:tcPr marL="76200" marR="76200" marT="76200" marB="76200" anchor="ctr">
-                    <a:lnL cmpd="sng" algn="ctr" cap="flat" w="9525">
-                      <a:solidFill>
-                        <a:srgbClr val="D9D9D9"/>
+                    <a:lnL cmpd="sng" algn="ctr" cap="flat" w="38100">
+                      <a:solidFill>
+                        <a:srgbClr val="000000"/>
                       </a:solidFill>
                       <a:prstDash val="solid"/>
                       <a:round/>
                       <a:headEnd type="none" w="med" len="med"/>
                       <a:tailEnd type="none" w="med" len="med"/>
                     </a:lnL>
-                    <a:lnR cmpd="sng" algn="ctr" cap="flat" w="9525">
-                      <a:solidFill>
-                        <a:srgbClr val="D9D9D9"/>
+                    <a:lnR cmpd="sng" algn="ctr" cap="flat" w="38100">
+                      <a:solidFill>
+                        <a:srgbClr val="000000"/>
                       </a:solidFill>
                       <a:prstDash val="solid"/>
                       <a:round/>
                       <a:headEnd type="none" w="med" len="med"/>
                       <a:tailEnd type="none" w="med" len="med"/>
                     </a:lnR>
-                    <a:lnT cmpd="sng" algn="ctr" cap="flat" w="9525">
-                      <a:solidFill>
-                        <a:srgbClr val="D9D9D9"/>
+                    <a:lnT cmpd="sng" algn="ctr" cap="flat" w="38100">
+                      <a:solidFill>
+                        <a:srgbClr val="000000"/>
                       </a:solidFill>
                       <a:prstDash val="solid"/>
                       <a:round/>
                       <a:headEnd type="none" w="med" len="med"/>
                       <a:tailEnd type="none" w="med" len="med"/>
                     </a:lnT>
-                    <a:lnB cmpd="sng" algn="ctr" cap="flat" w="9525">
-                      <a:solidFill>
-                        <a:srgbClr val="D9D9D9"/>
+                    <a:lnB cmpd="sng" algn="ctr" cap="flat" w="38100">
+                      <a:solidFill>
+                        <a:srgbClr val="000000"/>
                       </a:solidFill>
                       <a:prstDash val="solid"/>
                       <a:round/>
@@ -10794,36 +10794,36 @@
                     </a:p>
                   </a:txBody>
                   <a:tcPr marL="76200" marR="76200" marT="76200" marB="76200" anchor="ctr">
-                    <a:lnL cmpd="sng" algn="ctr" cap="flat" w="9525">
-                      <a:solidFill>
-                        <a:srgbClr val="D9D9D9"/>
+                    <a:lnL cmpd="sng" algn="ctr" cap="flat" w="38100">
+                      <a:solidFill>
+                        <a:srgbClr val="000000"/>
                       </a:solidFill>
                       <a:prstDash val="solid"/>
                       <a:round/>
                       <a:headEnd type="none" w="med" len="med"/>
                       <a:tailEnd type="none" w="med" len="med"/>
                     </a:lnL>
-                    <a:lnR cmpd="sng" algn="ctr" cap="flat" w="9525">
-                      <a:solidFill>
-                        <a:srgbClr val="D9D9D9"/>
+                    <a:lnR cmpd="sng" algn="ctr" cap="flat" w="38100">
+                      <a:solidFill>
+                        <a:srgbClr val="000000"/>
                       </a:solidFill>
                       <a:prstDash val="solid"/>
                       <a:round/>
                       <a:headEnd type="none" w="med" len="med"/>
                       <a:tailEnd type="none" w="med" len="med"/>
                     </a:lnR>
-                    <a:lnT cmpd="sng" algn="ctr" cap="flat" w="9525">
-                      <a:solidFill>
-                        <a:srgbClr val="D9D9D9"/>
+                    <a:lnT cmpd="sng" algn="ctr" cap="flat" w="38100">
+                      <a:solidFill>
+                        <a:srgbClr val="000000"/>
                       </a:solidFill>
                       <a:prstDash val="solid"/>
                       <a:round/>
                       <a:headEnd type="none" w="med" len="med"/>
                       <a:tailEnd type="none" w="med" len="med"/>
                     </a:lnT>
-                    <a:lnB cmpd="sng" algn="ctr" cap="flat" w="9525">
-                      <a:solidFill>
-                        <a:srgbClr val="D9D9D9"/>
+                    <a:lnB cmpd="sng" algn="ctr" cap="flat" w="38100">
+                      <a:solidFill>
+                        <a:srgbClr val="000000"/>
                       </a:solidFill>
                       <a:prstDash val="solid"/>
                       <a:round/>
@@ -10865,36 +10865,36 @@
                     </a:p>
                   </a:txBody>
                   <a:tcPr marL="76200" marR="76200" marT="76200" marB="76200" anchor="ctr">
-                    <a:lnL cmpd="sng" algn="ctr" cap="flat" w="9525">
-                      <a:solidFill>
-                        <a:srgbClr val="D9D9D9"/>
+                    <a:lnL cmpd="sng" algn="ctr" cap="flat" w="38100">
+                      <a:solidFill>
+                        <a:srgbClr val="000000"/>
                       </a:solidFill>
                       <a:prstDash val="solid"/>
                       <a:round/>
                       <a:headEnd type="none" w="med" len="med"/>
                       <a:tailEnd type="none" w="med" len="med"/>
                     </a:lnL>
-                    <a:lnR cmpd="sng" algn="ctr" cap="flat" w="9525">
-                      <a:solidFill>
-                        <a:srgbClr val="D9D9D9"/>
+                    <a:lnR cmpd="sng" algn="ctr" cap="flat" w="38100">
+                      <a:solidFill>
+                        <a:srgbClr val="000000"/>
                       </a:solidFill>
                       <a:prstDash val="solid"/>
                       <a:round/>
                       <a:headEnd type="none" w="med" len="med"/>
                       <a:tailEnd type="none" w="med" len="med"/>
                     </a:lnR>
-                    <a:lnT cmpd="sng" algn="ctr" cap="flat" w="9525">
-                      <a:solidFill>
-                        <a:srgbClr val="D9D9D9"/>
+                    <a:lnT cmpd="sng" algn="ctr" cap="flat" w="38100">
+                      <a:solidFill>
+                        <a:srgbClr val="000000"/>
                       </a:solidFill>
                       <a:prstDash val="solid"/>
                       <a:round/>
                       <a:headEnd type="none" w="med" len="med"/>
                       <a:tailEnd type="none" w="med" len="med"/>
                     </a:lnT>
-                    <a:lnB cmpd="sng" algn="ctr" cap="flat" w="9525">
-                      <a:solidFill>
-                        <a:srgbClr val="D9D9D9"/>
+                    <a:lnB cmpd="sng" algn="ctr" cap="flat" w="38100">
+                      <a:solidFill>
+                        <a:srgbClr val="000000"/>
                       </a:solidFill>
                       <a:prstDash val="solid"/>
                       <a:round/>
@@ -10936,36 +10936,36 @@
                     </a:p>
                   </a:txBody>
                   <a:tcPr marL="76200" marR="76200" marT="76200" marB="76200" anchor="ctr">
-                    <a:lnL cmpd="sng" algn="ctr" cap="flat" w="9525">
-                      <a:solidFill>
-                        <a:srgbClr val="D9D9D9"/>
+                    <a:lnL cmpd="sng" algn="ctr" cap="flat" w="38100">
+                      <a:solidFill>
+                        <a:srgbClr val="000000"/>
                       </a:solidFill>
                       <a:prstDash val="solid"/>
                       <a:round/>
                       <a:headEnd type="none" w="med" len="med"/>
                       <a:tailEnd type="none" w="med" len="med"/>
                     </a:lnL>
-                    <a:lnR cmpd="sng" algn="ctr" cap="flat" w="9525">
-                      <a:solidFill>
-                        <a:srgbClr val="D9D9D9"/>
+                    <a:lnR cmpd="sng" algn="ctr" cap="flat" w="38100">
+                      <a:solidFill>
+                        <a:srgbClr val="000000"/>
                       </a:solidFill>
                       <a:prstDash val="solid"/>
                       <a:round/>
                       <a:headEnd type="none" w="med" len="med"/>
                       <a:tailEnd type="none" w="med" len="med"/>
                     </a:lnR>
-                    <a:lnT cmpd="sng" algn="ctr" cap="flat" w="9525">
-                      <a:solidFill>
-                        <a:srgbClr val="D9D9D9"/>
+                    <a:lnT cmpd="sng" algn="ctr" cap="flat" w="38100">
+                      <a:solidFill>
+                        <a:srgbClr val="000000"/>
                       </a:solidFill>
                       <a:prstDash val="solid"/>
                       <a:round/>
                       <a:headEnd type="none" w="med" len="med"/>
                       <a:tailEnd type="none" w="med" len="med"/>
                     </a:lnT>
-                    <a:lnB cmpd="sng" algn="ctr" cap="flat" w="9525">
-                      <a:solidFill>
-                        <a:srgbClr val="D9D9D9"/>
+                    <a:lnB cmpd="sng" algn="ctr" cap="flat" w="38100">
+                      <a:solidFill>
+                        <a:srgbClr val="000000"/>
                       </a:solidFill>
                       <a:prstDash val="solid"/>
                       <a:round/>
@@ -11007,36 +11007,36 @@
                     </a:p>
                   </a:txBody>
                   <a:tcPr marL="76200" marR="76200" marT="76200" marB="76200" anchor="ctr">
-                    <a:lnL cmpd="sng" algn="ctr" cap="flat" w="9525">
-                      <a:solidFill>
-                        <a:srgbClr val="D9D9D9"/>
+                    <a:lnL cmpd="sng" algn="ctr" cap="flat" w="38100">
+                      <a:solidFill>
+                        <a:srgbClr val="000000"/>
                       </a:solidFill>
                       <a:prstDash val="solid"/>
                       <a:round/>
                       <a:headEnd type="none" w="med" len="med"/>
                       <a:tailEnd type="none" w="med" len="med"/>
                     </a:lnL>
-                    <a:lnR cmpd="sng" algn="ctr" cap="flat" w="9525">
-                      <a:solidFill>
-                        <a:srgbClr val="D9D9D9"/>
+                    <a:lnR cmpd="sng" algn="ctr" cap="flat" w="38100">
+                      <a:solidFill>
+                        <a:srgbClr val="000000"/>
                       </a:solidFill>
                       <a:prstDash val="solid"/>
                       <a:round/>
                       <a:headEnd type="none" w="med" len="med"/>
                       <a:tailEnd type="none" w="med" len="med"/>
                     </a:lnR>
-                    <a:lnT cmpd="sng" algn="ctr" cap="flat" w="9525">
-                      <a:solidFill>
-                        <a:srgbClr val="D9D9D9"/>
+                    <a:lnT cmpd="sng" algn="ctr" cap="flat" w="38100">
+                      <a:solidFill>
+                        <a:srgbClr val="000000"/>
                       </a:solidFill>
                       <a:prstDash val="solid"/>
                       <a:round/>
                       <a:headEnd type="none" w="med" len="med"/>
                       <a:tailEnd type="none" w="med" len="med"/>
                     </a:lnT>
-                    <a:lnB cmpd="sng" algn="ctr" cap="flat" w="9525">
-                      <a:solidFill>
-                        <a:srgbClr val="D9D9D9"/>
+                    <a:lnB cmpd="sng" algn="ctr" cap="flat" w="38100">
+                      <a:solidFill>
+                        <a:srgbClr val="000000"/>
                       </a:solidFill>
                       <a:prstDash val="solid"/>
                       <a:round/>
@@ -11078,36 +11078,36 @@
                     </a:p>
                   </a:txBody>
                   <a:tcPr marL="76200" marR="76200" marT="76200" marB="76200" anchor="ctr">
-                    <a:lnL cmpd="sng" algn="ctr" cap="flat" w="9525">
-                      <a:solidFill>
-                        <a:srgbClr val="D9D9D9"/>
+                    <a:lnL cmpd="sng" algn="ctr" cap="flat" w="38100">
+                      <a:solidFill>
+                        <a:srgbClr val="000000"/>
                       </a:solidFill>
                       <a:prstDash val="solid"/>
                       <a:round/>
                       <a:headEnd type="none" w="med" len="med"/>
                       <a:tailEnd type="none" w="med" len="med"/>
                     </a:lnL>
-                    <a:lnR cmpd="sng" algn="ctr" cap="flat" w="9525">
-                      <a:solidFill>
-                        <a:srgbClr val="D9D9D9"/>
+                    <a:lnR cmpd="sng" algn="ctr" cap="flat" w="38100">
+                      <a:solidFill>
+                        <a:srgbClr val="000000"/>
                       </a:solidFill>
                       <a:prstDash val="solid"/>
                       <a:round/>
                       <a:headEnd type="none" w="med" len="med"/>
                       <a:tailEnd type="none" w="med" len="med"/>
                     </a:lnR>
-                    <a:lnT cmpd="sng" algn="ctr" cap="flat" w="9525">
-                      <a:solidFill>
-                        <a:srgbClr val="D9D9D9"/>
+                    <a:lnT cmpd="sng" algn="ctr" cap="flat" w="38100">
+                      <a:solidFill>
+                        <a:srgbClr val="000000"/>
                       </a:solidFill>
                       <a:prstDash val="solid"/>
                       <a:round/>
                       <a:headEnd type="none" w="med" len="med"/>
                       <a:tailEnd type="none" w="med" len="med"/>
                     </a:lnT>
-                    <a:lnB cmpd="sng" algn="ctr" cap="flat" w="9525">
-                      <a:solidFill>
-                        <a:srgbClr val="D9D9D9"/>
+                    <a:lnB cmpd="sng" algn="ctr" cap="flat" w="38100">
+                      <a:solidFill>
+                        <a:srgbClr val="000000"/>
                       </a:solidFill>
                       <a:prstDash val="solid"/>
                       <a:round/>
@@ -11120,7 +11120,7 @@
                   </a:tcPr>
                 </a:tc>
               </a:tr>
-              <a:tr h="628351">
+              <a:tr h="653143">
                 <a:tc>
                   <a:txBody>
                     <a:bodyPr anchor="t" rtlCol="false"/>
@@ -11151,36 +11151,36 @@
                     </a:p>
                   </a:txBody>
                   <a:tcPr marL="76200" marR="76200" marT="76200" marB="76200" anchor="ctr">
-                    <a:lnL cmpd="sng" algn="ctr" cap="flat" w="9525">
-                      <a:solidFill>
-                        <a:srgbClr val="D9D9D9"/>
+                    <a:lnL cmpd="sng" algn="ctr" cap="flat" w="38100">
+                      <a:solidFill>
+                        <a:srgbClr val="000000"/>
                       </a:solidFill>
                       <a:prstDash val="solid"/>
                       <a:round/>
                       <a:headEnd type="none" w="med" len="med"/>
                       <a:tailEnd type="none" w="med" len="med"/>
                     </a:lnL>
-                    <a:lnR cmpd="sng" algn="ctr" cap="flat" w="9525">
-                      <a:solidFill>
-                        <a:srgbClr val="D9D9D9"/>
+                    <a:lnR cmpd="sng" algn="ctr" cap="flat" w="38100">
+                      <a:solidFill>
+                        <a:srgbClr val="000000"/>
                       </a:solidFill>
                       <a:prstDash val="solid"/>
                       <a:round/>
                       <a:headEnd type="none" w="med" len="med"/>
                       <a:tailEnd type="none" w="med" len="med"/>
                     </a:lnR>
-                    <a:lnT cmpd="sng" algn="ctr" cap="flat" w="9525">
-                      <a:solidFill>
-                        <a:srgbClr val="D9D9D9"/>
+                    <a:lnT cmpd="sng" algn="ctr" cap="flat" w="38100">
+                      <a:solidFill>
+                        <a:srgbClr val="000000"/>
                       </a:solidFill>
                       <a:prstDash val="solid"/>
                       <a:round/>
                       <a:headEnd type="none" w="med" len="med"/>
                       <a:tailEnd type="none" w="med" len="med"/>
                     </a:lnT>
-                    <a:lnB cmpd="sng" algn="ctr" cap="flat" w="9525">
-                      <a:solidFill>
-                        <a:srgbClr val="D9D9D9"/>
+                    <a:lnB cmpd="sng" algn="ctr" cap="flat" w="38100">
+                      <a:solidFill>
+                        <a:srgbClr val="000000"/>
                       </a:solidFill>
                       <a:prstDash val="solid"/>
                       <a:round/>
@@ -11222,36 +11222,36 @@
                     </a:p>
                   </a:txBody>
                   <a:tcPr marL="76200" marR="76200" marT="76200" marB="76200" anchor="ctr">
-                    <a:lnL cmpd="sng" algn="ctr" cap="flat" w="9525">
-                      <a:solidFill>
-                        <a:srgbClr val="D9D9D9"/>
+                    <a:lnL cmpd="sng" algn="ctr" cap="flat" w="38100">
+                      <a:solidFill>
+                        <a:srgbClr val="000000"/>
                       </a:solidFill>
                       <a:prstDash val="solid"/>
                       <a:round/>
                       <a:headEnd type="none" w="med" len="med"/>
                       <a:tailEnd type="none" w="med" len="med"/>
                     </a:lnL>
-                    <a:lnR cmpd="sng" algn="ctr" cap="flat" w="9525">
-                      <a:solidFill>
-                        <a:srgbClr val="D9D9D9"/>
+                    <a:lnR cmpd="sng" algn="ctr" cap="flat" w="38100">
+                      <a:solidFill>
+                        <a:srgbClr val="000000"/>
                       </a:solidFill>
                       <a:prstDash val="solid"/>
                       <a:round/>
                       <a:headEnd type="none" w="med" len="med"/>
                       <a:tailEnd type="none" w="med" len="med"/>
                     </a:lnR>
-                    <a:lnT cmpd="sng" algn="ctr" cap="flat" w="9525">
-                      <a:solidFill>
-                        <a:srgbClr val="D9D9D9"/>
+                    <a:lnT cmpd="sng" algn="ctr" cap="flat" w="38100">
+                      <a:solidFill>
+                        <a:srgbClr val="000000"/>
                       </a:solidFill>
                       <a:prstDash val="solid"/>
                       <a:round/>
                       <a:headEnd type="none" w="med" len="med"/>
                       <a:tailEnd type="none" w="med" len="med"/>
                     </a:lnT>
-                    <a:lnB cmpd="sng" algn="ctr" cap="flat" w="9525">
-                      <a:solidFill>
-                        <a:srgbClr val="D9D9D9"/>
+                    <a:lnB cmpd="sng" algn="ctr" cap="flat" w="38100">
+                      <a:solidFill>
+                        <a:srgbClr val="000000"/>
                       </a:solidFill>
                       <a:prstDash val="solid"/>
                       <a:round/>
@@ -11293,36 +11293,36 @@
                     </a:p>
                   </a:txBody>
                   <a:tcPr marL="76200" marR="76200" marT="76200" marB="76200" anchor="ctr">
-                    <a:lnL cmpd="sng" algn="ctr" cap="flat" w="9525">
-                      <a:solidFill>
-                        <a:srgbClr val="D9D9D9"/>
+                    <a:lnL cmpd="sng" algn="ctr" cap="flat" w="38100">
+                      <a:solidFill>
+                        <a:srgbClr val="000000"/>
                       </a:solidFill>
                       <a:prstDash val="solid"/>
                       <a:round/>
                       <a:headEnd type="none" w="med" len="med"/>
                       <a:tailEnd type="none" w="med" len="med"/>
                     </a:lnL>
-                    <a:lnR cmpd="sng" algn="ctr" cap="flat" w="9525">
-                      <a:solidFill>
-                        <a:srgbClr val="D9D9D9"/>
+                    <a:lnR cmpd="sng" algn="ctr" cap="flat" w="38100">
+                      <a:solidFill>
+                        <a:srgbClr val="000000"/>
                       </a:solidFill>
                       <a:prstDash val="solid"/>
                       <a:round/>
                       <a:headEnd type="none" w="med" len="med"/>
                       <a:tailEnd type="none" w="med" len="med"/>
                     </a:lnR>
-                    <a:lnT cmpd="sng" algn="ctr" cap="flat" w="9525">
-                      <a:solidFill>
-                        <a:srgbClr val="D9D9D9"/>
+                    <a:lnT cmpd="sng" algn="ctr" cap="flat" w="38100">
+                      <a:solidFill>
+                        <a:srgbClr val="000000"/>
                       </a:solidFill>
                       <a:prstDash val="solid"/>
                       <a:round/>
                       <a:headEnd type="none" w="med" len="med"/>
                       <a:tailEnd type="none" w="med" len="med"/>
                     </a:lnT>
-                    <a:lnB cmpd="sng" algn="ctr" cap="flat" w="9525">
-                      <a:solidFill>
-                        <a:srgbClr val="D9D9D9"/>
+                    <a:lnB cmpd="sng" algn="ctr" cap="flat" w="38100">
+                      <a:solidFill>
+                        <a:srgbClr val="000000"/>
                       </a:solidFill>
                       <a:prstDash val="solid"/>
                       <a:round/>
@@ -11364,36 +11364,36 @@
                     </a:p>
                   </a:txBody>
                   <a:tcPr marL="76200" marR="76200" marT="76200" marB="76200" anchor="ctr">
-                    <a:lnL cmpd="sng" algn="ctr" cap="flat" w="9525">
-                      <a:solidFill>
-                        <a:srgbClr val="D9D9D9"/>
+                    <a:lnL cmpd="sng" algn="ctr" cap="flat" w="38100">
+                      <a:solidFill>
+                        <a:srgbClr val="000000"/>
                       </a:solidFill>
                       <a:prstDash val="solid"/>
                       <a:round/>
                       <a:headEnd type="none" w="med" len="med"/>
                       <a:tailEnd type="none" w="med" len="med"/>
                     </a:lnL>
-                    <a:lnR cmpd="sng" algn="ctr" cap="flat" w="9525">
-                      <a:solidFill>
-                        <a:srgbClr val="D9D9D9"/>
+                    <a:lnR cmpd="sng" algn="ctr" cap="flat" w="38100">
+                      <a:solidFill>
+                        <a:srgbClr val="000000"/>
                       </a:solidFill>
                       <a:prstDash val="solid"/>
                       <a:round/>
                       <a:headEnd type="none" w="med" len="med"/>
                       <a:tailEnd type="none" w="med" len="med"/>
                     </a:lnR>
-                    <a:lnT cmpd="sng" algn="ctr" cap="flat" w="9525">
-                      <a:solidFill>
-                        <a:srgbClr val="D9D9D9"/>
+                    <a:lnT cmpd="sng" algn="ctr" cap="flat" w="38100">
+                      <a:solidFill>
+                        <a:srgbClr val="000000"/>
                       </a:solidFill>
                       <a:prstDash val="solid"/>
                       <a:round/>
                       <a:headEnd type="none" w="med" len="med"/>
                       <a:tailEnd type="none" w="med" len="med"/>
                     </a:lnT>
-                    <a:lnB cmpd="sng" algn="ctr" cap="flat" w="9525">
-                      <a:solidFill>
-                        <a:srgbClr val="D9D9D9"/>
+                    <a:lnB cmpd="sng" algn="ctr" cap="flat" w="38100">
+                      <a:solidFill>
+                        <a:srgbClr val="000000"/>
                       </a:solidFill>
                       <a:prstDash val="solid"/>
                       <a:round/>
@@ -11435,36 +11435,36 @@
                     </a:p>
                   </a:txBody>
                   <a:tcPr marL="76200" marR="76200" marT="76200" marB="76200" anchor="ctr">
-                    <a:lnL cmpd="sng" algn="ctr" cap="flat" w="9525">
-                      <a:solidFill>
-                        <a:srgbClr val="D9D9D9"/>
+                    <a:lnL cmpd="sng" algn="ctr" cap="flat" w="38100">
+                      <a:solidFill>
+                        <a:srgbClr val="000000"/>
                       </a:solidFill>
                       <a:prstDash val="solid"/>
                       <a:round/>
                       <a:headEnd type="none" w="med" len="med"/>
                       <a:tailEnd type="none" w="med" len="med"/>
                     </a:lnL>
-                    <a:lnR cmpd="sng" algn="ctr" cap="flat" w="9525">
-                      <a:solidFill>
-                        <a:srgbClr val="D9D9D9"/>
+                    <a:lnR cmpd="sng" algn="ctr" cap="flat" w="38100">
+                      <a:solidFill>
+                        <a:srgbClr val="000000"/>
                       </a:solidFill>
                       <a:prstDash val="solid"/>
                       <a:round/>
                       <a:headEnd type="none" w="med" len="med"/>
                       <a:tailEnd type="none" w="med" len="med"/>
                     </a:lnR>
-                    <a:lnT cmpd="sng" algn="ctr" cap="flat" w="9525">
-                      <a:solidFill>
-                        <a:srgbClr val="D9D9D9"/>
+                    <a:lnT cmpd="sng" algn="ctr" cap="flat" w="38100">
+                      <a:solidFill>
+                        <a:srgbClr val="000000"/>
                       </a:solidFill>
                       <a:prstDash val="solid"/>
                       <a:round/>
                       <a:headEnd type="none" w="med" len="med"/>
                       <a:tailEnd type="none" w="med" len="med"/>
                     </a:lnT>
-                    <a:lnB cmpd="sng" algn="ctr" cap="flat" w="9525">
-                      <a:solidFill>
-                        <a:srgbClr val="D9D9D9"/>
+                    <a:lnB cmpd="sng" algn="ctr" cap="flat" w="38100">
+                      <a:solidFill>
+                        <a:srgbClr val="000000"/>
                       </a:solidFill>
                       <a:prstDash val="solid"/>
                       <a:round/>
@@ -11506,36 +11506,36 @@
                     </a:p>
                   </a:txBody>
                   <a:tcPr marL="76200" marR="76200" marT="76200" marB="76200" anchor="ctr">
-                    <a:lnL cmpd="sng" algn="ctr" cap="flat" w="9525">
-                      <a:solidFill>
-                        <a:srgbClr val="D9D9D9"/>
+                    <a:lnL cmpd="sng" algn="ctr" cap="flat" w="38100">
+                      <a:solidFill>
+                        <a:srgbClr val="000000"/>
                       </a:solidFill>
                       <a:prstDash val="solid"/>
                       <a:round/>
                       <a:headEnd type="none" w="med" len="med"/>
                       <a:tailEnd type="none" w="med" len="med"/>
                     </a:lnL>
-                    <a:lnR cmpd="sng" algn="ctr" cap="flat" w="9525">
-                      <a:solidFill>
-                        <a:srgbClr val="D9D9D9"/>
+                    <a:lnR cmpd="sng" algn="ctr" cap="flat" w="38100">
+                      <a:solidFill>
+                        <a:srgbClr val="000000"/>
                       </a:solidFill>
                       <a:prstDash val="solid"/>
                       <a:round/>
                       <a:headEnd type="none" w="med" len="med"/>
                       <a:tailEnd type="none" w="med" len="med"/>
                     </a:lnR>
-                    <a:lnT cmpd="sng" algn="ctr" cap="flat" w="9525">
-                      <a:solidFill>
-                        <a:srgbClr val="D9D9D9"/>
+                    <a:lnT cmpd="sng" algn="ctr" cap="flat" w="38100">
+                      <a:solidFill>
+                        <a:srgbClr val="000000"/>
                       </a:solidFill>
                       <a:prstDash val="solid"/>
                       <a:round/>
                       <a:headEnd type="none" w="med" len="med"/>
                       <a:tailEnd type="none" w="med" len="med"/>
                     </a:lnT>
-                    <a:lnB cmpd="sng" algn="ctr" cap="flat" w="9525">
-                      <a:solidFill>
-                        <a:srgbClr val="D9D9D9"/>
+                    <a:lnB cmpd="sng" algn="ctr" cap="flat" w="38100">
+                      <a:solidFill>
+                        <a:srgbClr val="000000"/>
                       </a:solidFill>
                       <a:prstDash val="solid"/>
                       <a:round/>
@@ -11548,7 +11548,7 @@
                   </a:tcPr>
                 </a:tc>
               </a:tr>
-              <a:tr h="1039983">
+              <a:tr h="653143">
                 <a:tc>
                   <a:txBody>
                     <a:bodyPr anchor="t" rtlCol="false"/>
@@ -11579,36 +11579,36 @@
                     </a:p>
                   </a:txBody>
                   <a:tcPr marL="76200" marR="76200" marT="76200" marB="76200" anchor="ctr">
-                    <a:lnL cmpd="sng" algn="ctr" cap="flat" w="9525">
-                      <a:solidFill>
-                        <a:srgbClr val="D9D9D9"/>
+                    <a:lnL cmpd="sng" algn="ctr" cap="flat" w="38100">
+                      <a:solidFill>
+                        <a:srgbClr val="000000"/>
                       </a:solidFill>
                       <a:prstDash val="solid"/>
                       <a:round/>
                       <a:headEnd type="none" w="med" len="med"/>
                       <a:tailEnd type="none" w="med" len="med"/>
                     </a:lnL>
-                    <a:lnR cmpd="sng" algn="ctr" cap="flat" w="9525">
-                      <a:solidFill>
-                        <a:srgbClr val="D9D9D9"/>
+                    <a:lnR cmpd="sng" algn="ctr" cap="flat" w="38100">
+                      <a:solidFill>
+                        <a:srgbClr val="000000"/>
                       </a:solidFill>
                       <a:prstDash val="solid"/>
                       <a:round/>
                       <a:headEnd type="none" w="med" len="med"/>
                       <a:tailEnd type="none" w="med" len="med"/>
                     </a:lnR>
-                    <a:lnT cmpd="sng" algn="ctr" cap="flat" w="9525">
-                      <a:solidFill>
-                        <a:srgbClr val="D9D9D9"/>
+                    <a:lnT cmpd="sng" algn="ctr" cap="flat" w="38100">
+                      <a:solidFill>
+                        <a:srgbClr val="000000"/>
                       </a:solidFill>
                       <a:prstDash val="solid"/>
                       <a:round/>
                       <a:headEnd type="none" w="med" len="med"/>
                       <a:tailEnd type="none" w="med" len="med"/>
                     </a:lnT>
-                    <a:lnB cmpd="sng" algn="ctr" cap="flat" w="9525">
-                      <a:solidFill>
-                        <a:srgbClr val="D9D9D9"/>
+                    <a:lnB cmpd="sng" algn="ctr" cap="flat" w="38100">
+                      <a:solidFill>
+                        <a:srgbClr val="000000"/>
                       </a:solidFill>
                       <a:prstDash val="solid"/>
                       <a:round/>
@@ -11650,36 +11650,36 @@
                     </a:p>
                   </a:txBody>
                   <a:tcPr marL="76200" marR="76200" marT="76200" marB="76200" anchor="ctr">
-                    <a:lnL cmpd="sng" algn="ctr" cap="flat" w="9525">
-                      <a:solidFill>
-                        <a:srgbClr val="D9D9D9"/>
+                    <a:lnL cmpd="sng" algn="ctr" cap="flat" w="38100">
+                      <a:solidFill>
+                        <a:srgbClr val="000000"/>
                       </a:solidFill>
                       <a:prstDash val="solid"/>
                       <a:round/>
                       <a:headEnd type="none" w="med" len="med"/>
                       <a:tailEnd type="none" w="med" len="med"/>
                     </a:lnL>
-                    <a:lnR cmpd="sng" algn="ctr" cap="flat" w="9525">
-                      <a:solidFill>
-                        <a:srgbClr val="D9D9D9"/>
+                    <a:lnR cmpd="sng" algn="ctr" cap="flat" w="38100">
+                      <a:solidFill>
+                        <a:srgbClr val="000000"/>
                       </a:solidFill>
                       <a:prstDash val="solid"/>
                       <a:round/>
                       <a:headEnd type="none" w="med" len="med"/>
                       <a:tailEnd type="none" w="med" len="med"/>
                     </a:lnR>
-                    <a:lnT cmpd="sng" algn="ctr" cap="flat" w="9525">
-                      <a:solidFill>
-                        <a:srgbClr val="D9D9D9"/>
+                    <a:lnT cmpd="sng" algn="ctr" cap="flat" w="38100">
+                      <a:solidFill>
+                        <a:srgbClr val="000000"/>
                       </a:solidFill>
                       <a:prstDash val="solid"/>
                       <a:round/>
                       <a:headEnd type="none" w="med" len="med"/>
                       <a:tailEnd type="none" w="med" len="med"/>
                     </a:lnT>
-                    <a:lnB cmpd="sng" algn="ctr" cap="flat" w="9525">
-                      <a:solidFill>
-                        <a:srgbClr val="D9D9D9"/>
+                    <a:lnB cmpd="sng" algn="ctr" cap="flat" w="38100">
+                      <a:solidFill>
+                        <a:srgbClr val="000000"/>
                       </a:solidFill>
                       <a:prstDash val="solid"/>
                       <a:round/>
@@ -11721,36 +11721,36 @@
                     </a:p>
                   </a:txBody>
                   <a:tcPr marL="76200" marR="76200" marT="76200" marB="76200" anchor="ctr">
-                    <a:lnL cmpd="sng" algn="ctr" cap="flat" w="9525">
-                      <a:solidFill>
-                        <a:srgbClr val="D9D9D9"/>
+                    <a:lnL cmpd="sng" algn="ctr" cap="flat" w="38100">
+                      <a:solidFill>
+                        <a:srgbClr val="000000"/>
                       </a:solidFill>
                       <a:prstDash val="solid"/>
                       <a:round/>
                       <a:headEnd type="none" w="med" len="med"/>
                       <a:tailEnd type="none" w="med" len="med"/>
                     </a:lnL>
-                    <a:lnR cmpd="sng" algn="ctr" cap="flat" w="9525">
-                      <a:solidFill>
-                        <a:srgbClr val="D9D9D9"/>
+                    <a:lnR cmpd="sng" algn="ctr" cap="flat" w="38100">
+                      <a:solidFill>
+                        <a:srgbClr val="000000"/>
                       </a:solidFill>
                       <a:prstDash val="solid"/>
                       <a:round/>
                       <a:headEnd type="none" w="med" len="med"/>
                       <a:tailEnd type="none" w="med" len="med"/>
                     </a:lnR>
-                    <a:lnT cmpd="sng" algn="ctr" cap="flat" w="9525">
-                      <a:solidFill>
-                        <a:srgbClr val="D9D9D9"/>
+                    <a:lnT cmpd="sng" algn="ctr" cap="flat" w="38100">
+                      <a:solidFill>
+                        <a:srgbClr val="000000"/>
                       </a:solidFill>
                       <a:prstDash val="solid"/>
                       <a:round/>
                       <a:headEnd type="none" w="med" len="med"/>
                       <a:tailEnd type="none" w="med" len="med"/>
                     </a:lnT>
-                    <a:lnB cmpd="sng" algn="ctr" cap="flat" w="9525">
-                      <a:solidFill>
-                        <a:srgbClr val="D9D9D9"/>
+                    <a:lnB cmpd="sng" algn="ctr" cap="flat" w="38100">
+                      <a:solidFill>
+                        <a:srgbClr val="000000"/>
                       </a:solidFill>
                       <a:prstDash val="solid"/>
                       <a:round/>
@@ -11792,36 +11792,36 @@
                     </a:p>
                   </a:txBody>
                   <a:tcPr marL="76200" marR="76200" marT="76200" marB="76200" anchor="ctr">
-                    <a:lnL cmpd="sng" algn="ctr" cap="flat" w="9525">
-                      <a:solidFill>
-                        <a:srgbClr val="D9D9D9"/>
+                    <a:lnL cmpd="sng" algn="ctr" cap="flat" w="38100">
+                      <a:solidFill>
+                        <a:srgbClr val="000000"/>
                       </a:solidFill>
                       <a:prstDash val="solid"/>
                       <a:round/>
                       <a:headEnd type="none" w="med" len="med"/>
                       <a:tailEnd type="none" w="med" len="med"/>
                     </a:lnL>
-                    <a:lnR cmpd="sng" algn="ctr" cap="flat" w="9525">
-                      <a:solidFill>
-                        <a:srgbClr val="D9D9D9"/>
+                    <a:lnR cmpd="sng" algn="ctr" cap="flat" w="38100">
+                      <a:solidFill>
+                        <a:srgbClr val="000000"/>
                       </a:solidFill>
                       <a:prstDash val="solid"/>
                       <a:round/>
                       <a:headEnd type="none" w="med" len="med"/>
                       <a:tailEnd type="none" w="med" len="med"/>
                     </a:lnR>
-                    <a:lnT cmpd="sng" algn="ctr" cap="flat" w="9525">
-                      <a:solidFill>
-                        <a:srgbClr val="D9D9D9"/>
+                    <a:lnT cmpd="sng" algn="ctr" cap="flat" w="38100">
+                      <a:solidFill>
+                        <a:srgbClr val="000000"/>
                       </a:solidFill>
                       <a:prstDash val="solid"/>
                       <a:round/>
                       <a:headEnd type="none" w="med" len="med"/>
                       <a:tailEnd type="none" w="med" len="med"/>
                     </a:lnT>
-                    <a:lnB cmpd="sng" algn="ctr" cap="flat" w="9525">
-                      <a:solidFill>
-                        <a:srgbClr val="D9D9D9"/>
+                    <a:lnB cmpd="sng" algn="ctr" cap="flat" w="38100">
+                      <a:solidFill>
+                        <a:srgbClr val="000000"/>
                       </a:solidFill>
                       <a:prstDash val="solid"/>
                       <a:round/>
@@ -11863,36 +11863,36 @@
                     </a:p>
                   </a:txBody>
                   <a:tcPr marL="76200" marR="76200" marT="76200" marB="76200" anchor="ctr">
-                    <a:lnL cmpd="sng" algn="ctr" cap="flat" w="9525">
-                      <a:solidFill>
-                        <a:srgbClr val="D9D9D9"/>
+                    <a:lnL cmpd="sng" algn="ctr" cap="flat" w="38100">
+                      <a:solidFill>
+                        <a:srgbClr val="000000"/>
                       </a:solidFill>
                       <a:prstDash val="solid"/>
                       <a:round/>
                       <a:headEnd type="none" w="med" len="med"/>
                       <a:tailEnd type="none" w="med" len="med"/>
                     </a:lnL>
-                    <a:lnR cmpd="sng" algn="ctr" cap="flat" w="9525">
-                      <a:solidFill>
-                        <a:srgbClr val="D9D9D9"/>
+                    <a:lnR cmpd="sng" algn="ctr" cap="flat" w="38100">
+                      <a:solidFill>
+                        <a:srgbClr val="000000"/>
                       </a:solidFill>
                       <a:prstDash val="solid"/>
                       <a:round/>
                       <a:headEnd type="none" w="med" len="med"/>
                       <a:tailEnd type="none" w="med" len="med"/>
                     </a:lnR>
-                    <a:lnT cmpd="sng" algn="ctr" cap="flat" w="9525">
-                      <a:solidFill>
-                        <a:srgbClr val="D9D9D9"/>
+                    <a:lnT cmpd="sng" algn="ctr" cap="flat" w="38100">
+                      <a:solidFill>
+                        <a:srgbClr val="000000"/>
                       </a:solidFill>
                       <a:prstDash val="solid"/>
                       <a:round/>
                       <a:headEnd type="none" w="med" len="med"/>
                       <a:tailEnd type="none" w="med" len="med"/>
                     </a:lnT>
-                    <a:lnB cmpd="sng" algn="ctr" cap="flat" w="9525">
-                      <a:solidFill>
-                        <a:srgbClr val="D9D9D9"/>
+                    <a:lnB cmpd="sng" algn="ctr" cap="flat" w="38100">
+                      <a:solidFill>
+                        <a:srgbClr val="000000"/>
                       </a:solidFill>
                       <a:prstDash val="solid"/>
                       <a:round/>
@@ -11934,36 +11934,36 @@
                     </a:p>
                   </a:txBody>
                   <a:tcPr marL="76200" marR="76200" marT="76200" marB="76200" anchor="ctr">
-                    <a:lnL cmpd="sng" algn="ctr" cap="flat" w="9525">
-                      <a:solidFill>
-                        <a:srgbClr val="D9D9D9"/>
+                    <a:lnL cmpd="sng" algn="ctr" cap="flat" w="38100">
+                      <a:solidFill>
+                        <a:srgbClr val="000000"/>
                       </a:solidFill>
                       <a:prstDash val="solid"/>
                       <a:round/>
                       <a:headEnd type="none" w="med" len="med"/>
                       <a:tailEnd type="none" w="med" len="med"/>
                     </a:lnL>
-                    <a:lnR cmpd="sng" algn="ctr" cap="flat" w="9525">
-                      <a:solidFill>
-                        <a:srgbClr val="D9D9D9"/>
+                    <a:lnR cmpd="sng" algn="ctr" cap="flat" w="38100">
+                      <a:solidFill>
+                        <a:srgbClr val="000000"/>
                       </a:solidFill>
                       <a:prstDash val="solid"/>
                       <a:round/>
                       <a:headEnd type="none" w="med" len="med"/>
                       <a:tailEnd type="none" w="med" len="med"/>
                     </a:lnR>
-                    <a:lnT cmpd="sng" algn="ctr" cap="flat" w="9525">
-                      <a:solidFill>
-                        <a:srgbClr val="D9D9D9"/>
+                    <a:lnT cmpd="sng" algn="ctr" cap="flat" w="38100">
+                      <a:solidFill>
+                        <a:srgbClr val="000000"/>
                       </a:solidFill>
                       <a:prstDash val="solid"/>
                       <a:round/>
                       <a:headEnd type="none" w="med" len="med"/>
                       <a:tailEnd type="none" w="med" len="med"/>
                     </a:lnT>
-                    <a:lnB cmpd="sng" algn="ctr" cap="flat" w="9525">
-                      <a:solidFill>
-                        <a:srgbClr val="D9D9D9"/>
+                    <a:lnB cmpd="sng" algn="ctr" cap="flat" w="38100">
+                      <a:solidFill>
+                        <a:srgbClr val="000000"/>
                       </a:solidFill>
                       <a:prstDash val="solid"/>
                       <a:round/>
@@ -11976,7 +11976,7 @@
                   </a:tcPr>
                 </a:tc>
               </a:tr>
-              <a:tr h="1039983">
+              <a:tr h="653143">
                 <a:tc>
                   <a:txBody>
                     <a:bodyPr anchor="t" rtlCol="false"/>
@@ -12007,36 +12007,36 @@
                     </a:p>
                   </a:txBody>
                   <a:tcPr marL="76200" marR="76200" marT="76200" marB="76200" anchor="ctr">
-                    <a:lnL cmpd="sng" algn="ctr" cap="flat" w="9525">
-                      <a:solidFill>
-                        <a:srgbClr val="D9D9D9"/>
+                    <a:lnL cmpd="sng" algn="ctr" cap="flat" w="38100">
+                      <a:solidFill>
+                        <a:srgbClr val="000000"/>
                       </a:solidFill>
                       <a:prstDash val="solid"/>
                       <a:round/>
                       <a:headEnd type="none" w="med" len="med"/>
                       <a:tailEnd type="none" w="med" len="med"/>
                     </a:lnL>
-                    <a:lnR cmpd="sng" algn="ctr" cap="flat" w="9525">
-                      <a:solidFill>
-                        <a:srgbClr val="D9D9D9"/>
+                    <a:lnR cmpd="sng" algn="ctr" cap="flat" w="38100">
+                      <a:solidFill>
+                        <a:srgbClr val="000000"/>
                       </a:solidFill>
                       <a:prstDash val="solid"/>
                       <a:round/>
                       <a:headEnd type="none" w="med" len="med"/>
                       <a:tailEnd type="none" w="med" len="med"/>
                     </a:lnR>
-                    <a:lnT cmpd="sng" algn="ctr" cap="flat" w="9525">
-                      <a:solidFill>
-                        <a:srgbClr val="D9D9D9"/>
+                    <a:lnT cmpd="sng" algn="ctr" cap="flat" w="38100">
+                      <a:solidFill>
+                        <a:srgbClr val="000000"/>
                       </a:solidFill>
                       <a:prstDash val="solid"/>
                       <a:round/>
                       <a:headEnd type="none" w="med" len="med"/>
                       <a:tailEnd type="none" w="med" len="med"/>
                     </a:lnT>
-                    <a:lnB cmpd="sng" algn="ctr" cap="flat" w="9525">
-                      <a:solidFill>
-                        <a:srgbClr val="D9D9D9"/>
+                    <a:lnB cmpd="sng" algn="ctr" cap="flat" w="38100">
+                      <a:solidFill>
+                        <a:srgbClr val="000000"/>
                       </a:solidFill>
                       <a:prstDash val="solid"/>
                       <a:round/>
@@ -12078,36 +12078,36 @@
                     </a:p>
                   </a:txBody>
                   <a:tcPr marL="76200" marR="76200" marT="76200" marB="76200" anchor="ctr">
-                    <a:lnL cmpd="sng" algn="ctr" cap="flat" w="9525">
-                      <a:solidFill>
-                        <a:srgbClr val="D9D9D9"/>
+                    <a:lnL cmpd="sng" algn="ctr" cap="flat" w="38100">
+                      <a:solidFill>
+                        <a:srgbClr val="000000"/>
                       </a:solidFill>
                       <a:prstDash val="solid"/>
                       <a:round/>
                       <a:headEnd type="none" w="med" len="med"/>
                       <a:tailEnd type="none" w="med" len="med"/>
                     </a:lnL>
-                    <a:lnR cmpd="sng" algn="ctr" cap="flat" w="9525">
-                      <a:solidFill>
-                        <a:srgbClr val="D9D9D9"/>
+                    <a:lnR cmpd="sng" algn="ctr" cap="flat" w="38100">
+                      <a:solidFill>
+                        <a:srgbClr val="000000"/>
                       </a:solidFill>
                       <a:prstDash val="solid"/>
                       <a:round/>
                       <a:headEnd type="none" w="med" len="med"/>
                       <a:tailEnd type="none" w="med" len="med"/>
                     </a:lnR>
-                    <a:lnT cmpd="sng" algn="ctr" cap="flat" w="9525">
-                      <a:solidFill>
-                        <a:srgbClr val="D9D9D9"/>
+                    <a:lnT cmpd="sng" algn="ctr" cap="flat" w="38100">
+                      <a:solidFill>
+                        <a:srgbClr val="000000"/>
                       </a:solidFill>
                       <a:prstDash val="solid"/>
                       <a:round/>
                       <a:headEnd type="none" w="med" len="med"/>
                       <a:tailEnd type="none" w="med" len="med"/>
                     </a:lnT>
-                    <a:lnB cmpd="sng" algn="ctr" cap="flat" w="9525">
-                      <a:solidFill>
-                        <a:srgbClr val="D9D9D9"/>
+                    <a:lnB cmpd="sng" algn="ctr" cap="flat" w="38100">
+                      <a:solidFill>
+                        <a:srgbClr val="000000"/>
                       </a:solidFill>
                       <a:prstDash val="solid"/>
                       <a:round/>
@@ -12149,36 +12149,36 @@
                     </a:p>
                   </a:txBody>
                   <a:tcPr marL="76200" marR="76200" marT="76200" marB="76200" anchor="ctr">
-                    <a:lnL cmpd="sng" algn="ctr" cap="flat" w="9525">
-                      <a:solidFill>
-                        <a:srgbClr val="D9D9D9"/>
+                    <a:lnL cmpd="sng" algn="ctr" cap="flat" w="38100">
+                      <a:solidFill>
+                        <a:srgbClr val="000000"/>
                       </a:solidFill>
                       <a:prstDash val="solid"/>
                       <a:round/>
                       <a:headEnd type="none" w="med" len="med"/>
                       <a:tailEnd type="none" w="med" len="med"/>
                     </a:lnL>
-                    <a:lnR cmpd="sng" algn="ctr" cap="flat" w="9525">
-                      <a:solidFill>
-                        <a:srgbClr val="D9D9D9"/>
+                    <a:lnR cmpd="sng" algn="ctr" cap="flat" w="38100">
+                      <a:solidFill>
+                        <a:srgbClr val="000000"/>
                       </a:solidFill>
                       <a:prstDash val="solid"/>
                       <a:round/>
                       <a:headEnd type="none" w="med" len="med"/>
                       <a:tailEnd type="none" w="med" len="med"/>
                     </a:lnR>
-                    <a:lnT cmpd="sng" algn="ctr" cap="flat" w="9525">
-                      <a:solidFill>
-                        <a:srgbClr val="D9D9D9"/>
+                    <a:lnT cmpd="sng" algn="ctr" cap="flat" w="38100">
+                      <a:solidFill>
+                        <a:srgbClr val="000000"/>
                       </a:solidFill>
                       <a:prstDash val="solid"/>
                       <a:round/>
                       <a:headEnd type="none" w="med" len="med"/>
                       <a:tailEnd type="none" w="med" len="med"/>
                     </a:lnT>
-                    <a:lnB cmpd="sng" algn="ctr" cap="flat" w="9525">
-                      <a:solidFill>
-                        <a:srgbClr val="D9D9D9"/>
+                    <a:lnB cmpd="sng" algn="ctr" cap="flat" w="38100">
+                      <a:solidFill>
+                        <a:srgbClr val="000000"/>
                       </a:solidFill>
                       <a:prstDash val="solid"/>
                       <a:round/>
@@ -12220,36 +12220,36 @@
                     </a:p>
                   </a:txBody>
                   <a:tcPr marL="76200" marR="76200" marT="76200" marB="76200" anchor="ctr">
-                    <a:lnL cmpd="sng" algn="ctr" cap="flat" w="9525">
-                      <a:solidFill>
-                        <a:srgbClr val="D9D9D9"/>
+                    <a:lnL cmpd="sng" algn="ctr" cap="flat" w="38100">
+                      <a:solidFill>
+                        <a:srgbClr val="000000"/>
                       </a:solidFill>
                       <a:prstDash val="solid"/>
                       <a:round/>
                       <a:headEnd type="none" w="med" len="med"/>
                       <a:tailEnd type="none" w="med" len="med"/>
                     </a:lnL>
-                    <a:lnR cmpd="sng" algn="ctr" cap="flat" w="9525">
-                      <a:solidFill>
-                        <a:srgbClr val="D9D9D9"/>
+                    <a:lnR cmpd="sng" algn="ctr" cap="flat" w="38100">
+                      <a:solidFill>
+                        <a:srgbClr val="000000"/>
                       </a:solidFill>
                       <a:prstDash val="solid"/>
                       <a:round/>
                       <a:headEnd type="none" w="med" len="med"/>
                       <a:tailEnd type="none" w="med" len="med"/>
                     </a:lnR>
-                    <a:lnT cmpd="sng" algn="ctr" cap="flat" w="9525">
-                      <a:solidFill>
-                        <a:srgbClr val="D9D9D9"/>
+                    <a:lnT cmpd="sng" algn="ctr" cap="flat" w="38100">
+                      <a:solidFill>
+                        <a:srgbClr val="000000"/>
                       </a:solidFill>
                       <a:prstDash val="solid"/>
                       <a:round/>
                       <a:headEnd type="none" w="med" len="med"/>
                       <a:tailEnd type="none" w="med" len="med"/>
                     </a:lnT>
-                    <a:lnB cmpd="sng" algn="ctr" cap="flat" w="9525">
-                      <a:solidFill>
-                        <a:srgbClr val="D9D9D9"/>
+                    <a:lnB cmpd="sng" algn="ctr" cap="flat" w="38100">
+                      <a:solidFill>
+                        <a:srgbClr val="000000"/>
                       </a:solidFill>
                       <a:prstDash val="solid"/>
                       <a:round/>
@@ -12291,36 +12291,36 @@
                     </a:p>
                   </a:txBody>
                   <a:tcPr marL="76200" marR="76200" marT="76200" marB="76200" anchor="ctr">
-                    <a:lnL cmpd="sng" algn="ctr" cap="flat" w="9525">
-                      <a:solidFill>
-                        <a:srgbClr val="D9D9D9"/>
+                    <a:lnL cmpd="sng" algn="ctr" cap="flat" w="38100">
+                      <a:solidFill>
+                        <a:srgbClr val="000000"/>
                       </a:solidFill>
                       <a:prstDash val="solid"/>
                       <a:round/>
                       <a:headEnd type="none" w="med" len="med"/>
                       <a:tailEnd type="none" w="med" len="med"/>
                     </a:lnL>
-                    <a:lnR cmpd="sng" algn="ctr" cap="flat" w="9525">
-                      <a:solidFill>
-                        <a:srgbClr val="D9D9D9"/>
+                    <a:lnR cmpd="sng" algn="ctr" cap="flat" w="38100">
+                      <a:solidFill>
+                        <a:srgbClr val="000000"/>
                       </a:solidFill>
                       <a:prstDash val="solid"/>
                       <a:round/>
                       <a:headEnd type="none" w="med" len="med"/>
                       <a:tailEnd type="none" w="med" len="med"/>
                     </a:lnR>
-                    <a:lnT cmpd="sng" algn="ctr" cap="flat" w="9525">
-                      <a:solidFill>
-                        <a:srgbClr val="D9D9D9"/>
+                    <a:lnT cmpd="sng" algn="ctr" cap="flat" w="38100">
+                      <a:solidFill>
+                        <a:srgbClr val="000000"/>
                       </a:solidFill>
                       <a:prstDash val="solid"/>
                       <a:round/>
                       <a:headEnd type="none" w="med" len="med"/>
                       <a:tailEnd type="none" w="med" len="med"/>
                     </a:lnT>
-                    <a:lnB cmpd="sng" algn="ctr" cap="flat" w="9525">
-                      <a:solidFill>
-                        <a:srgbClr val="D9D9D9"/>
+                    <a:lnB cmpd="sng" algn="ctr" cap="flat" w="38100">
+                      <a:solidFill>
+                        <a:srgbClr val="000000"/>
                       </a:solidFill>
                       <a:prstDash val="solid"/>
                       <a:round/>
@@ -12362,36 +12362,36 @@
                     </a:p>
                   </a:txBody>
                   <a:tcPr marL="76200" marR="76200" marT="76200" marB="76200" anchor="ctr">
-                    <a:lnL cmpd="sng" algn="ctr" cap="flat" w="9525">
-                      <a:solidFill>
-                        <a:srgbClr val="D9D9D9"/>
+                    <a:lnL cmpd="sng" algn="ctr" cap="flat" w="38100">
+                      <a:solidFill>
+                        <a:srgbClr val="000000"/>
                       </a:solidFill>
                       <a:prstDash val="solid"/>
                       <a:round/>
                       <a:headEnd type="none" w="med" len="med"/>
                       <a:tailEnd type="none" w="med" len="med"/>
                     </a:lnL>
-                    <a:lnR cmpd="sng" algn="ctr" cap="flat" w="9525">
-                      <a:solidFill>
-                        <a:srgbClr val="D9D9D9"/>
+                    <a:lnR cmpd="sng" algn="ctr" cap="flat" w="38100">
+                      <a:solidFill>
+                        <a:srgbClr val="000000"/>
                       </a:solidFill>
                       <a:prstDash val="solid"/>
                       <a:round/>
                       <a:headEnd type="none" w="med" len="med"/>
                       <a:tailEnd type="none" w="med" len="med"/>
                     </a:lnR>
-                    <a:lnT cmpd="sng" algn="ctr" cap="flat" w="9525">
-                      <a:solidFill>
-                        <a:srgbClr val="D9D9D9"/>
+                    <a:lnT cmpd="sng" algn="ctr" cap="flat" w="38100">
+                      <a:solidFill>
+                        <a:srgbClr val="000000"/>
                       </a:solidFill>
                       <a:prstDash val="solid"/>
                       <a:round/>
                       <a:headEnd type="none" w="med" len="med"/>
                       <a:tailEnd type="none" w="med" len="med"/>
                     </a:lnT>
-                    <a:lnB cmpd="sng" algn="ctr" cap="flat" w="9525">
-                      <a:solidFill>
-                        <a:srgbClr val="D9D9D9"/>
+                    <a:lnB cmpd="sng" algn="ctr" cap="flat" w="38100">
+                      <a:solidFill>
+                        <a:srgbClr val="000000"/>
                       </a:solidFill>
                       <a:prstDash val="solid"/>
                       <a:round/>
@@ -12404,7 +12404,7 @@
                   </a:tcPr>
                 </a:tc>
               </a:tr>
-              <a:tr h="1039983">
+              <a:tr h="653143">
                 <a:tc>
                   <a:txBody>
                     <a:bodyPr anchor="t" rtlCol="false"/>
@@ -12435,36 +12435,36 @@
                     </a:p>
                   </a:txBody>
                   <a:tcPr marL="76200" marR="76200" marT="76200" marB="76200" anchor="ctr">
-                    <a:lnL cmpd="sng" algn="ctr" cap="flat" w="9525">
-                      <a:solidFill>
-                        <a:srgbClr val="D9D9D9"/>
+                    <a:lnL cmpd="sng" algn="ctr" cap="flat" w="38100">
+                      <a:solidFill>
+                        <a:srgbClr val="000000"/>
                       </a:solidFill>
                       <a:prstDash val="solid"/>
                       <a:round/>
                       <a:headEnd type="none" w="med" len="med"/>
                       <a:tailEnd type="none" w="med" len="med"/>
                     </a:lnL>
-                    <a:lnR cmpd="sng" algn="ctr" cap="flat" w="9525">
-                      <a:solidFill>
-                        <a:srgbClr val="D9D9D9"/>
+                    <a:lnR cmpd="sng" algn="ctr" cap="flat" w="38100">
+                      <a:solidFill>
+                        <a:srgbClr val="000000"/>
                       </a:solidFill>
                       <a:prstDash val="solid"/>
                       <a:round/>
                       <a:headEnd type="none" w="med" len="med"/>
                       <a:tailEnd type="none" w="med" len="med"/>
                     </a:lnR>
-                    <a:lnT cmpd="sng" algn="ctr" cap="flat" w="9525">
-                      <a:solidFill>
-                        <a:srgbClr val="D9D9D9"/>
+                    <a:lnT cmpd="sng" algn="ctr" cap="flat" w="38100">
+                      <a:solidFill>
+                        <a:srgbClr val="000000"/>
                       </a:solidFill>
                       <a:prstDash val="solid"/>
                       <a:round/>
                       <a:headEnd type="none" w="med" len="med"/>
                       <a:tailEnd type="none" w="med" len="med"/>
                     </a:lnT>
-                    <a:lnB cmpd="sng" algn="ctr" cap="flat" w="9525">
-                      <a:solidFill>
-                        <a:srgbClr val="D9D9D9"/>
+                    <a:lnB cmpd="sng" algn="ctr" cap="flat" w="38100">
+                      <a:solidFill>
+                        <a:srgbClr val="000000"/>
                       </a:solidFill>
                       <a:prstDash val="solid"/>
                       <a:round/>
@@ -12506,36 +12506,36 @@
                     </a:p>
                   </a:txBody>
                   <a:tcPr marL="76200" marR="76200" marT="76200" marB="76200" anchor="ctr">
-                    <a:lnL cmpd="sng" algn="ctr" cap="flat" w="9525">
-                      <a:solidFill>
-                        <a:srgbClr val="D9D9D9"/>
+                    <a:lnL cmpd="sng" algn="ctr" cap="flat" w="38100">
+                      <a:solidFill>
+                        <a:srgbClr val="000000"/>
                       </a:solidFill>
                       <a:prstDash val="solid"/>
                       <a:round/>
                       <a:headEnd type="none" w="med" len="med"/>
                       <a:tailEnd type="none" w="med" len="med"/>
                     </a:lnL>
-                    <a:lnR cmpd="sng" algn="ctr" cap="flat" w="9525">
-                      <a:solidFill>
-                        <a:srgbClr val="D9D9D9"/>
+                    <a:lnR cmpd="sng" algn="ctr" cap="flat" w="38100">
+                      <a:solidFill>
+                        <a:srgbClr val="000000"/>
                       </a:solidFill>
                       <a:prstDash val="solid"/>
                       <a:round/>
                       <a:headEnd type="none" w="med" len="med"/>
                       <a:tailEnd type="none" w="med" len="med"/>
                     </a:lnR>
-                    <a:lnT cmpd="sng" algn="ctr" cap="flat" w="9525">
-                      <a:solidFill>
-                        <a:srgbClr val="D9D9D9"/>
+                    <a:lnT cmpd="sng" algn="ctr" cap="flat" w="38100">
+                      <a:solidFill>
+                        <a:srgbClr val="000000"/>
                       </a:solidFill>
                       <a:prstDash val="solid"/>
                       <a:round/>
                       <a:headEnd type="none" w="med" len="med"/>
                       <a:tailEnd type="none" w="med" len="med"/>
                     </a:lnT>
-                    <a:lnB cmpd="sng" algn="ctr" cap="flat" w="9525">
-                      <a:solidFill>
-                        <a:srgbClr val="D9D9D9"/>
+                    <a:lnB cmpd="sng" algn="ctr" cap="flat" w="38100">
+                      <a:solidFill>
+                        <a:srgbClr val="000000"/>
                       </a:solidFill>
                       <a:prstDash val="solid"/>
                       <a:round/>
@@ -12577,36 +12577,36 @@
                     </a:p>
                   </a:txBody>
                   <a:tcPr marL="76200" marR="76200" marT="76200" marB="76200" anchor="ctr">
-                    <a:lnL cmpd="sng" algn="ctr" cap="flat" w="9525">
-                      <a:solidFill>
-                        <a:srgbClr val="D9D9D9"/>
+                    <a:lnL cmpd="sng" algn="ctr" cap="flat" w="38100">
+                      <a:solidFill>
+                        <a:srgbClr val="000000"/>
                       </a:solidFill>
                       <a:prstDash val="solid"/>
                       <a:round/>
                       <a:headEnd type="none" w="med" len="med"/>
                       <a:tailEnd type="none" w="med" len="med"/>
                     </a:lnL>
-                    <a:lnR cmpd="sng" algn="ctr" cap="flat" w="9525">
-                      <a:solidFill>
-                        <a:srgbClr val="D9D9D9"/>
+                    <a:lnR cmpd="sng" algn="ctr" cap="flat" w="38100">
+                      <a:solidFill>
+                        <a:srgbClr val="000000"/>
                       </a:solidFill>
                       <a:prstDash val="solid"/>
                       <a:round/>
                       <a:headEnd type="none" w="med" len="med"/>
                       <a:tailEnd type="none" w="med" len="med"/>
                     </a:lnR>
-                    <a:lnT cmpd="sng" algn="ctr" cap="flat" w="9525">
-                      <a:solidFill>
-                        <a:srgbClr val="D9D9D9"/>
+                    <a:lnT cmpd="sng" algn="ctr" cap="flat" w="38100">
+                      <a:solidFill>
+                        <a:srgbClr val="000000"/>
                       </a:solidFill>
                       <a:prstDash val="solid"/>
                       <a:round/>
                       <a:headEnd type="none" w="med" len="med"/>
                       <a:tailEnd type="none" w="med" len="med"/>
                     </a:lnT>
-                    <a:lnB cmpd="sng" algn="ctr" cap="flat" w="9525">
-                      <a:solidFill>
-                        <a:srgbClr val="D9D9D9"/>
+                    <a:lnB cmpd="sng" algn="ctr" cap="flat" w="38100">
+                      <a:solidFill>
+                        <a:srgbClr val="000000"/>
                       </a:solidFill>
                       <a:prstDash val="solid"/>
                       <a:round/>
@@ -12648,36 +12648,36 @@
                     </a:p>
                   </a:txBody>
                   <a:tcPr marL="76200" marR="76200" marT="76200" marB="76200" anchor="ctr">
-                    <a:lnL cmpd="sng" algn="ctr" cap="flat" w="9525">
-                      <a:solidFill>
-                        <a:srgbClr val="D9D9D9"/>
+                    <a:lnL cmpd="sng" algn="ctr" cap="flat" w="38100">
+                      <a:solidFill>
+                        <a:srgbClr val="000000"/>
                       </a:solidFill>
                       <a:prstDash val="solid"/>
                       <a:round/>
                       <a:headEnd type="none" w="med" len="med"/>
                       <a:tailEnd type="none" w="med" len="med"/>
                     </a:lnL>
-                    <a:lnR cmpd="sng" algn="ctr" cap="flat" w="9525">
-                      <a:solidFill>
-                        <a:srgbClr val="D9D9D9"/>
+                    <a:lnR cmpd="sng" algn="ctr" cap="flat" w="38100">
+                      <a:solidFill>
+                        <a:srgbClr val="000000"/>
                       </a:solidFill>
                       <a:prstDash val="solid"/>
                       <a:round/>
                       <a:headEnd type="none" w="med" len="med"/>
                       <a:tailEnd type="none" w="med" len="med"/>
                     </a:lnR>
-                    <a:lnT cmpd="sng" algn="ctr" cap="flat" w="9525">
-                      <a:solidFill>
-                        <a:srgbClr val="D9D9D9"/>
+                    <a:lnT cmpd="sng" algn="ctr" cap="flat" w="38100">
+                      <a:solidFill>
+                        <a:srgbClr val="000000"/>
                       </a:solidFill>
                       <a:prstDash val="solid"/>
                       <a:round/>
                       <a:headEnd type="none" w="med" len="med"/>
                       <a:tailEnd type="none" w="med" len="med"/>
                     </a:lnT>
-                    <a:lnB cmpd="sng" algn="ctr" cap="flat" w="9525">
-                      <a:solidFill>
-                        <a:srgbClr val="D9D9D9"/>
+                    <a:lnB cmpd="sng" algn="ctr" cap="flat" w="38100">
+                      <a:solidFill>
+                        <a:srgbClr val="000000"/>
                       </a:solidFill>
                       <a:prstDash val="solid"/>
                       <a:round/>
@@ -12719,36 +12719,36 @@
                     </a:p>
                   </a:txBody>
                   <a:tcPr marL="76200" marR="76200" marT="76200" marB="76200" anchor="ctr">
-                    <a:lnL cmpd="sng" algn="ctr" cap="flat" w="9525">
-                      <a:solidFill>
-                        <a:srgbClr val="D9D9D9"/>
+                    <a:lnL cmpd="sng" algn="ctr" cap="flat" w="38100">
+                      <a:solidFill>
+                        <a:srgbClr val="000000"/>
                       </a:solidFill>
                       <a:prstDash val="solid"/>
                       <a:round/>
                       <a:headEnd type="none" w="med" len="med"/>
                       <a:tailEnd type="none" w="med" len="med"/>
                     </a:lnL>
-                    <a:lnR cmpd="sng" algn="ctr" cap="flat" w="9525">
-                      <a:solidFill>
-                        <a:srgbClr val="D9D9D9"/>
+                    <a:lnR cmpd="sng" algn="ctr" cap="flat" w="38100">
+                      <a:solidFill>
+                        <a:srgbClr val="000000"/>
                       </a:solidFill>
                       <a:prstDash val="solid"/>
                       <a:round/>
                       <a:headEnd type="none" w="med" len="med"/>
                       <a:tailEnd type="none" w="med" len="med"/>
                     </a:lnR>
-                    <a:lnT cmpd="sng" algn="ctr" cap="flat" w="9525">
-                      <a:solidFill>
-                        <a:srgbClr val="D9D9D9"/>
+                    <a:lnT cmpd="sng" algn="ctr" cap="flat" w="38100">
+                      <a:solidFill>
+                        <a:srgbClr val="000000"/>
                       </a:solidFill>
                       <a:prstDash val="solid"/>
                       <a:round/>
                       <a:headEnd type="none" w="med" len="med"/>
                       <a:tailEnd type="none" w="med" len="med"/>
                     </a:lnT>
-                    <a:lnB cmpd="sng" algn="ctr" cap="flat" w="9525">
-                      <a:solidFill>
-                        <a:srgbClr val="D9D9D9"/>
+                    <a:lnB cmpd="sng" algn="ctr" cap="flat" w="38100">
+                      <a:solidFill>
+                        <a:srgbClr val="000000"/>
                       </a:solidFill>
                       <a:prstDash val="solid"/>
                       <a:round/>
@@ -12790,36 +12790,36 @@
                     </a:p>
                   </a:txBody>
                   <a:tcPr marL="76200" marR="76200" marT="76200" marB="76200" anchor="ctr">
-                    <a:lnL cmpd="sng" algn="ctr" cap="flat" w="9525">
-                      <a:solidFill>
-                        <a:srgbClr val="D9D9D9"/>
+                    <a:lnL cmpd="sng" algn="ctr" cap="flat" w="38100">
+                      <a:solidFill>
+                        <a:srgbClr val="000000"/>
                       </a:solidFill>
                       <a:prstDash val="solid"/>
                       <a:round/>
                       <a:headEnd type="none" w="med" len="med"/>
                       <a:tailEnd type="none" w="med" len="med"/>
                     </a:lnL>
-                    <a:lnR cmpd="sng" algn="ctr" cap="flat" w="9525">
-                      <a:solidFill>
-                        <a:srgbClr val="D9D9D9"/>
+                    <a:lnR cmpd="sng" algn="ctr" cap="flat" w="38100">
+                      <a:solidFill>
+                        <a:srgbClr val="000000"/>
                       </a:solidFill>
                       <a:prstDash val="solid"/>
                       <a:round/>
                       <a:headEnd type="none" w="med" len="med"/>
                       <a:tailEnd type="none" w="med" len="med"/>
                     </a:lnR>
-                    <a:lnT cmpd="sng" algn="ctr" cap="flat" w="9525">
-                      <a:solidFill>
-                        <a:srgbClr val="D9D9D9"/>
+                    <a:lnT cmpd="sng" algn="ctr" cap="flat" w="38100">
+                      <a:solidFill>
+                        <a:srgbClr val="000000"/>
                       </a:solidFill>
                       <a:prstDash val="solid"/>
                       <a:round/>
                       <a:headEnd type="none" w="med" len="med"/>
                       <a:tailEnd type="none" w="med" len="med"/>
                     </a:lnT>
-                    <a:lnB cmpd="sng" algn="ctr" cap="flat" w="9525">
-                      <a:solidFill>
-                        <a:srgbClr val="D9D9D9"/>
+                    <a:lnB cmpd="sng" algn="ctr" cap="flat" w="38100">
+                      <a:solidFill>
+                        <a:srgbClr val="000000"/>
                       </a:solidFill>
                       <a:prstDash val="solid"/>
                       <a:round/>
@@ -15354,7 +15354,7 @@
                 <a:cs typeface="Red Hat Display Bold"/>
                 <a:sym typeface="Red Hat Display Bold"/>
               </a:rPr>
-              <a:t>Đánh giá hiệu suất mô hình </a:t>
+              <a:t>So sánh các mô hình </a:t>
             </a:r>
           </a:p>
         </p:txBody>
@@ -15677,627 +15677,6 @@
 </file>
 
 <file path=ppt/slides/slide17.xml><?xml version="1.0" encoding="utf-8"?>
-<p:sld xmlns:p="http://schemas.openxmlformats.org/presentationml/2006/main" xmlns:a="http://schemas.openxmlformats.org/drawingml/2006/main" xmlns:r="http://schemas.openxmlformats.org/officeDocument/2006/relationships">
-  <p:cSld>
-    <p:bg>
-      <p:bgPr>
-        <a:solidFill>
-          <a:srgbClr val="FBFCFE"/>
-        </a:solidFill>
-      </p:bgPr>
-    </p:bg>
-    <p:spTree>
-      <p:nvGrpSpPr>
-        <p:cNvPr id="1" name=""/>
-        <p:cNvGrpSpPr/>
-        <p:nvPr/>
-      </p:nvGrpSpPr>
-      <p:grpSpPr>
-        <a:xfrm>
-          <a:off x="0" y="0"/>
-          <a:ext cx="0" cy="0"/>
-          <a:chOff x="0" y="0"/>
-          <a:chExt cx="0" cy="0"/>
-        </a:xfrm>
-      </p:grpSpPr>
-      <p:grpSp>
-        <p:nvGrpSpPr>
-          <p:cNvPr name="Group 2" id="2"/>
-          <p:cNvGrpSpPr/>
-          <p:nvPr/>
-        </p:nvGrpSpPr>
-        <p:grpSpPr>
-          <a:xfrm rot="0">
-            <a:off x="1064565" y="3271849"/>
-            <a:ext cx="1029499" cy="1029499"/>
-            <a:chOff x="0" y="0"/>
-            <a:chExt cx="812800" cy="812800"/>
-          </a:xfrm>
-        </p:grpSpPr>
-        <p:sp>
-          <p:nvSpPr>
-            <p:cNvPr name="Freeform 3" id="3"/>
-            <p:cNvSpPr/>
-            <p:nvPr/>
-          </p:nvSpPr>
-          <p:spPr>
-            <a:xfrm flipH="false" flipV="false" rot="0">
-              <a:off x="0" y="0"/>
-              <a:ext cx="812800" cy="812800"/>
-            </a:xfrm>
-            <a:custGeom>
-              <a:avLst/>
-              <a:gdLst/>
-              <a:ahLst/>
-              <a:cxnLst/>
-              <a:rect r="r" b="b" t="t" l="l"/>
-              <a:pathLst>
-                <a:path h="812800" w="812800">
-                  <a:moveTo>
-                    <a:pt x="406400" y="0"/>
-                  </a:moveTo>
-                  <a:cubicBezTo>
-                    <a:pt x="181951" y="0"/>
-                    <a:pt x="0" y="181951"/>
-                    <a:pt x="0" y="406400"/>
-                  </a:cubicBezTo>
-                  <a:cubicBezTo>
-                    <a:pt x="0" y="630849"/>
-                    <a:pt x="181951" y="812800"/>
-                    <a:pt x="406400" y="812800"/>
-                  </a:cubicBezTo>
-                  <a:cubicBezTo>
-                    <a:pt x="630849" y="812800"/>
-                    <a:pt x="812800" y="630849"/>
-                    <a:pt x="812800" y="406400"/>
-                  </a:cubicBezTo>
-                  <a:cubicBezTo>
-                    <a:pt x="812800" y="181951"/>
-                    <a:pt x="630849" y="0"/>
-                    <a:pt x="406400" y="0"/>
-                  </a:cubicBezTo>
-                  <a:close/>
-                </a:path>
-              </a:pathLst>
-            </a:custGeom>
-            <a:solidFill>
-              <a:srgbClr val="FFFFFF"/>
-            </a:solidFill>
-          </p:spPr>
-        </p:sp>
-        <p:sp>
-          <p:nvSpPr>
-            <p:cNvPr name="TextBox 4" id="4"/>
-            <p:cNvSpPr txBox="true"/>
-            <p:nvPr/>
-          </p:nvSpPr>
-          <p:spPr>
-            <a:xfrm>
-              <a:off x="76200" y="28575"/>
-              <a:ext cx="660400" cy="708025"/>
-            </a:xfrm>
-            <a:prstGeom prst="rect">
-              <a:avLst/>
-            </a:prstGeom>
-          </p:spPr>
-          <p:txBody>
-            <a:bodyPr anchor="ctr" rtlCol="false" tIns="50800" lIns="50800" bIns="50800" rIns="50800"/>
-            <a:lstStyle/>
-            <a:p>
-              <a:pPr algn="ctr">
-                <a:lnSpc>
-                  <a:spcPts val="3032"/>
-                </a:lnSpc>
-              </a:pPr>
-            </a:p>
-          </p:txBody>
-        </p:sp>
-      </p:grpSp>
-      <p:sp>
-        <p:nvSpPr>
-          <p:cNvPr name="TextBox 5" id="5"/>
-          <p:cNvSpPr txBox="true"/>
-          <p:nvPr/>
-        </p:nvSpPr>
-        <p:spPr>
-          <a:xfrm rot="0">
-            <a:off x="3059638" y="332856"/>
-            <a:ext cx="12168724" cy="781685"/>
-          </a:xfrm>
-          <a:prstGeom prst="rect">
-            <a:avLst/>
-          </a:prstGeom>
-        </p:spPr>
-        <p:txBody>
-          <a:bodyPr anchor="t" rtlCol="false" tIns="0" lIns="0" bIns="0" rIns="0">
-            <a:spAutoFit/>
-          </a:bodyPr>
-          <a:lstStyle/>
-          <a:p>
-            <a:pPr algn="ctr">
-              <a:lnSpc>
-                <a:spcPts val="6220"/>
-              </a:lnSpc>
-            </a:pPr>
-            <a:r>
-              <a:rPr lang="en-US" b="true" sz="5000">
-                <a:solidFill>
-                  <a:srgbClr val="2D2261"/>
-                </a:solidFill>
-                <a:latin typeface="Red Hat Display Bold"/>
-                <a:ea typeface="Red Hat Display Bold"/>
-                <a:cs typeface="Red Hat Display Bold"/>
-                <a:sym typeface="Red Hat Display Bold"/>
-              </a:rPr>
-              <a:t>Hạn chế và hướng phát triển</a:t>
-            </a:r>
-          </a:p>
-        </p:txBody>
-      </p:sp>
-      <p:sp>
-        <p:nvSpPr>
-          <p:cNvPr name="Freeform 6" id="6"/>
-          <p:cNvSpPr/>
-          <p:nvPr/>
-        </p:nvSpPr>
-        <p:spPr>
-          <a:xfrm flipH="false" flipV="false" rot="1026841">
-            <a:off x="15466248" y="-1931974"/>
-            <a:ext cx="6727323" cy="4586811"/>
-          </a:xfrm>
-          <a:custGeom>
-            <a:avLst/>
-            <a:gdLst/>
-            <a:ahLst/>
-            <a:cxnLst/>
-            <a:rect r="r" b="b" t="t" l="l"/>
-            <a:pathLst>
-              <a:path h="4586811" w="6727323">
-                <a:moveTo>
-                  <a:pt x="0" y="0"/>
-                </a:moveTo>
-                <a:lnTo>
-                  <a:pt x="6727323" y="0"/>
-                </a:lnTo>
-                <a:lnTo>
-                  <a:pt x="6727323" y="4586811"/>
-                </a:lnTo>
-                <a:lnTo>
-                  <a:pt x="0" y="4586811"/>
-                </a:lnTo>
-                <a:lnTo>
-                  <a:pt x="0" y="0"/>
-                </a:lnTo>
-                <a:close/>
-              </a:path>
-            </a:pathLst>
-          </a:custGeom>
-          <a:blipFill>
-            <a:blip r:embed="rId2">
-              <a:alphaModFix amt="50000"/>
-              <a:extLst>
-                <a:ext uri="{96DAC541-7B7A-43D3-8B79-37D633B846F1}">
-                  <asvg:svgBlip xmlns:asvg="http://schemas.microsoft.com/office/drawing/2016/SVG/main" r:embed="rId3"/>
-                </a:ext>
-              </a:extLst>
-            </a:blip>
-            <a:stretch>
-              <a:fillRect l="0" t="0" r="0" b="0"/>
-            </a:stretch>
-          </a:blipFill>
-        </p:spPr>
-      </p:sp>
-      <p:sp>
-        <p:nvSpPr>
-          <p:cNvPr name="Freeform 7" id="7"/>
-          <p:cNvSpPr/>
-          <p:nvPr/>
-        </p:nvSpPr>
-        <p:spPr>
-          <a:xfrm flipH="false" flipV="false" rot="635325">
-            <a:off x="-1442576" y="8071855"/>
-            <a:ext cx="7907020" cy="6699403"/>
-          </a:xfrm>
-          <a:custGeom>
-            <a:avLst/>
-            <a:gdLst/>
-            <a:ahLst/>
-            <a:cxnLst/>
-            <a:rect r="r" b="b" t="t" l="l"/>
-            <a:pathLst>
-              <a:path h="6699403" w="7907020">
-                <a:moveTo>
-                  <a:pt x="0" y="0"/>
-                </a:moveTo>
-                <a:lnTo>
-                  <a:pt x="7907020" y="0"/>
-                </a:lnTo>
-                <a:lnTo>
-                  <a:pt x="7907020" y="6699403"/>
-                </a:lnTo>
-                <a:lnTo>
-                  <a:pt x="0" y="6699403"/>
-                </a:lnTo>
-                <a:lnTo>
-                  <a:pt x="0" y="0"/>
-                </a:lnTo>
-                <a:close/>
-              </a:path>
-            </a:pathLst>
-          </a:custGeom>
-          <a:blipFill>
-            <a:blip r:embed="rId4">
-              <a:alphaModFix amt="50000"/>
-              <a:extLst>
-                <a:ext uri="{96DAC541-7B7A-43D3-8B79-37D633B846F1}">
-                  <asvg:svgBlip xmlns:asvg="http://schemas.microsoft.com/office/drawing/2016/SVG/main" r:embed="rId5"/>
-                </a:ext>
-              </a:extLst>
-            </a:blip>
-            <a:stretch>
-              <a:fillRect l="0" t="0" r="0" b="0"/>
-            </a:stretch>
-          </a:blipFill>
-        </p:spPr>
-      </p:sp>
-      <p:sp>
-        <p:nvSpPr>
-          <p:cNvPr name="Freeform 8" id="8"/>
-          <p:cNvSpPr/>
-          <p:nvPr/>
-        </p:nvSpPr>
-        <p:spPr>
-          <a:xfrm flipH="false" flipV="false" rot="-226878">
-            <a:off x="-1669960" y="-642345"/>
-            <a:ext cx="4576141" cy="2579280"/>
-          </a:xfrm>
-          <a:custGeom>
-            <a:avLst/>
-            <a:gdLst/>
-            <a:ahLst/>
-            <a:cxnLst/>
-            <a:rect r="r" b="b" t="t" l="l"/>
-            <a:pathLst>
-              <a:path h="2579280" w="4576141">
-                <a:moveTo>
-                  <a:pt x="0" y="0"/>
-                </a:moveTo>
-                <a:lnTo>
-                  <a:pt x="4576142" y="0"/>
-                </a:lnTo>
-                <a:lnTo>
-                  <a:pt x="4576142" y="2579280"/>
-                </a:lnTo>
-                <a:lnTo>
-                  <a:pt x="0" y="2579280"/>
-                </a:lnTo>
-                <a:lnTo>
-                  <a:pt x="0" y="0"/>
-                </a:lnTo>
-                <a:close/>
-              </a:path>
-            </a:pathLst>
-          </a:custGeom>
-          <a:blipFill>
-            <a:blip r:embed="rId6">
-              <a:extLst>
-                <a:ext uri="{96DAC541-7B7A-43D3-8B79-37D633B846F1}">
-                  <asvg:svgBlip xmlns:asvg="http://schemas.microsoft.com/office/drawing/2016/SVG/main" r:embed="rId7"/>
-                </a:ext>
-              </a:extLst>
-            </a:blip>
-            <a:stretch>
-              <a:fillRect l="0" t="0" r="0" b="0"/>
-            </a:stretch>
-          </a:blipFill>
-        </p:spPr>
-      </p:sp>
-      <p:sp>
-        <p:nvSpPr>
-          <p:cNvPr name="Freeform 9" id="9"/>
-          <p:cNvSpPr/>
-          <p:nvPr/>
-        </p:nvSpPr>
-        <p:spPr>
-          <a:xfrm flipH="false" flipV="false" rot="2830696">
-            <a:off x="14939466" y="8144946"/>
-            <a:ext cx="2835471" cy="4114800"/>
-          </a:xfrm>
-          <a:custGeom>
-            <a:avLst/>
-            <a:gdLst/>
-            <a:ahLst/>
-            <a:cxnLst/>
-            <a:rect r="r" b="b" t="t" l="l"/>
-            <a:pathLst>
-              <a:path h="4114800" w="2835471">
-                <a:moveTo>
-                  <a:pt x="0" y="0"/>
-                </a:moveTo>
-                <a:lnTo>
-                  <a:pt x="2835471" y="0"/>
-                </a:lnTo>
-                <a:lnTo>
-                  <a:pt x="2835471" y="4114800"/>
-                </a:lnTo>
-                <a:lnTo>
-                  <a:pt x="0" y="4114800"/>
-                </a:lnTo>
-                <a:lnTo>
-                  <a:pt x="0" y="0"/>
-                </a:lnTo>
-                <a:close/>
-              </a:path>
-            </a:pathLst>
-          </a:custGeom>
-          <a:blipFill>
-            <a:blip r:embed="rId8">
-              <a:extLst>
-                <a:ext uri="{96DAC541-7B7A-43D3-8B79-37D633B846F1}">
-                  <asvg:svgBlip xmlns:asvg="http://schemas.microsoft.com/office/drawing/2016/SVG/main" r:embed="rId9"/>
-                </a:ext>
-              </a:extLst>
-            </a:blip>
-            <a:stretch>
-              <a:fillRect l="0" t="0" r="0" b="0"/>
-            </a:stretch>
-          </a:blipFill>
-        </p:spPr>
-      </p:sp>
-      <p:sp>
-        <p:nvSpPr>
-          <p:cNvPr name="TextBox 10" id="10"/>
-          <p:cNvSpPr txBox="true"/>
-          <p:nvPr/>
-        </p:nvSpPr>
-        <p:spPr>
-          <a:xfrm rot="0">
-            <a:off x="1028700" y="2008822"/>
-            <a:ext cx="16230600" cy="4452096"/>
-          </a:xfrm>
-          <a:prstGeom prst="rect">
-            <a:avLst/>
-          </a:prstGeom>
-        </p:spPr>
-        <p:txBody>
-          <a:bodyPr anchor="t" rtlCol="false" tIns="0" lIns="0" bIns="0" rIns="0">
-            <a:spAutoFit/>
-          </a:bodyPr>
-          <a:lstStyle/>
-          <a:p>
-            <a:pPr algn="l">
-              <a:lnSpc>
-                <a:spcPts val="5033"/>
-              </a:lnSpc>
-            </a:pPr>
-            <a:r>
-              <a:rPr lang="en-US" sz="3595" b="true">
-                <a:solidFill>
-                  <a:srgbClr val="2D2261"/>
-                </a:solidFill>
-                <a:latin typeface="Roboto Slab Bold"/>
-                <a:ea typeface="Roboto Slab Bold"/>
-                <a:cs typeface="Roboto Slab Bold"/>
-                <a:sym typeface="Roboto Slab Bold"/>
-              </a:rPr>
-              <a:t>Hạn chế:</a:t>
-            </a:r>
-          </a:p>
-          <a:p>
-            <a:pPr algn="l" marL="776294" indent="-388147" lvl="1">
-              <a:lnSpc>
-                <a:spcPts val="5033"/>
-              </a:lnSpc>
-              <a:buFont typeface="Arial"/>
-              <a:buChar char="•"/>
-            </a:pPr>
-            <a:r>
-              <a:rPr lang="en-US" sz="3595">
-                <a:solidFill>
-                  <a:srgbClr val="2D2261"/>
-                </a:solidFill>
-                <a:latin typeface="Roboto Slab"/>
-                <a:ea typeface="Roboto Slab"/>
-                <a:cs typeface="Roboto Slab"/>
-                <a:sym typeface="Roboto Slab"/>
-              </a:rPr>
-              <a:t>Holdout ngắn (30 phiên); holdout và rolling-CV chưa đồng nhất.</a:t>
-            </a:r>
-          </a:p>
-          <a:p>
-            <a:pPr algn="l" marL="776294" indent="-388147" lvl="1">
-              <a:lnSpc>
-                <a:spcPts val="5033"/>
-              </a:lnSpc>
-              <a:buFont typeface="Arial"/>
-              <a:buChar char="•"/>
-            </a:pPr>
-            <a:r>
-              <a:rPr lang="en-US" sz="3595">
-                <a:solidFill>
-                  <a:srgbClr val="2D2261"/>
-                </a:solidFill>
-                <a:latin typeface="Roboto Slab"/>
-                <a:ea typeface="Roboto Slab"/>
-                <a:cs typeface="Roboto Slab"/>
-                <a:sym typeface="Roboto Slab"/>
-              </a:rPr>
-              <a:t>ARIMAX/SARIMA chưa có CV cùng cove</a:t>
-            </a:r>
-            <a:r>
-              <a:rPr lang="en-US" sz="3595">
-                <a:solidFill>
-                  <a:srgbClr val="2D2261"/>
-                </a:solidFill>
-                <a:latin typeface="Roboto Slab"/>
-                <a:ea typeface="Roboto Slab"/>
-                <a:cs typeface="Roboto Slab"/>
-                <a:sym typeface="Roboto Slab"/>
-              </a:rPr>
-              <a:t>rage để so sánh công bằng.</a:t>
-            </a:r>
-          </a:p>
-          <a:p>
-            <a:pPr algn="l" marL="776294" indent="-388147" lvl="1">
-              <a:lnSpc>
-                <a:spcPts val="5033"/>
-              </a:lnSpc>
-              <a:buFont typeface="Arial"/>
-              <a:buChar char="•"/>
-            </a:pPr>
-            <a:r>
-              <a:rPr lang="en-US" sz="3595">
-                <a:solidFill>
-                  <a:srgbClr val="2D2261"/>
-                </a:solidFill>
-                <a:latin typeface="Roboto Slab"/>
-                <a:ea typeface="Roboto Slab"/>
-                <a:cs typeface="Roboto Slab"/>
-                <a:sym typeface="Roboto Slab"/>
-              </a:rPr>
-              <a:t>3/4 GARCH không đạt Nyblom joint stability; Pearson GOF bác bỏ ở cả 4.</a:t>
-            </a:r>
-          </a:p>
-          <a:p>
-            <a:pPr algn="l" marL="776294" indent="-388147" lvl="1">
-              <a:lnSpc>
-                <a:spcPts val="5033"/>
-              </a:lnSpc>
-              <a:buFont typeface="Arial"/>
-              <a:buChar char="•"/>
-            </a:pPr>
-            <a:r>
-              <a:rPr lang="en-US" sz="3595">
-                <a:solidFill>
-                  <a:srgbClr val="2D2261"/>
-                </a:solidFill>
-                <a:latin typeface="Roboto Slab"/>
-                <a:ea typeface="Roboto Slab"/>
-                <a:cs typeface="Roboto Slab"/>
-                <a:sym typeface="Roboto Slab"/>
-              </a:rPr>
-              <a:t>Chưa đánh giá volatility forecast ngoài mẫu (VaR backtest).</a:t>
-            </a:r>
-          </a:p>
-          <a:p>
-            <a:pPr algn="l" marL="776294" indent="-388147" lvl="1">
-              <a:lnSpc>
-                <a:spcPts val="5033"/>
-              </a:lnSpc>
-              <a:buFont typeface="Arial"/>
-              <a:buChar char="•"/>
-            </a:pPr>
-            <a:r>
-              <a:rPr lang="en-US" b="true" sz="3595">
-                <a:solidFill>
-                  <a:srgbClr val="2D2261"/>
-                </a:solidFill>
-                <a:latin typeface="Roboto Slab Bold"/>
-                <a:ea typeface="Roboto Slab Bold"/>
-                <a:cs typeface="Roboto Slab Bold"/>
-                <a:sym typeface="Roboto Slab Bold"/>
-              </a:rPr>
-              <a:t>Kết quả phục vụ học thuật, không phải khuyến nghị đầu tư.</a:t>
-            </a:r>
-          </a:p>
-        </p:txBody>
-      </p:sp>
-      <p:sp>
-        <p:nvSpPr>
-          <p:cNvPr name="TextBox 11" id="11"/>
-          <p:cNvSpPr txBox="true"/>
-          <p:nvPr/>
-        </p:nvSpPr>
-        <p:spPr>
-          <a:xfrm rot="0">
-            <a:off x="1028700" y="6709894"/>
-            <a:ext cx="16230600" cy="2537460"/>
-          </a:xfrm>
-          <a:prstGeom prst="rect">
-            <a:avLst/>
-          </a:prstGeom>
-        </p:spPr>
-        <p:txBody>
-          <a:bodyPr anchor="t" rtlCol="false" tIns="0" lIns="0" bIns="0" rIns="0">
-            <a:spAutoFit/>
-          </a:bodyPr>
-          <a:lstStyle/>
-          <a:p>
-            <a:pPr algn="l">
-              <a:lnSpc>
-                <a:spcPts val="5040"/>
-              </a:lnSpc>
-            </a:pPr>
-            <a:r>
-              <a:rPr lang="en-US" sz="3600">
-                <a:solidFill>
-                  <a:srgbClr val="2D2261"/>
-                </a:solidFill>
-                <a:latin typeface="Roboto Slab"/>
-                <a:ea typeface="Roboto Slab"/>
-                <a:cs typeface="Roboto Slab"/>
-                <a:sym typeface="Roboto Slab"/>
-              </a:rPr>
-              <a:t>Kết quả hiện tại đủ để mô tả conditional volatility trong mẫu nhưng chưa đủ cho một hệ thống quản trị rủi ro thực tế. </a:t>
-            </a:r>
-          </a:p>
-          <a:p>
-            <a:pPr algn="l">
-              <a:lnSpc>
-                <a:spcPts val="5040"/>
-              </a:lnSpc>
-              <a:spcBef>
-                <a:spcPct val="0"/>
-              </a:spcBef>
-            </a:pPr>
-            <a:r>
-              <a:rPr lang="en-US" b="true" sz="3600">
-                <a:solidFill>
-                  <a:srgbClr val="2D2261"/>
-                </a:solidFill>
-                <a:latin typeface="Roboto Slab Bold"/>
-                <a:ea typeface="Roboto Slab Bold"/>
-                <a:cs typeface="Roboto Slab Bold"/>
-                <a:sym typeface="Roboto Slab Bold"/>
-              </a:rPr>
-              <a:t>Hướng phát t</a:t>
-            </a:r>
-            <a:r>
-              <a:rPr lang="en-US" b="true" sz="3600">
-                <a:solidFill>
-                  <a:srgbClr val="2D2261"/>
-                </a:solidFill>
-                <a:latin typeface="Roboto Slab Bold"/>
-                <a:ea typeface="Roboto Slab Bold"/>
-                <a:cs typeface="Roboto Slab Bold"/>
-                <a:sym typeface="Roboto Slab Bold"/>
-              </a:rPr>
-              <a:t>riển </a:t>
-            </a:r>
-            <a:r>
-              <a:rPr lang="en-US" sz="3600">
-                <a:solidFill>
-                  <a:srgbClr val="2D2261"/>
-                </a:solidFill>
-                <a:latin typeface="Roboto Slab"/>
-                <a:ea typeface="Roboto Slab"/>
-                <a:cs typeface="Roboto Slab"/>
-                <a:sym typeface="Roboto Slab"/>
-              </a:rPr>
-              <a:t>tiếp theo là đánh giá Rolling CV cho tất cả models, VaR backtest, thử skewed-t/GED.</a:t>
-            </a:r>
-          </a:p>
-        </p:txBody>
-      </p:sp>
-    </p:spTree>
-  </p:cSld>
-  <p:clrMapOvr>
-    <a:masterClrMapping/>
-  </p:clrMapOvr>
-</p:sld>
-</file>
-
-<file path=ppt/slides/slide18.xml><?xml version="1.0" encoding="utf-8"?>
 <p:sld xmlns:p="http://schemas.openxmlformats.org/presentationml/2006/main" xmlns:a="http://schemas.openxmlformats.org/drawingml/2006/main" xmlns:r="http://schemas.openxmlformats.org/officeDocument/2006/relationships">
   <p:cSld>
     <p:bg>
@@ -16893,6 +16272,627 @@
 </p:sld>
 </file>
 
+<file path=ppt/slides/slide18.xml><?xml version="1.0" encoding="utf-8"?>
+<p:sld xmlns:p="http://schemas.openxmlformats.org/presentationml/2006/main" xmlns:a="http://schemas.openxmlformats.org/drawingml/2006/main" xmlns:r="http://schemas.openxmlformats.org/officeDocument/2006/relationships">
+  <p:cSld>
+    <p:bg>
+      <p:bgPr>
+        <a:solidFill>
+          <a:srgbClr val="FBFCFE"/>
+        </a:solidFill>
+      </p:bgPr>
+    </p:bg>
+    <p:spTree>
+      <p:nvGrpSpPr>
+        <p:cNvPr id="1" name=""/>
+        <p:cNvGrpSpPr/>
+        <p:nvPr/>
+      </p:nvGrpSpPr>
+      <p:grpSpPr>
+        <a:xfrm>
+          <a:off x="0" y="0"/>
+          <a:ext cx="0" cy="0"/>
+          <a:chOff x="0" y="0"/>
+          <a:chExt cx="0" cy="0"/>
+        </a:xfrm>
+      </p:grpSpPr>
+      <p:grpSp>
+        <p:nvGrpSpPr>
+          <p:cNvPr name="Group 2" id="2"/>
+          <p:cNvGrpSpPr/>
+          <p:nvPr/>
+        </p:nvGrpSpPr>
+        <p:grpSpPr>
+          <a:xfrm rot="0">
+            <a:off x="1064565" y="3271849"/>
+            <a:ext cx="1029499" cy="1029499"/>
+            <a:chOff x="0" y="0"/>
+            <a:chExt cx="812800" cy="812800"/>
+          </a:xfrm>
+        </p:grpSpPr>
+        <p:sp>
+          <p:nvSpPr>
+            <p:cNvPr name="Freeform 3" id="3"/>
+            <p:cNvSpPr/>
+            <p:nvPr/>
+          </p:nvSpPr>
+          <p:spPr>
+            <a:xfrm flipH="false" flipV="false" rot="0">
+              <a:off x="0" y="0"/>
+              <a:ext cx="812800" cy="812800"/>
+            </a:xfrm>
+            <a:custGeom>
+              <a:avLst/>
+              <a:gdLst/>
+              <a:ahLst/>
+              <a:cxnLst/>
+              <a:rect r="r" b="b" t="t" l="l"/>
+              <a:pathLst>
+                <a:path h="812800" w="812800">
+                  <a:moveTo>
+                    <a:pt x="406400" y="0"/>
+                  </a:moveTo>
+                  <a:cubicBezTo>
+                    <a:pt x="181951" y="0"/>
+                    <a:pt x="0" y="181951"/>
+                    <a:pt x="0" y="406400"/>
+                  </a:cubicBezTo>
+                  <a:cubicBezTo>
+                    <a:pt x="0" y="630849"/>
+                    <a:pt x="181951" y="812800"/>
+                    <a:pt x="406400" y="812800"/>
+                  </a:cubicBezTo>
+                  <a:cubicBezTo>
+                    <a:pt x="630849" y="812800"/>
+                    <a:pt x="812800" y="630849"/>
+                    <a:pt x="812800" y="406400"/>
+                  </a:cubicBezTo>
+                  <a:cubicBezTo>
+                    <a:pt x="812800" y="181951"/>
+                    <a:pt x="630849" y="0"/>
+                    <a:pt x="406400" y="0"/>
+                  </a:cubicBezTo>
+                  <a:close/>
+                </a:path>
+              </a:pathLst>
+            </a:custGeom>
+            <a:solidFill>
+              <a:srgbClr val="FFFFFF"/>
+            </a:solidFill>
+          </p:spPr>
+        </p:sp>
+        <p:sp>
+          <p:nvSpPr>
+            <p:cNvPr name="TextBox 4" id="4"/>
+            <p:cNvSpPr txBox="true"/>
+            <p:nvPr/>
+          </p:nvSpPr>
+          <p:spPr>
+            <a:xfrm>
+              <a:off x="76200" y="28575"/>
+              <a:ext cx="660400" cy="708025"/>
+            </a:xfrm>
+            <a:prstGeom prst="rect">
+              <a:avLst/>
+            </a:prstGeom>
+          </p:spPr>
+          <p:txBody>
+            <a:bodyPr anchor="ctr" rtlCol="false" tIns="50800" lIns="50800" bIns="50800" rIns="50800"/>
+            <a:lstStyle/>
+            <a:p>
+              <a:pPr algn="ctr">
+                <a:lnSpc>
+                  <a:spcPts val="3032"/>
+                </a:lnSpc>
+              </a:pPr>
+            </a:p>
+          </p:txBody>
+        </p:sp>
+      </p:grpSp>
+      <p:sp>
+        <p:nvSpPr>
+          <p:cNvPr name="TextBox 5" id="5"/>
+          <p:cNvSpPr txBox="true"/>
+          <p:nvPr/>
+        </p:nvSpPr>
+        <p:spPr>
+          <a:xfrm rot="0">
+            <a:off x="3059638" y="332856"/>
+            <a:ext cx="12168724" cy="781685"/>
+          </a:xfrm>
+          <a:prstGeom prst="rect">
+            <a:avLst/>
+          </a:prstGeom>
+        </p:spPr>
+        <p:txBody>
+          <a:bodyPr anchor="t" rtlCol="false" tIns="0" lIns="0" bIns="0" rIns="0">
+            <a:spAutoFit/>
+          </a:bodyPr>
+          <a:lstStyle/>
+          <a:p>
+            <a:pPr algn="ctr">
+              <a:lnSpc>
+                <a:spcPts val="6220"/>
+              </a:lnSpc>
+            </a:pPr>
+            <a:r>
+              <a:rPr lang="en-US" b="true" sz="5000">
+                <a:solidFill>
+                  <a:srgbClr val="2D2261"/>
+                </a:solidFill>
+                <a:latin typeface="Red Hat Display Bold"/>
+                <a:ea typeface="Red Hat Display Bold"/>
+                <a:cs typeface="Red Hat Display Bold"/>
+                <a:sym typeface="Red Hat Display Bold"/>
+              </a:rPr>
+              <a:t>Hạn chế và hướng phát triển</a:t>
+            </a:r>
+          </a:p>
+        </p:txBody>
+      </p:sp>
+      <p:sp>
+        <p:nvSpPr>
+          <p:cNvPr name="Freeform 6" id="6"/>
+          <p:cNvSpPr/>
+          <p:nvPr/>
+        </p:nvSpPr>
+        <p:spPr>
+          <a:xfrm flipH="false" flipV="false" rot="1026841">
+            <a:off x="15466248" y="-1931974"/>
+            <a:ext cx="6727323" cy="4586811"/>
+          </a:xfrm>
+          <a:custGeom>
+            <a:avLst/>
+            <a:gdLst/>
+            <a:ahLst/>
+            <a:cxnLst/>
+            <a:rect r="r" b="b" t="t" l="l"/>
+            <a:pathLst>
+              <a:path h="4586811" w="6727323">
+                <a:moveTo>
+                  <a:pt x="0" y="0"/>
+                </a:moveTo>
+                <a:lnTo>
+                  <a:pt x="6727323" y="0"/>
+                </a:lnTo>
+                <a:lnTo>
+                  <a:pt x="6727323" y="4586811"/>
+                </a:lnTo>
+                <a:lnTo>
+                  <a:pt x="0" y="4586811"/>
+                </a:lnTo>
+                <a:lnTo>
+                  <a:pt x="0" y="0"/>
+                </a:lnTo>
+                <a:close/>
+              </a:path>
+            </a:pathLst>
+          </a:custGeom>
+          <a:blipFill>
+            <a:blip r:embed="rId2">
+              <a:alphaModFix amt="50000"/>
+              <a:extLst>
+                <a:ext uri="{96DAC541-7B7A-43D3-8B79-37D633B846F1}">
+                  <asvg:svgBlip xmlns:asvg="http://schemas.microsoft.com/office/drawing/2016/SVG/main" r:embed="rId3"/>
+                </a:ext>
+              </a:extLst>
+            </a:blip>
+            <a:stretch>
+              <a:fillRect l="0" t="0" r="0" b="0"/>
+            </a:stretch>
+          </a:blipFill>
+        </p:spPr>
+      </p:sp>
+      <p:sp>
+        <p:nvSpPr>
+          <p:cNvPr name="Freeform 7" id="7"/>
+          <p:cNvSpPr/>
+          <p:nvPr/>
+        </p:nvSpPr>
+        <p:spPr>
+          <a:xfrm flipH="false" flipV="false" rot="635325">
+            <a:off x="-1442576" y="8071855"/>
+            <a:ext cx="7907020" cy="6699403"/>
+          </a:xfrm>
+          <a:custGeom>
+            <a:avLst/>
+            <a:gdLst/>
+            <a:ahLst/>
+            <a:cxnLst/>
+            <a:rect r="r" b="b" t="t" l="l"/>
+            <a:pathLst>
+              <a:path h="6699403" w="7907020">
+                <a:moveTo>
+                  <a:pt x="0" y="0"/>
+                </a:moveTo>
+                <a:lnTo>
+                  <a:pt x="7907020" y="0"/>
+                </a:lnTo>
+                <a:lnTo>
+                  <a:pt x="7907020" y="6699403"/>
+                </a:lnTo>
+                <a:lnTo>
+                  <a:pt x="0" y="6699403"/>
+                </a:lnTo>
+                <a:lnTo>
+                  <a:pt x="0" y="0"/>
+                </a:lnTo>
+                <a:close/>
+              </a:path>
+            </a:pathLst>
+          </a:custGeom>
+          <a:blipFill>
+            <a:blip r:embed="rId4">
+              <a:alphaModFix amt="50000"/>
+              <a:extLst>
+                <a:ext uri="{96DAC541-7B7A-43D3-8B79-37D633B846F1}">
+                  <asvg:svgBlip xmlns:asvg="http://schemas.microsoft.com/office/drawing/2016/SVG/main" r:embed="rId5"/>
+                </a:ext>
+              </a:extLst>
+            </a:blip>
+            <a:stretch>
+              <a:fillRect l="0" t="0" r="0" b="0"/>
+            </a:stretch>
+          </a:blipFill>
+        </p:spPr>
+      </p:sp>
+      <p:sp>
+        <p:nvSpPr>
+          <p:cNvPr name="Freeform 8" id="8"/>
+          <p:cNvSpPr/>
+          <p:nvPr/>
+        </p:nvSpPr>
+        <p:spPr>
+          <a:xfrm flipH="false" flipV="false" rot="-226878">
+            <a:off x="-1669960" y="-642345"/>
+            <a:ext cx="4576141" cy="2579280"/>
+          </a:xfrm>
+          <a:custGeom>
+            <a:avLst/>
+            <a:gdLst/>
+            <a:ahLst/>
+            <a:cxnLst/>
+            <a:rect r="r" b="b" t="t" l="l"/>
+            <a:pathLst>
+              <a:path h="2579280" w="4576141">
+                <a:moveTo>
+                  <a:pt x="0" y="0"/>
+                </a:moveTo>
+                <a:lnTo>
+                  <a:pt x="4576142" y="0"/>
+                </a:lnTo>
+                <a:lnTo>
+                  <a:pt x="4576142" y="2579280"/>
+                </a:lnTo>
+                <a:lnTo>
+                  <a:pt x="0" y="2579280"/>
+                </a:lnTo>
+                <a:lnTo>
+                  <a:pt x="0" y="0"/>
+                </a:lnTo>
+                <a:close/>
+              </a:path>
+            </a:pathLst>
+          </a:custGeom>
+          <a:blipFill>
+            <a:blip r:embed="rId6">
+              <a:extLst>
+                <a:ext uri="{96DAC541-7B7A-43D3-8B79-37D633B846F1}">
+                  <asvg:svgBlip xmlns:asvg="http://schemas.microsoft.com/office/drawing/2016/SVG/main" r:embed="rId7"/>
+                </a:ext>
+              </a:extLst>
+            </a:blip>
+            <a:stretch>
+              <a:fillRect l="0" t="0" r="0" b="0"/>
+            </a:stretch>
+          </a:blipFill>
+        </p:spPr>
+      </p:sp>
+      <p:sp>
+        <p:nvSpPr>
+          <p:cNvPr name="Freeform 9" id="9"/>
+          <p:cNvSpPr/>
+          <p:nvPr/>
+        </p:nvSpPr>
+        <p:spPr>
+          <a:xfrm flipH="false" flipV="false" rot="2830696">
+            <a:off x="14939466" y="8144946"/>
+            <a:ext cx="2835471" cy="4114800"/>
+          </a:xfrm>
+          <a:custGeom>
+            <a:avLst/>
+            <a:gdLst/>
+            <a:ahLst/>
+            <a:cxnLst/>
+            <a:rect r="r" b="b" t="t" l="l"/>
+            <a:pathLst>
+              <a:path h="4114800" w="2835471">
+                <a:moveTo>
+                  <a:pt x="0" y="0"/>
+                </a:moveTo>
+                <a:lnTo>
+                  <a:pt x="2835471" y="0"/>
+                </a:lnTo>
+                <a:lnTo>
+                  <a:pt x="2835471" y="4114800"/>
+                </a:lnTo>
+                <a:lnTo>
+                  <a:pt x="0" y="4114800"/>
+                </a:lnTo>
+                <a:lnTo>
+                  <a:pt x="0" y="0"/>
+                </a:lnTo>
+                <a:close/>
+              </a:path>
+            </a:pathLst>
+          </a:custGeom>
+          <a:blipFill>
+            <a:blip r:embed="rId8">
+              <a:extLst>
+                <a:ext uri="{96DAC541-7B7A-43D3-8B79-37D633B846F1}">
+                  <asvg:svgBlip xmlns:asvg="http://schemas.microsoft.com/office/drawing/2016/SVG/main" r:embed="rId9"/>
+                </a:ext>
+              </a:extLst>
+            </a:blip>
+            <a:stretch>
+              <a:fillRect l="0" t="0" r="0" b="0"/>
+            </a:stretch>
+          </a:blipFill>
+        </p:spPr>
+      </p:sp>
+      <p:sp>
+        <p:nvSpPr>
+          <p:cNvPr name="TextBox 10" id="10"/>
+          <p:cNvSpPr txBox="true"/>
+          <p:nvPr/>
+        </p:nvSpPr>
+        <p:spPr>
+          <a:xfrm rot="0">
+            <a:off x="1028700" y="2008822"/>
+            <a:ext cx="16395004" cy="3813921"/>
+          </a:xfrm>
+          <a:prstGeom prst="rect">
+            <a:avLst/>
+          </a:prstGeom>
+        </p:spPr>
+        <p:txBody>
+          <a:bodyPr anchor="t" rtlCol="false" tIns="0" lIns="0" bIns="0" rIns="0">
+            <a:spAutoFit/>
+          </a:bodyPr>
+          <a:lstStyle/>
+          <a:p>
+            <a:pPr algn="l">
+              <a:lnSpc>
+                <a:spcPts val="5033"/>
+              </a:lnSpc>
+            </a:pPr>
+            <a:r>
+              <a:rPr lang="en-US" sz="3595" b="true">
+                <a:solidFill>
+                  <a:srgbClr val="2D2261"/>
+                </a:solidFill>
+                <a:latin typeface="Roboto Slab Bold"/>
+                <a:ea typeface="Roboto Slab Bold"/>
+                <a:cs typeface="Roboto Slab Bold"/>
+                <a:sym typeface="Roboto Slab Bold"/>
+              </a:rPr>
+              <a:t>Hạn chế:</a:t>
+            </a:r>
+          </a:p>
+          <a:p>
+            <a:pPr algn="l" marL="776294" indent="-388147" lvl="1">
+              <a:lnSpc>
+                <a:spcPts val="5033"/>
+              </a:lnSpc>
+              <a:buFont typeface="Arial"/>
+              <a:buChar char="•"/>
+            </a:pPr>
+            <a:r>
+              <a:rPr lang="en-US" sz="3595">
+                <a:solidFill>
+                  <a:srgbClr val="2D2261"/>
+                </a:solidFill>
+                <a:latin typeface="Roboto Slab"/>
+                <a:ea typeface="Roboto Slab"/>
+                <a:cs typeface="Roboto Slab"/>
+                <a:sym typeface="Roboto Slab"/>
+              </a:rPr>
+              <a:t>Holdout ngắn (30 phiên); holdout và rolling-CV chưa đồng nhất.</a:t>
+            </a:r>
+          </a:p>
+          <a:p>
+            <a:pPr algn="l" marL="776294" indent="-388147" lvl="1">
+              <a:lnSpc>
+                <a:spcPts val="5033"/>
+              </a:lnSpc>
+              <a:buFont typeface="Arial"/>
+              <a:buChar char="•"/>
+            </a:pPr>
+            <a:r>
+              <a:rPr lang="en-US" sz="3595">
+                <a:solidFill>
+                  <a:srgbClr val="2D2261"/>
+                </a:solidFill>
+                <a:latin typeface="Roboto Slab"/>
+                <a:ea typeface="Roboto Slab"/>
+                <a:cs typeface="Roboto Slab"/>
+                <a:sym typeface="Roboto Slab"/>
+              </a:rPr>
+              <a:t>ARIMAX/SARIMA chưa có CV cùng cove</a:t>
+            </a:r>
+            <a:r>
+              <a:rPr lang="en-US" sz="3595">
+                <a:solidFill>
+                  <a:srgbClr val="2D2261"/>
+                </a:solidFill>
+                <a:latin typeface="Roboto Slab"/>
+                <a:ea typeface="Roboto Slab"/>
+                <a:cs typeface="Roboto Slab"/>
+                <a:sym typeface="Roboto Slab"/>
+              </a:rPr>
+              <a:t>rage để so sánh công bằng.</a:t>
+            </a:r>
+          </a:p>
+          <a:p>
+            <a:pPr algn="l" marL="776294" indent="-388147" lvl="1">
+              <a:lnSpc>
+                <a:spcPts val="5033"/>
+              </a:lnSpc>
+              <a:buFont typeface="Arial"/>
+              <a:buChar char="•"/>
+            </a:pPr>
+            <a:r>
+              <a:rPr lang="en-US" sz="3595">
+                <a:solidFill>
+                  <a:srgbClr val="2D2261"/>
+                </a:solidFill>
+                <a:latin typeface="Roboto Slab"/>
+                <a:ea typeface="Roboto Slab"/>
+                <a:cs typeface="Roboto Slab"/>
+                <a:sym typeface="Roboto Slab"/>
+              </a:rPr>
+              <a:t>3/4 GARCH không đạt Nyblom joint stability; Pearson GOF bác bỏ ở cả 4.</a:t>
+            </a:r>
+          </a:p>
+          <a:p>
+            <a:pPr algn="l" marL="776294" indent="-388147" lvl="1">
+              <a:lnSpc>
+                <a:spcPts val="5033"/>
+              </a:lnSpc>
+              <a:buFont typeface="Arial"/>
+              <a:buChar char="•"/>
+            </a:pPr>
+            <a:r>
+              <a:rPr lang="en-US" sz="3595">
+                <a:solidFill>
+                  <a:srgbClr val="2D2261"/>
+                </a:solidFill>
+                <a:latin typeface="Roboto Slab"/>
+                <a:ea typeface="Roboto Slab"/>
+                <a:cs typeface="Roboto Slab"/>
+                <a:sym typeface="Roboto Slab"/>
+              </a:rPr>
+              <a:t>Chưa đánh giá volatility forecast ngoài mẫu (VaR backtest).</a:t>
+            </a:r>
+          </a:p>
+          <a:p>
+            <a:pPr algn="l" marL="776294" indent="-388147" lvl="1">
+              <a:lnSpc>
+                <a:spcPts val="5033"/>
+              </a:lnSpc>
+              <a:buFont typeface="Arial"/>
+              <a:buChar char="•"/>
+            </a:pPr>
+            <a:r>
+              <a:rPr lang="en-US" b="true" sz="3595">
+                <a:solidFill>
+                  <a:srgbClr val="2D2261"/>
+                </a:solidFill>
+                <a:latin typeface="Roboto Slab Bold"/>
+                <a:ea typeface="Roboto Slab Bold"/>
+                <a:cs typeface="Roboto Slab Bold"/>
+                <a:sym typeface="Roboto Slab Bold"/>
+              </a:rPr>
+              <a:t>Kết quả phục vụ học thuật, không phải khuyến nghị đầu tư.</a:t>
+            </a:r>
+          </a:p>
+        </p:txBody>
+      </p:sp>
+      <p:sp>
+        <p:nvSpPr>
+          <p:cNvPr name="TextBox 11" id="11"/>
+          <p:cNvSpPr txBox="true"/>
+          <p:nvPr/>
+        </p:nvSpPr>
+        <p:spPr>
+          <a:xfrm rot="0">
+            <a:off x="1028700" y="6709894"/>
+            <a:ext cx="16230600" cy="2537460"/>
+          </a:xfrm>
+          <a:prstGeom prst="rect">
+            <a:avLst/>
+          </a:prstGeom>
+        </p:spPr>
+        <p:txBody>
+          <a:bodyPr anchor="t" rtlCol="false" tIns="0" lIns="0" bIns="0" rIns="0">
+            <a:spAutoFit/>
+          </a:bodyPr>
+          <a:lstStyle/>
+          <a:p>
+            <a:pPr algn="l">
+              <a:lnSpc>
+                <a:spcPts val="5040"/>
+              </a:lnSpc>
+            </a:pPr>
+            <a:r>
+              <a:rPr lang="en-US" sz="3600">
+                <a:solidFill>
+                  <a:srgbClr val="2D2261"/>
+                </a:solidFill>
+                <a:latin typeface="Roboto Slab"/>
+                <a:ea typeface="Roboto Slab"/>
+                <a:cs typeface="Roboto Slab"/>
+                <a:sym typeface="Roboto Slab"/>
+              </a:rPr>
+              <a:t>Kết quả hiện tại đủ để mô tả conditional volatility trong mẫu nhưng chưa đủ cho một hệ thống quản trị rủi ro thực tế. </a:t>
+            </a:r>
+          </a:p>
+          <a:p>
+            <a:pPr algn="l">
+              <a:lnSpc>
+                <a:spcPts val="5040"/>
+              </a:lnSpc>
+              <a:spcBef>
+                <a:spcPct val="0"/>
+              </a:spcBef>
+            </a:pPr>
+            <a:r>
+              <a:rPr lang="en-US" b="true" sz="3600">
+                <a:solidFill>
+                  <a:srgbClr val="2D2261"/>
+                </a:solidFill>
+                <a:latin typeface="Roboto Slab Bold"/>
+                <a:ea typeface="Roboto Slab Bold"/>
+                <a:cs typeface="Roboto Slab Bold"/>
+                <a:sym typeface="Roboto Slab Bold"/>
+              </a:rPr>
+              <a:t>Hướng phát t</a:t>
+            </a:r>
+            <a:r>
+              <a:rPr lang="en-US" b="true" sz="3600">
+                <a:solidFill>
+                  <a:srgbClr val="2D2261"/>
+                </a:solidFill>
+                <a:latin typeface="Roboto Slab Bold"/>
+                <a:ea typeface="Roboto Slab Bold"/>
+                <a:cs typeface="Roboto Slab Bold"/>
+                <a:sym typeface="Roboto Slab Bold"/>
+              </a:rPr>
+              <a:t>riển </a:t>
+            </a:r>
+            <a:r>
+              <a:rPr lang="en-US" sz="3600">
+                <a:solidFill>
+                  <a:srgbClr val="2D2261"/>
+                </a:solidFill>
+                <a:latin typeface="Roboto Slab"/>
+                <a:ea typeface="Roboto Slab"/>
+                <a:cs typeface="Roboto Slab"/>
+                <a:sym typeface="Roboto Slab"/>
+              </a:rPr>
+              <a:t>tiếp theo là đánh giá Rolling CV cho tất cả models, VaR backtest, thử skewed-t/GED.</a:t>
+            </a:r>
+          </a:p>
+        </p:txBody>
+      </p:sp>
+    </p:spTree>
+  </p:cSld>
+  <p:clrMapOvr>
+    <a:masterClrMapping/>
+  </p:clrMapOvr>
+</p:sld>
+</file>
+
 <file path=ppt/slides/slide19.xml><?xml version="1.0" encoding="utf-8"?>
 <p:sld xmlns:p="http://schemas.openxmlformats.org/presentationml/2006/main" xmlns:a="http://schemas.openxmlformats.org/drawingml/2006/main" xmlns:r="http://schemas.openxmlformats.org/officeDocument/2006/relationships">
   <p:cSld>
@@ -17270,8 +17270,8 @@
           <p:nvPr/>
         </p:nvGraphicFramePr>
         <p:xfrm>
-          <a:off x="0" y="1286946"/>
-          <a:ext cx="18288000" cy="8914791"/>
+          <a:off x="0" y="1287556"/>
+          <a:ext cx="18288000" cy="6819900"/>
         </p:xfrm>
         <a:graphic>
           <a:graphicData uri="http://schemas.openxmlformats.org/drawingml/2006/table">
@@ -17284,7 +17284,7 @@
                 <a:gridCol w="4026607"/>
                 <a:gridCol w="3666143"/>
               </a:tblGrid>
-              <a:tr h="1913177">
+              <a:tr h="1494248">
                 <a:tc>
                   <a:txBody>
                     <a:bodyPr anchor="t" rtlCol="false"/>
@@ -17345,28 +17345,6 @@
                         <a:t>   viên</a:t>
                       </a:r>
                     </a:p>
-                    <a:p>
-                      <a:pPr algn="ctr" marL="0" indent="0" lvl="0">
-                        <a:lnSpc>
-                          <a:spcPts val="3360"/>
-                        </a:lnSpc>
-                        <a:spcBef>
-                          <a:spcPct val="0"/>
-                        </a:spcBef>
-                      </a:pPr>
-                      <a:r>
-                        <a:rPr lang="en-US" b="true" sz="2400" strike="noStrike" u="none">
-                          <a:solidFill>
-                            <a:srgbClr val="000000"/>
-                          </a:solidFill>
-                          <a:latin typeface="Red Hat Display Bold"/>
-                          <a:ea typeface="Red Hat Display Bold"/>
-                          <a:cs typeface="Red Hat Display Bold"/>
-                          <a:sym typeface="Red Hat Display Bold"/>
-                        </a:rPr>
-                        <a:t>   </a:t>
-                      </a:r>
-                    </a:p>
                   </a:txBody>
                   <a:tcPr marL="76200" marR="76200" marT="76200" marB="76200" anchor="ctr">
                     <a:lnL cmpd="sng" algn="ctr" cap="flat" w="38100">
@@ -17446,28 +17424,6 @@
                           <a:sym typeface="Red Hat Display Bold"/>
                         </a:rPr>
                         <a:t>   Tỷ lệ</a:t>
-                      </a:r>
-                    </a:p>
-                    <a:p>
-                      <a:pPr algn="ctr" marL="0" indent="0" lvl="0">
-                        <a:lnSpc>
-                          <a:spcPts val="3360"/>
-                        </a:lnSpc>
-                        <a:spcBef>
-                          <a:spcPct val="0"/>
-                        </a:spcBef>
-                      </a:pPr>
-                      <a:r>
-                        <a:rPr lang="en-US" b="true" sz="2400" strike="noStrike" u="none">
-                          <a:solidFill>
-                            <a:srgbClr val="000000"/>
-                          </a:solidFill>
-                          <a:latin typeface="Red Hat Display Bold"/>
-                          <a:ea typeface="Red Hat Display Bold"/>
-                          <a:cs typeface="Red Hat Display Bold"/>
-                          <a:sym typeface="Red Hat Display Bold"/>
-                        </a:rPr>
-                        <a:t>   </a:t>
                       </a:r>
                     </a:p>
                   </a:txBody>
@@ -17573,28 +17529,6 @@
                         <a:t>   đóng góp</a:t>
                       </a:r>
                     </a:p>
-                    <a:p>
-                      <a:pPr algn="ctr" marL="0" indent="0" lvl="0">
-                        <a:lnSpc>
-                          <a:spcPts val="3360"/>
-                        </a:lnSpc>
-                        <a:spcBef>
-                          <a:spcPct val="0"/>
-                        </a:spcBef>
-                      </a:pPr>
-                      <a:r>
-                        <a:rPr lang="en-US" b="true" sz="2400" strike="noStrike" u="none">
-                          <a:solidFill>
-                            <a:srgbClr val="000000"/>
-                          </a:solidFill>
-                          <a:latin typeface="Red Hat Display Bold"/>
-                          <a:ea typeface="Red Hat Display Bold"/>
-                          <a:cs typeface="Red Hat Display Bold"/>
-                          <a:sym typeface="Red Hat Display Bold"/>
-                        </a:rPr>
-                        <a:t>   </a:t>
-                      </a:r>
-                    </a:p>
                   </a:txBody>
                   <a:tcPr marL="76200" marR="76200" marT="76200" marB="76200" anchor="ctr">
                     <a:lnL cmpd="sng" algn="ctr" cap="flat" w="38100">
@@ -17676,28 +17610,6 @@
                         <a:t>   Thời gian thực hiện</a:t>
                       </a:r>
                     </a:p>
-                    <a:p>
-                      <a:pPr algn="ctr" marL="0" indent="0" lvl="0">
-                        <a:lnSpc>
-                          <a:spcPts val="3360"/>
-                        </a:lnSpc>
-                        <a:spcBef>
-                          <a:spcPct val="0"/>
-                        </a:spcBef>
-                      </a:pPr>
-                      <a:r>
-                        <a:rPr lang="en-US" b="true" sz="2400" strike="noStrike" u="none">
-                          <a:solidFill>
-                            <a:srgbClr val="000000"/>
-                          </a:solidFill>
-                          <a:latin typeface="Red Hat Display Bold"/>
-                          <a:ea typeface="Red Hat Display Bold"/>
-                          <a:cs typeface="Red Hat Display Bold"/>
-                          <a:sym typeface="Red Hat Display Bold"/>
-                        </a:rPr>
-                        <a:t>   </a:t>
-                      </a:r>
-                    </a:p>
                   </a:txBody>
                   <a:tcPr marL="76200" marR="76200" marT="76200" marB="76200" anchor="ctr">
                     <a:lnL cmpd="sng" algn="ctr" cap="flat" w="38100">
@@ -17779,28 +17691,6 @@
                         <a:t>   Các file phụ trách chính</a:t>
                       </a:r>
                     </a:p>
-                    <a:p>
-                      <a:pPr algn="ctr" marL="0" indent="0" lvl="0">
-                        <a:lnSpc>
-                          <a:spcPts val="3360"/>
-                        </a:lnSpc>
-                        <a:spcBef>
-                          <a:spcPct val="0"/>
-                        </a:spcBef>
-                      </a:pPr>
-                      <a:r>
-                        <a:rPr lang="en-US" b="true" sz="2400" strike="noStrike" u="none">
-                          <a:solidFill>
-                            <a:srgbClr val="000000"/>
-                          </a:solidFill>
-                          <a:latin typeface="Red Hat Display Bold"/>
-                          <a:ea typeface="Red Hat Display Bold"/>
-                          <a:cs typeface="Red Hat Display Bold"/>
-                          <a:sym typeface="Red Hat Display Bold"/>
-                        </a:rPr>
-                        <a:t>   </a:t>
-                      </a:r>
-                    </a:p>
                   </a:txBody>
                   <a:tcPr marL="76200" marR="76200" marT="76200" marB="76200" anchor="ctr">
                     <a:lnL cmpd="sng" algn="ctr" cap="flat" w="38100">
@@ -17845,7 +17735,7 @@
                   </a:tcPr>
                 </a:tc>
               </a:tr>
-              <a:tr h="2333463">
+              <a:tr h="1494248">
                 <a:tc>
                   <a:txBody>
                     <a:bodyPr anchor="t" rtlCol="false"/>
@@ -17906,28 +17796,6 @@
                         <a:t>  (24133037)</a:t>
                       </a:r>
                     </a:p>
-                    <a:p>
-                      <a:pPr algn="ctr" marL="0" indent="0" lvl="0">
-                        <a:lnSpc>
-                          <a:spcPts val="3360"/>
-                        </a:lnSpc>
-                        <a:spcBef>
-                          <a:spcPct val="0"/>
-                        </a:spcBef>
-                      </a:pPr>
-                      <a:r>
-                        <a:rPr lang="en-US" sz="2400" strike="noStrike" u="none">
-                          <a:solidFill>
-                            <a:srgbClr val="000000"/>
-                          </a:solidFill>
-                          <a:latin typeface="Red Hat Display"/>
-                          <a:ea typeface="Red Hat Display"/>
-                          <a:cs typeface="Red Hat Display"/>
-                          <a:sym typeface="Red Hat Display"/>
-                        </a:rPr>
-                        <a:t>  </a:t>
-                      </a:r>
-                    </a:p>
                   </a:txBody>
                   <a:tcPr marL="76200" marR="76200" marT="76200" marB="76200" anchor="ctr">
                     <a:lnL cmpd="sng" algn="ctr" cap="flat" w="38100">
@@ -18006,29 +17874,7 @@
                           <a:cs typeface="Red Hat Display"/>
                           <a:sym typeface="Red Hat Display"/>
                         </a:rPr>
-                        <a:t>  30%</a:t>
-                      </a:r>
-                    </a:p>
-                    <a:p>
-                      <a:pPr algn="ctr" marL="0" indent="0" lvl="0">
-                        <a:lnSpc>
-                          <a:spcPts val="3360"/>
-                        </a:lnSpc>
-                        <a:spcBef>
-                          <a:spcPct val="0"/>
-                        </a:spcBef>
-                      </a:pPr>
-                      <a:r>
-                        <a:rPr lang="en-US" sz="2400" strike="noStrike" u="none">
-                          <a:solidFill>
-                            <a:srgbClr val="000000"/>
-                          </a:solidFill>
-                          <a:latin typeface="Red Hat Display"/>
-                          <a:ea typeface="Red Hat Display"/>
-                          <a:cs typeface="Red Hat Display"/>
-                          <a:sym typeface="Red Hat Display"/>
-                        </a:rPr>
-                        <a:t>  </a:t>
+                        <a:t>  30% </a:t>
                       </a:r>
                     </a:p>
                   </a:txBody>
@@ -18134,28 +17980,6 @@
                         <a:t>  cleaning, quality checks và EDA</a:t>
                       </a:r>
                     </a:p>
-                    <a:p>
-                      <a:pPr algn="ctr" marL="0" indent="0" lvl="0">
-                        <a:lnSpc>
-                          <a:spcPts val="3360"/>
-                        </a:lnSpc>
-                        <a:spcBef>
-                          <a:spcPct val="0"/>
-                        </a:spcBef>
-                      </a:pPr>
-                      <a:r>
-                        <a:rPr lang="en-US" sz="2400" strike="noStrike" u="none">
-                          <a:solidFill>
-                            <a:srgbClr val="000000"/>
-                          </a:solidFill>
-                          <a:latin typeface="Red Hat Display"/>
-                          <a:ea typeface="Red Hat Display"/>
-                          <a:cs typeface="Red Hat Display"/>
-                          <a:sym typeface="Red Hat Display"/>
-                        </a:rPr>
-                        <a:t>  </a:t>
-                      </a:r>
-                    </a:p>
                   </a:txBody>
                   <a:tcPr marL="76200" marR="76200" marT="76200" marB="76200" anchor="ctr">
                     <a:lnL cmpd="sng" algn="ctr" cap="flat" w="38100">
@@ -18237,28 +18061,6 @@
                         <a:t>  25/05/2026 – 19/06/2026</a:t>
                       </a:r>
                     </a:p>
-                    <a:p>
-                      <a:pPr algn="ctr" marL="0" indent="0" lvl="0">
-                        <a:lnSpc>
-                          <a:spcPts val="3360"/>
-                        </a:lnSpc>
-                        <a:spcBef>
-                          <a:spcPct val="0"/>
-                        </a:spcBef>
-                      </a:pPr>
-                      <a:r>
-                        <a:rPr lang="en-US" sz="2400" strike="noStrike" u="none">
-                          <a:solidFill>
-                            <a:srgbClr val="000000"/>
-                          </a:solidFill>
-                          <a:latin typeface="Red Hat Display"/>
-                          <a:ea typeface="Red Hat Display"/>
-                          <a:cs typeface="Red Hat Display"/>
-                          <a:sym typeface="Red Hat Display"/>
-                        </a:rPr>
-                        <a:t>  </a:t>
-                      </a:r>
-                    </a:p>
                   </a:txBody>
                   <a:tcPr marL="76200" marR="76200" marT="76200" marB="76200" anchor="ctr">
                     <a:lnL cmpd="sng" algn="ctr" cap="flat" w="38100">
@@ -18340,28 +18142,6 @@
                         <a:t>  Notebook, R/01, R/02, dữ liệu và hình EDA</a:t>
                       </a:r>
                     </a:p>
-                    <a:p>
-                      <a:pPr algn="ctr" marL="0" indent="0" lvl="0">
-                        <a:lnSpc>
-                          <a:spcPts val="3360"/>
-                        </a:lnSpc>
-                        <a:spcBef>
-                          <a:spcPct val="0"/>
-                        </a:spcBef>
-                      </a:pPr>
-                      <a:r>
-                        <a:rPr lang="en-US" sz="2400" strike="noStrike" u="none">
-                          <a:solidFill>
-                            <a:srgbClr val="000000"/>
-                          </a:solidFill>
-                          <a:latin typeface="Red Hat Display"/>
-                          <a:ea typeface="Red Hat Display"/>
-                          <a:cs typeface="Red Hat Display"/>
-                          <a:sym typeface="Red Hat Display"/>
-                        </a:rPr>
-                        <a:t>  </a:t>
-                      </a:r>
-                    </a:p>
                   </a:txBody>
                   <a:tcPr marL="76200" marR="76200" marT="76200" marB="76200" anchor="ctr">
                     <a:lnL cmpd="sng" algn="ctr" cap="flat" w="38100">
@@ -18406,7 +18186,7 @@
                   </a:tcPr>
                 </a:tc>
               </a:tr>
-              <a:tr h="2334075">
+              <a:tr h="1915702">
                 <a:tc>
                   <a:txBody>
                     <a:bodyPr anchor="t" rtlCol="false"/>
@@ -18467,28 +18247,6 @@
                         <a:t>  (24162039)</a:t>
                       </a:r>
                     </a:p>
-                    <a:p>
-                      <a:pPr algn="ctr" marL="0" indent="0" lvl="0">
-                        <a:lnSpc>
-                          <a:spcPts val="3360"/>
-                        </a:lnSpc>
-                        <a:spcBef>
-                          <a:spcPct val="0"/>
-                        </a:spcBef>
-                      </a:pPr>
-                      <a:r>
-                        <a:rPr lang="en-US" sz="2400" strike="noStrike" u="none">
-                          <a:solidFill>
-                            <a:srgbClr val="000000"/>
-                          </a:solidFill>
-                          <a:latin typeface="Red Hat Display"/>
-                          <a:ea typeface="Red Hat Display"/>
-                          <a:cs typeface="Red Hat Display"/>
-                          <a:sym typeface="Red Hat Display"/>
-                        </a:rPr>
-                        <a:t>  </a:t>
-                      </a:r>
-                    </a:p>
                   </a:txBody>
                   <a:tcPr marL="76200" marR="76200" marT="76200" marB="76200" anchor="ctr">
                     <a:lnL cmpd="sng" algn="ctr" cap="flat" w="38100">
@@ -18568,28 +18326,6 @@
                           <a:sym typeface="Red Hat Display"/>
                         </a:rPr>
                         <a:t>  35%</a:t>
-                      </a:r>
-                    </a:p>
-                    <a:p>
-                      <a:pPr algn="ctr" marL="0" indent="0" lvl="0">
-                        <a:lnSpc>
-                          <a:spcPts val="3360"/>
-                        </a:lnSpc>
-                        <a:spcBef>
-                          <a:spcPct val="0"/>
-                        </a:spcBef>
-                      </a:pPr>
-                      <a:r>
-                        <a:rPr lang="en-US" sz="2400" strike="noStrike" u="none">
-                          <a:solidFill>
-                            <a:srgbClr val="000000"/>
-                          </a:solidFill>
-                          <a:latin typeface="Red Hat Display"/>
-                          <a:ea typeface="Red Hat Display"/>
-                          <a:cs typeface="Red Hat Display"/>
-                          <a:sym typeface="Red Hat Display"/>
-                        </a:rPr>
-                        <a:t>  </a:t>
                       </a:r>
                     </a:p>
                   </a:txBody>
@@ -18695,28 +18431,6 @@
                         <a:t>  framework, benchmark, rolling CV và diagnostics</a:t>
                       </a:r>
                     </a:p>
-                    <a:p>
-                      <a:pPr algn="ctr" marL="0" indent="0" lvl="0">
-                        <a:lnSpc>
-                          <a:spcPts val="3360"/>
-                        </a:lnSpc>
-                        <a:spcBef>
-                          <a:spcPct val="0"/>
-                        </a:spcBef>
-                      </a:pPr>
-                      <a:r>
-                        <a:rPr lang="en-US" sz="2400" strike="noStrike" u="none">
-                          <a:solidFill>
-                            <a:srgbClr val="000000"/>
-                          </a:solidFill>
-                          <a:latin typeface="Red Hat Display"/>
-                          <a:ea typeface="Red Hat Display"/>
-                          <a:cs typeface="Red Hat Display"/>
-                          <a:sym typeface="Red Hat Display"/>
-                        </a:rPr>
-                        <a:t>  </a:t>
-                      </a:r>
-                    </a:p>
                   </a:txBody>
                   <a:tcPr marL="76200" marR="76200" marT="76200" marB="76200" anchor="ctr">
                     <a:lnL cmpd="sng" algn="ctr" cap="flat" w="38100">
@@ -18796,28 +18510,6 @@
                           <a:sym typeface="Red Hat Display"/>
                         </a:rPr>
                         <a:t>  25/05/2026 – 19/06/2026</a:t>
-                      </a:r>
-                    </a:p>
-                    <a:p>
-                      <a:pPr algn="ctr" marL="0" indent="0" lvl="0">
-                        <a:lnSpc>
-                          <a:spcPts val="3360"/>
-                        </a:lnSpc>
-                        <a:spcBef>
-                          <a:spcPct val="0"/>
-                        </a:spcBef>
-                      </a:pPr>
-                      <a:r>
-                        <a:rPr lang="en-US" sz="2400" strike="noStrike" u="none">
-                          <a:solidFill>
-                            <a:srgbClr val="000000"/>
-                          </a:solidFill>
-                          <a:latin typeface="Red Hat Display"/>
-                          <a:ea typeface="Red Hat Display"/>
-                          <a:cs typeface="Red Hat Display"/>
-                          <a:sym typeface="Red Hat Display"/>
-                        </a:rPr>
-                        <a:t>  </a:t>
                       </a:r>
                     </a:p>
                   </a:txBody>
@@ -18923,28 +18615,6 @@
                         <a:t>  forecast</a:t>
                       </a:r>
                     </a:p>
-                    <a:p>
-                      <a:pPr algn="ctr" marL="0" indent="0" lvl="0">
-                        <a:lnSpc>
-                          <a:spcPts val="3360"/>
-                        </a:lnSpc>
-                        <a:spcBef>
-                          <a:spcPct val="0"/>
-                        </a:spcBef>
-                      </a:pPr>
-                      <a:r>
-                        <a:rPr lang="en-US" sz="2400" strike="noStrike" u="none">
-                          <a:solidFill>
-                            <a:srgbClr val="000000"/>
-                          </a:solidFill>
-                          <a:latin typeface="Red Hat Display"/>
-                          <a:ea typeface="Red Hat Display"/>
-                          <a:cs typeface="Red Hat Display"/>
-                          <a:sym typeface="Red Hat Display"/>
-                        </a:rPr>
-                        <a:t>  </a:t>
-                      </a:r>
-                    </a:p>
                   </a:txBody>
                   <a:tcPr marL="76200" marR="76200" marT="76200" marB="76200" anchor="ctr">
                     <a:lnL cmpd="sng" algn="ctr" cap="flat" w="38100">
@@ -18989,7 +18659,7 @@
                   </a:tcPr>
                 </a:tc>
               </a:tr>
-              <a:tr h="2334075">
+              <a:tr h="1915702">
                 <a:tc>
                   <a:txBody>
                     <a:bodyPr anchor="t" rtlCol="false"/>
@@ -19059,18 +18729,6 @@
                           <a:spcPct val="0"/>
                         </a:spcBef>
                       </a:pPr>
-                      <a:r>
-                        <a:rPr lang="en-US" sz="2400" strike="noStrike" u="none">
-                          <a:solidFill>
-                            <a:srgbClr val="000000"/>
-                          </a:solidFill>
-                          <a:latin typeface="Red Hat Display"/>
-                          <a:ea typeface="Red Hat Display"/>
-                          <a:cs typeface="Red Hat Display"/>
-                          <a:sym typeface="Red Hat Display"/>
-                        </a:rPr>
-                        <a:t>  </a:t>
-                      </a:r>
                     </a:p>
                   </a:txBody>
                   <a:tcPr marL="76200" marR="76200" marT="76200" marB="76200" anchor="ctr">
@@ -19151,28 +18809,6 @@
                           <a:sym typeface="Red Hat Display"/>
                         </a:rPr>
                         <a:t>  35%</a:t>
-                      </a:r>
-                    </a:p>
-                    <a:p>
-                      <a:pPr algn="ctr" marL="0" indent="0" lvl="0">
-                        <a:lnSpc>
-                          <a:spcPts val="3360"/>
-                        </a:lnSpc>
-                        <a:spcBef>
-                          <a:spcPct val="0"/>
-                        </a:spcBef>
-                      </a:pPr>
-                      <a:r>
-                        <a:rPr lang="en-US" sz="2400" strike="noStrike" u="none">
-                          <a:solidFill>
-                            <a:srgbClr val="000000"/>
-                          </a:solidFill>
-                          <a:latin typeface="Red Hat Display"/>
-                          <a:ea typeface="Red Hat Display"/>
-                          <a:cs typeface="Red Hat Display"/>
-                          <a:sym typeface="Red Hat Display"/>
-                        </a:rPr>
-                        <a:t>  </a:t>
                       </a:r>
                     </a:p>
                   </a:txBody>
@@ -19278,28 +18914,6 @@
                         <a:t>  diagnostics, comparison và tích hợp báo cáo</a:t>
                       </a:r>
                     </a:p>
-                    <a:p>
-                      <a:pPr algn="ctr" marL="0" indent="0" lvl="0">
-                        <a:lnSpc>
-                          <a:spcPts val="3360"/>
-                        </a:lnSpc>
-                        <a:spcBef>
-                          <a:spcPct val="0"/>
-                        </a:spcBef>
-                      </a:pPr>
-                      <a:r>
-                        <a:rPr lang="en-US" sz="2400" strike="noStrike" u="none">
-                          <a:solidFill>
-                            <a:srgbClr val="000000"/>
-                          </a:solidFill>
-                          <a:latin typeface="Red Hat Display"/>
-                          <a:ea typeface="Red Hat Display"/>
-                          <a:cs typeface="Red Hat Display"/>
-                          <a:sym typeface="Red Hat Display"/>
-                        </a:rPr>
-                        <a:t>  </a:t>
-                      </a:r>
-                    </a:p>
                   </a:txBody>
                   <a:tcPr marL="76200" marR="76200" marT="76200" marB="76200" anchor="ctr">
                     <a:lnL cmpd="sng" algn="ctr" cap="flat" w="38100">
@@ -19381,28 +18995,6 @@
                         <a:t>  25/05/2026 – 19/06/2026</a:t>
                       </a:r>
                     </a:p>
-                    <a:p>
-                      <a:pPr algn="ctr" marL="0" indent="0" lvl="0">
-                        <a:lnSpc>
-                          <a:spcPts val="3360"/>
-                        </a:lnSpc>
-                        <a:spcBef>
-                          <a:spcPct val="0"/>
-                        </a:spcBef>
-                      </a:pPr>
-                      <a:r>
-                        <a:rPr lang="en-US" sz="2400" strike="noStrike" u="none">
-                          <a:solidFill>
-                            <a:srgbClr val="000000"/>
-                          </a:solidFill>
-                          <a:latin typeface="Red Hat Display"/>
-                          <a:ea typeface="Red Hat Display"/>
-                          <a:cs typeface="Red Hat Display"/>
-                          <a:sym typeface="Red Hat Display"/>
-                        </a:rPr>
-                        <a:t>  </a:t>
-                      </a:r>
-                    </a:p>
                   </a:txBody>
                   <a:tcPr marL="76200" marR="76200" marT="76200" marB="76200" anchor="ctr">
                     <a:lnL cmpd="sng" algn="ctr" cap="flat" w="38100">
@@ -19484,28 +19076,6 @@
                         <a:t>  R/04-R/06, Word và khung slide</a:t>
                       </a:r>
                     </a:p>
-                    <a:p>
-                      <a:pPr algn="ctr" marL="0" indent="0" lvl="0">
-                        <a:lnSpc>
-                          <a:spcPts val="3360"/>
-                        </a:lnSpc>
-                        <a:spcBef>
-                          <a:spcPct val="0"/>
-                        </a:spcBef>
-                      </a:pPr>
-                      <a:r>
-                        <a:rPr lang="en-US" sz="2400" strike="noStrike" u="none">
-                          <a:solidFill>
-                            <a:srgbClr val="000000"/>
-                          </a:solidFill>
-                          <a:latin typeface="Red Hat Display"/>
-                          <a:ea typeface="Red Hat Display"/>
-                          <a:cs typeface="Red Hat Display"/>
-                          <a:sym typeface="Red Hat Display"/>
-                        </a:rPr>
-                        <a:t>  </a:t>
-                      </a:r>
-                    </a:p>
                   </a:txBody>
                   <a:tcPr marL="76200" marR="76200" marT="76200" marB="76200" anchor="ctr">
                     <a:lnL cmpd="sng" algn="ctr" cap="flat" w="38100">
@@ -19554,6 +19124,66 @@
           </a:graphicData>
         </a:graphic>
       </p:graphicFrame>
+      <p:sp>
+        <p:nvSpPr>
+          <p:cNvPr name="TextBox 11" id="11"/>
+          <p:cNvSpPr txBox="true"/>
+          <p:nvPr/>
+        </p:nvSpPr>
+        <p:spPr>
+          <a:xfrm rot="0">
+            <a:off x="1028700" y="8103759"/>
+            <a:ext cx="16230600" cy="1154541"/>
+          </a:xfrm>
+          <a:prstGeom prst="rect">
+            <a:avLst/>
+          </a:prstGeom>
+        </p:spPr>
+        <p:txBody>
+          <a:bodyPr anchor="t" rtlCol="false" tIns="0" lIns="0" bIns="0" rIns="0">
+            <a:spAutoFit/>
+          </a:bodyPr>
+          <a:lstStyle/>
+          <a:p>
+            <a:pPr algn="l">
+              <a:lnSpc>
+                <a:spcPts val="5033"/>
+              </a:lnSpc>
+            </a:pPr>
+            <a:r>
+              <a:rPr lang="en-US" sz="3595" b="true">
+                <a:solidFill>
+                  <a:srgbClr val="2D2261"/>
+                </a:solidFill>
+                <a:latin typeface="Roboto Slab Bold"/>
+                <a:ea typeface="Roboto Slab Bold"/>
+                <a:cs typeface="Roboto Slab Bold"/>
+                <a:sym typeface="Roboto Slab Bold"/>
+              </a:rPr>
+              <a:t>Mã nguồn dự án: </a:t>
+            </a:r>
+          </a:p>
+          <a:p>
+            <a:pPr algn="l">
+              <a:lnSpc>
+                <a:spcPts val="4193"/>
+              </a:lnSpc>
+            </a:pPr>
+            <a:r>
+              <a:rPr lang="en-US" sz="2995">
+                <a:solidFill>
+                  <a:srgbClr val="2D2261"/>
+                </a:solidFill>
+                <a:latin typeface="Roboto Slab"/>
+                <a:ea typeface="Roboto Slab"/>
+                <a:cs typeface="Roboto Slab"/>
+                <a:sym typeface="Roboto Slab"/>
+              </a:rPr>
+              <a:t>https://github.com/ledanghoanganh/fpt-stock-analysis-with-R-programming-language</a:t>
+            </a:r>
+          </a:p>
+        </p:txBody>
+      </p:sp>
     </p:spTree>
   </p:cSld>
   <p:clrMapOvr>
@@ -26925,8 +26555,8 @@
           <p:nvPr/>
         </p:nvGraphicFramePr>
         <p:xfrm>
-          <a:off x="9144000" y="2116145"/>
-          <a:ext cx="8676988" cy="6442916"/>
+          <a:off x="9144000" y="1758402"/>
+          <a:ext cx="8676988" cy="4419600"/>
         </p:xfrm>
         <a:graphic>
           <a:graphicData uri="http://schemas.openxmlformats.org/drawingml/2006/table">
@@ -26936,7 +26566,7 @@
                 <a:gridCol w="2881837"/>
                 <a:gridCol w="5795150"/>
               </a:tblGrid>
-              <a:tr h="919226">
+              <a:tr h="499607">
                 <a:tc>
                   <a:txBody>
                     <a:bodyPr anchor="t" rtlCol="false"/>
@@ -27068,7 +26698,7 @@
                   </a:tcPr>
                 </a:tc>
               </a:tr>
-              <a:tr h="787121">
+              <a:tr h="499607">
                 <a:tc>
                   <a:txBody>
                     <a:bodyPr anchor="t" rtlCol="false"/>
@@ -27200,7 +26830,7 @@
                   </a:tcPr>
                 </a:tc>
               </a:tr>
-              <a:tr h="598031">
+              <a:tr h="499607">
                 <a:tc>
                   <a:txBody>
                     <a:bodyPr anchor="t" rtlCol="false"/>
@@ -27332,7 +26962,7 @@
                   </a:tcPr>
                 </a:tc>
               </a:tr>
-              <a:tr h="727576">
+              <a:tr h="499607">
                 <a:tc>
                   <a:txBody>
                     <a:bodyPr anchor="t" rtlCol="false"/>
@@ -27464,7 +27094,7 @@
                   </a:tcPr>
                 </a:tc>
               </a:tr>
-              <a:tr h="919839">
+              <a:tr h="922351">
                 <a:tc>
                   <a:txBody>
                     <a:bodyPr anchor="t" rtlCol="false"/>
@@ -27596,7 +27226,7 @@
                   </a:tcPr>
                 </a:tc>
               </a:tr>
-              <a:tr h="920452">
+              <a:tr h="499607">
                 <a:tc>
                   <a:txBody>
                     <a:bodyPr anchor="t" rtlCol="false"/>
@@ -27728,7 +27358,7 @@
                   </a:tcPr>
                 </a:tc>
               </a:tr>
-              <a:tr h="919226">
+              <a:tr h="499607">
                 <a:tc>
                   <a:txBody>
                     <a:bodyPr anchor="t" rtlCol="false"/>
@@ -27860,7 +27490,7 @@
                   </a:tcPr>
                 </a:tc>
               </a:tr>
-              <a:tr h="651444">
+              <a:tr h="499607">
                 <a:tc>
                   <a:txBody>
                     <a:bodyPr anchor="t" rtlCol="false"/>
@@ -28045,8 +27675,8 @@
         </p:nvSpPr>
         <p:spPr>
           <a:xfrm rot="0">
-            <a:off x="1028700" y="3738973"/>
-            <a:ext cx="7702243" cy="3927475"/>
+            <a:off x="9144000" y="6301496"/>
+            <a:ext cx="8676988" cy="3248890"/>
           </a:xfrm>
           <a:prstGeom prst="rect">
             <a:avLst/>
@@ -28060,11 +27690,11 @@
           <a:p>
             <a:pPr algn="l">
               <a:lnSpc>
-                <a:spcPts val="3499"/>
+                <a:spcPts val="3265"/>
               </a:lnSpc>
             </a:pPr>
             <a:r>
-              <a:rPr lang="en-US" sz="2499" b="true">
+              <a:rPr lang="en-US" sz="2332" b="true">
                 <a:solidFill>
                   <a:srgbClr val="000000"/>
                 </a:solidFill>
@@ -28077,15 +27707,15 @@
             </a:r>
           </a:p>
           <a:p>
-            <a:pPr algn="l" marL="539749" indent="-269875" lvl="1">
+            <a:pPr algn="l" marL="503537" indent="-251768" lvl="1">
               <a:lnSpc>
-                <a:spcPts val="3499"/>
+                <a:spcPts val="3265"/>
               </a:lnSpc>
               <a:buFont typeface="Arial"/>
               <a:buChar char="•"/>
             </a:pPr>
             <a:r>
-              <a:rPr lang="en-US" b="true" sz="2499">
+              <a:rPr lang="en-US" b="true" sz="2332">
                 <a:solidFill>
                   <a:srgbClr val="000000"/>
                 </a:solidFill>
@@ -28097,7 +27727,7 @@
               <a:t>Holdout 30 phiên: </a:t>
             </a:r>
             <a:r>
-              <a:rPr lang="en-US" sz="2499">
+              <a:rPr lang="en-US" sz="2332">
                 <a:solidFill>
                   <a:srgbClr val="000000"/>
                 </a:solidFill>
@@ -28110,15 +27740,15 @@
             </a:r>
           </a:p>
           <a:p>
-            <a:pPr algn="l" marL="539749" indent="-269875" lvl="1">
+            <a:pPr algn="l" marL="503537" indent="-251768" lvl="1">
               <a:lnSpc>
-                <a:spcPts val="3499"/>
+                <a:spcPts val="3265"/>
               </a:lnSpc>
               <a:buFont typeface="Arial"/>
               <a:buChar char="•"/>
             </a:pPr>
             <a:r>
-              <a:rPr lang="en-US" b="true" sz="2499">
+              <a:rPr lang="en-US" b="true" sz="2332">
                 <a:solidFill>
                   <a:srgbClr val="000000"/>
                 </a:solidFill>
@@ -28130,7 +27760,7 @@
               <a:t>Rolling-origin CV: </a:t>
             </a:r>
             <a:r>
-              <a:rPr lang="en-US" sz="2499">
+              <a:rPr lang="en-US" sz="2332">
                 <a:solidFill>
                   <a:srgbClr val="000000"/>
                 </a:solidFill>
@@ -28143,15 +27773,15 @@
             </a:r>
           </a:p>
           <a:p>
-            <a:pPr algn="l" marL="539749" indent="-269875" lvl="1">
+            <a:pPr algn="l" marL="503537" indent="-251768" lvl="1">
               <a:lnSpc>
-                <a:spcPts val="3499"/>
+                <a:spcPts val="3265"/>
               </a:lnSpc>
               <a:buFont typeface="Arial"/>
               <a:buChar char="•"/>
             </a:pPr>
             <a:r>
-              <a:rPr lang="en-US" b="true" sz="2499">
+              <a:rPr lang="en-US" b="true" sz="2332">
                 <a:solidFill>
                   <a:srgbClr val="000000"/>
                 </a:solidFill>
@@ -28163,7 +27793,7 @@
               <a:t>Metric: </a:t>
             </a:r>
             <a:r>
-              <a:rPr lang="en-US" sz="2499">
+              <a:rPr lang="en-US" sz="2332">
                 <a:solidFill>
                   <a:srgbClr val="000000"/>
                 </a:solidFill>
@@ -28175,7 +27805,7 @@
               <a:t>Dùng </a:t>
             </a:r>
             <a:r>
-              <a:rPr lang="en-US" b="true" sz="2499">
+              <a:rPr lang="en-US" b="true" sz="2332">
                 <a:solidFill>
                   <a:srgbClr val="000000"/>
                 </a:solidFill>
@@ -28187,7 +27817,7 @@
               <a:t>RMSE, MAE</a:t>
             </a:r>
             <a:r>
-              <a:rPr lang="en-US" sz="2499">
+              <a:rPr lang="en-US" sz="2332">
                 <a:solidFill>
                   <a:srgbClr val="000000"/>
                 </a:solidFill>
@@ -28199,7 +27829,7 @@
               <a:t>, </a:t>
             </a:r>
             <a:r>
-              <a:rPr lang="en-US" b="true" sz="2499">
+              <a:rPr lang="en-US" b="true" sz="2332">
                 <a:solidFill>
                   <a:srgbClr val="000000"/>
                 </a:solidFill>
@@ -28211,7 +27841,7 @@
               <a:t>MAPE </a:t>
             </a:r>
             <a:r>
-              <a:rPr lang="en-US" sz="2499">
+              <a:rPr lang="en-US" sz="2332">
                 <a:solidFill>
                   <a:srgbClr val="000000"/>
                 </a:solidFill>
@@ -28224,15 +27854,15 @@
             </a:r>
           </a:p>
           <a:p>
-            <a:pPr algn="l" marL="539749" indent="-269875" lvl="1">
+            <a:pPr algn="l" marL="503537" indent="-251768" lvl="1">
               <a:lnSpc>
-                <a:spcPts val="3499"/>
+                <a:spcPts val="3265"/>
               </a:lnSpc>
               <a:buFont typeface="Arial"/>
               <a:buChar char="•"/>
             </a:pPr>
             <a:r>
-              <a:rPr lang="en-US" b="true" sz="2499">
+              <a:rPr lang="en-US" b="true" sz="2332">
                 <a:solidFill>
                   <a:srgbClr val="000000"/>
                 </a:solidFill>
@@ -28244,7 +27874,7 @@
               <a:t>Ljung-Box Test: </a:t>
             </a:r>
             <a:r>
-              <a:rPr lang="en-US" sz="2499">
+              <a:rPr lang="en-US" sz="2332">
                 <a:solidFill>
                   <a:srgbClr val="000000"/>
                 </a:solidFill>
@@ -28266,7 +27896,7 @@
         </p:nvSpPr>
         <p:spPr>
           <a:xfrm rot="0">
-            <a:off x="1028700" y="2849574"/>
+            <a:off x="9144000" y="1202777"/>
             <a:ext cx="8676988" cy="422275"/>
           </a:xfrm>
           <a:prstGeom prst="rect">
@@ -28295,6 +27925,224 @@
                 <a:sym typeface="Red Hat Display"/>
               </a:rPr>
               <a:t>Gồm 7 mô hình dự báo</a:t>
+            </a:r>
+          </a:p>
+        </p:txBody>
+      </p:sp>
+      <p:sp>
+        <p:nvSpPr>
+          <p:cNvPr name="TextBox 13" id="13"/>
+          <p:cNvSpPr txBox="true"/>
+          <p:nvPr/>
+        </p:nvSpPr>
+        <p:spPr>
+          <a:xfrm rot="0">
+            <a:off x="780029" y="1390102"/>
+            <a:ext cx="7702243" cy="8308975"/>
+          </a:xfrm>
+          <a:prstGeom prst="rect">
+            <a:avLst/>
+          </a:prstGeom>
+        </p:spPr>
+        <p:txBody>
+          <a:bodyPr anchor="t" rtlCol="false" tIns="0" lIns="0" bIns="0" rIns="0">
+            <a:spAutoFit/>
+          </a:bodyPr>
+          <a:lstStyle/>
+          <a:p>
+            <a:pPr algn="l">
+              <a:lnSpc>
+                <a:spcPts val="3499"/>
+              </a:lnSpc>
+            </a:pPr>
+            <a:r>
+              <a:rPr lang="en-US" sz="2499" b="true">
+                <a:solidFill>
+                  <a:srgbClr val="000000"/>
+                </a:solidFill>
+                <a:latin typeface="Red Hat Display Bold"/>
+                <a:ea typeface="Red Hat Display Bold"/>
+                <a:cs typeface="Red Hat Display Bold"/>
+                <a:sym typeface="Red Hat Display Bold"/>
+              </a:rPr>
+              <a:t>Lý do chọn mô hình</a:t>
+            </a:r>
+          </a:p>
+          <a:p>
+            <a:pPr algn="l" marL="539749" indent="-269875" lvl="1">
+              <a:lnSpc>
+                <a:spcPts val="3499"/>
+              </a:lnSpc>
+              <a:buFont typeface="Arial"/>
+              <a:buChar char="•"/>
+            </a:pPr>
+            <a:r>
+              <a:rPr lang="en-US" b="true" sz="2499">
+                <a:solidFill>
+                  <a:srgbClr val="000000"/>
+                </a:solidFill>
+                <a:latin typeface="Red Hat Display Bold"/>
+                <a:ea typeface="Red Hat Display Bold"/>
+                <a:cs typeface="Red Hat Display Bold"/>
+                <a:sym typeface="Red Hat Display Bold"/>
+              </a:rPr>
+              <a:t>Naive &amp; Drift</a:t>
+            </a:r>
+            <a:r>
+              <a:rPr lang="en-US" sz="2499">
+                <a:solidFill>
+                  <a:srgbClr val="000000"/>
+                </a:solidFill>
+                <a:latin typeface="Red Hat Display"/>
+                <a:ea typeface="Red Hat Display"/>
+                <a:cs typeface="Red Hat Display"/>
+                <a:sym typeface="Red Hat Display"/>
+              </a:rPr>
+              <a:t>: Đóng vai trò làm thước đo cơ sở. Kiểm tra giả thuyết liệu giá cổ phiếu có đi theo bước đi ngẫu nhiên (Random Wa</a:t>
+            </a:r>
+            <a:r>
+              <a:rPr lang="en-US" sz="2499">
+                <a:solidFill>
+                  <a:srgbClr val="000000"/>
+                </a:solidFill>
+                <a:latin typeface="Red Hat Display"/>
+                <a:ea typeface="Red Hat Display"/>
+                <a:cs typeface="Red Hat Display"/>
+                <a:sym typeface="Red Hat Display"/>
+              </a:rPr>
+              <a:t>lk) và hoàn toàn không thể dự báo?</a:t>
+            </a:r>
+          </a:p>
+          <a:p>
+            <a:pPr algn="l" marL="539749" indent="-269875" lvl="1">
+              <a:lnSpc>
+                <a:spcPts val="3499"/>
+              </a:lnSpc>
+              <a:buFont typeface="Arial"/>
+              <a:buChar char="•"/>
+            </a:pPr>
+            <a:r>
+              <a:rPr lang="en-US" b="true" sz="2499">
+                <a:solidFill>
+                  <a:srgbClr val="000000"/>
+                </a:solidFill>
+                <a:latin typeface="Red Hat Display Bold"/>
+                <a:ea typeface="Red Hat Display Bold"/>
+                <a:cs typeface="Red Hat Display Bold"/>
+                <a:sym typeface="Red Hat Display Bold"/>
+              </a:rPr>
+              <a:t>ARIMA &amp; ETS</a:t>
+            </a:r>
+            <a:r>
+              <a:rPr lang="en-US" sz="2499">
+                <a:solidFill>
+                  <a:srgbClr val="000000"/>
+                </a:solidFill>
+                <a:latin typeface="Red Hat Display"/>
+                <a:ea typeface="Red Hat Display"/>
+                <a:cs typeface="Red Hat Display"/>
+                <a:sym typeface="Red Hat Display"/>
+              </a:rPr>
+              <a:t>: Giá cổ phiếu có bị chi phối bởi mức tự tương quan quá khứ (ARIMA) hay xu hướng nội tại (ETS) không?</a:t>
+            </a:r>
+          </a:p>
+          <a:p>
+            <a:pPr algn="l" marL="539749" indent="-269875" lvl="1">
+              <a:lnSpc>
+                <a:spcPts val="3499"/>
+              </a:lnSpc>
+              <a:buFont typeface="Arial"/>
+              <a:buChar char="•"/>
+            </a:pPr>
+            <a:r>
+              <a:rPr lang="en-US" b="true" sz="2499">
+                <a:solidFill>
+                  <a:srgbClr val="000000"/>
+                </a:solidFill>
+                <a:latin typeface="Red Hat Display Bold"/>
+                <a:ea typeface="Red Hat Display Bold"/>
+                <a:cs typeface="Red Hat Display Bold"/>
+                <a:sym typeface="Red Hat Display Bold"/>
+              </a:rPr>
+              <a:t>SARIMA</a:t>
+            </a:r>
+            <a:r>
+              <a:rPr lang="en-US" sz="2499">
+                <a:solidFill>
+                  <a:srgbClr val="000000"/>
+                </a:solidFill>
+                <a:latin typeface="Red Hat Display"/>
+                <a:ea typeface="Red Hat Display"/>
+                <a:cs typeface="Red Hat Display"/>
+                <a:sym typeface="Red Hat Display"/>
+              </a:rPr>
+              <a:t>: Kiểm định tính mùa vụ. Liệu xu hướng giao dịch có sự lặp lại đều đặn theo từng tuần (chu kỳ 5 phiên) hay không?</a:t>
+            </a:r>
+          </a:p>
+          <a:p>
+            <a:pPr algn="l" marL="539749" indent="-269875" lvl="1">
+              <a:lnSpc>
+                <a:spcPts val="3499"/>
+              </a:lnSpc>
+              <a:buFont typeface="Arial"/>
+              <a:buChar char="•"/>
+            </a:pPr>
+            <a:r>
+              <a:rPr lang="en-US" b="true" sz="2499">
+                <a:solidFill>
+                  <a:srgbClr val="000000"/>
+                </a:solidFill>
+                <a:latin typeface="Red Hat Display Bold"/>
+                <a:ea typeface="Red Hat Display Bold"/>
+                <a:cs typeface="Red Hat Display Bold"/>
+                <a:sym typeface="Red Hat Display Bold"/>
+              </a:rPr>
+              <a:t>ETS Damped </a:t>
+            </a:r>
+            <a:r>
+              <a:rPr lang="en-US" sz="2499">
+                <a:solidFill>
+                  <a:srgbClr val="000000"/>
+                </a:solidFill>
+                <a:latin typeface="Red Hat Display"/>
+                <a:ea typeface="Red Hat Display"/>
+                <a:cs typeface="Red Hat Display"/>
+                <a:sym typeface="Red Hat Display"/>
+              </a:rPr>
+              <a:t>(Giới hạn đà tăng): Điều chuẩn mô hình sát với thực tế. Thêm lực hãm (Damped) để chặn đường dự báo đâm thẳng lên vô cực khi đang ở đà tăng nóng.</a:t>
+            </a:r>
+          </a:p>
+          <a:p>
+            <a:pPr algn="l" marL="539749" indent="-269875" lvl="1">
+              <a:lnSpc>
+                <a:spcPts val="3499"/>
+              </a:lnSpc>
+              <a:buFont typeface="Arial"/>
+              <a:buChar char="•"/>
+            </a:pPr>
+            <a:r>
+              <a:rPr lang="en-US" b="true" sz="2499">
+                <a:solidFill>
+                  <a:srgbClr val="000000"/>
+                </a:solidFill>
+                <a:latin typeface="Red Hat Display Bold"/>
+                <a:ea typeface="Red Hat Display Bold"/>
+                <a:cs typeface="Red Hat Display Bold"/>
+                <a:sym typeface="Red Hat Display Bold"/>
+              </a:rPr>
+              <a:t>ARIMAX Lagged</a:t>
+            </a:r>
+            <a:r>
+              <a:rPr lang="en-US" sz="2499">
+                <a:solidFill>
+                  <a:srgbClr val="000000"/>
+                </a:solidFill>
+                <a:latin typeface="Red Hat Display"/>
+                <a:ea typeface="Red Hat Display"/>
+                <a:cs typeface="Red Hat Display"/>
+                <a:sym typeface="Red Hat Display"/>
+              </a:rPr>
+              <a:t> (Biến ngoại sinh): Mở rộng góc nhìn. Kiểm tra xem dòng tiền (khối lượng) và mức độ giằng co (biên độ giá) của hôm nay có tác động đến giá ngày mai không?</a:t>
             </a:r>
           </a:p>
         </p:txBody>
@@ -28331,102 +28179,9 @@
           <a:chExt cx="0" cy="0"/>
         </a:xfrm>
       </p:grpSpPr>
-      <p:grpSp>
-        <p:nvGrpSpPr>
-          <p:cNvPr name="Group 2" id="2"/>
-          <p:cNvGrpSpPr/>
-          <p:nvPr/>
-        </p:nvGrpSpPr>
-        <p:grpSpPr>
-          <a:xfrm rot="0">
-            <a:off x="1064565" y="3271849"/>
-            <a:ext cx="1029499" cy="1029499"/>
-            <a:chOff x="0" y="0"/>
-            <a:chExt cx="812800" cy="812800"/>
-          </a:xfrm>
-        </p:grpSpPr>
-        <p:sp>
-          <p:nvSpPr>
-            <p:cNvPr name="Freeform 3" id="3"/>
-            <p:cNvSpPr/>
-            <p:nvPr/>
-          </p:nvSpPr>
-          <p:spPr>
-            <a:xfrm flipH="false" flipV="false" rot="0">
-              <a:off x="0" y="0"/>
-              <a:ext cx="812800" cy="812800"/>
-            </a:xfrm>
-            <a:custGeom>
-              <a:avLst/>
-              <a:gdLst/>
-              <a:ahLst/>
-              <a:cxnLst/>
-              <a:rect r="r" b="b" t="t" l="l"/>
-              <a:pathLst>
-                <a:path h="812800" w="812800">
-                  <a:moveTo>
-                    <a:pt x="406400" y="0"/>
-                  </a:moveTo>
-                  <a:cubicBezTo>
-                    <a:pt x="181951" y="0"/>
-                    <a:pt x="0" y="181951"/>
-                    <a:pt x="0" y="406400"/>
-                  </a:cubicBezTo>
-                  <a:cubicBezTo>
-                    <a:pt x="0" y="630849"/>
-                    <a:pt x="181951" y="812800"/>
-                    <a:pt x="406400" y="812800"/>
-                  </a:cubicBezTo>
-                  <a:cubicBezTo>
-                    <a:pt x="630849" y="812800"/>
-                    <a:pt x="812800" y="630849"/>
-                    <a:pt x="812800" y="406400"/>
-                  </a:cubicBezTo>
-                  <a:cubicBezTo>
-                    <a:pt x="812800" y="181951"/>
-                    <a:pt x="630849" y="0"/>
-                    <a:pt x="406400" y="0"/>
-                  </a:cubicBezTo>
-                  <a:close/>
-                </a:path>
-              </a:pathLst>
-            </a:custGeom>
-            <a:solidFill>
-              <a:srgbClr val="FFFFFF"/>
-            </a:solidFill>
-          </p:spPr>
-        </p:sp>
-        <p:sp>
-          <p:nvSpPr>
-            <p:cNvPr name="TextBox 4" id="4"/>
-            <p:cNvSpPr txBox="true"/>
-            <p:nvPr/>
-          </p:nvSpPr>
-          <p:spPr>
-            <a:xfrm>
-              <a:off x="76200" y="28575"/>
-              <a:ext cx="660400" cy="708025"/>
-            </a:xfrm>
-            <a:prstGeom prst="rect">
-              <a:avLst/>
-            </a:prstGeom>
-          </p:spPr>
-          <p:txBody>
-            <a:bodyPr anchor="ctr" rtlCol="false" tIns="50800" lIns="50800" bIns="50800" rIns="50800"/>
-            <a:lstStyle/>
-            <a:p>
-              <a:pPr algn="ctr">
-                <a:lnSpc>
-                  <a:spcPts val="3032"/>
-                </a:lnSpc>
-              </a:pPr>
-            </a:p>
-          </p:txBody>
-        </p:sp>
-      </p:grpSp>
       <p:sp>
         <p:nvSpPr>
-          <p:cNvPr name="Freeform 5" id="5"/>
+          <p:cNvPr name="Freeform 2" id="2"/>
           <p:cNvSpPr/>
           <p:nvPr/>
         </p:nvSpPr>
@@ -28479,7 +28234,7 @@
       </p:sp>
       <p:sp>
         <p:nvSpPr>
-          <p:cNvPr name="Freeform 6" id="6"/>
+          <p:cNvPr name="Freeform 3" id="3"/>
           <p:cNvSpPr/>
           <p:nvPr/>
         </p:nvSpPr>
@@ -28532,7 +28287,7 @@
       </p:sp>
       <p:sp>
         <p:nvSpPr>
-          <p:cNvPr name="Freeform 7" id="7"/>
+          <p:cNvPr name="Freeform 4" id="4"/>
           <p:cNvSpPr/>
           <p:nvPr/>
         </p:nvSpPr>
@@ -28584,7 +28339,7 @@
       </p:sp>
       <p:sp>
         <p:nvSpPr>
-          <p:cNvPr name="Freeform 8" id="8"/>
+          <p:cNvPr name="Freeform 5" id="5"/>
           <p:cNvSpPr/>
           <p:nvPr/>
         </p:nvSpPr>
@@ -28634,1617 +28389,16 @@
           </a:blipFill>
         </p:spPr>
       </p:sp>
-      <p:graphicFrame>
-        <p:nvGraphicFramePr>
-          <p:cNvPr name="Table 9" id="9"/>
-          <p:cNvGraphicFramePr>
-            <a:graphicFrameLocks noGrp="true"/>
-          </p:cNvGraphicFramePr>
-          <p:nvPr/>
-        </p:nvGraphicFramePr>
-        <p:xfrm>
-          <a:off x="797362" y="1296065"/>
-          <a:ext cx="6423399" cy="4000500"/>
-        </p:xfrm>
-        <a:graphic>
-          <a:graphicData uri="http://schemas.openxmlformats.org/drawingml/2006/table">
-            <a:tbl>
-              <a:tblPr/>
-              <a:tblGrid>
-                <a:gridCol w="2182786"/>
-                <a:gridCol w="2339392"/>
-                <a:gridCol w="1901222"/>
-              </a:tblGrid>
-              <a:tr h="500062">
-                <a:tc>
-                  <a:txBody>
-                    <a:bodyPr anchor="t" rtlCol="false"/>
-                    <a:lstStyle/>
-                    <a:p>
-                      <a:pPr algn="ctr">
-                        <a:lnSpc>
-                          <a:spcPts val="3360"/>
-                        </a:lnSpc>
-                        <a:defRPr/>
-                      </a:pPr>
-                      <a:r>
-                        <a:rPr lang="en-US" sz="2400" b="true">
-                          <a:solidFill>
-                            <a:srgbClr val="000000"/>
-                          </a:solidFill>
-                          <a:latin typeface="Red Hat Display Bold"/>
-                          <a:ea typeface="Red Hat Display Bold"/>
-                          <a:cs typeface="Red Hat Display Bold"/>
-                          <a:sym typeface="Red Hat Display Bold"/>
-                        </a:rPr>
-                        <a:t>Model</a:t>
-                      </a:r>
-                      <a:endParaRPr lang="en-US" sz="1100"/>
-                    </a:p>
-                  </a:txBody>
-                  <a:tcPr marL="0" marR="0" marT="0" marB="0" anchor="ctr">
-                    <a:lnL cmpd="sng" algn="ctr" cap="flat" w="38100">
-                      <a:solidFill>
-                        <a:srgbClr val="000000"/>
-                      </a:solidFill>
-                      <a:prstDash val="solid"/>
-                      <a:round/>
-                      <a:headEnd type="none" w="med" len="med"/>
-                      <a:tailEnd type="none" w="med" len="med"/>
-                    </a:lnL>
-                    <a:lnR cmpd="sng" algn="ctr" cap="flat" w="38100">
-                      <a:solidFill>
-                        <a:srgbClr val="000000"/>
-                      </a:solidFill>
-                      <a:prstDash val="solid"/>
-                      <a:round/>
-                      <a:headEnd type="none" w="med" len="med"/>
-                      <a:tailEnd type="none" w="med" len="med"/>
-                    </a:lnR>
-                    <a:lnT cmpd="sng" algn="ctr" cap="flat" w="38100">
-                      <a:solidFill>
-                        <a:srgbClr val="000000"/>
-                      </a:solidFill>
-                      <a:prstDash val="solid"/>
-                      <a:round/>
-                      <a:headEnd type="none" w="med" len="med"/>
-                      <a:tailEnd type="none" w="med" len="med"/>
-                    </a:lnT>
-                    <a:lnB cmpd="sng" algn="ctr" cap="flat" w="38100">
-                      <a:solidFill>
-                        <a:srgbClr val="000000"/>
-                      </a:solidFill>
-                      <a:prstDash val="solid"/>
-                      <a:round/>
-                      <a:headEnd type="none" w="med" len="med"/>
-                      <a:tailEnd type="none" w="med" len="med"/>
-                    </a:lnB>
-                  </a:tcPr>
-                </a:tc>
-                <a:tc>
-                  <a:txBody>
-                    <a:bodyPr anchor="t" rtlCol="false"/>
-                    <a:lstStyle/>
-                    <a:p>
-                      <a:pPr algn="ctr">
-                        <a:lnSpc>
-                          <a:spcPts val="3360"/>
-                        </a:lnSpc>
-                        <a:defRPr/>
-                      </a:pPr>
-                      <a:r>
-                        <a:rPr lang="en-US" sz="2400" b="true">
-                          <a:solidFill>
-                            <a:srgbClr val="000000"/>
-                          </a:solidFill>
-                          <a:latin typeface="Red Hat Display Bold"/>
-                          <a:ea typeface="Red Hat Display Bold"/>
-                          <a:cs typeface="Red Hat Display Bold"/>
-                          <a:sym typeface="Red Hat Display Bold"/>
-                        </a:rPr>
-                        <a:t>RMSE</a:t>
-                      </a:r>
-                      <a:endParaRPr lang="en-US" sz="1100"/>
-                    </a:p>
-                  </a:txBody>
-                  <a:tcPr marL="0" marR="0" marT="0" marB="0" anchor="ctr">
-                    <a:lnL cmpd="sng" algn="ctr" cap="flat" w="38100">
-                      <a:solidFill>
-                        <a:srgbClr val="000000"/>
-                      </a:solidFill>
-                      <a:prstDash val="solid"/>
-                      <a:round/>
-                      <a:headEnd type="none" w="med" len="med"/>
-                      <a:tailEnd type="none" w="med" len="med"/>
-                    </a:lnL>
-                    <a:lnR cmpd="sng" algn="ctr" cap="flat" w="38100">
-                      <a:solidFill>
-                        <a:srgbClr val="000000"/>
-                      </a:solidFill>
-                      <a:prstDash val="solid"/>
-                      <a:round/>
-                      <a:headEnd type="none" w="med" len="med"/>
-                      <a:tailEnd type="none" w="med" len="med"/>
-                    </a:lnR>
-                    <a:lnT cmpd="sng" algn="ctr" cap="flat" w="38100">
-                      <a:solidFill>
-                        <a:srgbClr val="000000"/>
-                      </a:solidFill>
-                      <a:prstDash val="solid"/>
-                      <a:round/>
-                      <a:headEnd type="none" w="med" len="med"/>
-                      <a:tailEnd type="none" w="med" len="med"/>
-                    </a:lnT>
-                    <a:lnB cmpd="sng" algn="ctr" cap="flat" w="38100">
-                      <a:solidFill>
-                        <a:srgbClr val="000000"/>
-                      </a:solidFill>
-                      <a:prstDash val="solid"/>
-                      <a:round/>
-                      <a:headEnd type="none" w="med" len="med"/>
-                      <a:tailEnd type="none" w="med" len="med"/>
-                    </a:lnB>
-                  </a:tcPr>
-                </a:tc>
-                <a:tc>
-                  <a:txBody>
-                    <a:bodyPr anchor="t" rtlCol="false"/>
-                    <a:lstStyle/>
-                    <a:p>
-                      <a:pPr algn="ctr">
-                        <a:lnSpc>
-                          <a:spcPts val="3360"/>
-                        </a:lnSpc>
-                        <a:defRPr/>
-                      </a:pPr>
-                      <a:r>
-                        <a:rPr lang="en-US" sz="2400" b="true">
-                          <a:solidFill>
-                            <a:srgbClr val="000000"/>
-                          </a:solidFill>
-                          <a:latin typeface="Red Hat Display Bold"/>
-                          <a:ea typeface="Red Hat Display Bold"/>
-                          <a:cs typeface="Red Hat Display Bold"/>
-                          <a:sym typeface="Red Hat Display Bold"/>
-                        </a:rPr>
-                        <a:t>MAPE</a:t>
-                      </a:r>
-                      <a:endParaRPr lang="en-US" sz="1100"/>
-                    </a:p>
-                  </a:txBody>
-                  <a:tcPr marL="0" marR="0" marT="0" marB="0" anchor="ctr">
-                    <a:lnL cmpd="sng" algn="ctr" cap="flat" w="38100">
-                      <a:solidFill>
-                        <a:srgbClr val="000000"/>
-                      </a:solidFill>
-                      <a:prstDash val="solid"/>
-                      <a:round/>
-                      <a:headEnd type="none" w="med" len="med"/>
-                      <a:tailEnd type="none" w="med" len="med"/>
-                    </a:lnL>
-                    <a:lnR cmpd="sng" algn="ctr" cap="flat" w="38100">
-                      <a:solidFill>
-                        <a:srgbClr val="000000"/>
-                      </a:solidFill>
-                      <a:prstDash val="solid"/>
-                      <a:round/>
-                      <a:headEnd type="none" w="med" len="med"/>
-                      <a:tailEnd type="none" w="med" len="med"/>
-                    </a:lnR>
-                    <a:lnT cmpd="sng" algn="ctr" cap="flat" w="38100">
-                      <a:solidFill>
-                        <a:srgbClr val="000000"/>
-                      </a:solidFill>
-                      <a:prstDash val="solid"/>
-                      <a:round/>
-                      <a:headEnd type="none" w="med" len="med"/>
-                      <a:tailEnd type="none" w="med" len="med"/>
-                    </a:lnT>
-                    <a:lnB cmpd="sng" algn="ctr" cap="flat" w="38100">
-                      <a:solidFill>
-                        <a:srgbClr val="000000"/>
-                      </a:solidFill>
-                      <a:prstDash val="solid"/>
-                      <a:round/>
-                      <a:headEnd type="none" w="med" len="med"/>
-                      <a:tailEnd type="none" w="med" len="med"/>
-                    </a:lnB>
-                  </a:tcPr>
-                </a:tc>
-              </a:tr>
-              <a:tr h="500062">
-                <a:tc>
-                  <a:txBody>
-                    <a:bodyPr anchor="t" rtlCol="false"/>
-                    <a:lstStyle/>
-                    <a:p>
-                      <a:pPr algn="ctr">
-                        <a:lnSpc>
-                          <a:spcPts val="3360"/>
-                        </a:lnSpc>
-                        <a:defRPr/>
-                      </a:pPr>
-                      <a:r>
-                        <a:rPr lang="en-US" sz="2400" b="true">
-                          <a:solidFill>
-                            <a:srgbClr val="000000"/>
-                          </a:solidFill>
-                          <a:latin typeface="Red Hat Display Bold"/>
-                          <a:ea typeface="Red Hat Display Bold"/>
-                          <a:cs typeface="Red Hat Display Bold"/>
-                          <a:sym typeface="Red Hat Display Bold"/>
-                        </a:rPr>
-                        <a:t>ETS Damped</a:t>
-                      </a:r>
-                      <a:endParaRPr lang="en-US" sz="1100"/>
-                    </a:p>
-                  </a:txBody>
-                  <a:tcPr marL="0" marR="0" marT="0" marB="0" anchor="ctr">
-                    <a:lnL cmpd="sng" algn="ctr" cap="flat" w="38100">
-                      <a:solidFill>
-                        <a:srgbClr val="000000"/>
-                      </a:solidFill>
-                      <a:prstDash val="solid"/>
-                      <a:round/>
-                      <a:headEnd type="none" w="med" len="med"/>
-                      <a:tailEnd type="none" w="med" len="med"/>
-                    </a:lnL>
-                    <a:lnR cmpd="sng" algn="ctr" cap="flat" w="38100">
-                      <a:solidFill>
-                        <a:srgbClr val="000000"/>
-                      </a:solidFill>
-                      <a:prstDash val="solid"/>
-                      <a:round/>
-                      <a:headEnd type="none" w="med" len="med"/>
-                      <a:tailEnd type="none" w="med" len="med"/>
-                    </a:lnR>
-                    <a:lnT cmpd="sng" algn="ctr" cap="flat" w="38100">
-                      <a:solidFill>
-                        <a:srgbClr val="000000"/>
-                      </a:solidFill>
-                      <a:prstDash val="solid"/>
-                      <a:round/>
-                      <a:headEnd type="none" w="med" len="med"/>
-                      <a:tailEnd type="none" w="med" len="med"/>
-                    </a:lnT>
-                    <a:lnB cmpd="sng" algn="ctr" cap="flat" w="38100">
-                      <a:solidFill>
-                        <a:srgbClr val="000000"/>
-                      </a:solidFill>
-                      <a:prstDash val="solid"/>
-                      <a:round/>
-                      <a:headEnd type="none" w="med" len="med"/>
-                      <a:tailEnd type="none" w="med" len="med"/>
-                    </a:lnB>
-                  </a:tcPr>
-                </a:tc>
-                <a:tc>
-                  <a:txBody>
-                    <a:bodyPr anchor="t" rtlCol="false"/>
-                    <a:lstStyle/>
-                    <a:p>
-                      <a:pPr algn="ctr">
-                        <a:lnSpc>
-                          <a:spcPts val="3360"/>
-                        </a:lnSpc>
-                        <a:defRPr/>
-                      </a:pPr>
-                      <a:r>
-                        <a:rPr lang="en-US" sz="2400" b="true">
-                          <a:solidFill>
-                            <a:srgbClr val="000000"/>
-                          </a:solidFill>
-                          <a:latin typeface="Red Hat Display Bold"/>
-                          <a:ea typeface="Red Hat Display Bold"/>
-                          <a:cs typeface="Red Hat Display Bold"/>
-                          <a:sym typeface="Red Hat Display Bold"/>
-                        </a:rPr>
-                        <a:t>1.939,13</a:t>
-                      </a:r>
-                      <a:endParaRPr lang="en-US" sz="1100"/>
-                    </a:p>
-                  </a:txBody>
-                  <a:tcPr marL="0" marR="0" marT="0" marB="0" anchor="ctr">
-                    <a:lnL cmpd="sng" algn="ctr" cap="flat" w="38100">
-                      <a:solidFill>
-                        <a:srgbClr val="000000"/>
-                      </a:solidFill>
-                      <a:prstDash val="solid"/>
-                      <a:round/>
-                      <a:headEnd type="none" w="med" len="med"/>
-                      <a:tailEnd type="none" w="med" len="med"/>
-                    </a:lnL>
-                    <a:lnR cmpd="sng" algn="ctr" cap="flat" w="38100">
-                      <a:solidFill>
-                        <a:srgbClr val="000000"/>
-                      </a:solidFill>
-                      <a:prstDash val="solid"/>
-                      <a:round/>
-                      <a:headEnd type="none" w="med" len="med"/>
-                      <a:tailEnd type="none" w="med" len="med"/>
-                    </a:lnR>
-                    <a:lnT cmpd="sng" algn="ctr" cap="flat" w="38100">
-                      <a:solidFill>
-                        <a:srgbClr val="000000"/>
-                      </a:solidFill>
-                      <a:prstDash val="solid"/>
-                      <a:round/>
-                      <a:headEnd type="none" w="med" len="med"/>
-                      <a:tailEnd type="none" w="med" len="med"/>
-                    </a:lnT>
-                    <a:lnB cmpd="sng" algn="ctr" cap="flat" w="38100">
-                      <a:solidFill>
-                        <a:srgbClr val="000000"/>
-                      </a:solidFill>
-                      <a:prstDash val="solid"/>
-                      <a:round/>
-                      <a:headEnd type="none" w="med" len="med"/>
-                      <a:tailEnd type="none" w="med" len="med"/>
-                    </a:lnB>
-                  </a:tcPr>
-                </a:tc>
-                <a:tc>
-                  <a:txBody>
-                    <a:bodyPr anchor="t" rtlCol="false"/>
-                    <a:lstStyle/>
-                    <a:p>
-                      <a:pPr algn="ctr">
-                        <a:lnSpc>
-                          <a:spcPts val="3360"/>
-                        </a:lnSpc>
-                        <a:defRPr/>
-                      </a:pPr>
-                      <a:r>
-                        <a:rPr lang="en-US" sz="2400" b="true">
-                          <a:solidFill>
-                            <a:srgbClr val="000000"/>
-                          </a:solidFill>
-                          <a:latin typeface="Red Hat Display Bold"/>
-                          <a:ea typeface="Red Hat Display Bold"/>
-                          <a:cs typeface="Red Hat Display Bold"/>
-                          <a:sym typeface="Red Hat Display Bold"/>
-                        </a:rPr>
-                        <a:t>2,10%</a:t>
-                      </a:r>
-                      <a:endParaRPr lang="en-US" sz="1100"/>
-                    </a:p>
-                  </a:txBody>
-                  <a:tcPr marL="0" marR="0" marT="0" marB="0" anchor="ctr">
-                    <a:lnL cmpd="sng" algn="ctr" cap="flat" w="38100">
-                      <a:solidFill>
-                        <a:srgbClr val="000000"/>
-                      </a:solidFill>
-                      <a:prstDash val="solid"/>
-                      <a:round/>
-                      <a:headEnd type="none" w="med" len="med"/>
-                      <a:tailEnd type="none" w="med" len="med"/>
-                    </a:lnL>
-                    <a:lnR cmpd="sng" algn="ctr" cap="flat" w="38100">
-                      <a:solidFill>
-                        <a:srgbClr val="000000"/>
-                      </a:solidFill>
-                      <a:prstDash val="solid"/>
-                      <a:round/>
-                      <a:headEnd type="none" w="med" len="med"/>
-                      <a:tailEnd type="none" w="med" len="med"/>
-                    </a:lnR>
-                    <a:lnT cmpd="sng" algn="ctr" cap="flat" w="38100">
-                      <a:solidFill>
-                        <a:srgbClr val="000000"/>
-                      </a:solidFill>
-                      <a:prstDash val="solid"/>
-                      <a:round/>
-                      <a:headEnd type="none" w="med" len="med"/>
-                      <a:tailEnd type="none" w="med" len="med"/>
-                    </a:lnT>
-                    <a:lnB cmpd="sng" algn="ctr" cap="flat" w="38100">
-                      <a:solidFill>
-                        <a:srgbClr val="000000"/>
-                      </a:solidFill>
-                      <a:prstDash val="solid"/>
-                      <a:round/>
-                      <a:headEnd type="none" w="med" len="med"/>
-                      <a:tailEnd type="none" w="med" len="med"/>
-                    </a:lnB>
-                  </a:tcPr>
-                </a:tc>
-              </a:tr>
-              <a:tr h="500062">
-                <a:tc>
-                  <a:txBody>
-                    <a:bodyPr anchor="t" rtlCol="false"/>
-                    <a:lstStyle/>
-                    <a:p>
-                      <a:pPr algn="ctr">
-                        <a:lnSpc>
-                          <a:spcPts val="3360"/>
-                        </a:lnSpc>
-                        <a:defRPr/>
-                      </a:pPr>
-                      <a:r>
-                        <a:rPr lang="en-US" sz="2400">
-                          <a:solidFill>
-                            <a:srgbClr val="000000"/>
-                          </a:solidFill>
-                          <a:latin typeface="Red Hat Display"/>
-                          <a:ea typeface="Red Hat Display"/>
-                          <a:cs typeface="Red Hat Display"/>
-                          <a:sym typeface="Red Hat Display"/>
-                        </a:rPr>
-                        <a:t>Naive</a:t>
-                      </a:r>
-                      <a:endParaRPr lang="en-US" sz="1100"/>
-                    </a:p>
-                  </a:txBody>
-                  <a:tcPr marL="0" marR="0" marT="0" marB="0" anchor="ctr">
-                    <a:lnL cmpd="sng" algn="ctr" cap="flat" w="38100">
-                      <a:solidFill>
-                        <a:srgbClr val="000000"/>
-                      </a:solidFill>
-                      <a:prstDash val="solid"/>
-                      <a:round/>
-                      <a:headEnd type="none" w="med" len="med"/>
-                      <a:tailEnd type="none" w="med" len="med"/>
-                    </a:lnL>
-                    <a:lnR cmpd="sng" algn="ctr" cap="flat" w="38100">
-                      <a:solidFill>
-                        <a:srgbClr val="000000"/>
-                      </a:solidFill>
-                      <a:prstDash val="solid"/>
-                      <a:round/>
-                      <a:headEnd type="none" w="med" len="med"/>
-                      <a:tailEnd type="none" w="med" len="med"/>
-                    </a:lnR>
-                    <a:lnT cmpd="sng" algn="ctr" cap="flat" w="38100">
-                      <a:solidFill>
-                        <a:srgbClr val="000000"/>
-                      </a:solidFill>
-                      <a:prstDash val="solid"/>
-                      <a:round/>
-                      <a:headEnd type="none" w="med" len="med"/>
-                      <a:tailEnd type="none" w="med" len="med"/>
-                    </a:lnT>
-                    <a:lnB cmpd="sng" algn="ctr" cap="flat" w="38100">
-                      <a:solidFill>
-                        <a:srgbClr val="000000"/>
-                      </a:solidFill>
-                      <a:prstDash val="solid"/>
-                      <a:round/>
-                      <a:headEnd type="none" w="med" len="med"/>
-                      <a:tailEnd type="none" w="med" len="med"/>
-                    </a:lnB>
-                  </a:tcPr>
-                </a:tc>
-                <a:tc>
-                  <a:txBody>
-                    <a:bodyPr anchor="t" rtlCol="false"/>
-                    <a:lstStyle/>
-                    <a:p>
-                      <a:pPr algn="ctr">
-                        <a:lnSpc>
-                          <a:spcPts val="3360"/>
-                        </a:lnSpc>
-                        <a:defRPr/>
-                      </a:pPr>
-                      <a:r>
-                        <a:rPr lang="en-US" sz="2400">
-                          <a:solidFill>
-                            <a:srgbClr val="000000"/>
-                          </a:solidFill>
-                          <a:latin typeface="Red Hat Display"/>
-                          <a:ea typeface="Red Hat Display"/>
-                          <a:cs typeface="Red Hat Display"/>
-                          <a:sym typeface="Red Hat Display"/>
-                        </a:rPr>
-                        <a:t>1.939,85</a:t>
-                      </a:r>
-                      <a:endParaRPr lang="en-US" sz="1100"/>
-                    </a:p>
-                  </a:txBody>
-                  <a:tcPr marL="0" marR="0" marT="0" marB="0" anchor="ctr">
-                    <a:lnL cmpd="sng" algn="ctr" cap="flat" w="38100">
-                      <a:solidFill>
-                        <a:srgbClr val="000000"/>
-                      </a:solidFill>
-                      <a:prstDash val="solid"/>
-                      <a:round/>
-                      <a:headEnd type="none" w="med" len="med"/>
-                      <a:tailEnd type="none" w="med" len="med"/>
-                    </a:lnL>
-                    <a:lnR cmpd="sng" algn="ctr" cap="flat" w="38100">
-                      <a:solidFill>
-                        <a:srgbClr val="000000"/>
-                      </a:solidFill>
-                      <a:prstDash val="solid"/>
-                      <a:round/>
-                      <a:headEnd type="none" w="med" len="med"/>
-                      <a:tailEnd type="none" w="med" len="med"/>
-                    </a:lnR>
-                    <a:lnT cmpd="sng" algn="ctr" cap="flat" w="38100">
-                      <a:solidFill>
-                        <a:srgbClr val="000000"/>
-                      </a:solidFill>
-                      <a:prstDash val="solid"/>
-                      <a:round/>
-                      <a:headEnd type="none" w="med" len="med"/>
-                      <a:tailEnd type="none" w="med" len="med"/>
-                    </a:lnT>
-                    <a:lnB cmpd="sng" algn="ctr" cap="flat" w="38100">
-                      <a:solidFill>
-                        <a:srgbClr val="000000"/>
-                      </a:solidFill>
-                      <a:prstDash val="solid"/>
-                      <a:round/>
-                      <a:headEnd type="none" w="med" len="med"/>
-                      <a:tailEnd type="none" w="med" len="med"/>
-                    </a:lnB>
-                  </a:tcPr>
-                </a:tc>
-                <a:tc>
-                  <a:txBody>
-                    <a:bodyPr anchor="t" rtlCol="false"/>
-                    <a:lstStyle/>
-                    <a:p>
-                      <a:pPr algn="ctr">
-                        <a:lnSpc>
-                          <a:spcPts val="3360"/>
-                        </a:lnSpc>
-                        <a:defRPr/>
-                      </a:pPr>
-                      <a:r>
-                        <a:rPr lang="en-US" sz="2400">
-                          <a:solidFill>
-                            <a:srgbClr val="000000"/>
-                          </a:solidFill>
-                          <a:latin typeface="Red Hat Display"/>
-                          <a:ea typeface="Red Hat Display"/>
-                          <a:cs typeface="Red Hat Display"/>
-                          <a:sym typeface="Red Hat Display"/>
-                        </a:rPr>
-                        <a:t>2,11%</a:t>
-                      </a:r>
-                      <a:endParaRPr lang="en-US" sz="1100"/>
-                    </a:p>
-                  </a:txBody>
-                  <a:tcPr marL="0" marR="0" marT="0" marB="0" anchor="ctr">
-                    <a:lnL cmpd="sng" algn="ctr" cap="flat" w="38100">
-                      <a:solidFill>
-                        <a:srgbClr val="000000"/>
-                      </a:solidFill>
-                      <a:prstDash val="solid"/>
-                      <a:round/>
-                      <a:headEnd type="none" w="med" len="med"/>
-                      <a:tailEnd type="none" w="med" len="med"/>
-                    </a:lnL>
-                    <a:lnR cmpd="sng" algn="ctr" cap="flat" w="38100">
-                      <a:solidFill>
-                        <a:srgbClr val="000000"/>
-                      </a:solidFill>
-                      <a:prstDash val="solid"/>
-                      <a:round/>
-                      <a:headEnd type="none" w="med" len="med"/>
-                      <a:tailEnd type="none" w="med" len="med"/>
-                    </a:lnR>
-                    <a:lnT cmpd="sng" algn="ctr" cap="flat" w="38100">
-                      <a:solidFill>
-                        <a:srgbClr val="000000"/>
-                      </a:solidFill>
-                      <a:prstDash val="solid"/>
-                      <a:round/>
-                      <a:headEnd type="none" w="med" len="med"/>
-                      <a:tailEnd type="none" w="med" len="med"/>
-                    </a:lnT>
-                    <a:lnB cmpd="sng" algn="ctr" cap="flat" w="38100">
-                      <a:solidFill>
-                        <a:srgbClr val="000000"/>
-                      </a:solidFill>
-                      <a:prstDash val="solid"/>
-                      <a:round/>
-                      <a:headEnd type="none" w="med" len="med"/>
-                      <a:tailEnd type="none" w="med" len="med"/>
-                    </a:lnB>
-                  </a:tcPr>
-                </a:tc>
-              </a:tr>
-              <a:tr h="500062">
-                <a:tc>
-                  <a:txBody>
-                    <a:bodyPr anchor="t" rtlCol="false"/>
-                    <a:lstStyle/>
-                    <a:p>
-                      <a:pPr algn="ctr">
-                        <a:lnSpc>
-                          <a:spcPts val="3360"/>
-                        </a:lnSpc>
-                        <a:defRPr/>
-                      </a:pPr>
-                      <a:r>
-                        <a:rPr lang="en-US" sz="2400">
-                          <a:solidFill>
-                            <a:srgbClr val="000000"/>
-                          </a:solidFill>
-                          <a:latin typeface="Red Hat Display"/>
-                          <a:ea typeface="Red Hat Display"/>
-                          <a:cs typeface="Red Hat Display"/>
-                          <a:sym typeface="Red Hat Display"/>
-                        </a:rPr>
-                        <a:t>SARIMA</a:t>
-                      </a:r>
-                      <a:endParaRPr lang="en-US" sz="1100"/>
-                    </a:p>
-                  </a:txBody>
-                  <a:tcPr marL="0" marR="0" marT="0" marB="0" anchor="ctr">
-                    <a:lnL cmpd="sng" algn="ctr" cap="flat" w="38100">
-                      <a:solidFill>
-                        <a:srgbClr val="000000"/>
-                      </a:solidFill>
-                      <a:prstDash val="solid"/>
-                      <a:round/>
-                      <a:headEnd type="none" w="med" len="med"/>
-                      <a:tailEnd type="none" w="med" len="med"/>
-                    </a:lnL>
-                    <a:lnR cmpd="sng" algn="ctr" cap="flat" w="38100">
-                      <a:solidFill>
-                        <a:srgbClr val="000000"/>
-                      </a:solidFill>
-                      <a:prstDash val="solid"/>
-                      <a:round/>
-                      <a:headEnd type="none" w="med" len="med"/>
-                      <a:tailEnd type="none" w="med" len="med"/>
-                    </a:lnR>
-                    <a:lnT cmpd="sng" algn="ctr" cap="flat" w="38100">
-                      <a:solidFill>
-                        <a:srgbClr val="000000"/>
-                      </a:solidFill>
-                      <a:prstDash val="solid"/>
-                      <a:round/>
-                      <a:headEnd type="none" w="med" len="med"/>
-                      <a:tailEnd type="none" w="med" len="med"/>
-                    </a:lnT>
-                    <a:lnB cmpd="sng" algn="ctr" cap="flat" w="38100">
-                      <a:solidFill>
-                        <a:srgbClr val="000000"/>
-                      </a:solidFill>
-                      <a:prstDash val="solid"/>
-                      <a:round/>
-                      <a:headEnd type="none" w="med" len="med"/>
-                      <a:tailEnd type="none" w="med" len="med"/>
-                    </a:lnB>
-                  </a:tcPr>
-                </a:tc>
-                <a:tc>
-                  <a:txBody>
-                    <a:bodyPr anchor="t" rtlCol="false"/>
-                    <a:lstStyle/>
-                    <a:p>
-                      <a:pPr algn="ctr">
-                        <a:lnSpc>
-                          <a:spcPts val="3360"/>
-                        </a:lnSpc>
-                        <a:defRPr/>
-                      </a:pPr>
-                      <a:r>
-                        <a:rPr lang="en-US" sz="2400">
-                          <a:solidFill>
-                            <a:srgbClr val="000000"/>
-                          </a:solidFill>
-                          <a:latin typeface="Red Hat Display"/>
-                          <a:ea typeface="Red Hat Display"/>
-                          <a:cs typeface="Red Hat Display"/>
-                          <a:sym typeface="Red Hat Display"/>
-                        </a:rPr>
-                        <a:t>1.983,50</a:t>
-                      </a:r>
-                      <a:endParaRPr lang="en-US" sz="1100"/>
-                    </a:p>
-                  </a:txBody>
-                  <a:tcPr marL="0" marR="0" marT="0" marB="0" anchor="ctr">
-                    <a:lnL cmpd="sng" algn="ctr" cap="flat" w="38100">
-                      <a:solidFill>
-                        <a:srgbClr val="000000"/>
-                      </a:solidFill>
-                      <a:prstDash val="solid"/>
-                      <a:round/>
-                      <a:headEnd type="none" w="med" len="med"/>
-                      <a:tailEnd type="none" w="med" len="med"/>
-                    </a:lnL>
-                    <a:lnR cmpd="sng" algn="ctr" cap="flat" w="38100">
-                      <a:solidFill>
-                        <a:srgbClr val="000000"/>
-                      </a:solidFill>
-                      <a:prstDash val="solid"/>
-                      <a:round/>
-                      <a:headEnd type="none" w="med" len="med"/>
-                      <a:tailEnd type="none" w="med" len="med"/>
-                    </a:lnR>
-                    <a:lnT cmpd="sng" algn="ctr" cap="flat" w="38100">
-                      <a:solidFill>
-                        <a:srgbClr val="000000"/>
-                      </a:solidFill>
-                      <a:prstDash val="solid"/>
-                      <a:round/>
-                      <a:headEnd type="none" w="med" len="med"/>
-                      <a:tailEnd type="none" w="med" len="med"/>
-                    </a:lnT>
-                    <a:lnB cmpd="sng" algn="ctr" cap="flat" w="38100">
-                      <a:solidFill>
-                        <a:srgbClr val="000000"/>
-                      </a:solidFill>
-                      <a:prstDash val="solid"/>
-                      <a:round/>
-                      <a:headEnd type="none" w="med" len="med"/>
-                      <a:tailEnd type="none" w="med" len="med"/>
-                    </a:lnB>
-                  </a:tcPr>
-                </a:tc>
-                <a:tc>
-                  <a:txBody>
-                    <a:bodyPr anchor="t" rtlCol="false"/>
-                    <a:lstStyle/>
-                    <a:p>
-                      <a:pPr algn="ctr">
-                        <a:lnSpc>
-                          <a:spcPts val="3360"/>
-                        </a:lnSpc>
-                        <a:defRPr/>
-                      </a:pPr>
-                      <a:r>
-                        <a:rPr lang="en-US" sz="2400">
-                          <a:solidFill>
-                            <a:srgbClr val="000000"/>
-                          </a:solidFill>
-                          <a:latin typeface="Red Hat Display"/>
-                          <a:ea typeface="Red Hat Display"/>
-                          <a:cs typeface="Red Hat Display"/>
-                          <a:sym typeface="Red Hat Display"/>
-                        </a:rPr>
-                        <a:t>2,19%</a:t>
-                      </a:r>
-                      <a:endParaRPr lang="en-US" sz="1100"/>
-                    </a:p>
-                  </a:txBody>
-                  <a:tcPr marL="0" marR="0" marT="0" marB="0" anchor="ctr">
-                    <a:lnL cmpd="sng" algn="ctr" cap="flat" w="38100">
-                      <a:solidFill>
-                        <a:srgbClr val="000000"/>
-                      </a:solidFill>
-                      <a:prstDash val="solid"/>
-                      <a:round/>
-                      <a:headEnd type="none" w="med" len="med"/>
-                      <a:tailEnd type="none" w="med" len="med"/>
-                    </a:lnL>
-                    <a:lnR cmpd="sng" algn="ctr" cap="flat" w="38100">
-                      <a:solidFill>
-                        <a:srgbClr val="000000"/>
-                      </a:solidFill>
-                      <a:prstDash val="solid"/>
-                      <a:round/>
-                      <a:headEnd type="none" w="med" len="med"/>
-                      <a:tailEnd type="none" w="med" len="med"/>
-                    </a:lnR>
-                    <a:lnT cmpd="sng" algn="ctr" cap="flat" w="38100">
-                      <a:solidFill>
-                        <a:srgbClr val="000000"/>
-                      </a:solidFill>
-                      <a:prstDash val="solid"/>
-                      <a:round/>
-                      <a:headEnd type="none" w="med" len="med"/>
-                      <a:tailEnd type="none" w="med" len="med"/>
-                    </a:lnT>
-                    <a:lnB cmpd="sng" algn="ctr" cap="flat" w="38100">
-                      <a:solidFill>
-                        <a:srgbClr val="000000"/>
-                      </a:solidFill>
-                      <a:prstDash val="solid"/>
-                      <a:round/>
-                      <a:headEnd type="none" w="med" len="med"/>
-                      <a:tailEnd type="none" w="med" len="med"/>
-                    </a:lnB>
-                  </a:tcPr>
-                </a:tc>
-              </a:tr>
-              <a:tr h="500062">
-                <a:tc>
-                  <a:txBody>
-                    <a:bodyPr anchor="t" rtlCol="false"/>
-                    <a:lstStyle/>
-                    <a:p>
-                      <a:pPr algn="ctr">
-                        <a:lnSpc>
-                          <a:spcPts val="3360"/>
-                        </a:lnSpc>
-                        <a:defRPr/>
-                      </a:pPr>
-                      <a:r>
-                        <a:rPr lang="en-US" sz="2400">
-                          <a:solidFill>
-                            <a:srgbClr val="000000"/>
-                          </a:solidFill>
-                          <a:latin typeface="Red Hat Display"/>
-                          <a:ea typeface="Red Hat Display"/>
-                          <a:cs typeface="Red Hat Display"/>
-                          <a:sym typeface="Red Hat Display"/>
-                        </a:rPr>
-                        <a:t>ETS</a:t>
-                      </a:r>
-                      <a:endParaRPr lang="en-US" sz="1100"/>
-                    </a:p>
-                  </a:txBody>
-                  <a:tcPr marL="0" marR="0" marT="0" marB="0" anchor="ctr">
-                    <a:lnL cmpd="sng" algn="ctr" cap="flat" w="38100">
-                      <a:solidFill>
-                        <a:srgbClr val="000000"/>
-                      </a:solidFill>
-                      <a:prstDash val="solid"/>
-                      <a:round/>
-                      <a:headEnd type="none" w="med" len="med"/>
-                      <a:tailEnd type="none" w="med" len="med"/>
-                    </a:lnL>
-                    <a:lnR cmpd="sng" algn="ctr" cap="flat" w="38100">
-                      <a:solidFill>
-                        <a:srgbClr val="000000"/>
-                      </a:solidFill>
-                      <a:prstDash val="solid"/>
-                      <a:round/>
-                      <a:headEnd type="none" w="med" len="med"/>
-                      <a:tailEnd type="none" w="med" len="med"/>
-                    </a:lnR>
-                    <a:lnT cmpd="sng" algn="ctr" cap="flat" w="38100">
-                      <a:solidFill>
-                        <a:srgbClr val="000000"/>
-                      </a:solidFill>
-                      <a:prstDash val="solid"/>
-                      <a:round/>
-                      <a:headEnd type="none" w="med" len="med"/>
-                      <a:tailEnd type="none" w="med" len="med"/>
-                    </a:lnT>
-                    <a:lnB cmpd="sng" algn="ctr" cap="flat" w="38100">
-                      <a:solidFill>
-                        <a:srgbClr val="000000"/>
-                      </a:solidFill>
-                      <a:prstDash val="solid"/>
-                      <a:round/>
-                      <a:headEnd type="none" w="med" len="med"/>
-                      <a:tailEnd type="none" w="med" len="med"/>
-                    </a:lnB>
-                  </a:tcPr>
-                </a:tc>
-                <a:tc>
-                  <a:txBody>
-                    <a:bodyPr anchor="t" rtlCol="false"/>
-                    <a:lstStyle/>
-                    <a:p>
-                      <a:pPr algn="ctr">
-                        <a:lnSpc>
-                          <a:spcPts val="3360"/>
-                        </a:lnSpc>
-                        <a:defRPr/>
-                      </a:pPr>
-                      <a:r>
-                        <a:rPr lang="en-US" sz="2400">
-                          <a:solidFill>
-                            <a:srgbClr val="000000"/>
-                          </a:solidFill>
-                          <a:latin typeface="Red Hat Display"/>
-                          <a:ea typeface="Red Hat Display"/>
-                          <a:cs typeface="Red Hat Display"/>
-                          <a:sym typeface="Red Hat Display"/>
-                        </a:rPr>
-                        <a:t>1.986,72</a:t>
-                      </a:r>
-                      <a:endParaRPr lang="en-US" sz="1100"/>
-                    </a:p>
-                  </a:txBody>
-                  <a:tcPr marL="0" marR="0" marT="0" marB="0" anchor="ctr">
-                    <a:lnL cmpd="sng" algn="ctr" cap="flat" w="38100">
-                      <a:solidFill>
-                        <a:srgbClr val="000000"/>
-                      </a:solidFill>
-                      <a:prstDash val="solid"/>
-                      <a:round/>
-                      <a:headEnd type="none" w="med" len="med"/>
-                      <a:tailEnd type="none" w="med" len="med"/>
-                    </a:lnL>
-                    <a:lnR cmpd="sng" algn="ctr" cap="flat" w="38100">
-                      <a:solidFill>
-                        <a:srgbClr val="000000"/>
-                      </a:solidFill>
-                      <a:prstDash val="solid"/>
-                      <a:round/>
-                      <a:headEnd type="none" w="med" len="med"/>
-                      <a:tailEnd type="none" w="med" len="med"/>
-                    </a:lnR>
-                    <a:lnT cmpd="sng" algn="ctr" cap="flat" w="38100">
-                      <a:solidFill>
-                        <a:srgbClr val="000000"/>
-                      </a:solidFill>
-                      <a:prstDash val="solid"/>
-                      <a:round/>
-                      <a:headEnd type="none" w="med" len="med"/>
-                      <a:tailEnd type="none" w="med" len="med"/>
-                    </a:lnT>
-                    <a:lnB cmpd="sng" algn="ctr" cap="flat" w="38100">
-                      <a:solidFill>
-                        <a:srgbClr val="000000"/>
-                      </a:solidFill>
-                      <a:prstDash val="solid"/>
-                      <a:round/>
-                      <a:headEnd type="none" w="med" len="med"/>
-                      <a:tailEnd type="none" w="med" len="med"/>
-                    </a:lnB>
-                  </a:tcPr>
-                </a:tc>
-                <a:tc>
-                  <a:txBody>
-                    <a:bodyPr anchor="t" rtlCol="false"/>
-                    <a:lstStyle/>
-                    <a:p>
-                      <a:pPr algn="ctr">
-                        <a:lnSpc>
-                          <a:spcPts val="3360"/>
-                        </a:lnSpc>
-                        <a:defRPr/>
-                      </a:pPr>
-                      <a:r>
-                        <a:rPr lang="en-US" sz="2400">
-                          <a:solidFill>
-                            <a:srgbClr val="000000"/>
-                          </a:solidFill>
-                          <a:latin typeface="Red Hat Display"/>
-                          <a:ea typeface="Red Hat Display"/>
-                          <a:cs typeface="Red Hat Display"/>
-                          <a:sym typeface="Red Hat Display"/>
-                        </a:rPr>
-                        <a:t>2,08%</a:t>
-                      </a:r>
-                      <a:endParaRPr lang="en-US" sz="1100"/>
-                    </a:p>
-                  </a:txBody>
-                  <a:tcPr marL="0" marR="0" marT="0" marB="0" anchor="ctr">
-                    <a:lnL cmpd="sng" algn="ctr" cap="flat" w="38100">
-                      <a:solidFill>
-                        <a:srgbClr val="000000"/>
-                      </a:solidFill>
-                      <a:prstDash val="solid"/>
-                      <a:round/>
-                      <a:headEnd type="none" w="med" len="med"/>
-                      <a:tailEnd type="none" w="med" len="med"/>
-                    </a:lnL>
-                    <a:lnR cmpd="sng" algn="ctr" cap="flat" w="38100">
-                      <a:solidFill>
-                        <a:srgbClr val="000000"/>
-                      </a:solidFill>
-                      <a:prstDash val="solid"/>
-                      <a:round/>
-                      <a:headEnd type="none" w="med" len="med"/>
-                      <a:tailEnd type="none" w="med" len="med"/>
-                    </a:lnR>
-                    <a:lnT cmpd="sng" algn="ctr" cap="flat" w="38100">
-                      <a:solidFill>
-                        <a:srgbClr val="000000"/>
-                      </a:solidFill>
-                      <a:prstDash val="solid"/>
-                      <a:round/>
-                      <a:headEnd type="none" w="med" len="med"/>
-                      <a:tailEnd type="none" w="med" len="med"/>
-                    </a:lnT>
-                    <a:lnB cmpd="sng" algn="ctr" cap="flat" w="38100">
-                      <a:solidFill>
-                        <a:srgbClr val="000000"/>
-                      </a:solidFill>
-                      <a:prstDash val="solid"/>
-                      <a:round/>
-                      <a:headEnd type="none" w="med" len="med"/>
-                      <a:tailEnd type="none" w="med" len="med"/>
-                    </a:lnB>
-                  </a:tcPr>
-                </a:tc>
-              </a:tr>
-              <a:tr h="500062">
-                <a:tc>
-                  <a:txBody>
-                    <a:bodyPr anchor="t" rtlCol="false"/>
-                    <a:lstStyle/>
-                    <a:p>
-                      <a:pPr algn="ctr">
-                        <a:lnSpc>
-                          <a:spcPts val="3360"/>
-                        </a:lnSpc>
-                        <a:defRPr/>
-                      </a:pPr>
-                      <a:r>
-                        <a:rPr lang="en-US" sz="2400">
-                          <a:solidFill>
-                            <a:srgbClr val="000000"/>
-                          </a:solidFill>
-                          <a:latin typeface="Red Hat Display"/>
-                          <a:ea typeface="Red Hat Display"/>
-                          <a:cs typeface="Red Hat Display"/>
-                          <a:sym typeface="Red Hat Display"/>
-                        </a:rPr>
-                        <a:t>Drift</a:t>
-                      </a:r>
-                      <a:endParaRPr lang="en-US" sz="1100"/>
-                    </a:p>
-                  </a:txBody>
-                  <a:tcPr marL="0" marR="0" marT="0" marB="0" anchor="ctr">
-                    <a:lnL cmpd="sng" algn="ctr" cap="flat" w="38100">
-                      <a:solidFill>
-                        <a:srgbClr val="000000"/>
-                      </a:solidFill>
-                      <a:prstDash val="solid"/>
-                      <a:round/>
-                      <a:headEnd type="none" w="med" len="med"/>
-                      <a:tailEnd type="none" w="med" len="med"/>
-                    </a:lnL>
-                    <a:lnR cmpd="sng" algn="ctr" cap="flat" w="38100">
-                      <a:solidFill>
-                        <a:srgbClr val="000000"/>
-                      </a:solidFill>
-                      <a:prstDash val="solid"/>
-                      <a:round/>
-                      <a:headEnd type="none" w="med" len="med"/>
-                      <a:tailEnd type="none" w="med" len="med"/>
-                    </a:lnR>
-                    <a:lnT cmpd="sng" algn="ctr" cap="flat" w="38100">
-                      <a:solidFill>
-                        <a:srgbClr val="000000"/>
-                      </a:solidFill>
-                      <a:prstDash val="solid"/>
-                      <a:round/>
-                      <a:headEnd type="none" w="med" len="med"/>
-                      <a:tailEnd type="none" w="med" len="med"/>
-                    </a:lnT>
-                    <a:lnB cmpd="sng" algn="ctr" cap="flat" w="38100">
-                      <a:solidFill>
-                        <a:srgbClr val="000000"/>
-                      </a:solidFill>
-                      <a:prstDash val="solid"/>
-                      <a:round/>
-                      <a:headEnd type="none" w="med" len="med"/>
-                      <a:tailEnd type="none" w="med" len="med"/>
-                    </a:lnB>
-                  </a:tcPr>
-                </a:tc>
-                <a:tc>
-                  <a:txBody>
-                    <a:bodyPr anchor="t" rtlCol="false"/>
-                    <a:lstStyle/>
-                    <a:p>
-                      <a:pPr algn="ctr">
-                        <a:lnSpc>
-                          <a:spcPts val="3360"/>
-                        </a:lnSpc>
-                        <a:defRPr/>
-                      </a:pPr>
-                      <a:r>
-                        <a:rPr lang="en-US" sz="2400">
-                          <a:solidFill>
-                            <a:srgbClr val="000000"/>
-                          </a:solidFill>
-                          <a:latin typeface="Red Hat Display"/>
-                          <a:ea typeface="Red Hat Display"/>
-                          <a:cs typeface="Red Hat Display"/>
-                          <a:sym typeface="Red Hat Display"/>
-                        </a:rPr>
-                        <a:t>2.020,67</a:t>
-                      </a:r>
-                      <a:endParaRPr lang="en-US" sz="1100"/>
-                    </a:p>
-                  </a:txBody>
-                  <a:tcPr marL="0" marR="0" marT="0" marB="0" anchor="ctr">
-                    <a:lnL cmpd="sng" algn="ctr" cap="flat" w="38100">
-                      <a:solidFill>
-                        <a:srgbClr val="000000"/>
-                      </a:solidFill>
-                      <a:prstDash val="solid"/>
-                      <a:round/>
-                      <a:headEnd type="none" w="med" len="med"/>
-                      <a:tailEnd type="none" w="med" len="med"/>
-                    </a:lnL>
-                    <a:lnR cmpd="sng" algn="ctr" cap="flat" w="38100">
-                      <a:solidFill>
-                        <a:srgbClr val="000000"/>
-                      </a:solidFill>
-                      <a:prstDash val="solid"/>
-                      <a:round/>
-                      <a:headEnd type="none" w="med" len="med"/>
-                      <a:tailEnd type="none" w="med" len="med"/>
-                    </a:lnR>
-                    <a:lnT cmpd="sng" algn="ctr" cap="flat" w="38100">
-                      <a:solidFill>
-                        <a:srgbClr val="000000"/>
-                      </a:solidFill>
-                      <a:prstDash val="solid"/>
-                      <a:round/>
-                      <a:headEnd type="none" w="med" len="med"/>
-                      <a:tailEnd type="none" w="med" len="med"/>
-                    </a:lnT>
-                    <a:lnB cmpd="sng" algn="ctr" cap="flat" w="38100">
-                      <a:solidFill>
-                        <a:srgbClr val="000000"/>
-                      </a:solidFill>
-                      <a:prstDash val="solid"/>
-                      <a:round/>
-                      <a:headEnd type="none" w="med" len="med"/>
-                      <a:tailEnd type="none" w="med" len="med"/>
-                    </a:lnB>
-                  </a:tcPr>
-                </a:tc>
-                <a:tc>
-                  <a:txBody>
-                    <a:bodyPr anchor="t" rtlCol="false"/>
-                    <a:lstStyle/>
-                    <a:p>
-                      <a:pPr algn="ctr">
-                        <a:lnSpc>
-                          <a:spcPts val="3360"/>
-                        </a:lnSpc>
-                        <a:defRPr/>
-                      </a:pPr>
-                      <a:r>
-                        <a:rPr lang="en-US" sz="2400">
-                          <a:solidFill>
-                            <a:srgbClr val="000000"/>
-                          </a:solidFill>
-                          <a:latin typeface="Red Hat Display"/>
-                          <a:ea typeface="Red Hat Display"/>
-                          <a:cs typeface="Red Hat Display"/>
-                          <a:sym typeface="Red Hat Display"/>
-                        </a:rPr>
-                        <a:t>2,23%</a:t>
-                      </a:r>
-                      <a:endParaRPr lang="en-US" sz="1100"/>
-                    </a:p>
-                  </a:txBody>
-                  <a:tcPr marL="0" marR="0" marT="0" marB="0" anchor="ctr">
-                    <a:lnL cmpd="sng" algn="ctr" cap="flat" w="38100">
-                      <a:solidFill>
-                        <a:srgbClr val="000000"/>
-                      </a:solidFill>
-                      <a:prstDash val="solid"/>
-                      <a:round/>
-                      <a:headEnd type="none" w="med" len="med"/>
-                      <a:tailEnd type="none" w="med" len="med"/>
-                    </a:lnL>
-                    <a:lnR cmpd="sng" algn="ctr" cap="flat" w="38100">
-                      <a:solidFill>
-                        <a:srgbClr val="000000"/>
-                      </a:solidFill>
-                      <a:prstDash val="solid"/>
-                      <a:round/>
-                      <a:headEnd type="none" w="med" len="med"/>
-                      <a:tailEnd type="none" w="med" len="med"/>
-                    </a:lnR>
-                    <a:lnT cmpd="sng" algn="ctr" cap="flat" w="38100">
-                      <a:solidFill>
-                        <a:srgbClr val="000000"/>
-                      </a:solidFill>
-                      <a:prstDash val="solid"/>
-                      <a:round/>
-                      <a:headEnd type="none" w="med" len="med"/>
-                      <a:tailEnd type="none" w="med" len="med"/>
-                    </a:lnT>
-                    <a:lnB cmpd="sng" algn="ctr" cap="flat" w="38100">
-                      <a:solidFill>
-                        <a:srgbClr val="000000"/>
-                      </a:solidFill>
-                      <a:prstDash val="solid"/>
-                      <a:round/>
-                      <a:headEnd type="none" w="med" len="med"/>
-                      <a:tailEnd type="none" w="med" len="med"/>
-                    </a:lnB>
-                  </a:tcPr>
-                </a:tc>
-              </a:tr>
-              <a:tr h="500062">
-                <a:tc>
-                  <a:txBody>
-                    <a:bodyPr anchor="t" rtlCol="false"/>
-                    <a:lstStyle/>
-                    <a:p>
-                      <a:pPr algn="ctr">
-                        <a:lnSpc>
-                          <a:spcPts val="3360"/>
-                        </a:lnSpc>
-                        <a:defRPr/>
-                      </a:pPr>
-                      <a:r>
-                        <a:rPr lang="en-US" sz="2400">
-                          <a:solidFill>
-                            <a:srgbClr val="000000"/>
-                          </a:solidFill>
-                          <a:latin typeface="Red Hat Display"/>
-                          <a:ea typeface="Red Hat Display"/>
-                          <a:cs typeface="Red Hat Display"/>
-                          <a:sym typeface="Red Hat Display"/>
-                        </a:rPr>
-                        <a:t>ARIMAX</a:t>
-                      </a:r>
-                      <a:endParaRPr lang="en-US" sz="1100"/>
-                    </a:p>
-                  </a:txBody>
-                  <a:tcPr marL="0" marR="0" marT="0" marB="0" anchor="ctr">
-                    <a:lnL cmpd="sng" algn="ctr" cap="flat" w="38100">
-                      <a:solidFill>
-                        <a:srgbClr val="000000"/>
-                      </a:solidFill>
-                      <a:prstDash val="solid"/>
-                      <a:round/>
-                      <a:headEnd type="none" w="med" len="med"/>
-                      <a:tailEnd type="none" w="med" len="med"/>
-                    </a:lnL>
-                    <a:lnR cmpd="sng" algn="ctr" cap="flat" w="38100">
-                      <a:solidFill>
-                        <a:srgbClr val="000000"/>
-                      </a:solidFill>
-                      <a:prstDash val="solid"/>
-                      <a:round/>
-                      <a:headEnd type="none" w="med" len="med"/>
-                      <a:tailEnd type="none" w="med" len="med"/>
-                    </a:lnR>
-                    <a:lnT cmpd="sng" algn="ctr" cap="flat" w="38100">
-                      <a:solidFill>
-                        <a:srgbClr val="000000"/>
-                      </a:solidFill>
-                      <a:prstDash val="solid"/>
-                      <a:round/>
-                      <a:headEnd type="none" w="med" len="med"/>
-                      <a:tailEnd type="none" w="med" len="med"/>
-                    </a:lnT>
-                    <a:lnB cmpd="sng" algn="ctr" cap="flat" w="38100">
-                      <a:solidFill>
-                        <a:srgbClr val="000000"/>
-                      </a:solidFill>
-                      <a:prstDash val="solid"/>
-                      <a:round/>
-                      <a:headEnd type="none" w="med" len="med"/>
-                      <a:tailEnd type="none" w="med" len="med"/>
-                    </a:lnB>
-                  </a:tcPr>
-                </a:tc>
-                <a:tc>
-                  <a:txBody>
-                    <a:bodyPr anchor="t" rtlCol="false"/>
-                    <a:lstStyle/>
-                    <a:p>
-                      <a:pPr algn="ctr">
-                        <a:lnSpc>
-                          <a:spcPts val="3360"/>
-                        </a:lnSpc>
-                        <a:defRPr/>
-                      </a:pPr>
-                      <a:r>
-                        <a:rPr lang="en-US" sz="2400">
-                          <a:solidFill>
-                            <a:srgbClr val="000000"/>
-                          </a:solidFill>
-                          <a:latin typeface="Red Hat Display"/>
-                          <a:ea typeface="Red Hat Display"/>
-                          <a:cs typeface="Red Hat Display"/>
-                          <a:sym typeface="Red Hat Display"/>
-                        </a:rPr>
-                        <a:t>2.025,86</a:t>
-                      </a:r>
-                      <a:endParaRPr lang="en-US" sz="1100"/>
-                    </a:p>
-                  </a:txBody>
-                  <a:tcPr marL="0" marR="0" marT="0" marB="0" anchor="ctr">
-                    <a:lnL cmpd="sng" algn="ctr" cap="flat" w="38100">
-                      <a:solidFill>
-                        <a:srgbClr val="000000"/>
-                      </a:solidFill>
-                      <a:prstDash val="solid"/>
-                      <a:round/>
-                      <a:headEnd type="none" w="med" len="med"/>
-                      <a:tailEnd type="none" w="med" len="med"/>
-                    </a:lnL>
-                    <a:lnR cmpd="sng" algn="ctr" cap="flat" w="38100">
-                      <a:solidFill>
-                        <a:srgbClr val="000000"/>
-                      </a:solidFill>
-                      <a:prstDash val="solid"/>
-                      <a:round/>
-                      <a:headEnd type="none" w="med" len="med"/>
-                      <a:tailEnd type="none" w="med" len="med"/>
-                    </a:lnR>
-                    <a:lnT cmpd="sng" algn="ctr" cap="flat" w="38100">
-                      <a:solidFill>
-                        <a:srgbClr val="000000"/>
-                      </a:solidFill>
-                      <a:prstDash val="solid"/>
-                      <a:round/>
-                      <a:headEnd type="none" w="med" len="med"/>
-                      <a:tailEnd type="none" w="med" len="med"/>
-                    </a:lnT>
-                    <a:lnB cmpd="sng" algn="ctr" cap="flat" w="38100">
-                      <a:solidFill>
-                        <a:srgbClr val="000000"/>
-                      </a:solidFill>
-                      <a:prstDash val="solid"/>
-                      <a:round/>
-                      <a:headEnd type="none" w="med" len="med"/>
-                      <a:tailEnd type="none" w="med" len="med"/>
-                    </a:lnB>
-                  </a:tcPr>
-                </a:tc>
-                <a:tc>
-                  <a:txBody>
-                    <a:bodyPr anchor="t" rtlCol="false"/>
-                    <a:lstStyle/>
-                    <a:p>
-                      <a:pPr algn="ctr">
-                        <a:lnSpc>
-                          <a:spcPts val="3360"/>
-                        </a:lnSpc>
-                        <a:defRPr/>
-                      </a:pPr>
-                      <a:r>
-                        <a:rPr lang="en-US" sz="2400">
-                          <a:solidFill>
-                            <a:srgbClr val="000000"/>
-                          </a:solidFill>
-                          <a:latin typeface="Red Hat Display"/>
-                          <a:ea typeface="Red Hat Display"/>
-                          <a:cs typeface="Red Hat Display"/>
-                          <a:sym typeface="Red Hat Display"/>
-                        </a:rPr>
-                        <a:t>2,24%</a:t>
-                      </a:r>
-                      <a:endParaRPr lang="en-US" sz="1100"/>
-                    </a:p>
-                  </a:txBody>
-                  <a:tcPr marL="0" marR="0" marT="0" marB="0" anchor="ctr">
-                    <a:lnL cmpd="sng" algn="ctr" cap="flat" w="38100">
-                      <a:solidFill>
-                        <a:srgbClr val="000000"/>
-                      </a:solidFill>
-                      <a:prstDash val="solid"/>
-                      <a:round/>
-                      <a:headEnd type="none" w="med" len="med"/>
-                      <a:tailEnd type="none" w="med" len="med"/>
-                    </a:lnL>
-                    <a:lnR cmpd="sng" algn="ctr" cap="flat" w="38100">
-                      <a:solidFill>
-                        <a:srgbClr val="000000"/>
-                      </a:solidFill>
-                      <a:prstDash val="solid"/>
-                      <a:round/>
-                      <a:headEnd type="none" w="med" len="med"/>
-                      <a:tailEnd type="none" w="med" len="med"/>
-                    </a:lnR>
-                    <a:lnT cmpd="sng" algn="ctr" cap="flat" w="38100">
-                      <a:solidFill>
-                        <a:srgbClr val="000000"/>
-                      </a:solidFill>
-                      <a:prstDash val="solid"/>
-                      <a:round/>
-                      <a:headEnd type="none" w="med" len="med"/>
-                      <a:tailEnd type="none" w="med" len="med"/>
-                    </a:lnT>
-                    <a:lnB cmpd="sng" algn="ctr" cap="flat" w="38100">
-                      <a:solidFill>
-                        <a:srgbClr val="000000"/>
-                      </a:solidFill>
-                      <a:prstDash val="solid"/>
-                      <a:round/>
-                      <a:headEnd type="none" w="med" len="med"/>
-                      <a:tailEnd type="none" w="med" len="med"/>
-                    </a:lnB>
-                  </a:tcPr>
-                </a:tc>
-              </a:tr>
-              <a:tr h="500062">
-                <a:tc>
-                  <a:txBody>
-                    <a:bodyPr anchor="t" rtlCol="false"/>
-                    <a:lstStyle/>
-                    <a:p>
-                      <a:pPr algn="ctr">
-                        <a:lnSpc>
-                          <a:spcPts val="3360"/>
-                        </a:lnSpc>
-                        <a:defRPr/>
-                      </a:pPr>
-                      <a:r>
-                        <a:rPr lang="en-US" sz="2400">
-                          <a:solidFill>
-                            <a:srgbClr val="000000"/>
-                          </a:solidFill>
-                          <a:latin typeface="Red Hat Display"/>
-                          <a:ea typeface="Red Hat Display"/>
-                          <a:cs typeface="Red Hat Display"/>
-                          <a:sym typeface="Red Hat Display"/>
-                        </a:rPr>
-                        <a:t>ARIMA</a:t>
-                      </a:r>
-                      <a:endParaRPr lang="en-US" sz="1100"/>
-                    </a:p>
-                  </a:txBody>
-                  <a:tcPr marL="0" marR="0" marT="0" marB="0" anchor="ctr">
-                    <a:lnL cmpd="sng" algn="ctr" cap="flat" w="38100">
-                      <a:solidFill>
-                        <a:srgbClr val="000000"/>
-                      </a:solidFill>
-                      <a:prstDash val="solid"/>
-                      <a:round/>
-                      <a:headEnd type="none" w="med" len="med"/>
-                      <a:tailEnd type="none" w="med" len="med"/>
-                    </a:lnL>
-                    <a:lnR cmpd="sng" algn="ctr" cap="flat" w="38100">
-                      <a:solidFill>
-                        <a:srgbClr val="000000"/>
-                      </a:solidFill>
-                      <a:prstDash val="solid"/>
-                      <a:round/>
-                      <a:headEnd type="none" w="med" len="med"/>
-                      <a:tailEnd type="none" w="med" len="med"/>
-                    </a:lnR>
-                    <a:lnT cmpd="sng" algn="ctr" cap="flat" w="38100">
-                      <a:solidFill>
-                        <a:srgbClr val="000000"/>
-                      </a:solidFill>
-                      <a:prstDash val="solid"/>
-                      <a:round/>
-                      <a:headEnd type="none" w="med" len="med"/>
-                      <a:tailEnd type="none" w="med" len="med"/>
-                    </a:lnT>
-                    <a:lnB cmpd="sng" algn="ctr" cap="flat" w="38100">
-                      <a:solidFill>
-                        <a:srgbClr val="000000"/>
-                      </a:solidFill>
-                      <a:prstDash val="solid"/>
-                      <a:round/>
-                      <a:headEnd type="none" w="med" len="med"/>
-                      <a:tailEnd type="none" w="med" len="med"/>
-                    </a:lnB>
-                  </a:tcPr>
-                </a:tc>
-                <a:tc>
-                  <a:txBody>
-                    <a:bodyPr anchor="t" rtlCol="false"/>
-                    <a:lstStyle/>
-                    <a:p>
-                      <a:pPr algn="ctr">
-                        <a:lnSpc>
-                          <a:spcPts val="3360"/>
-                        </a:lnSpc>
-                        <a:defRPr/>
-                      </a:pPr>
-                      <a:r>
-                        <a:rPr lang="en-US" sz="2400">
-                          <a:solidFill>
-                            <a:srgbClr val="000000"/>
-                          </a:solidFill>
-                          <a:latin typeface="Red Hat Display"/>
-                          <a:ea typeface="Red Hat Display"/>
-                          <a:cs typeface="Red Hat Display"/>
-                          <a:sym typeface="Red Hat Display"/>
-                        </a:rPr>
-                        <a:t>2.119,63</a:t>
-                      </a:r>
-                      <a:endParaRPr lang="en-US" sz="1100"/>
-                    </a:p>
-                  </a:txBody>
-                  <a:tcPr marL="0" marR="0" marT="0" marB="0" anchor="ctr">
-                    <a:lnL cmpd="sng" algn="ctr" cap="flat" w="38100">
-                      <a:solidFill>
-                        <a:srgbClr val="000000"/>
-                      </a:solidFill>
-                      <a:prstDash val="solid"/>
-                      <a:round/>
-                      <a:headEnd type="none" w="med" len="med"/>
-                      <a:tailEnd type="none" w="med" len="med"/>
-                    </a:lnL>
-                    <a:lnR cmpd="sng" algn="ctr" cap="flat" w="38100">
-                      <a:solidFill>
-                        <a:srgbClr val="000000"/>
-                      </a:solidFill>
-                      <a:prstDash val="solid"/>
-                      <a:round/>
-                      <a:headEnd type="none" w="med" len="med"/>
-                      <a:tailEnd type="none" w="med" len="med"/>
-                    </a:lnR>
-                    <a:lnT cmpd="sng" algn="ctr" cap="flat" w="38100">
-                      <a:solidFill>
-                        <a:srgbClr val="000000"/>
-                      </a:solidFill>
-                      <a:prstDash val="solid"/>
-                      <a:round/>
-                      <a:headEnd type="none" w="med" len="med"/>
-                      <a:tailEnd type="none" w="med" len="med"/>
-                    </a:lnT>
-                    <a:lnB cmpd="sng" algn="ctr" cap="flat" w="38100">
-                      <a:solidFill>
-                        <a:srgbClr val="000000"/>
-                      </a:solidFill>
-                      <a:prstDash val="solid"/>
-                      <a:round/>
-                      <a:headEnd type="none" w="med" len="med"/>
-                      <a:tailEnd type="none" w="med" len="med"/>
-                    </a:lnB>
-                  </a:tcPr>
-                </a:tc>
-                <a:tc>
-                  <a:txBody>
-                    <a:bodyPr anchor="t" rtlCol="false"/>
-                    <a:lstStyle/>
-                    <a:p>
-                      <a:pPr algn="ctr">
-                        <a:lnSpc>
-                          <a:spcPts val="3360"/>
-                        </a:lnSpc>
-                        <a:defRPr/>
-                      </a:pPr>
-                      <a:r>
-                        <a:rPr lang="en-US" sz="2400">
-                          <a:solidFill>
-                            <a:srgbClr val="000000"/>
-                          </a:solidFill>
-                          <a:latin typeface="Red Hat Display"/>
-                          <a:ea typeface="Red Hat Display"/>
-                          <a:cs typeface="Red Hat Display"/>
-                          <a:sym typeface="Red Hat Display"/>
-                        </a:rPr>
-                        <a:t>2,38%</a:t>
-                      </a:r>
-                      <a:endParaRPr lang="en-US" sz="1100"/>
-                    </a:p>
-                  </a:txBody>
-                  <a:tcPr marL="0" marR="0" marT="0" marB="0" anchor="ctr">
-                    <a:lnL cmpd="sng" algn="ctr" cap="flat" w="38100">
-                      <a:solidFill>
-                        <a:srgbClr val="000000"/>
-                      </a:solidFill>
-                      <a:prstDash val="solid"/>
-                      <a:round/>
-                      <a:headEnd type="none" w="med" len="med"/>
-                      <a:tailEnd type="none" w="med" len="med"/>
-                    </a:lnL>
-                    <a:lnR cmpd="sng" algn="ctr" cap="flat" w="38100">
-                      <a:solidFill>
-                        <a:srgbClr val="000000"/>
-                      </a:solidFill>
-                      <a:prstDash val="solid"/>
-                      <a:round/>
-                      <a:headEnd type="none" w="med" len="med"/>
-                      <a:tailEnd type="none" w="med" len="med"/>
-                    </a:lnR>
-                    <a:lnT cmpd="sng" algn="ctr" cap="flat" w="38100">
-                      <a:solidFill>
-                        <a:srgbClr val="000000"/>
-                      </a:solidFill>
-                      <a:prstDash val="solid"/>
-                      <a:round/>
-                      <a:headEnd type="none" w="med" len="med"/>
-                      <a:tailEnd type="none" w="med" len="med"/>
-                    </a:lnT>
-                    <a:lnB cmpd="sng" algn="ctr" cap="flat" w="38100">
-                      <a:solidFill>
-                        <a:srgbClr val="000000"/>
-                      </a:solidFill>
-                      <a:prstDash val="solid"/>
-                      <a:round/>
-                      <a:headEnd type="none" w="med" len="med"/>
-                      <a:tailEnd type="none" w="med" len="med"/>
-                    </a:lnB>
-                  </a:tcPr>
-                </a:tc>
-              </a:tr>
-            </a:tbl>
-          </a:graphicData>
-        </a:graphic>
-      </p:graphicFrame>
       <p:sp>
         <p:nvSpPr>
-          <p:cNvPr name="Freeform 10" id="10"/>
+          <p:cNvPr name="Freeform 6" id="6"/>
           <p:cNvSpPr/>
           <p:nvPr/>
         </p:nvSpPr>
         <p:spPr>
           <a:xfrm flipH="false" flipV="false" rot="0">
-            <a:off x="8237780" y="1028700"/>
-            <a:ext cx="9887819" cy="5932692"/>
+            <a:off x="478015" y="1482999"/>
+            <a:ext cx="7816409" cy="3660501"/>
           </a:xfrm>
           <a:custGeom>
             <a:avLst/>
@@ -30253,18 +28407,18 @@
             <a:cxnLst/>
             <a:rect r="r" b="b" t="t" l="l"/>
             <a:pathLst>
-              <a:path h="5932692" w="9887819">
+              <a:path h="3660501" w="7816409">
                 <a:moveTo>
                   <a:pt x="0" y="0"/>
                 </a:moveTo>
                 <a:lnTo>
-                  <a:pt x="9887819" y="0"/>
-                </a:lnTo>
-                <a:lnTo>
-                  <a:pt x="9887819" y="5932692"/>
-                </a:lnTo>
-                <a:lnTo>
-                  <a:pt x="0" y="5932692"/>
+                  <a:pt x="7816409" y="0"/>
+                </a:lnTo>
+                <a:lnTo>
+                  <a:pt x="7816409" y="3660501"/>
+                </a:lnTo>
+                <a:lnTo>
+                  <a:pt x="0" y="3660501"/>
                 </a:lnTo>
                 <a:lnTo>
                   <a:pt x="0" y="0"/>
@@ -30283,7 +28437,99 @@
       </p:sp>
       <p:sp>
         <p:nvSpPr>
-          <p:cNvPr name="TextBox 11" id="11"/>
+          <p:cNvPr name="Freeform 7" id="7"/>
+          <p:cNvSpPr/>
+          <p:nvPr/>
+        </p:nvSpPr>
+        <p:spPr>
+          <a:xfrm flipH="false" flipV="false" rot="0">
+            <a:off x="8880064" y="1028700"/>
+            <a:ext cx="8891486" cy="3290435"/>
+          </a:xfrm>
+          <a:custGeom>
+            <a:avLst/>
+            <a:gdLst/>
+            <a:ahLst/>
+            <a:cxnLst/>
+            <a:rect r="r" b="b" t="t" l="l"/>
+            <a:pathLst>
+              <a:path h="3290435" w="8891486">
+                <a:moveTo>
+                  <a:pt x="0" y="0"/>
+                </a:moveTo>
+                <a:lnTo>
+                  <a:pt x="8891486" y="0"/>
+                </a:lnTo>
+                <a:lnTo>
+                  <a:pt x="8891486" y="3290435"/>
+                </a:lnTo>
+                <a:lnTo>
+                  <a:pt x="0" y="3290435"/>
+                </a:lnTo>
+                <a:lnTo>
+                  <a:pt x="0" y="0"/>
+                </a:lnTo>
+                <a:close/>
+              </a:path>
+            </a:pathLst>
+          </a:custGeom>
+          <a:blipFill>
+            <a:blip r:embed="rId11"/>
+            <a:stretch>
+              <a:fillRect l="0" t="0" r="0" b="0"/>
+            </a:stretch>
+          </a:blipFill>
+        </p:spPr>
+      </p:sp>
+      <p:sp>
+        <p:nvSpPr>
+          <p:cNvPr name="Freeform 8" id="8"/>
+          <p:cNvSpPr/>
+          <p:nvPr/>
+        </p:nvSpPr>
+        <p:spPr>
+          <a:xfrm flipH="false" flipV="false" rot="0">
+            <a:off x="8880064" y="4569519"/>
+            <a:ext cx="8891486" cy="2699413"/>
+          </a:xfrm>
+          <a:custGeom>
+            <a:avLst/>
+            <a:gdLst/>
+            <a:ahLst/>
+            <a:cxnLst/>
+            <a:rect r="r" b="b" t="t" l="l"/>
+            <a:pathLst>
+              <a:path h="2699413" w="8891486">
+                <a:moveTo>
+                  <a:pt x="0" y="0"/>
+                </a:moveTo>
+                <a:lnTo>
+                  <a:pt x="8891486" y="0"/>
+                </a:lnTo>
+                <a:lnTo>
+                  <a:pt x="8891486" y="2699413"/>
+                </a:lnTo>
+                <a:lnTo>
+                  <a:pt x="0" y="2699413"/>
+                </a:lnTo>
+                <a:lnTo>
+                  <a:pt x="0" y="0"/>
+                </a:lnTo>
+                <a:close/>
+              </a:path>
+            </a:pathLst>
+          </a:custGeom>
+          <a:blipFill>
+            <a:blip r:embed="rId12"/>
+            <a:stretch>
+              <a:fillRect l="0" t="0" r="0" b="0"/>
+            </a:stretch>
+          </a:blipFill>
+        </p:spPr>
+      </p:sp>
+      <p:sp>
+        <p:nvSpPr>
+          <p:cNvPr name="TextBox 9" id="9"/>
           <p:cNvSpPr txBox="true"/>
           <p:nvPr/>
         </p:nvSpPr>
@@ -30324,7 +28570,7 @@
       </p:sp>
       <p:sp>
         <p:nvSpPr>
-          <p:cNvPr name="TextBox 12" id="12"/>
+          <p:cNvPr name="TextBox 10" id="10"/>
           <p:cNvSpPr txBox="true"/>
           <p:nvPr/>
         </p:nvSpPr>
@@ -30507,7 +28753,7 @@
       </p:sp>
       <p:sp>
         <p:nvSpPr>
-          <p:cNvPr name="TextBox 13" id="13"/>
+          <p:cNvPr name="TextBox 11" id="11"/>
           <p:cNvSpPr txBox="true"/>
           <p:nvPr/>
         </p:nvSpPr>
@@ -30560,51 +28806,7 @@
       </p:sp>
       <p:sp>
         <p:nvSpPr>
-          <p:cNvPr name="TextBox 14" id="14"/>
-          <p:cNvSpPr txBox="true"/>
-          <p:nvPr/>
-        </p:nvSpPr>
-        <p:spPr>
-          <a:xfrm rot="0">
-            <a:off x="11799118" y="6996003"/>
-            <a:ext cx="3975973" cy="330200"/>
-          </a:xfrm>
-          <a:prstGeom prst="rect">
-            <a:avLst/>
-          </a:prstGeom>
-        </p:spPr>
-        <p:txBody>
-          <a:bodyPr anchor="t" rtlCol="false" tIns="0" lIns="0" bIns="0" rIns="0">
-            <a:spAutoFit/>
-          </a:bodyPr>
-          <a:lstStyle/>
-          <a:p>
-            <a:pPr algn="ctr">
-              <a:lnSpc>
-                <a:spcPts val="2799"/>
-              </a:lnSpc>
-              <a:spcBef>
-                <a:spcPct val="0"/>
-              </a:spcBef>
-            </a:pPr>
-            <a:r>
-              <a:rPr lang="en-US" sz="1999" i="true">
-                <a:solidFill>
-                  <a:srgbClr val="000000"/>
-                </a:solidFill>
-                <a:latin typeface="Red Hat Display Italics"/>
-                <a:ea typeface="Red Hat Display Italics"/>
-                <a:cs typeface="Red Hat Display Italics"/>
-                <a:sym typeface="Red Hat Display Italics"/>
-              </a:rPr>
-              <a:t>Mô hình có RMSE holdout thấp nhất</a:t>
-            </a:r>
-          </a:p>
-        </p:txBody>
-      </p:sp>
-      <p:sp>
-        <p:nvSpPr>
-          <p:cNvPr name="TextBox 15" id="15"/>
+          <p:cNvPr name="TextBox 12" id="12"/>
           <p:cNvSpPr txBox="true"/>
           <p:nvPr/>
         </p:nvSpPr>
